--- a/decks/LabMgmt_02_Regulatory-and-Accreditation.pptx
+++ b/decks/LabMgmt_02_Regulatory-and-Accreditation.pptx
@@ -25,9 +25,14 @@
     <p:sldId id="273" r:id="rId19"/>
     <p:sldId id="274" r:id="rId20"/>
     <p:sldId id="275" r:id="rId21"/>
+    <p:sldId id="276" r:id="rId22"/>
+    <p:sldId id="277" r:id="rId23"/>
+    <p:sldId id="278" r:id="rId24"/>
+    <p:sldId id="279" r:id="rId25"/>
+    <p:sldId id="280" r:id="rId26"/>
   </p:sldIdLst>
   <p:notesMasterIdLst>
-    <p:notesMasterId r:id="rId22"/>
+    <p:notesMasterId r:id="rId27"/>
   </p:notesMasterIdLst>
   <p:sldSz cx="12191695" cy="6858000"/>
   <p:notesSz cx="6858000" cy="12191695"/>
@@ -1601,6 +1606,446 @@
             <a:fld id="{F7021451-1387-4CA6-816F-3879F97B5CBC}" type="slidenum">
               <a:rPr lang="en-US"/>
               <a:t>20</a:t>
+            </a:fld>
+            <a:endParaRPr lang="en-US"/>
+          </a:p>
+        </p:txBody>
+      </p:sp>
+    </p:spTree>
+    <p:extLst>
+      <p:ext uri="{BB962C8B-B14F-4D97-AF65-F5344CB8AC3E}">
+        <p14:creationId xmlns:p14="http://schemas.microsoft.com/office/powerpoint/2010/main" val="1024086991"/>
+      </p:ext>
+    </p:extLst>
+  </p:cSld>
+  <p:clrMapOvr>
+    <a:masterClrMapping/>
+  </p:clrMapOvr>
+</p:notes>
+</file>
+
+<file path=ppt/notesSlides/notesSlide21.xml><?xml version="1.0" encoding="utf-8"?>
+<p:notes xmlns:a="http://schemas.openxmlformats.org/drawingml/2006/main" xmlns:r="http://schemas.openxmlformats.org/officeDocument/2006/relationships" xmlns:p="http://schemas.openxmlformats.org/presentationml/2006/main">
+  <p:cSld>
+    <p:spTree>
+      <p:nvGrpSpPr>
+        <p:cNvPr id="1" name=""/>
+        <p:cNvGrpSpPr/>
+        <p:nvPr/>
+      </p:nvGrpSpPr>
+      <p:grpSpPr>
+        <a:xfrm>
+          <a:off x="0" y="0"/>
+          <a:ext cx="0" cy="0"/>
+          <a:chOff x="0" y="0"/>
+          <a:chExt cx="0" cy="0"/>
+        </a:xfrm>
+      </p:grpSpPr>
+      <p:sp>
+        <p:nvSpPr>
+          <p:cNvPr id="2" name="Slide Image Placeholder 1"/>
+          <p:cNvSpPr>
+            <a:spLocks noGrp="1" noRot="1" noChangeAspect="1"/>
+          </p:cNvSpPr>
+          <p:nvPr>
+            <p:ph type="sldImg"/>
+          </p:nvPr>
+        </p:nvSpPr>
+        <p:spPr/>
+      </p:sp>
+      <p:sp>
+        <p:nvSpPr>
+          <p:cNvPr id="3" name="Notes Placeholder 2"/>
+          <p:cNvSpPr>
+            <a:spLocks noGrp="1"/>
+          </p:cNvSpPr>
+          <p:nvPr>
+            <p:ph type="body" idx="1"/>
+          </p:nvPr>
+        </p:nvSpPr>
+        <p:spPr/>
+        <p:txBody>
+          <a:bodyPr/>
+          <a:lstStyle/>
+          <a:p>
+            <a:r>
+              <a:rPr lang="en-US" dirty="0"/>
+              <a:t/>
+            </a:r>
+            <a:endParaRPr lang="en-US" dirty="0"/>
+          </a:p>
+        </p:txBody>
+      </p:sp>
+      <p:sp>
+        <p:nvSpPr>
+          <p:cNvPr id="4" name="Slide Number Placeholder 3"/>
+          <p:cNvSpPr>
+            <a:spLocks noGrp="1"/>
+          </p:cNvSpPr>
+          <p:nvPr>
+            <p:ph type="sldNum" sz="quarter" idx="10"/>
+          </p:nvPr>
+        </p:nvSpPr>
+        <p:spPr/>
+        <p:txBody>
+          <a:bodyPr/>
+          <a:lstStyle/>
+          <a:p>
+            <a:fld id="{F7021451-1387-4CA6-816F-3879F97B5CBC}" type="slidenum">
+              <a:rPr lang="en-US"/>
+              <a:t>21</a:t>
+            </a:fld>
+            <a:endParaRPr lang="en-US"/>
+          </a:p>
+        </p:txBody>
+      </p:sp>
+    </p:spTree>
+    <p:extLst>
+      <p:ext uri="{BB962C8B-B14F-4D97-AF65-F5344CB8AC3E}">
+        <p14:creationId xmlns:p14="http://schemas.microsoft.com/office/powerpoint/2010/main" val="1024086991"/>
+      </p:ext>
+    </p:extLst>
+  </p:cSld>
+  <p:clrMapOvr>
+    <a:masterClrMapping/>
+  </p:clrMapOvr>
+</p:notes>
+</file>
+
+<file path=ppt/notesSlides/notesSlide22.xml><?xml version="1.0" encoding="utf-8"?>
+<p:notes xmlns:a="http://schemas.openxmlformats.org/drawingml/2006/main" xmlns:r="http://schemas.openxmlformats.org/officeDocument/2006/relationships" xmlns:p="http://schemas.openxmlformats.org/presentationml/2006/main">
+  <p:cSld>
+    <p:spTree>
+      <p:nvGrpSpPr>
+        <p:cNvPr id="1" name=""/>
+        <p:cNvGrpSpPr/>
+        <p:nvPr/>
+      </p:nvGrpSpPr>
+      <p:grpSpPr>
+        <a:xfrm>
+          <a:off x="0" y="0"/>
+          <a:ext cx="0" cy="0"/>
+          <a:chOff x="0" y="0"/>
+          <a:chExt cx="0" cy="0"/>
+        </a:xfrm>
+      </p:grpSpPr>
+      <p:sp>
+        <p:nvSpPr>
+          <p:cNvPr id="2" name="Slide Image Placeholder 1"/>
+          <p:cNvSpPr>
+            <a:spLocks noGrp="1" noRot="1" noChangeAspect="1"/>
+          </p:cNvSpPr>
+          <p:nvPr>
+            <p:ph type="sldImg"/>
+          </p:nvPr>
+        </p:nvSpPr>
+        <p:spPr/>
+      </p:sp>
+      <p:sp>
+        <p:nvSpPr>
+          <p:cNvPr id="3" name="Notes Placeholder 2"/>
+          <p:cNvSpPr>
+            <a:spLocks noGrp="1"/>
+          </p:cNvSpPr>
+          <p:nvPr>
+            <p:ph type="body" idx="1"/>
+          </p:nvPr>
+        </p:nvSpPr>
+        <p:spPr/>
+        <p:txBody>
+          <a:bodyPr/>
+          <a:lstStyle/>
+          <a:p>
+            <a:r>
+              <a:rPr lang="en-US" dirty="0"/>
+              <a:t/>
+            </a:r>
+            <a:endParaRPr lang="en-US" dirty="0"/>
+          </a:p>
+        </p:txBody>
+      </p:sp>
+      <p:sp>
+        <p:nvSpPr>
+          <p:cNvPr id="4" name="Slide Number Placeholder 3"/>
+          <p:cNvSpPr>
+            <a:spLocks noGrp="1"/>
+          </p:cNvSpPr>
+          <p:nvPr>
+            <p:ph type="sldNum" sz="quarter" idx="10"/>
+          </p:nvPr>
+        </p:nvSpPr>
+        <p:spPr/>
+        <p:txBody>
+          <a:bodyPr/>
+          <a:lstStyle/>
+          <a:p>
+            <a:fld id="{F7021451-1387-4CA6-816F-3879F97B5CBC}" type="slidenum">
+              <a:rPr lang="en-US"/>
+              <a:t>22</a:t>
+            </a:fld>
+            <a:endParaRPr lang="en-US"/>
+          </a:p>
+        </p:txBody>
+      </p:sp>
+    </p:spTree>
+    <p:extLst>
+      <p:ext uri="{BB962C8B-B14F-4D97-AF65-F5344CB8AC3E}">
+        <p14:creationId xmlns:p14="http://schemas.microsoft.com/office/powerpoint/2010/main" val="1024086991"/>
+      </p:ext>
+    </p:extLst>
+  </p:cSld>
+  <p:clrMapOvr>
+    <a:masterClrMapping/>
+  </p:clrMapOvr>
+</p:notes>
+</file>
+
+<file path=ppt/notesSlides/notesSlide23.xml><?xml version="1.0" encoding="utf-8"?>
+<p:notes xmlns:a="http://schemas.openxmlformats.org/drawingml/2006/main" xmlns:r="http://schemas.openxmlformats.org/officeDocument/2006/relationships" xmlns:p="http://schemas.openxmlformats.org/presentationml/2006/main">
+  <p:cSld>
+    <p:spTree>
+      <p:nvGrpSpPr>
+        <p:cNvPr id="1" name=""/>
+        <p:cNvGrpSpPr/>
+        <p:nvPr/>
+      </p:nvGrpSpPr>
+      <p:grpSpPr>
+        <a:xfrm>
+          <a:off x="0" y="0"/>
+          <a:ext cx="0" cy="0"/>
+          <a:chOff x="0" y="0"/>
+          <a:chExt cx="0" cy="0"/>
+        </a:xfrm>
+      </p:grpSpPr>
+      <p:sp>
+        <p:nvSpPr>
+          <p:cNvPr id="2" name="Slide Image Placeholder 1"/>
+          <p:cNvSpPr>
+            <a:spLocks noGrp="1" noRot="1" noChangeAspect="1"/>
+          </p:cNvSpPr>
+          <p:nvPr>
+            <p:ph type="sldImg"/>
+          </p:nvPr>
+        </p:nvSpPr>
+        <p:spPr/>
+      </p:sp>
+      <p:sp>
+        <p:nvSpPr>
+          <p:cNvPr id="3" name="Notes Placeholder 2"/>
+          <p:cNvSpPr>
+            <a:spLocks noGrp="1"/>
+          </p:cNvSpPr>
+          <p:nvPr>
+            <p:ph type="body" idx="1"/>
+          </p:nvPr>
+        </p:nvSpPr>
+        <p:spPr/>
+        <p:txBody>
+          <a:bodyPr/>
+          <a:lstStyle/>
+          <a:p>
+            <a:r>
+              <a:rPr lang="en-US" dirty="0"/>
+              <a:t/>
+            </a:r>
+            <a:endParaRPr lang="en-US" dirty="0"/>
+          </a:p>
+        </p:txBody>
+      </p:sp>
+      <p:sp>
+        <p:nvSpPr>
+          <p:cNvPr id="4" name="Slide Number Placeholder 3"/>
+          <p:cNvSpPr>
+            <a:spLocks noGrp="1"/>
+          </p:cNvSpPr>
+          <p:nvPr>
+            <p:ph type="sldNum" sz="quarter" idx="10"/>
+          </p:nvPr>
+        </p:nvSpPr>
+        <p:spPr/>
+        <p:txBody>
+          <a:bodyPr/>
+          <a:lstStyle/>
+          <a:p>
+            <a:fld id="{F7021451-1387-4CA6-816F-3879F97B5CBC}" type="slidenum">
+              <a:rPr lang="en-US"/>
+              <a:t>23</a:t>
+            </a:fld>
+            <a:endParaRPr lang="en-US"/>
+          </a:p>
+        </p:txBody>
+      </p:sp>
+    </p:spTree>
+    <p:extLst>
+      <p:ext uri="{BB962C8B-B14F-4D97-AF65-F5344CB8AC3E}">
+        <p14:creationId xmlns:p14="http://schemas.microsoft.com/office/powerpoint/2010/main" val="1024086991"/>
+      </p:ext>
+    </p:extLst>
+  </p:cSld>
+  <p:clrMapOvr>
+    <a:masterClrMapping/>
+  </p:clrMapOvr>
+</p:notes>
+</file>
+
+<file path=ppt/notesSlides/notesSlide24.xml><?xml version="1.0" encoding="utf-8"?>
+<p:notes xmlns:a="http://schemas.openxmlformats.org/drawingml/2006/main" xmlns:r="http://schemas.openxmlformats.org/officeDocument/2006/relationships" xmlns:p="http://schemas.openxmlformats.org/presentationml/2006/main">
+  <p:cSld>
+    <p:spTree>
+      <p:nvGrpSpPr>
+        <p:cNvPr id="1" name=""/>
+        <p:cNvGrpSpPr/>
+        <p:nvPr/>
+      </p:nvGrpSpPr>
+      <p:grpSpPr>
+        <a:xfrm>
+          <a:off x="0" y="0"/>
+          <a:ext cx="0" cy="0"/>
+          <a:chOff x="0" y="0"/>
+          <a:chExt cx="0" cy="0"/>
+        </a:xfrm>
+      </p:grpSpPr>
+      <p:sp>
+        <p:nvSpPr>
+          <p:cNvPr id="2" name="Slide Image Placeholder 1"/>
+          <p:cNvSpPr>
+            <a:spLocks noGrp="1" noRot="1" noChangeAspect="1"/>
+          </p:cNvSpPr>
+          <p:nvPr>
+            <p:ph type="sldImg"/>
+          </p:nvPr>
+        </p:nvSpPr>
+        <p:spPr/>
+      </p:sp>
+      <p:sp>
+        <p:nvSpPr>
+          <p:cNvPr id="3" name="Notes Placeholder 2"/>
+          <p:cNvSpPr>
+            <a:spLocks noGrp="1"/>
+          </p:cNvSpPr>
+          <p:nvPr>
+            <p:ph type="body" idx="1"/>
+          </p:nvPr>
+        </p:nvSpPr>
+        <p:spPr/>
+        <p:txBody>
+          <a:bodyPr/>
+          <a:lstStyle/>
+          <a:p>
+            <a:r>
+              <a:rPr lang="en-US" dirty="0"/>
+              <a:t/>
+            </a:r>
+            <a:endParaRPr lang="en-US" dirty="0"/>
+          </a:p>
+        </p:txBody>
+      </p:sp>
+      <p:sp>
+        <p:nvSpPr>
+          <p:cNvPr id="4" name="Slide Number Placeholder 3"/>
+          <p:cNvSpPr>
+            <a:spLocks noGrp="1"/>
+          </p:cNvSpPr>
+          <p:nvPr>
+            <p:ph type="sldNum" sz="quarter" idx="10"/>
+          </p:nvPr>
+        </p:nvSpPr>
+        <p:spPr/>
+        <p:txBody>
+          <a:bodyPr/>
+          <a:lstStyle/>
+          <a:p>
+            <a:fld id="{F7021451-1387-4CA6-816F-3879F97B5CBC}" type="slidenum">
+              <a:rPr lang="en-US"/>
+              <a:t>24</a:t>
+            </a:fld>
+            <a:endParaRPr lang="en-US"/>
+          </a:p>
+        </p:txBody>
+      </p:sp>
+    </p:spTree>
+    <p:extLst>
+      <p:ext uri="{BB962C8B-B14F-4D97-AF65-F5344CB8AC3E}">
+        <p14:creationId xmlns:p14="http://schemas.microsoft.com/office/powerpoint/2010/main" val="1024086991"/>
+      </p:ext>
+    </p:extLst>
+  </p:cSld>
+  <p:clrMapOvr>
+    <a:masterClrMapping/>
+  </p:clrMapOvr>
+</p:notes>
+</file>
+
+<file path=ppt/notesSlides/notesSlide25.xml><?xml version="1.0" encoding="utf-8"?>
+<p:notes xmlns:a="http://schemas.openxmlformats.org/drawingml/2006/main" xmlns:r="http://schemas.openxmlformats.org/officeDocument/2006/relationships" xmlns:p="http://schemas.openxmlformats.org/presentationml/2006/main">
+  <p:cSld>
+    <p:spTree>
+      <p:nvGrpSpPr>
+        <p:cNvPr id="1" name=""/>
+        <p:cNvGrpSpPr/>
+        <p:nvPr/>
+      </p:nvGrpSpPr>
+      <p:grpSpPr>
+        <a:xfrm>
+          <a:off x="0" y="0"/>
+          <a:ext cx="0" cy="0"/>
+          <a:chOff x="0" y="0"/>
+          <a:chExt cx="0" cy="0"/>
+        </a:xfrm>
+      </p:grpSpPr>
+      <p:sp>
+        <p:nvSpPr>
+          <p:cNvPr id="2" name="Slide Image Placeholder 1"/>
+          <p:cNvSpPr>
+            <a:spLocks noGrp="1" noRot="1" noChangeAspect="1"/>
+          </p:cNvSpPr>
+          <p:nvPr>
+            <p:ph type="sldImg"/>
+          </p:nvPr>
+        </p:nvSpPr>
+        <p:spPr/>
+      </p:sp>
+      <p:sp>
+        <p:nvSpPr>
+          <p:cNvPr id="3" name="Notes Placeholder 2"/>
+          <p:cNvSpPr>
+            <a:spLocks noGrp="1"/>
+          </p:cNvSpPr>
+          <p:nvPr>
+            <p:ph type="body" idx="1"/>
+          </p:nvPr>
+        </p:nvSpPr>
+        <p:spPr/>
+        <p:txBody>
+          <a:bodyPr/>
+          <a:lstStyle/>
+          <a:p>
+            <a:r>
+              <a:rPr lang="en-US" dirty="0"/>
+              <a:t/>
+            </a:r>
+            <a:endParaRPr lang="en-US" dirty="0"/>
+          </a:p>
+        </p:txBody>
+      </p:sp>
+      <p:sp>
+        <p:nvSpPr>
+          <p:cNvPr id="4" name="Slide Number Placeholder 3"/>
+          <p:cNvSpPr>
+            <a:spLocks noGrp="1"/>
+          </p:cNvSpPr>
+          <p:nvPr>
+            <p:ph type="sldNum" sz="quarter" idx="10"/>
+          </p:nvPr>
+        </p:nvSpPr>
+        <p:spPr/>
+        <p:txBody>
+          <a:bodyPr/>
+          <a:lstStyle/>
+          <a:p>
+            <a:fld id="{F7021451-1387-4CA6-816F-3879F97B5CBC}" type="slidenum">
+              <a:rPr lang="en-US"/>
+              <a:t>25</a:t>
             </a:fld>
             <a:endParaRPr lang="en-US"/>
           </a:p>
@@ -2726,7 +3171,7 @@
                 <a:ea typeface="Calibri" pitchFamily="34" charset="-122"/>
                 <a:cs typeface="Calibri" pitchFamily="34" charset="-120"/>
               </a:rPr>
-              <a:t>LAB MANAGEMENT &amp; QUALITY  ·  LECTURE 2 OF 5</a:t>
+              <a:t>LABORATORY MANAGEMENT  ·  LECTURE 2 OF 5</a:t>
             </a:r>
             <a:endParaRPr lang="en-US" sz="1300" dirty="0"/>
           </a:p>
@@ -2765,7 +3210,7 @@
                 <a:ea typeface="Calibri" pitchFamily="34" charset="-122"/>
                 <a:cs typeface="Calibri" pitchFamily="34" charset="-120"/>
               </a:rPr>
-              <a:t>Regulatory &amp; Accreditation Essentials</a:t>
+              <a:t>Regulatory &amp; Accreditation</a:t>
             </a:r>
             <a:endParaRPr lang="en-US" sz="4600" dirty="0"/>
           </a:p>
@@ -2804,7 +3249,7 @@
                 <a:ea typeface="Calibri" pitchFamily="34" charset="-122"/>
                 <a:cs typeface="Calibri" pitchFamily="34" charset="-120"/>
               </a:rPr>
-              <a:t>CLIA, CAP, Test Complexity, and Competency</a:t>
+              <a:t>CLIA, Accreditation, Proficiency Testing, and Test Complexity</a:t>
             </a:r>
             <a:endParaRPr lang="en-US" sz="1900" dirty="0"/>
           </a:p>
@@ -2996,7 +3441,7 @@
                 <a:ea typeface="Calibri" pitchFamily="34" charset="-122"/>
                 <a:cs typeface="Calibri" pitchFamily="34" charset="-120"/>
               </a:rPr>
-              <a:t>LAB MANAGEMENT &amp; QUALITY   ·   DOCUMENTS</a:t>
+              <a:t>LAB MANAGEMENT &amp; QUALITY   ·   PROFICIENCY</a:t>
             </a:r>
             <a:endParaRPr lang="en-US" sz="1100" dirty="0"/>
           </a:p>
@@ -3035,7 +3480,7 @@
                 <a:ea typeface="Calibri" pitchFamily="34" charset="-122"/>
                 <a:cs typeface="Calibri" pitchFamily="34" charset="-120"/>
               </a:rPr>
-              <a:t>Document Control &amp; Inspection Readiness</a:t>
+              <a:t>Proficiency Testing</a:t>
             </a:r>
             <a:endParaRPr lang="en-US" sz="3000" dirty="0"/>
           </a:p>
@@ -3103,7 +3548,7 @@
                 <a:ea typeface="Calibri" pitchFamily="34" charset="-122"/>
                 <a:cs typeface="Calibri" pitchFamily="34" charset="-120"/>
               </a:rPr>
-              <a:t>DOCUMENT CONTROL</a:t>
+              <a:t>WHAT PT DOES</a:t>
             </a:r>
             <a:endParaRPr lang="en-US" sz="1200" dirty="0"/>
           </a:p>
@@ -3146,7 +3591,7 @@
                 <a:ea typeface="Calibri" pitchFamily="34" charset="-122"/>
                 <a:cs typeface="Calibri" pitchFamily="34" charset="-120"/>
               </a:rPr>
-              <a:t>Controlled SOPs: current versions, approvals, review dates, and retired-version archives.</a:t>
+              <a:t>External samples are tested blindly and compared to peers/reference — objective proof of accuracy.</a:t>
             </a:r>
             <a:endParaRPr lang="en-US" sz="1250" dirty="0"/>
           </a:p>
@@ -3167,7 +3612,7 @@
                 <a:ea typeface="Calibri" pitchFamily="34" charset="-122"/>
                 <a:cs typeface="Calibri" pitchFamily="34" charset="-120"/>
               </a:rPr>
-              <a:t>Records retention per regulation (varies by record type).</a:t>
+              <a:t>Required for regulated analytes; alternative assessment otherwise.</a:t>
             </a:r>
             <a:endParaRPr lang="en-US" sz="1250" dirty="0"/>
           </a:p>
@@ -3188,7 +3633,7 @@
                 <a:ea typeface="Calibri" pitchFamily="34" charset="-122"/>
                 <a:cs typeface="Calibri" pitchFamily="34" charset="-120"/>
               </a:rPr>
-              <a:t>Traceability from result to procedure to validation.</a:t>
+              <a:t>Handle PT samples like patient samples.</a:t>
             </a:r>
             <a:endParaRPr lang="en-US" sz="1250" dirty="0"/>
           </a:p>
@@ -3209,7 +3654,7 @@
                 <a:ea typeface="Calibri" pitchFamily="34" charset="-122"/>
                 <a:cs typeface="Calibri" pitchFamily="34" charset="-120"/>
               </a:rPr>
-              <a:t>Change control for procedure and system changes.</a:t>
+              <a:t>Do NOT refer PT samples to another lab or discuss them — a serious violation.</a:t>
             </a:r>
             <a:endParaRPr lang="en-US" sz="1250" dirty="0"/>
           </a:p>
@@ -3232,7 +3677,7 @@
             </a:avLst>
           </a:prstGeom>
           <a:solidFill>
-            <a:srgbClr val="ECEFF1"/>
+            <a:srgbClr val="E6EAED"/>
           </a:solidFill>
           <a:ln/>
           <a:effectLst>
@@ -3277,7 +3722,7 @@
                 <a:ea typeface="Calibri" pitchFamily="34" charset="-122"/>
                 <a:cs typeface="Calibri" pitchFamily="34" charset="-120"/>
               </a:rPr>
-              <a:t>INSPECTION READINESS</a:t>
+              <a:t>RESPONDING TO FAILURE</a:t>
             </a:r>
             <a:endParaRPr lang="en-US" sz="1200" dirty="0"/>
           </a:p>
@@ -3320,7 +3765,7 @@
                 <a:ea typeface="Calibri" pitchFamily="34" charset="-122"/>
                 <a:cs typeface="Calibri" pitchFamily="34" charset="-120"/>
               </a:rPr>
-              <a:t>Readiness is daily practice — QC, PT, competency, and documents continuously in order.</a:t>
+              <a:t>A failure triggers investigation, root-cause analysis, and corrective action.</a:t>
             </a:r>
             <a:endParaRPr lang="en-US" sz="1250" dirty="0"/>
           </a:p>
@@ -3341,7 +3786,7 @@
                 <a:ea typeface="Calibri" pitchFamily="34" charset="-122"/>
                 <a:cs typeface="Calibri" pitchFamily="34" charset="-120"/>
               </a:rPr>
-              <a:t>Self-inspection between external inspections finds gaps early.</a:t>
+              <a:t>Unsuccessful performance can restrict testing.</a:t>
             </a:r>
             <a:endParaRPr lang="en-US" sz="1250" dirty="0"/>
           </a:p>
@@ -3362,7 +3807,7 @@
                 <a:ea typeface="Calibri" pitchFamily="34" charset="-122"/>
                 <a:cs typeface="Calibri" pitchFamily="34" charset="-120"/>
               </a:rPr>
-              <a:t>Know your checklists and validation files.</a:t>
+              <a:t>Document remediation and verify effectiveness.</a:t>
             </a:r>
             <a:endParaRPr lang="en-US" sz="1250" dirty="0"/>
           </a:p>
@@ -3383,7 +3828,7 @@
                 <a:ea typeface="Calibri" pitchFamily="34" charset="-122"/>
                 <a:cs typeface="Calibri" pitchFamily="34" charset="-120"/>
               </a:rPr>
-              <a:t>Corrective action records demonstrate a functioning QMS.</a:t>
+              <a:t>Repeated failure has regulatory consequences.</a:t>
             </a:r>
             <a:endParaRPr lang="en-US" sz="1250" dirty="0"/>
           </a:p>
@@ -3509,7 +3954,7 @@
     <p:bg>
       <p:bgPr>
         <a:solidFill>
-          <a:srgbClr val="2C3A41"/>
+          <a:srgbClr val="FFFFFF"/>
         </a:solidFill>
       </p:bgPr>
     </p:bg>
@@ -3529,58 +3974,295 @@
       </p:grpSpPr>
       <p:sp>
         <p:nvSpPr>
-          <p:cNvPr id="2" name="Shape 0"/>
-          <p:cNvSpPr/>
-          <p:nvPr/>
-        </p:nvSpPr>
-        <p:spPr>
-          <a:xfrm>
-            <a:off x="9509760" y="-1280160"/>
-            <a:ext cx="4754880" cy="4754880"/>
-          </a:xfrm>
-          <a:prstGeom prst="ellipse">
-            <a:avLst/>
+          <p:cNvPr id="2" name="Text 0"/>
+          <p:cNvSpPr/>
+          <p:nvPr/>
+        </p:nvSpPr>
+        <p:spPr>
+          <a:xfrm>
+            <a:off x="566928" y="329184"/>
+            <a:ext cx="10515600" cy="310896"/>
+          </a:xfrm>
+          <a:prstGeom prst="rect">
+            <a:avLst/>
+          </a:prstGeom>
+          <a:noFill/>
+          <a:ln/>
+        </p:spPr>
+        <p:txBody>
+          <a:bodyPr wrap="square" lIns="0" tIns="0" rIns="0" bIns="0" rtlCol="0" anchor="ctr"/>
+          <a:lstStyle/>
+          <a:p>
+            <a:pPr algn="l" indent="0" marL="0">
+              <a:buNone/>
+            </a:pPr>
+            <a:r>
+              <a:rPr lang="en-US" sz="1100" b="1" spc="150" kern="0" dirty="0">
+                <a:solidFill>
+                  <a:srgbClr val="455A64"/>
+                </a:solidFill>
+                <a:latin typeface="Calibri" pitchFamily="34" charset="0"/>
+                <a:ea typeface="Calibri" pitchFamily="34" charset="-122"/>
+                <a:cs typeface="Calibri" pitchFamily="34" charset="-120"/>
+              </a:rPr>
+              <a:t>LAB MANAGEMENT &amp; QUALITY   ·   PERSONNEL</a:t>
+            </a:r>
+            <a:endParaRPr lang="en-US" sz="1100" dirty="0"/>
+          </a:p>
+        </p:txBody>
+      </p:sp>
+      <p:sp>
+        <p:nvSpPr>
+          <p:cNvPr id="3" name="Text 1"/>
+          <p:cNvSpPr/>
+          <p:nvPr/>
+        </p:nvSpPr>
+        <p:spPr>
+          <a:xfrm>
+            <a:off x="566928" y="713232"/>
+            <a:ext cx="11064240" cy="749808"/>
+          </a:xfrm>
+          <a:prstGeom prst="rect">
+            <a:avLst/>
+          </a:prstGeom>
+          <a:noFill/>
+          <a:ln/>
+        </p:spPr>
+        <p:txBody>
+          <a:bodyPr wrap="square" lIns="0" tIns="0" rIns="0" bIns="0" rtlCol="0" anchor="ctr"/>
+          <a:lstStyle/>
+          <a:p>
+            <a:pPr algn="l" indent="0" marL="0">
+              <a:buNone/>
+            </a:pPr>
+            <a:r>
+              <a:rPr lang="en-US" sz="3000" b="1" dirty="0">
+                <a:solidFill>
+                  <a:srgbClr val="0E3A5F"/>
+                </a:solidFill>
+                <a:latin typeface="Calibri" pitchFamily="34" charset="0"/>
+                <a:ea typeface="Calibri" pitchFamily="34" charset="-122"/>
+                <a:cs typeface="Calibri" pitchFamily="34" charset="-120"/>
+              </a:rPr>
+              <a:t>Competency &amp; Qualifications</a:t>
+            </a:r>
+            <a:endParaRPr lang="en-US" sz="3000" dirty="0"/>
+          </a:p>
+        </p:txBody>
+      </p:sp>
+      <p:sp>
+        <p:nvSpPr>
+          <p:cNvPr id="4" name="Shape 2"/>
+          <p:cNvSpPr/>
+          <p:nvPr/>
+        </p:nvSpPr>
+        <p:spPr>
+          <a:xfrm>
+            <a:off x="566928" y="1517904"/>
+            <a:ext cx="5346040" cy="4114800"/>
+          </a:xfrm>
+          <a:prstGeom prst="roundRect">
+            <a:avLst>
+              <a:gd name="adj" fmla="val 2000"/>
+            </a:avLst>
           </a:prstGeom>
           <a:solidFill>
-            <a:srgbClr val="FFFFFF">
-              <a:alpha val="8000"/>
-            </a:srgbClr>
+            <a:srgbClr val="ECEFF1"/>
           </a:solidFill>
           <a:ln/>
-        </p:spPr>
-      </p:sp>
-      <p:sp>
-        <p:nvSpPr>
-          <p:cNvPr id="3" name="Shape 1"/>
-          <p:cNvSpPr/>
-          <p:nvPr/>
-        </p:nvSpPr>
-        <p:spPr>
-          <a:xfrm>
-            <a:off x="10607040" y="3931920"/>
-            <a:ext cx="3108960" cy="3108960"/>
-          </a:xfrm>
-          <a:prstGeom prst="ellipse">
-            <a:avLst/>
+          <a:effectLst>
+            <a:outerShdw sx="100000" sy="100000" kx="0" ky="0" algn="bl" rotWithShape="0" blurRad="88900" dist="25400" dir="5400000">
+              <a:srgbClr val="22303C">
+                <a:alpha val="12000"/>
+              </a:srgbClr>
+            </a:outerShdw>
+          </a:effectLst>
+        </p:spPr>
+      </p:sp>
+      <p:sp>
+        <p:nvSpPr>
+          <p:cNvPr id="5" name="Text 3"/>
+          <p:cNvSpPr/>
+          <p:nvPr/>
+        </p:nvSpPr>
+        <p:spPr>
+          <a:xfrm>
+            <a:off x="804672" y="1682496"/>
+            <a:ext cx="4888840" cy="274320"/>
+          </a:xfrm>
+          <a:prstGeom prst="rect">
+            <a:avLst/>
+          </a:prstGeom>
+          <a:noFill/>
+          <a:ln/>
+        </p:spPr>
+        <p:txBody>
+          <a:bodyPr wrap="square" lIns="0" tIns="0" rIns="0" bIns="0" rtlCol="0" anchor="ctr"/>
+          <a:lstStyle/>
+          <a:p>
+            <a:pPr indent="0" marL="0">
+              <a:buNone/>
+            </a:pPr>
+            <a:r>
+              <a:rPr lang="en-US" sz="1200" b="1" spc="100" kern="0" dirty="0">
+                <a:solidFill>
+                  <a:srgbClr val="2C3A41"/>
+                </a:solidFill>
+                <a:latin typeface="Calibri" pitchFamily="34" charset="0"/>
+                <a:ea typeface="Calibri" pitchFamily="34" charset="-122"/>
+                <a:cs typeface="Calibri" pitchFamily="34" charset="-120"/>
+              </a:rPr>
+              <a:t>PERSONNEL REQUIREMENTS</a:t>
+            </a:r>
+            <a:endParaRPr lang="en-US" sz="1200" dirty="0"/>
+          </a:p>
+        </p:txBody>
+      </p:sp>
+      <p:sp>
+        <p:nvSpPr>
+          <p:cNvPr id="6" name="Text 4"/>
+          <p:cNvSpPr/>
+          <p:nvPr/>
+        </p:nvSpPr>
+        <p:spPr>
+          <a:xfrm>
+            <a:off x="804672" y="2029968"/>
+            <a:ext cx="4870552" cy="3474720"/>
+          </a:xfrm>
+          <a:prstGeom prst="rect">
+            <a:avLst/>
+          </a:prstGeom>
+          <a:noFill/>
+          <a:ln/>
+        </p:spPr>
+        <p:txBody>
+          <a:bodyPr wrap="square" lIns="0" tIns="0" rIns="0" bIns="0" rtlCol="0" anchor="t"/>
+          <a:lstStyle/>
+          <a:p>
+            <a:pPr algn="l" marL="177800" indent="-177800">
+              <a:spcAft>
+                <a:spcPts val="900"/>
+              </a:spcAft>
+              <a:buSzPct val="100000"/>
+              <a:buChar char="•"/>
+            </a:pPr>
+            <a:r>
+              <a:rPr lang="en-US" sz="1250" b="1" dirty="0">
+                <a:solidFill>
+                  <a:srgbClr val="1B2A38"/>
+                </a:solidFill>
+                <a:latin typeface="Calibri" pitchFamily="34" charset="0"/>
+                <a:ea typeface="Calibri" pitchFamily="34" charset="-122"/>
+                <a:cs typeface="Calibri" pitchFamily="34" charset="-120"/>
+              </a:rPr>
+              <a:t>Defined roles (director, supervisor, testing personnel) with qualifications scaled to complexity.</a:t>
+            </a:r>
+            <a:endParaRPr lang="en-US" sz="1250" dirty="0"/>
+          </a:p>
+          <a:p>
+            <a:pPr algn="l" marL="177800" indent="-177800">
+              <a:spcAft>
+                <a:spcPts val="900"/>
+              </a:spcAft>
+              <a:buSzPct val="100000"/>
+              <a:buChar char="•"/>
+            </a:pPr>
+            <a:r>
+              <a:rPr lang="en-US" sz="1250" dirty="0">
+                <a:solidFill>
+                  <a:srgbClr val="33444F"/>
+                </a:solidFill>
+                <a:latin typeface="Calibri" pitchFamily="34" charset="0"/>
+                <a:ea typeface="Calibri" pitchFamily="34" charset="-122"/>
+                <a:cs typeface="Calibri" pitchFamily="34" charset="-120"/>
+              </a:rPr>
+              <a:t>The laboratory director holds overall responsibility.</a:t>
+            </a:r>
+            <a:endParaRPr lang="en-US" sz="1250" dirty="0"/>
+          </a:p>
+          <a:p>
+            <a:pPr algn="l" marL="177800" indent="-177800">
+              <a:spcAft>
+                <a:spcPts val="900"/>
+              </a:spcAft>
+              <a:buSzPct val="100000"/>
+              <a:buChar char="•"/>
+            </a:pPr>
+            <a:r>
+              <a:rPr lang="en-US" sz="1250" dirty="0">
+                <a:solidFill>
+                  <a:srgbClr val="33444F"/>
+                </a:solidFill>
+                <a:latin typeface="Calibri" pitchFamily="34" charset="0"/>
+                <a:ea typeface="Calibri" pitchFamily="34" charset="-122"/>
+                <a:cs typeface="Calibri" pitchFamily="34" charset="-120"/>
+              </a:rPr>
+              <a:t>Documented training and authorization to test.</a:t>
+            </a:r>
+            <a:endParaRPr lang="en-US" sz="1250" dirty="0"/>
+          </a:p>
+          <a:p>
+            <a:pPr algn="l" marL="177800" indent="-177800">
+              <a:spcAft>
+                <a:spcPts val="900"/>
+              </a:spcAft>
+              <a:buSzPct val="100000"/>
+              <a:buChar char="•"/>
+            </a:pPr>
+            <a:r>
+              <a:rPr lang="en-US" sz="1250" dirty="0">
+                <a:solidFill>
+                  <a:srgbClr val="33444F"/>
+                </a:solidFill>
+                <a:latin typeface="Calibri" pitchFamily="34" charset="0"/>
+                <a:ea typeface="Calibri" pitchFamily="34" charset="-122"/>
+                <a:cs typeface="Calibri" pitchFamily="34" charset="-120"/>
+              </a:rPr>
+              <a:t>Adequate staffing for safe operation.</a:t>
+            </a:r>
+            <a:endParaRPr lang="en-US" sz="1250" dirty="0"/>
+          </a:p>
+        </p:txBody>
+      </p:sp>
+      <p:sp>
+        <p:nvSpPr>
+          <p:cNvPr id="7" name="Shape 5"/>
+          <p:cNvSpPr/>
+          <p:nvPr/>
+        </p:nvSpPr>
+        <p:spPr>
+          <a:xfrm>
+            <a:off x="6278728" y="1517904"/>
+            <a:ext cx="5346040" cy="4114800"/>
+          </a:xfrm>
+          <a:prstGeom prst="roundRect">
+            <a:avLst>
+              <a:gd name="adj" fmla="val 2000"/>
+            </a:avLst>
           </a:prstGeom>
           <a:solidFill>
-            <a:srgbClr val="FFFFFF">
-              <a:alpha val="6000"/>
-            </a:srgbClr>
+            <a:srgbClr val="E6EAED"/>
           </a:solidFill>
           <a:ln/>
-        </p:spPr>
-      </p:sp>
-      <p:sp>
-        <p:nvSpPr>
-          <p:cNvPr id="4" name="Text 2"/>
-          <p:cNvSpPr/>
-          <p:nvPr/>
-        </p:nvSpPr>
-        <p:spPr>
-          <a:xfrm>
-            <a:off x="566928" y="1783080"/>
-            <a:ext cx="2743200" cy="1463040"/>
+          <a:effectLst>
+            <a:outerShdw sx="100000" sy="100000" kx="0" ky="0" algn="bl" rotWithShape="0" blurRad="88900" dist="25400" dir="5400000">
+              <a:srgbClr val="22303C">
+                <a:alpha val="12000"/>
+              </a:srgbClr>
+            </a:outerShdw>
+          </a:effectLst>
+        </p:spPr>
+      </p:sp>
+      <p:sp>
+        <p:nvSpPr>
+          <p:cNvPr id="8" name="Text 6"/>
+          <p:cNvSpPr/>
+          <p:nvPr/>
+        </p:nvSpPr>
+        <p:spPr>
+          <a:xfrm>
+            <a:off x="6516472" y="1682496"/>
+            <a:ext cx="4888840" cy="274320"/>
           </a:xfrm>
           <a:prstGeom prst="rect">
             <a:avLst/>
@@ -3592,34 +4274,179 @@
           <a:bodyPr wrap="square" lIns="0" tIns="0" rIns="0" bIns="0" rtlCol="0" anchor="ctr"/>
           <a:lstStyle/>
           <a:p>
+            <a:pPr indent="0" marL="0">
+              <a:buNone/>
+            </a:pPr>
+            <a:r>
+              <a:rPr lang="en-US" sz="1200" b="1" spc="100" kern="0" dirty="0">
+                <a:solidFill>
+                  <a:srgbClr val="2C3A41"/>
+                </a:solidFill>
+                <a:latin typeface="Calibri" pitchFamily="34" charset="0"/>
+                <a:ea typeface="Calibri" pitchFamily="34" charset="-122"/>
+                <a:cs typeface="Calibri" pitchFamily="34" charset="-120"/>
+              </a:rPr>
+              <a:t>COMPETENCY ASSESSMENT</a:t>
+            </a:r>
+            <a:endParaRPr lang="en-US" sz="1200" dirty="0"/>
+          </a:p>
+        </p:txBody>
+      </p:sp>
+      <p:sp>
+        <p:nvSpPr>
+          <p:cNvPr id="9" name="Text 7"/>
+          <p:cNvSpPr/>
+          <p:nvPr/>
+        </p:nvSpPr>
+        <p:spPr>
+          <a:xfrm>
+            <a:off x="6516472" y="2029968"/>
+            <a:ext cx="4870552" cy="3474720"/>
+          </a:xfrm>
+          <a:prstGeom prst="rect">
+            <a:avLst/>
+          </a:prstGeom>
+          <a:noFill/>
+          <a:ln/>
+        </p:spPr>
+        <p:txBody>
+          <a:bodyPr wrap="square" lIns="0" tIns="0" rIns="0" bIns="0" rtlCol="0" anchor="t"/>
+          <a:lstStyle/>
+          <a:p>
+            <a:pPr algn="l" marL="177800" indent="-177800">
+              <a:spcAft>
+                <a:spcPts val="900"/>
+              </a:spcAft>
+              <a:buSzPct val="100000"/>
+              <a:buChar char="•"/>
+            </a:pPr>
+            <a:r>
+              <a:rPr lang="en-US" sz="1250" b="1" dirty="0">
+                <a:solidFill>
+                  <a:srgbClr val="1B2A38"/>
+                </a:solidFill>
+                <a:latin typeface="Calibri" pitchFamily="34" charset="0"/>
+                <a:ea typeface="Calibri" pitchFamily="34" charset="-122"/>
+                <a:cs typeface="Calibri" pitchFamily="34" charset="-120"/>
+              </a:rPr>
+              <a:t>Ongoing competency uses the six required elements (e.g., direct observation, result review, blind samples, problem-solving).</a:t>
+            </a:r>
+            <a:endParaRPr lang="en-US" sz="1250" dirty="0"/>
+          </a:p>
+          <a:p>
+            <a:pPr algn="l" marL="177800" indent="-177800">
+              <a:spcAft>
+                <a:spcPts val="900"/>
+              </a:spcAft>
+              <a:buSzPct val="100000"/>
+              <a:buChar char="•"/>
+            </a:pPr>
+            <a:r>
+              <a:rPr lang="en-US" sz="1250" dirty="0">
+                <a:solidFill>
+                  <a:srgbClr val="33444F"/>
+                </a:solidFill>
+                <a:latin typeface="Calibri" pitchFamily="34" charset="0"/>
+                <a:ea typeface="Calibri" pitchFamily="34" charset="-122"/>
+                <a:cs typeface="Calibri" pitchFamily="34" charset="-120"/>
+              </a:rPr>
+              <a:t>Assessed at defined intervals.</a:t>
+            </a:r>
+            <a:endParaRPr lang="en-US" sz="1250" dirty="0"/>
+          </a:p>
+          <a:p>
+            <a:pPr algn="l" marL="177800" indent="-177800">
+              <a:spcAft>
+                <a:spcPts val="900"/>
+              </a:spcAft>
+              <a:buSzPct val="100000"/>
+              <a:buChar char="•"/>
+            </a:pPr>
+            <a:r>
+              <a:rPr lang="en-US" sz="1250" dirty="0">
+                <a:solidFill>
+                  <a:srgbClr val="33444F"/>
+                </a:solidFill>
+                <a:latin typeface="Calibri" pitchFamily="34" charset="0"/>
+                <a:ea typeface="Calibri" pitchFamily="34" charset="-122"/>
+                <a:cs typeface="Calibri" pitchFamily="34" charset="-120"/>
+              </a:rPr>
+              <a:t>Remediate identified gaps.</a:t>
+            </a:r>
+            <a:endParaRPr lang="en-US" sz="1250" dirty="0"/>
+          </a:p>
+          <a:p>
+            <a:pPr algn="l" marL="177800" indent="-177800">
+              <a:spcAft>
+                <a:spcPts val="900"/>
+              </a:spcAft>
+              <a:buSzPct val="100000"/>
+              <a:buChar char="•"/>
+            </a:pPr>
+            <a:r>
+              <a:rPr lang="en-US" sz="1250" dirty="0">
+                <a:solidFill>
+                  <a:srgbClr val="33444F"/>
+                </a:solidFill>
+                <a:latin typeface="Calibri" pitchFamily="34" charset="0"/>
+                <a:ea typeface="Calibri" pitchFamily="34" charset="-122"/>
+                <a:cs typeface="Calibri" pitchFamily="34" charset="-120"/>
+              </a:rPr>
+              <a:t>Maintain records for inspection.</a:t>
+            </a:r>
+            <a:endParaRPr lang="en-US" sz="1250" dirty="0"/>
+          </a:p>
+        </p:txBody>
+      </p:sp>
+      <p:sp>
+        <p:nvSpPr>
+          <p:cNvPr id="10" name="Text 8"/>
+          <p:cNvSpPr/>
+          <p:nvPr/>
+        </p:nvSpPr>
+        <p:spPr>
+          <a:xfrm>
+            <a:off x="566928" y="6473952"/>
+            <a:ext cx="7772400" cy="274320"/>
+          </a:xfrm>
+          <a:prstGeom prst="rect">
+            <a:avLst/>
+          </a:prstGeom>
+          <a:noFill/>
+          <a:ln/>
+        </p:spPr>
+        <p:txBody>
+          <a:bodyPr wrap="square" lIns="0" tIns="0" rIns="0" bIns="0" rtlCol="0" anchor="ctr"/>
+          <a:lstStyle/>
+          <a:p>
             <a:pPr algn="l" indent="0" marL="0">
               <a:buNone/>
             </a:pPr>
             <a:r>
-              <a:rPr lang="en-US" sz="6400" b="1" dirty="0">
-                <a:solidFill>
-                  <a:srgbClr val="ECEFF1"/>
-                </a:solidFill>
-                <a:latin typeface="Calibri" pitchFamily="34" charset="0"/>
-                <a:ea typeface="Calibri" pitchFamily="34" charset="-122"/>
-                <a:cs typeface="Calibri" pitchFamily="34" charset="-120"/>
-              </a:rPr>
-              <a:t>03</a:t>
-            </a:r>
-            <a:endParaRPr lang="en-US" sz="6400" dirty="0"/>
-          </a:p>
-        </p:txBody>
-      </p:sp>
-      <p:sp>
-        <p:nvSpPr>
-          <p:cNvPr id="5" name="Text 3"/>
-          <p:cNvSpPr/>
-          <p:nvPr/>
-        </p:nvSpPr>
-        <p:spPr>
-          <a:xfrm>
-            <a:off x="566928" y="3246120"/>
-            <a:ext cx="10058400" cy="365760"/>
+              <a:rPr lang="en-US" sz="850" dirty="0">
+                <a:solidFill>
+                  <a:srgbClr val="9AA8B4"/>
+                </a:solidFill>
+                <a:latin typeface="Calibri" pitchFamily="34" charset="0"/>
+                <a:ea typeface="Calibri" pitchFamily="34" charset="-122"/>
+                <a:cs typeface="Calibri" pitchFamily="34" charset="-120"/>
+              </a:rPr>
+              <a:t>Makassed General Hospital  ·  Department of Laboratory Medicine</a:t>
+            </a:r>
+            <a:endParaRPr lang="en-US" sz="850" dirty="0"/>
+          </a:p>
+        </p:txBody>
+      </p:sp>
+      <p:sp>
+        <p:nvSpPr>
+          <p:cNvPr id="11" name="Text 9"/>
+          <p:cNvSpPr/>
+          <p:nvPr/>
+        </p:nvSpPr>
+        <p:spPr>
+          <a:xfrm>
+            <a:off x="9814255" y="6473952"/>
+            <a:ext cx="1828800" cy="274320"/>
           </a:xfrm>
           <a:prstGeom prst="rect">
             <a:avLst/>
@@ -3631,60 +4458,49 @@
           <a:bodyPr wrap="square" lIns="0" tIns="0" rIns="0" bIns="0" rtlCol="0" anchor="ctr"/>
           <a:lstStyle/>
           <a:p>
-            <a:pPr algn="l" indent="0" marL="0">
-              <a:buNone/>
-            </a:pPr>
-            <a:r>
-              <a:rPr lang="en-US" sz="1300" b="1" spc="250" kern="0" dirty="0">
-                <a:solidFill>
-                  <a:srgbClr val="F2C9D9"/>
-                </a:solidFill>
-                <a:latin typeface="Calibri" pitchFamily="34" charset="0"/>
-                <a:ea typeface="Calibri" pitchFamily="34" charset="-122"/>
-                <a:cs typeface="Calibri" pitchFamily="34" charset="-120"/>
-              </a:rPr>
-              <a:t>PART THREE</a:t>
-            </a:r>
-            <a:endParaRPr lang="en-US" sz="1300" dirty="0"/>
-          </a:p>
-        </p:txBody>
-      </p:sp>
-      <p:sp>
-        <p:nvSpPr>
-          <p:cNvPr id="6" name="Text 4"/>
-          <p:cNvSpPr/>
-          <p:nvPr/>
-        </p:nvSpPr>
-        <p:spPr>
-          <a:xfrm>
-            <a:off x="566928" y="3611880"/>
-            <a:ext cx="10607040" cy="1463040"/>
-          </a:xfrm>
-          <a:prstGeom prst="rect">
-            <a:avLst/>
-          </a:prstGeom>
-          <a:noFill/>
-          <a:ln/>
-        </p:spPr>
-        <p:txBody>
-          <a:bodyPr wrap="square" lIns="0" tIns="0" rIns="0" bIns="0" rtlCol="0" anchor="t"/>
-          <a:lstStyle/>
-          <a:p>
-            <a:pPr algn="l" indent="0" marL="0">
-              <a:buNone/>
-            </a:pPr>
-            <a:r>
-              <a:rPr lang="en-US" sz="3800" b="1" dirty="0">
-                <a:solidFill>
-                  <a:srgbClr val="FFFFFF"/>
-                </a:solidFill>
-                <a:latin typeface="Calibri" pitchFamily="34" charset="0"/>
-                <a:ea typeface="Calibri" pitchFamily="34" charset="-122"/>
-                <a:cs typeface="Calibri" pitchFamily="34" charset="-120"/>
-              </a:rPr>
-              <a:t>Cases &amp; Board Review</a:t>
-            </a:r>
-            <a:endParaRPr lang="en-US" sz="3800" dirty="0"/>
+            <a:pPr algn="r" indent="0" marL="0">
+              <a:buNone/>
+            </a:pPr>
+            <a:r>
+              <a:rPr lang="en-US" sz="850" dirty="0">
+                <a:solidFill>
+                  <a:srgbClr val="9AA8B4"/>
+                </a:solidFill>
+                <a:latin typeface="Calibri" pitchFamily="34" charset="0"/>
+                <a:ea typeface="Calibri" pitchFamily="34" charset="-122"/>
+                <a:cs typeface="Calibri" pitchFamily="34" charset="-120"/>
+              </a:rPr>
+              <a:t>CP Lecture Series</a:t>
+            </a:r>
+            <a:pPr algn="r" indent="0" marL="0">
+              <a:buNone/>
+            </a:pPr>
+            <a:r>
+              <a:rPr lang="en-US" sz="850" dirty="0">
+                <a:solidFill>
+                  <a:srgbClr val="DCE4EC"/>
+                </a:solidFill>
+                <a:latin typeface="Calibri" pitchFamily="34" charset="0"/>
+                <a:ea typeface="Calibri" pitchFamily="34" charset="-122"/>
+                <a:cs typeface="Calibri" pitchFamily="34" charset="-120"/>
+              </a:rPr>
+              <a:t>   ·   </a:t>
+            </a:r>
+            <a:pPr algn="r" indent="0" marL="0">
+              <a:buNone/>
+            </a:pPr>
+            <a:r>
+              <a:rPr lang="en-US" sz="850" b="1" dirty="0">
+                <a:solidFill>
+                  <a:srgbClr val="455A64"/>
+                </a:solidFill>
+                <a:latin typeface="Calibri" pitchFamily="34" charset="0"/>
+                <a:ea typeface="Calibri" pitchFamily="34" charset="-122"/>
+                <a:cs typeface="Calibri" pitchFamily="34" charset="-120"/>
+              </a:rPr>
+              <a:t>9</a:t>
+            </a:r>
+            <a:endParaRPr lang="en-US" sz="850" dirty="0"/>
           </a:p>
         </p:txBody>
       </p:sp>
@@ -3753,7 +4569,7 @@
                 <a:ea typeface="Calibri" pitchFamily="34" charset="-122"/>
                 <a:cs typeface="Calibri" pitchFamily="34" charset="-120"/>
               </a:rPr>
-              <a:t>LAB MANAGEMENT &amp; QUALITY   ·   CASE 1</a:t>
+              <a:t>LAB MANAGEMENT &amp; QUALITY   ·   INSPECTION</a:t>
             </a:r>
             <a:endParaRPr lang="en-US" sz="1100" dirty="0"/>
           </a:p>
@@ -3792,7 +4608,7 @@
                 <a:ea typeface="Calibri" pitchFamily="34" charset="-122"/>
                 <a:cs typeface="Calibri" pitchFamily="34" charset="-120"/>
               </a:rPr>
-              <a:t>Case 1</a:t>
+              <a:t>Inspection Readiness</a:t>
             </a:r>
             <a:endParaRPr lang="en-US" sz="3000" dirty="0"/>
           </a:p>
@@ -3807,11 +4623,11 @@
         <p:spPr>
           <a:xfrm>
             <a:off x="566928" y="1517904"/>
-            <a:ext cx="11057839" cy="2788920"/>
+            <a:ext cx="5346040" cy="4114800"/>
           </a:xfrm>
           <a:prstGeom prst="roundRect">
             <a:avLst>
-              <a:gd name="adj" fmla="val 2951"/>
+              <a:gd name="adj" fmla="val 2000"/>
             </a:avLst>
           </a:prstGeom>
           <a:solidFill>
@@ -3835,8 +4651,8 @@
         </p:nvSpPr>
         <p:spPr>
           <a:xfrm>
-            <a:off x="841248" y="1700784"/>
-            <a:ext cx="5486400" cy="292608"/>
+            <a:off x="804672" y="1682496"/>
+            <a:ext cx="4888840" cy="274320"/>
           </a:xfrm>
           <a:prstGeom prst="rect">
             <a:avLst/>
@@ -3852,17 +4668,17 @@
               <a:buNone/>
             </a:pPr>
             <a:r>
-              <a:rPr lang="en-US" sz="1100" b="1" spc="150" kern="0" dirty="0">
-                <a:solidFill>
-                  <a:srgbClr val="455A64"/>
-                </a:solidFill>
-                <a:latin typeface="Calibri" pitchFamily="34" charset="0"/>
-                <a:ea typeface="Calibri" pitchFamily="34" charset="-122"/>
-                <a:cs typeface="Calibri" pitchFamily="34" charset="-120"/>
-              </a:rPr>
-              <a:t>CLINICAL VIGNETTE</a:t>
-            </a:r>
-            <a:endParaRPr lang="en-US" sz="1100" dirty="0"/>
+              <a:rPr lang="en-US" sz="1200" b="1" spc="100" kern="0" dirty="0">
+                <a:solidFill>
+                  <a:srgbClr val="2C3A41"/>
+                </a:solidFill>
+                <a:latin typeface="Calibri" pitchFamily="34" charset="0"/>
+                <a:ea typeface="Calibri" pitchFamily="34" charset="-122"/>
+                <a:cs typeface="Calibri" pitchFamily="34" charset="-120"/>
+              </a:rPr>
+              <a:t>CONTINUOUS READINESS</a:t>
+            </a:r>
+            <a:endParaRPr lang="en-US" sz="1200" dirty="0"/>
           </a:p>
         </p:txBody>
       </p:sp>
@@ -3874,8 +4690,8 @@
         </p:nvSpPr>
         <p:spPr>
           <a:xfrm>
-            <a:off x="841248" y="2029968"/>
-            <a:ext cx="10509199" cy="2148840"/>
+            <a:off x="804672" y="2029968"/>
+            <a:ext cx="4870552" cy="3474720"/>
           </a:xfrm>
           <a:prstGeom prst="rect">
             <a:avLst/>
@@ -3887,14 +4703,36 @@
           <a:bodyPr wrap="square" lIns="0" tIns="0" rIns="0" bIns="0" rtlCol="0" anchor="t"/>
           <a:lstStyle/>
           <a:p>
-            <a:pPr algn="l" indent="0" marL="0">
-              <a:lnSpc>
-                <a:spcPct val="108000"/>
-              </a:lnSpc>
-              <a:buNone/>
-            </a:pPr>
-            <a:r>
-              <a:rPr lang="en-US" sz="1450" dirty="0">
+            <a:pPr algn="l" marL="177800" indent="-177800">
+              <a:spcAft>
+                <a:spcPts val="900"/>
+              </a:spcAft>
+              <a:buSzPct val="100000"/>
+              <a:buChar char="•"/>
+            </a:pPr>
+            <a:r>
+              <a:rPr lang="en-US" sz="1250" b="1" dirty="0">
+                <a:solidFill>
+                  <a:srgbClr val="1B2A38"/>
+                </a:solidFill>
+                <a:latin typeface="Calibri" pitchFamily="34" charset="0"/>
+                <a:ea typeface="Calibri" pitchFamily="34" charset="-122"/>
+                <a:cs typeface="Calibri" pitchFamily="34" charset="-120"/>
+              </a:rPr>
+              <a:t>Maintain documentation, QC records, and corrective actions so the lab is always inspection-ready.</a:t>
+            </a:r>
+            <a:endParaRPr lang="en-US" sz="1250" dirty="0"/>
+          </a:p>
+          <a:p>
+            <a:pPr algn="l" marL="177800" indent="-177800">
+              <a:spcAft>
+                <a:spcPts val="900"/>
+              </a:spcAft>
+              <a:buSzPct val="100000"/>
+              <a:buChar char="•"/>
+            </a:pPr>
+            <a:r>
+              <a:rPr lang="en-US" sz="1250" dirty="0">
                 <a:solidFill>
                   <a:srgbClr val="33444F"/>
                 </a:solidFill>
@@ -3902,9 +4740,51 @@
                 <a:ea typeface="Calibri" pitchFamily="34" charset="-122"/>
                 <a:cs typeface="Calibri" pitchFamily="34" charset="-120"/>
               </a:rPr>
-              <a:t>A laboratory wants to bring up a new laboratory-developed molecular assay quickly using FDA-cleared reagents 'off-label' for a new indication.</a:t>
-            </a:r>
-            <a:endParaRPr lang="en-US" sz="1450" dirty="0"/>
+              <a:t>Self-inspections find gaps proactively.</a:t>
+            </a:r>
+            <a:endParaRPr lang="en-US" sz="1250" dirty="0"/>
+          </a:p>
+          <a:p>
+            <a:pPr algn="l" marL="177800" indent="-177800">
+              <a:spcAft>
+                <a:spcPts val="900"/>
+              </a:spcAft>
+              <a:buSzPct val="100000"/>
+              <a:buChar char="•"/>
+            </a:pPr>
+            <a:r>
+              <a:rPr lang="en-US" sz="1250" dirty="0">
+                <a:solidFill>
+                  <a:srgbClr val="33444F"/>
+                </a:solidFill>
+                <a:latin typeface="Calibri" pitchFamily="34" charset="0"/>
+                <a:ea typeface="Calibri" pitchFamily="34" charset="-122"/>
+                <a:cs typeface="Calibri" pitchFamily="34" charset="-120"/>
+              </a:rPr>
+              <a:t>Track and close deficiencies.</a:t>
+            </a:r>
+            <a:endParaRPr lang="en-US" sz="1250" dirty="0"/>
+          </a:p>
+          <a:p>
+            <a:pPr algn="l" marL="177800" indent="-177800">
+              <a:spcAft>
+                <a:spcPts val="900"/>
+              </a:spcAft>
+              <a:buSzPct val="100000"/>
+              <a:buChar char="•"/>
+            </a:pPr>
+            <a:r>
+              <a:rPr lang="en-US" sz="1250" dirty="0">
+                <a:solidFill>
+                  <a:srgbClr val="33444F"/>
+                </a:solidFill>
+                <a:latin typeface="Calibri" pitchFamily="34" charset="0"/>
+                <a:ea typeface="Calibri" pitchFamily="34" charset="-122"/>
+                <a:cs typeface="Calibri" pitchFamily="34" charset="-120"/>
+              </a:rPr>
+              <a:t>Engage staff in readiness.</a:t>
+            </a:r>
+            <a:endParaRPr lang="en-US" sz="1250" dirty="0"/>
           </a:p>
         </p:txBody>
       </p:sp>
@@ -3916,16 +4796,16 @@
         </p:nvSpPr>
         <p:spPr>
           <a:xfrm>
-            <a:off x="566928" y="4553712"/>
-            <a:ext cx="11057839" cy="1325880"/>
+            <a:off x="6278728" y="1517904"/>
+            <a:ext cx="5346040" cy="4114800"/>
           </a:xfrm>
           <a:prstGeom prst="roundRect">
             <a:avLst>
-              <a:gd name="adj" fmla="val 6207"/>
+              <a:gd name="adj" fmla="val 2000"/>
             </a:avLst>
           </a:prstGeom>
           <a:solidFill>
-            <a:srgbClr val="0E3A5F"/>
+            <a:srgbClr val="E6EAED"/>
           </a:solidFill>
           <a:ln/>
           <a:effectLst>
@@ -3945,8 +4825,8 @@
         </p:nvSpPr>
         <p:spPr>
           <a:xfrm>
-            <a:off x="822960" y="4681728"/>
-            <a:ext cx="640080" cy="960120"/>
+            <a:off x="6516472" y="1682496"/>
+            <a:ext cx="4888840" cy="274320"/>
           </a:xfrm>
           <a:prstGeom prst="rect">
             <a:avLst/>
@@ -3958,21 +4838,21 @@
           <a:bodyPr wrap="square" lIns="0" tIns="0" rIns="0" bIns="0" rtlCol="0" anchor="ctr"/>
           <a:lstStyle/>
           <a:p>
-            <a:pPr algn="ctr" indent="0" marL="0">
-              <a:buNone/>
-            </a:pPr>
-            <a:r>
-              <a:rPr lang="en-US" sz="4000" b="1" dirty="0">
-                <a:solidFill>
-                  <a:srgbClr val="455A64"/>
-                </a:solidFill>
-                <a:latin typeface="Calibri" pitchFamily="34" charset="0"/>
-                <a:ea typeface="Calibri" pitchFamily="34" charset="-122"/>
-                <a:cs typeface="Calibri" pitchFamily="34" charset="-120"/>
-              </a:rPr>
-              <a:t>?</a:t>
-            </a:r>
-            <a:endParaRPr lang="en-US" sz="4000" dirty="0"/>
+            <a:pPr indent="0" marL="0">
+              <a:buNone/>
+            </a:pPr>
+            <a:r>
+              <a:rPr lang="en-US" sz="1200" b="1" spc="100" kern="0" dirty="0">
+                <a:solidFill>
+                  <a:srgbClr val="2C3A41"/>
+                </a:solidFill>
+                <a:latin typeface="Calibri" pitchFamily="34" charset="0"/>
+                <a:ea typeface="Calibri" pitchFamily="34" charset="-122"/>
+                <a:cs typeface="Calibri" pitchFamily="34" charset="-120"/>
+              </a:rPr>
+              <a:t>RESPONDING TO FINDINGS</a:t>
+            </a:r>
+            <a:endParaRPr lang="en-US" sz="1200" dirty="0"/>
           </a:p>
         </p:txBody>
       </p:sp>
@@ -3984,34 +4864,101 @@
         </p:nvSpPr>
         <p:spPr>
           <a:xfrm>
-            <a:off x="1618488" y="4553712"/>
-            <a:ext cx="9686239" cy="1325880"/>
-          </a:xfrm>
-          <a:prstGeom prst="rect">
-            <a:avLst/>
-          </a:prstGeom>
-          <a:noFill/>
-          <a:ln/>
-        </p:spPr>
-        <p:txBody>
-          <a:bodyPr wrap="square" lIns="0" tIns="0" rIns="0" bIns="0" rtlCol="0" anchor="ctr"/>
-          <a:lstStyle/>
-          <a:p>
-            <a:pPr algn="l" indent="0" marL="0">
-              <a:buNone/>
-            </a:pPr>
-            <a:r>
-              <a:rPr lang="en-US" sz="1500" b="1" dirty="0">
-                <a:solidFill>
-                  <a:srgbClr val="FFFFFF"/>
-                </a:solidFill>
-                <a:latin typeface="Calibri" pitchFamily="34" charset="0"/>
-                <a:ea typeface="Calibri" pitchFamily="34" charset="-122"/>
-                <a:cs typeface="Calibri" pitchFamily="34" charset="-120"/>
-              </a:rPr>
-              <a:t>What complexity and validation requirements apply?</a:t>
-            </a:r>
-            <a:endParaRPr lang="en-US" sz="1500" dirty="0"/>
+            <a:off x="6516472" y="2029968"/>
+            <a:ext cx="4870552" cy="3474720"/>
+          </a:xfrm>
+          <a:prstGeom prst="rect">
+            <a:avLst/>
+          </a:prstGeom>
+          <a:noFill/>
+          <a:ln/>
+        </p:spPr>
+        <p:txBody>
+          <a:bodyPr wrap="square" lIns="0" tIns="0" rIns="0" bIns="0" rtlCol="0" anchor="t"/>
+          <a:lstStyle/>
+          <a:p>
+            <a:pPr algn="l" marL="177800" indent="-177800">
+              <a:spcAft>
+                <a:spcPts val="900"/>
+              </a:spcAft>
+              <a:buSzPct val="100000"/>
+              <a:buChar char="•"/>
+            </a:pPr>
+            <a:r>
+              <a:rPr lang="en-US" sz="1250" b="1" dirty="0">
+                <a:solidFill>
+                  <a:srgbClr val="1B2A38"/>
+                </a:solidFill>
+                <a:latin typeface="Calibri" pitchFamily="34" charset="0"/>
+                <a:ea typeface="Calibri" pitchFamily="34" charset="-122"/>
+                <a:cs typeface="Calibri" pitchFamily="34" charset="-120"/>
+              </a:rPr>
+              <a:t>Address citations with documented corrective action and timelines.</a:t>
+            </a:r>
+            <a:endParaRPr lang="en-US" sz="1250" dirty="0"/>
+          </a:p>
+          <a:p>
+            <a:pPr algn="l" marL="177800" indent="-177800">
+              <a:spcAft>
+                <a:spcPts val="900"/>
+              </a:spcAft>
+              <a:buSzPct val="100000"/>
+              <a:buChar char="•"/>
+            </a:pPr>
+            <a:r>
+              <a:rPr lang="en-US" sz="1250" dirty="0">
+                <a:solidFill>
+                  <a:srgbClr val="33444F"/>
+                </a:solidFill>
+                <a:latin typeface="Calibri" pitchFamily="34" charset="0"/>
+                <a:ea typeface="Calibri" pitchFamily="34" charset="-122"/>
+                <a:cs typeface="Calibri" pitchFamily="34" charset="-120"/>
+              </a:rPr>
+              <a:t>Demonstrate sustained compliance.</a:t>
+            </a:r>
+            <a:endParaRPr lang="en-US" sz="1250" dirty="0"/>
+          </a:p>
+          <a:p>
+            <a:pPr algn="l" marL="177800" indent="-177800">
+              <a:spcAft>
+                <a:spcPts val="900"/>
+              </a:spcAft>
+              <a:buSzPct val="100000"/>
+              <a:buChar char="•"/>
+            </a:pPr>
+            <a:r>
+              <a:rPr lang="en-US" sz="1250" dirty="0">
+                <a:solidFill>
+                  <a:srgbClr val="33444F"/>
+                </a:solidFill>
+                <a:latin typeface="Calibri" pitchFamily="34" charset="0"/>
+                <a:ea typeface="Calibri" pitchFamily="34" charset="-122"/>
+                <a:cs typeface="Calibri" pitchFamily="34" charset="-120"/>
+              </a:rPr>
+              <a:t>Use findings to strengthen the system.</a:t>
+            </a:r>
+            <a:endParaRPr lang="en-US" sz="1250" dirty="0"/>
+          </a:p>
+          <a:p>
+            <a:pPr algn="l" marL="177800" indent="-177800">
+              <a:spcAft>
+                <a:spcPts val="900"/>
+              </a:spcAft>
+              <a:buSzPct val="100000"/>
+              <a:buChar char="•"/>
+            </a:pPr>
+            <a:r>
+              <a:rPr lang="en-US" sz="1250" dirty="0">
+                <a:solidFill>
+                  <a:srgbClr val="33444F"/>
+                </a:solidFill>
+                <a:latin typeface="Calibri" pitchFamily="34" charset="0"/>
+                <a:ea typeface="Calibri" pitchFamily="34" charset="-122"/>
+                <a:cs typeface="Calibri" pitchFamily="34" charset="-120"/>
+              </a:rPr>
+              <a:t>Escalate systemic issues to leadership.</a:t>
+            </a:r>
+            <a:endParaRPr lang="en-US" sz="1250" dirty="0"/>
           </a:p>
         </p:txBody>
       </p:sp>
@@ -4115,7 +5062,7 @@
                 <a:ea typeface="Calibri" pitchFamily="34" charset="-122"/>
                 <a:cs typeface="Calibri" pitchFamily="34" charset="-120"/>
               </a:rPr>
-              <a:t>9</a:t>
+              <a:t>10</a:t>
             </a:r>
             <a:endParaRPr lang="en-US" sz="850" dirty="0"/>
           </a:p>
@@ -4135,7 +5082,7 @@
     <p:bg>
       <p:bgPr>
         <a:solidFill>
-          <a:srgbClr val="FFFFFF"/>
+          <a:srgbClr val="2C3A41"/>
         </a:solidFill>
       </p:bgPr>
     </p:bg>
@@ -4155,14 +5102,58 @@
       </p:grpSpPr>
       <p:sp>
         <p:nvSpPr>
-          <p:cNvPr id="2" name="Text 0"/>
-          <p:cNvSpPr/>
-          <p:nvPr/>
-        </p:nvSpPr>
-        <p:spPr>
-          <a:xfrm>
-            <a:off x="566928" y="329184"/>
-            <a:ext cx="10515600" cy="310896"/>
+          <p:cNvPr id="2" name="Shape 0"/>
+          <p:cNvSpPr/>
+          <p:nvPr/>
+        </p:nvSpPr>
+        <p:spPr>
+          <a:xfrm>
+            <a:off x="9509760" y="-1280160"/>
+            <a:ext cx="4754880" cy="4754880"/>
+          </a:xfrm>
+          <a:prstGeom prst="ellipse">
+            <a:avLst/>
+          </a:prstGeom>
+          <a:solidFill>
+            <a:srgbClr val="FFFFFF">
+              <a:alpha val="8000"/>
+            </a:srgbClr>
+          </a:solidFill>
+          <a:ln/>
+        </p:spPr>
+      </p:sp>
+      <p:sp>
+        <p:nvSpPr>
+          <p:cNvPr id="3" name="Shape 1"/>
+          <p:cNvSpPr/>
+          <p:nvPr/>
+        </p:nvSpPr>
+        <p:spPr>
+          <a:xfrm>
+            <a:off x="10607040" y="3931920"/>
+            <a:ext cx="3108960" cy="3108960"/>
+          </a:xfrm>
+          <a:prstGeom prst="ellipse">
+            <a:avLst/>
+          </a:prstGeom>
+          <a:solidFill>
+            <a:srgbClr val="FFFFFF">
+              <a:alpha val="6000"/>
+            </a:srgbClr>
+          </a:solidFill>
+          <a:ln/>
+        </p:spPr>
+      </p:sp>
+      <p:sp>
+        <p:nvSpPr>
+          <p:cNvPr id="4" name="Text 2"/>
+          <p:cNvSpPr/>
+          <p:nvPr/>
+        </p:nvSpPr>
+        <p:spPr>
+          <a:xfrm>
+            <a:off x="566928" y="1783080"/>
+            <a:ext cx="2743200" cy="1463040"/>
           </a:xfrm>
           <a:prstGeom prst="rect">
             <a:avLst/>
@@ -4178,30 +5169,30 @@
               <a:buNone/>
             </a:pPr>
             <a:r>
-              <a:rPr lang="en-US" sz="1100" b="1" spc="150" kern="0" dirty="0">
-                <a:solidFill>
-                  <a:srgbClr val="455A64"/>
-                </a:solidFill>
-                <a:latin typeface="Calibri" pitchFamily="34" charset="0"/>
-                <a:ea typeface="Calibri" pitchFamily="34" charset="-122"/>
-                <a:cs typeface="Calibri" pitchFamily="34" charset="-120"/>
-              </a:rPr>
-              <a:t>LAB MANAGEMENT &amp; QUALITY   ·   CASE 1  ·  RESOLUTION</a:t>
-            </a:r>
-            <a:endParaRPr lang="en-US" sz="1100" dirty="0"/>
-          </a:p>
-        </p:txBody>
-      </p:sp>
-      <p:sp>
-        <p:nvSpPr>
-          <p:cNvPr id="3" name="Text 1"/>
-          <p:cNvSpPr/>
-          <p:nvPr/>
-        </p:nvSpPr>
-        <p:spPr>
-          <a:xfrm>
-            <a:off x="566928" y="713232"/>
-            <a:ext cx="11064240" cy="749808"/>
+              <a:rPr lang="en-US" sz="6400" b="1" dirty="0">
+                <a:solidFill>
+                  <a:srgbClr val="ECEFF1"/>
+                </a:solidFill>
+                <a:latin typeface="Calibri" pitchFamily="34" charset="0"/>
+                <a:ea typeface="Calibri" pitchFamily="34" charset="-122"/>
+                <a:cs typeface="Calibri" pitchFamily="34" charset="-120"/>
+              </a:rPr>
+              <a:t>03</a:t>
+            </a:r>
+            <a:endParaRPr lang="en-US" sz="6400" dirty="0"/>
+          </a:p>
+        </p:txBody>
+      </p:sp>
+      <p:sp>
+        <p:nvSpPr>
+          <p:cNvPr id="5" name="Text 3"/>
+          <p:cNvSpPr/>
+          <p:nvPr/>
+        </p:nvSpPr>
+        <p:spPr>
+          <a:xfrm>
+            <a:off x="566928" y="3246120"/>
+            <a:ext cx="10058400" cy="365760"/>
           </a:xfrm>
           <a:prstGeom prst="rect">
             <a:avLst/>
@@ -4217,30 +5208,30 @@
               <a:buNone/>
             </a:pPr>
             <a:r>
-              <a:rPr lang="en-US" sz="3000" b="1" dirty="0">
-                <a:solidFill>
-                  <a:srgbClr val="0E3A5F"/>
-                </a:solidFill>
-                <a:latin typeface="Calibri" pitchFamily="34" charset="0"/>
-                <a:ea typeface="Calibri" pitchFamily="34" charset="-122"/>
-                <a:cs typeface="Calibri" pitchFamily="34" charset="-120"/>
-              </a:rPr>
-              <a:t>Case 1: LDT Validation</a:t>
-            </a:r>
-            <a:endParaRPr lang="en-US" sz="3000" dirty="0"/>
-          </a:p>
-        </p:txBody>
-      </p:sp>
-      <p:sp>
-        <p:nvSpPr>
-          <p:cNvPr id="4" name="Text 2"/>
-          <p:cNvSpPr/>
-          <p:nvPr/>
-        </p:nvSpPr>
-        <p:spPr>
-          <a:xfrm>
-            <a:off x="566928" y="1554480"/>
-            <a:ext cx="6413547" cy="4023360"/>
+              <a:rPr lang="en-US" sz="1300" b="1" spc="250" kern="0" dirty="0">
+                <a:solidFill>
+                  <a:srgbClr val="F2C9D9"/>
+                </a:solidFill>
+                <a:latin typeface="Calibri" pitchFamily="34" charset="0"/>
+                <a:ea typeface="Calibri" pitchFamily="34" charset="-122"/>
+                <a:cs typeface="Calibri" pitchFamily="34" charset="-120"/>
+              </a:rPr>
+              <a:t>PART THREE</a:t>
+            </a:r>
+            <a:endParaRPr lang="en-US" sz="1300" dirty="0"/>
+          </a:p>
+        </p:txBody>
+      </p:sp>
+      <p:sp>
+        <p:nvSpPr>
+          <p:cNvPr id="6" name="Text 4"/>
+          <p:cNvSpPr/>
+          <p:nvPr/>
+        </p:nvSpPr>
+        <p:spPr>
+          <a:xfrm>
+            <a:off x="566928" y="3611880"/>
+            <a:ext cx="10607040" cy="1463040"/>
           </a:xfrm>
           <a:prstGeom prst="rect">
             <a:avLst/>
@@ -4252,304 +5243,21 @@
           <a:bodyPr wrap="square" lIns="0" tIns="0" rIns="0" bIns="0" rtlCol="0" anchor="t"/>
           <a:lstStyle/>
           <a:p>
-            <a:pPr algn="l" marL="177800" indent="-177800">
-              <a:spcAft>
-                <a:spcPts val="900"/>
-              </a:spcAft>
-              <a:buSzPct val="100000"/>
-              <a:buChar char="•"/>
-            </a:pPr>
-            <a:r>
-              <a:rPr lang="en-US" sz="1400" b="1" dirty="0">
-                <a:solidFill>
-                  <a:srgbClr val="1B2A38"/>
-                </a:solidFill>
-                <a:latin typeface="Calibri" pitchFamily="34" charset="0"/>
-                <a:ea typeface="Calibri" pitchFamily="34" charset="-122"/>
-                <a:cs typeface="Calibri" pitchFamily="34" charset="-120"/>
-              </a:rPr>
-              <a:t>Modifying or developing a test (an LDT) makes it high complexity, requiring FULL validation.</a:t>
-            </a:r>
-            <a:endParaRPr lang="en-US" sz="1400" dirty="0"/>
-          </a:p>
-          <a:p>
-            <a:pPr algn="l" marL="177800" indent="-177800">
-              <a:spcAft>
-                <a:spcPts val="900"/>
-              </a:spcAft>
-              <a:buSzPct val="100000"/>
-              <a:buChar char="•"/>
-            </a:pPr>
-            <a:r>
-              <a:rPr lang="en-US" sz="1400" dirty="0">
-                <a:solidFill>
-                  <a:srgbClr val="33444F"/>
-                </a:solidFill>
-                <a:latin typeface="Calibri" pitchFamily="34" charset="0"/>
-                <a:ea typeface="Calibri" pitchFamily="34" charset="-122"/>
-                <a:cs typeface="Calibri" pitchFamily="34" charset="-120"/>
-              </a:rPr>
-              <a:t>Establish accuracy, precision, analytical sensitivity/specificity, reportable range, and reference interval.</a:t>
-            </a:r>
-            <a:endParaRPr lang="en-US" sz="1400" dirty="0"/>
-          </a:p>
-          <a:p>
-            <a:pPr algn="l" marL="177800" indent="-177800">
-              <a:spcAft>
-                <a:spcPts val="900"/>
-              </a:spcAft>
-              <a:buSzPct val="100000"/>
-              <a:buChar char="•"/>
-            </a:pPr>
-            <a:r>
-              <a:rPr lang="en-US" sz="1400" dirty="0">
-                <a:solidFill>
-                  <a:srgbClr val="33444F"/>
-                </a:solidFill>
-                <a:latin typeface="Calibri" pitchFamily="34" charset="0"/>
-                <a:ea typeface="Calibri" pitchFamily="34" charset="-122"/>
-                <a:cs typeface="Calibri" pitchFamily="34" charset="-120"/>
-              </a:rPr>
-              <a:t>Document personnel qualifications for high-complexity testing.</a:t>
-            </a:r>
-            <a:endParaRPr lang="en-US" sz="1400" dirty="0"/>
-          </a:p>
-          <a:p>
-            <a:pPr algn="l" marL="177800" indent="-177800">
-              <a:spcAft>
-                <a:spcPts val="900"/>
-              </a:spcAft>
-              <a:buSzPct val="100000"/>
-              <a:buChar char="•"/>
-            </a:pPr>
-            <a:r>
-              <a:rPr lang="en-US" sz="1400" dirty="0">
-                <a:solidFill>
-                  <a:srgbClr val="33444F"/>
-                </a:solidFill>
-                <a:latin typeface="Calibri" pitchFamily="34" charset="0"/>
-                <a:ea typeface="Calibri" pitchFamily="34" charset="-122"/>
-                <a:cs typeface="Calibri" pitchFamily="34" charset="-120"/>
-              </a:rPr>
-              <a:t>Verification (the lighter process) applies only to unmodified FDA-cleared assays used as intended.</a:t>
-            </a:r>
-            <a:endParaRPr lang="en-US" sz="1400" dirty="0"/>
-          </a:p>
-        </p:txBody>
-      </p:sp>
-      <p:sp>
-        <p:nvSpPr>
-          <p:cNvPr id="5" name="Shape 3"/>
-          <p:cNvSpPr/>
-          <p:nvPr/>
-        </p:nvSpPr>
-        <p:spPr>
-          <a:xfrm>
-            <a:off x="7422788" y="1554480"/>
-            <a:ext cx="4201979" cy="3977640"/>
-          </a:xfrm>
-          <a:prstGeom prst="roundRect">
-            <a:avLst>
-              <a:gd name="adj" fmla="val 2069"/>
-            </a:avLst>
-          </a:prstGeom>
-          <a:solidFill>
-            <a:srgbClr val="ECEFF1"/>
-          </a:solidFill>
-          <a:ln/>
-          <a:effectLst>
-            <a:outerShdw sx="100000" sy="100000" kx="0" ky="0" algn="bl" rotWithShape="0" blurRad="88900" dist="25400" dir="5400000">
-              <a:srgbClr val="22303C">
-                <a:alpha val="12000"/>
-              </a:srgbClr>
-            </a:outerShdw>
-          </a:effectLst>
-        </p:spPr>
-      </p:sp>
-      <p:sp>
-        <p:nvSpPr>
-          <p:cNvPr id="6" name="Text 4"/>
-          <p:cNvSpPr/>
-          <p:nvPr/>
-        </p:nvSpPr>
-        <p:spPr>
-          <a:xfrm>
-            <a:off x="7660532" y="1755648"/>
-            <a:ext cx="3744779" cy="310896"/>
-          </a:xfrm>
-          <a:prstGeom prst="rect">
-            <a:avLst/>
-          </a:prstGeom>
-          <a:noFill/>
-          <a:ln/>
-        </p:spPr>
-        <p:txBody>
-          <a:bodyPr wrap="square" lIns="0" tIns="0" rIns="0" bIns="0" rtlCol="0" anchor="ctr"/>
-          <a:lstStyle/>
-          <a:p>
-            <a:pPr indent="0" marL="0">
-              <a:buNone/>
-            </a:pPr>
-            <a:r>
-              <a:rPr lang="en-US" sz="1100" b="1" spc="140" kern="0" dirty="0">
-                <a:solidFill>
-                  <a:srgbClr val="455A64"/>
-                </a:solidFill>
-                <a:latin typeface="Calibri" pitchFamily="34" charset="0"/>
-                <a:ea typeface="Calibri" pitchFamily="34" charset="-122"/>
-                <a:cs typeface="Calibri" pitchFamily="34" charset="-120"/>
-              </a:rPr>
-              <a:t>TEACHING POINT</a:t>
-            </a:r>
-            <a:endParaRPr lang="en-US" sz="1100" dirty="0"/>
-          </a:p>
-        </p:txBody>
-      </p:sp>
-      <p:sp>
-        <p:nvSpPr>
-          <p:cNvPr id="7" name="Text 5"/>
-          <p:cNvSpPr/>
-          <p:nvPr/>
-        </p:nvSpPr>
-        <p:spPr>
-          <a:xfrm>
-            <a:off x="7660532" y="2121408"/>
-            <a:ext cx="3726491" cy="3291840"/>
-          </a:xfrm>
-          <a:prstGeom prst="rect">
-            <a:avLst/>
-          </a:prstGeom>
-          <a:noFill/>
-          <a:ln/>
-        </p:spPr>
-        <p:txBody>
-          <a:bodyPr wrap="square" lIns="0" tIns="0" rIns="0" bIns="0" rtlCol="0" anchor="t"/>
-          <a:lstStyle/>
-          <a:p>
             <a:pPr algn="l" indent="0" marL="0">
-              <a:lnSpc>
-                <a:spcPct val="110000"/>
-              </a:lnSpc>
-              <a:buNone/>
-            </a:pPr>
-            <a:r>
-              <a:rPr lang="en-US" sz="1350" dirty="0">
-                <a:solidFill>
-                  <a:srgbClr val="33444F"/>
-                </a:solidFill>
-                <a:latin typeface="Calibri" pitchFamily="34" charset="0"/>
-                <a:ea typeface="Calibri" pitchFamily="34" charset="-122"/>
-                <a:cs typeface="Calibri" pitchFamily="34" charset="-120"/>
-              </a:rPr>
-              <a:t>FDA-cleared/as-intended → verify; modified or laboratory-developed → validate fully as high complexity.</a:t>
-            </a:r>
-            <a:endParaRPr lang="en-US" sz="1350" dirty="0"/>
-          </a:p>
-        </p:txBody>
-      </p:sp>
-      <p:sp>
-        <p:nvSpPr>
-          <p:cNvPr id="8" name="Text 6"/>
-          <p:cNvSpPr/>
-          <p:nvPr/>
-        </p:nvSpPr>
-        <p:spPr>
-          <a:xfrm>
-            <a:off x="566928" y="6473952"/>
-            <a:ext cx="7772400" cy="274320"/>
-          </a:xfrm>
-          <a:prstGeom prst="rect">
-            <a:avLst/>
-          </a:prstGeom>
-          <a:noFill/>
-          <a:ln/>
-        </p:spPr>
-        <p:txBody>
-          <a:bodyPr wrap="square" lIns="0" tIns="0" rIns="0" bIns="0" rtlCol="0" anchor="ctr"/>
-          <a:lstStyle/>
-          <a:p>
-            <a:pPr algn="l" indent="0" marL="0">
-              <a:buNone/>
-            </a:pPr>
-            <a:r>
-              <a:rPr lang="en-US" sz="850" dirty="0">
-                <a:solidFill>
-                  <a:srgbClr val="9AA8B4"/>
-                </a:solidFill>
-                <a:latin typeface="Calibri" pitchFamily="34" charset="0"/>
-                <a:ea typeface="Calibri" pitchFamily="34" charset="-122"/>
-                <a:cs typeface="Calibri" pitchFamily="34" charset="-120"/>
-              </a:rPr>
-              <a:t>Makassed General Hospital  ·  Department of Laboratory Medicine</a:t>
-            </a:r>
-            <a:endParaRPr lang="en-US" sz="850" dirty="0"/>
-          </a:p>
-        </p:txBody>
-      </p:sp>
-      <p:sp>
-        <p:nvSpPr>
-          <p:cNvPr id="9" name="Text 7"/>
-          <p:cNvSpPr/>
-          <p:nvPr/>
-        </p:nvSpPr>
-        <p:spPr>
-          <a:xfrm>
-            <a:off x="9814255" y="6473952"/>
-            <a:ext cx="1828800" cy="274320"/>
-          </a:xfrm>
-          <a:prstGeom prst="rect">
-            <a:avLst/>
-          </a:prstGeom>
-          <a:noFill/>
-          <a:ln/>
-        </p:spPr>
-        <p:txBody>
-          <a:bodyPr wrap="square" lIns="0" tIns="0" rIns="0" bIns="0" rtlCol="0" anchor="ctr"/>
-          <a:lstStyle/>
-          <a:p>
-            <a:pPr algn="r" indent="0" marL="0">
-              <a:buNone/>
-            </a:pPr>
-            <a:r>
-              <a:rPr lang="en-US" sz="850" dirty="0">
-                <a:solidFill>
-                  <a:srgbClr val="9AA8B4"/>
-                </a:solidFill>
-                <a:latin typeface="Calibri" pitchFamily="34" charset="0"/>
-                <a:ea typeface="Calibri" pitchFamily="34" charset="-122"/>
-                <a:cs typeface="Calibri" pitchFamily="34" charset="-120"/>
-              </a:rPr>
-              <a:t>CP Lecture Series</a:t>
-            </a:r>
-            <a:pPr algn="r" indent="0" marL="0">
-              <a:buNone/>
-            </a:pPr>
-            <a:r>
-              <a:rPr lang="en-US" sz="850" dirty="0">
-                <a:solidFill>
-                  <a:srgbClr val="DCE4EC"/>
-                </a:solidFill>
-                <a:latin typeface="Calibri" pitchFamily="34" charset="0"/>
-                <a:ea typeface="Calibri" pitchFamily="34" charset="-122"/>
-                <a:cs typeface="Calibri" pitchFamily="34" charset="-120"/>
-              </a:rPr>
-              <a:t>   ·   </a:t>
-            </a:r>
-            <a:pPr algn="r" indent="0" marL="0">
-              <a:buNone/>
-            </a:pPr>
-            <a:r>
-              <a:rPr lang="en-US" sz="850" b="1" dirty="0">
-                <a:solidFill>
-                  <a:srgbClr val="455A64"/>
-                </a:solidFill>
-                <a:latin typeface="Calibri" pitchFamily="34" charset="0"/>
-                <a:ea typeface="Calibri" pitchFamily="34" charset="-122"/>
-                <a:cs typeface="Calibri" pitchFamily="34" charset="-120"/>
-              </a:rPr>
-              <a:t>10</a:t>
-            </a:r>
-            <a:endParaRPr lang="en-US" sz="850" dirty="0"/>
+              <a:buNone/>
+            </a:pPr>
+            <a:r>
+              <a:rPr lang="en-US" sz="3800" b="1" dirty="0">
+                <a:solidFill>
+                  <a:srgbClr val="FFFFFF"/>
+                </a:solidFill>
+                <a:latin typeface="Calibri" pitchFamily="34" charset="0"/>
+                <a:ea typeface="Calibri" pitchFamily="34" charset="-122"/>
+                <a:cs typeface="Calibri" pitchFamily="34" charset="-120"/>
+              </a:rPr>
+              <a:t>Cases &amp; Board Review</a:t>
+            </a:r>
+            <a:endParaRPr lang="en-US" sz="3800" dirty="0"/>
           </a:p>
         </p:txBody>
       </p:sp>
@@ -4618,7 +5326,7 @@
                 <a:ea typeface="Calibri" pitchFamily="34" charset="-122"/>
                 <a:cs typeface="Calibri" pitchFamily="34" charset="-120"/>
               </a:rPr>
-              <a:t>LAB MANAGEMENT &amp; QUALITY   ·   CASE 2</a:t>
+              <a:t>LAB MANAGEMENT &amp; QUALITY   ·   CASE 1</a:t>
             </a:r>
             <a:endParaRPr lang="en-US" sz="1100" dirty="0"/>
           </a:p>
@@ -4657,7 +5365,7 @@
                 <a:ea typeface="Calibri" pitchFamily="34" charset="-122"/>
                 <a:cs typeface="Calibri" pitchFamily="34" charset="-120"/>
               </a:rPr>
-              <a:t>Case 2</a:t>
+              <a:t>Case 1</a:t>
             </a:r>
             <a:endParaRPr lang="en-US" sz="3000" dirty="0"/>
           </a:p>
@@ -4767,7 +5475,7 @@
                 <a:ea typeface="Calibri" pitchFamily="34" charset="-122"/>
                 <a:cs typeface="Calibri" pitchFamily="34" charset="-120"/>
               </a:rPr>
-              <a:t>During a CAP inspection, a technologist is found performing high-complexity testing with training documented but NO record of annual competency assessment.</a:t>
+              <a:t>A technologist, unsure of a result, sends a proficiency-testing sample to a reference lab for confirmation.</a:t>
             </a:r>
             <a:endParaRPr lang="en-US" sz="1450" dirty="0"/>
           </a:p>
@@ -4874,7 +5582,7 @@
                 <a:ea typeface="Calibri" pitchFamily="34" charset="-122"/>
                 <a:cs typeface="Calibri" pitchFamily="34" charset="-120"/>
               </a:rPr>
-              <a:t>What is the deficiency, and what elements were required?</a:t>
+              <a:t>Why is this a serious problem?</a:t>
             </a:r>
             <a:endParaRPr lang="en-US" sz="1500" dirty="0"/>
           </a:p>
@@ -5051,7 +5759,7 @@
                 <a:ea typeface="Calibri" pitchFamily="34" charset="-122"/>
                 <a:cs typeface="Calibri" pitchFamily="34" charset="-120"/>
               </a:rPr>
-              <a:t>LAB MANAGEMENT &amp; QUALITY   ·   CASE 2  ·  RESOLUTION</a:t>
+              <a:t>LAB MANAGEMENT &amp; QUALITY   ·   CASE 1  ·  RESOLUTION</a:t>
             </a:r>
             <a:endParaRPr lang="en-US" sz="1100" dirty="0"/>
           </a:p>
@@ -5090,7 +5798,7 @@
                 <a:ea typeface="Calibri" pitchFamily="34" charset="-122"/>
                 <a:cs typeface="Calibri" pitchFamily="34" charset="-120"/>
               </a:rPr>
-              <a:t>Case 2: Missing Competency Assessment</a:t>
+              <a:t>Case 1: PT Referral Violation</a:t>
             </a:r>
             <a:endParaRPr lang="en-US" sz="3000" dirty="0"/>
           </a:p>
@@ -5133,7 +5841,7 @@
                 <a:ea typeface="Calibri" pitchFamily="34" charset="-122"/>
                 <a:cs typeface="Calibri" pitchFamily="34" charset="-120"/>
               </a:rPr>
-              <a:t>Competency assessment is required (initially and at defined intervals) and was not documented — a citable deficiency.</a:t>
+              <a:t>Referring a PT sample to another laboratory is a serious regulatory violation, even if well-intentioned.</a:t>
             </a:r>
             <a:endParaRPr lang="en-US" sz="1400" dirty="0"/>
           </a:p>
@@ -5154,7 +5862,7 @@
                 <a:ea typeface="Calibri" pitchFamily="34" charset="-122"/>
                 <a:cs typeface="Calibri" pitchFamily="34" charset="-120"/>
               </a:rPr>
-              <a:t>The six elements must be assessed and recorded.</a:t>
+              <a:t>PT must be handled exactly like a patient sample and not shared.</a:t>
             </a:r>
             <a:endParaRPr lang="en-US" sz="1400" dirty="0"/>
           </a:p>
@@ -5175,7 +5883,7 @@
                 <a:ea typeface="Calibri" pitchFamily="34" charset="-122"/>
                 <a:cs typeface="Calibri" pitchFamily="34" charset="-120"/>
               </a:rPr>
-              <a:t>Training is not a substitute for ongoing competency assessment.</a:t>
+              <a:t>Penalties can include loss of certification.</a:t>
             </a:r>
             <a:endParaRPr lang="en-US" sz="1400" dirty="0"/>
           </a:p>
@@ -5196,7 +5904,7 @@
                 <a:ea typeface="Calibri" pitchFamily="34" charset="-122"/>
                 <a:cs typeface="Calibri" pitchFamily="34" charset="-120"/>
               </a:rPr>
-              <a:t>Corrective action: assess now, document, and build a compliant schedule.</a:t>
+              <a:t>Educate staff on PT rules.</a:t>
             </a:r>
             <a:endParaRPr lang="en-US" sz="1400" dirty="0"/>
           </a:p>
@@ -5306,7 +6014,7 @@
                 <a:ea typeface="Calibri" pitchFamily="34" charset="-122"/>
                 <a:cs typeface="Calibri" pitchFamily="34" charset="-120"/>
               </a:rPr>
-              <a:t>Training shows initial capability; documented competency assessment (six elements, at required intervals) shows it is maintained.</a:t>
+              <a:t>Never refer or discuss proficiency-testing samples — PT referral is among the most serious CLIA violations.</a:t>
             </a:r>
             <a:endParaRPr lang="en-US" sz="1350" dirty="0"/>
           </a:p>
@@ -5483,7 +6191,7 @@
                 <a:ea typeface="Calibri" pitchFamily="34" charset="-122"/>
                 <a:cs typeface="Calibri" pitchFamily="34" charset="-120"/>
               </a:rPr>
-              <a:t>LAB MANAGEMENT &amp; QUALITY   ·   BOARD REVIEW  ·  Q1</a:t>
+              <a:t>LAB MANAGEMENT &amp; QUALITY   ·   CASE 2</a:t>
             </a:r>
             <a:endParaRPr lang="en-US" sz="1100" dirty="0"/>
           </a:p>
@@ -5514,7 +6222,7 @@
               <a:buNone/>
             </a:pPr>
             <a:r>
-              <a:rPr lang="en-US" sz="2600" b="1" dirty="0">
+              <a:rPr lang="en-US" sz="3000" b="1" dirty="0">
                 <a:solidFill>
                   <a:srgbClr val="0E3A5F"/>
                 </a:solidFill>
@@ -5522,190 +6230,26 @@
                 <a:ea typeface="Calibri" pitchFamily="34" charset="-122"/>
                 <a:cs typeface="Calibri" pitchFamily="34" charset="-120"/>
               </a:rPr>
-              <a:t>Board-Style Review</a:t>
-            </a:r>
-            <a:endParaRPr lang="en-US" sz="2600" dirty="0"/>
-          </a:p>
-        </p:txBody>
-      </p:sp>
-      <p:sp>
-        <p:nvSpPr>
-          <p:cNvPr id="4" name="Text 2"/>
-          <p:cNvSpPr/>
-          <p:nvPr/>
-        </p:nvSpPr>
-        <p:spPr>
-          <a:xfrm>
-            <a:off x="566928" y="1417320"/>
-            <a:ext cx="11057839" cy="914400"/>
-          </a:xfrm>
-          <a:prstGeom prst="rect">
-            <a:avLst/>
-          </a:prstGeom>
-          <a:noFill/>
-          <a:ln/>
-        </p:spPr>
-        <p:txBody>
-          <a:bodyPr wrap="square" lIns="0" tIns="0" rIns="0" bIns="0" rtlCol="0" anchor="t"/>
-          <a:lstStyle/>
-          <a:p>
-            <a:pPr algn="l" indent="0" marL="0">
-              <a:lnSpc>
-                <a:spcPct val="105000"/>
-              </a:lnSpc>
-              <a:buNone/>
-            </a:pPr>
-            <a:r>
-              <a:rPr lang="en-US" sz="1450" b="1" dirty="0">
-                <a:solidFill>
-                  <a:srgbClr val="1B2A38"/>
-                </a:solidFill>
-                <a:latin typeface="Calibri" pitchFamily="34" charset="0"/>
-                <a:ea typeface="Calibri" pitchFamily="34" charset="-122"/>
-                <a:cs typeface="Calibri" pitchFamily="34" charset="-120"/>
-              </a:rPr>
-              <a:t>A laboratory-developed test (LDT) is classified as:</a:t>
-            </a:r>
-            <a:endParaRPr lang="en-US" sz="1450" dirty="0"/>
-          </a:p>
-        </p:txBody>
-      </p:sp>
-      <p:sp>
-        <p:nvSpPr>
-          <p:cNvPr id="5" name="Text 3"/>
-          <p:cNvSpPr/>
-          <p:nvPr/>
-        </p:nvSpPr>
-        <p:spPr>
-          <a:xfrm>
-            <a:off x="658368" y="2395728"/>
-            <a:ext cx="6192390" cy="3017520"/>
-          </a:xfrm>
-          <a:prstGeom prst="rect">
-            <a:avLst/>
-          </a:prstGeom>
-          <a:noFill/>
-          <a:ln/>
-        </p:spPr>
-        <p:txBody>
-          <a:bodyPr wrap="square" lIns="0" tIns="0" rIns="0" bIns="0" rtlCol="0" anchor="t"/>
-          <a:lstStyle/>
-          <a:p>
-            <a:pPr algn="l" indent="0" marL="0">
-              <a:spcAft>
-                <a:spcPts val="600"/>
-              </a:spcAft>
-              <a:buNone/>
-            </a:pPr>
-            <a:r>
-              <a:rPr lang="en-US" sz="1350" dirty="0">
-                <a:solidFill>
-                  <a:srgbClr val="33444F"/>
-                </a:solidFill>
-                <a:latin typeface="Calibri" pitchFamily="34" charset="0"/>
-                <a:ea typeface="Calibri" pitchFamily="34" charset="-122"/>
-                <a:cs typeface="Calibri" pitchFamily="34" charset="-120"/>
-              </a:rPr>
-              <a:t>A. Waived</a:t>
-            </a:r>
-            <a:endParaRPr lang="en-US" sz="1350" dirty="0"/>
-          </a:p>
-          <a:p>
-            <a:pPr algn="l" indent="0" marL="0">
-              <a:spcAft>
-                <a:spcPts val="600"/>
-              </a:spcAft>
-              <a:buNone/>
-            </a:pPr>
-            <a:r>
-              <a:rPr lang="en-US" sz="1350" dirty="0">
-                <a:solidFill>
-                  <a:srgbClr val="33444F"/>
-                </a:solidFill>
-                <a:latin typeface="Calibri" pitchFamily="34" charset="0"/>
-                <a:ea typeface="Calibri" pitchFamily="34" charset="-122"/>
-                <a:cs typeface="Calibri" pitchFamily="34" charset="-120"/>
-              </a:rPr>
-              <a:t>B. Moderate complexity automatically</a:t>
-            </a:r>
-            <a:endParaRPr lang="en-US" sz="1350" dirty="0"/>
-          </a:p>
-          <a:p>
-            <a:pPr algn="l" indent="0" marL="0">
-              <a:spcAft>
-                <a:spcPts val="600"/>
-              </a:spcAft>
-              <a:buNone/>
-            </a:pPr>
-            <a:r>
-              <a:rPr lang="en-US" sz="1350" b="1" dirty="0">
-                <a:solidFill>
-                  <a:srgbClr val="2C3A41"/>
-                </a:solidFill>
-                <a:latin typeface="Calibri" pitchFamily="34" charset="0"/>
-                <a:ea typeface="Calibri" pitchFamily="34" charset="-122"/>
-                <a:cs typeface="Calibri" pitchFamily="34" charset="-120"/>
-              </a:rPr>
-              <a:t>C. High complexity, requiring full validation</a:t>
-            </a:r>
-            <a:endParaRPr lang="en-US" sz="1350" dirty="0"/>
-          </a:p>
-          <a:p>
-            <a:pPr algn="l" indent="0" marL="0">
-              <a:spcAft>
-                <a:spcPts val="600"/>
-              </a:spcAft>
-              <a:buNone/>
-            </a:pPr>
-            <a:r>
-              <a:rPr lang="en-US" sz="1350" dirty="0">
-                <a:solidFill>
-                  <a:srgbClr val="33444F"/>
-                </a:solidFill>
-                <a:latin typeface="Calibri" pitchFamily="34" charset="0"/>
-                <a:ea typeface="Calibri" pitchFamily="34" charset="-122"/>
-                <a:cs typeface="Calibri" pitchFamily="34" charset="-120"/>
-              </a:rPr>
-              <a:t>D. Exempt from CLIA</a:t>
-            </a:r>
-            <a:endParaRPr lang="en-US" sz="1350" dirty="0"/>
-          </a:p>
-          <a:p>
-            <a:pPr algn="l" indent="0" marL="0">
-              <a:spcAft>
-                <a:spcPts val="600"/>
-              </a:spcAft>
-              <a:buNone/>
-            </a:pPr>
-            <a:r>
-              <a:rPr lang="en-US" sz="1350" dirty="0">
-                <a:solidFill>
-                  <a:srgbClr val="33444F"/>
-                </a:solidFill>
-                <a:latin typeface="Calibri" pitchFamily="34" charset="0"/>
-                <a:ea typeface="Calibri" pitchFamily="34" charset="-122"/>
-                <a:cs typeface="Calibri" pitchFamily="34" charset="-120"/>
-              </a:rPr>
-              <a:t>E. Verification only</a:t>
-            </a:r>
-            <a:endParaRPr lang="en-US" sz="1350" dirty="0"/>
-          </a:p>
-        </p:txBody>
-      </p:sp>
-      <p:sp>
-        <p:nvSpPr>
-          <p:cNvPr id="6" name="Shape 4"/>
-          <p:cNvSpPr/>
-          <p:nvPr/>
-        </p:nvSpPr>
-        <p:spPr>
-          <a:xfrm>
-            <a:off x="7201632" y="2395728"/>
-            <a:ext cx="4423136" cy="3246120"/>
+              <a:t>Case 2</a:t>
+            </a:r>
+            <a:endParaRPr lang="en-US" sz="3000" dirty="0"/>
+          </a:p>
+        </p:txBody>
+      </p:sp>
+      <p:sp>
+        <p:nvSpPr>
+          <p:cNvPr id="4" name="Shape 2"/>
+          <p:cNvSpPr/>
+          <p:nvPr/>
+        </p:nvSpPr>
+        <p:spPr>
+          <a:xfrm>
+            <a:off x="566928" y="1517904"/>
+            <a:ext cx="11057839" cy="2788920"/>
           </a:xfrm>
           <a:prstGeom prst="roundRect">
             <a:avLst>
-              <a:gd name="adj" fmla="val 2535"/>
+              <a:gd name="adj" fmla="val 2951"/>
             </a:avLst>
           </a:prstGeom>
           <a:solidFill>
@@ -5723,14 +6267,14 @@
       </p:sp>
       <p:sp>
         <p:nvSpPr>
-          <p:cNvPr id="7" name="Text 5"/>
-          <p:cNvSpPr/>
-          <p:nvPr/>
-        </p:nvSpPr>
-        <p:spPr>
-          <a:xfrm>
-            <a:off x="7439376" y="2578608"/>
-            <a:ext cx="3965936" cy="457200"/>
+          <p:cNvPr id="5" name="Text 3"/>
+          <p:cNvSpPr/>
+          <p:nvPr/>
+        </p:nvSpPr>
+        <p:spPr>
+          <a:xfrm>
+            <a:off x="841248" y="1700784"/>
+            <a:ext cx="5486400" cy="292608"/>
           </a:xfrm>
           <a:prstGeom prst="rect">
             <a:avLst/>
@@ -5746,7 +6290,7 @@
               <a:buNone/>
             </a:pPr>
             <a:r>
-              <a:rPr lang="en-US" sz="1500" b="1" dirty="0">
+              <a:rPr lang="en-US" sz="1100" b="1" spc="150" kern="0" dirty="0">
                 <a:solidFill>
                   <a:srgbClr val="455A64"/>
                 </a:solidFill>
@@ -5754,36 +6298,22 @@
                 <a:ea typeface="Calibri" pitchFamily="34" charset="-122"/>
                 <a:cs typeface="Calibri" pitchFamily="34" charset="-120"/>
               </a:rPr>
-              <a:t>ANSWER  </a:t>
-            </a:r>
-            <a:pPr indent="0" marL="0">
-              <a:buNone/>
-            </a:pPr>
-            <a:r>
-              <a:rPr lang="en-US" sz="1500" b="1" dirty="0">
-                <a:solidFill>
-                  <a:srgbClr val="1B2A38"/>
-                </a:solidFill>
-                <a:latin typeface="Calibri" pitchFamily="34" charset="0"/>
-                <a:ea typeface="Calibri" pitchFamily="34" charset="-122"/>
-                <a:cs typeface="Calibri" pitchFamily="34" charset="-120"/>
-              </a:rPr>
-              <a:t>C — High complexity; full validation</a:t>
-            </a:r>
-            <a:endParaRPr lang="en-US" sz="1500" dirty="0"/>
-          </a:p>
-        </p:txBody>
-      </p:sp>
-      <p:sp>
-        <p:nvSpPr>
-          <p:cNvPr id="8" name="Text 6"/>
-          <p:cNvSpPr/>
-          <p:nvPr/>
-        </p:nvSpPr>
-        <p:spPr>
-          <a:xfrm>
-            <a:off x="7439376" y="3127248"/>
-            <a:ext cx="3947648" cy="2377440"/>
+              <a:t>CLINICAL VIGNETTE</a:t>
+            </a:r>
+            <a:endParaRPr lang="en-US" sz="1100" dirty="0"/>
+          </a:p>
+        </p:txBody>
+      </p:sp>
+      <p:sp>
+        <p:nvSpPr>
+          <p:cNvPr id="6" name="Text 4"/>
+          <p:cNvSpPr/>
+          <p:nvPr/>
+        </p:nvSpPr>
+        <p:spPr>
+          <a:xfrm>
+            <a:off x="841248" y="2029968"/>
+            <a:ext cx="10509199" cy="2148840"/>
           </a:xfrm>
           <a:prstGeom prst="rect">
             <a:avLst/>
@@ -5802,7 +6332,7 @@
               <a:buNone/>
             </a:pPr>
             <a:r>
-              <a:rPr lang="en-US" sz="1250" dirty="0">
+              <a:rPr lang="en-US" sz="1450" dirty="0">
                 <a:solidFill>
                   <a:srgbClr val="33444F"/>
                 </a:solidFill>
@@ -5810,15 +6340,122 @@
                 <a:ea typeface="Calibri" pitchFamily="34" charset="-122"/>
                 <a:cs typeface="Calibri" pitchFamily="34" charset="-120"/>
               </a:rPr>
-              <a:t>LDTs (and modified FDA-cleared assays) are high complexity and require full validation of performance characteristics before clinical use.</a:t>
-            </a:r>
-            <a:endParaRPr lang="en-US" sz="1250" dirty="0"/>
+              <a:t>A laboratory modifies an FDA-cleared assay to use a different specimen type.</a:t>
+            </a:r>
+            <a:endParaRPr lang="en-US" sz="1450" dirty="0"/>
+          </a:p>
+        </p:txBody>
+      </p:sp>
+      <p:sp>
+        <p:nvSpPr>
+          <p:cNvPr id="7" name="Shape 5"/>
+          <p:cNvSpPr/>
+          <p:nvPr/>
+        </p:nvSpPr>
+        <p:spPr>
+          <a:xfrm>
+            <a:off x="566928" y="4553712"/>
+            <a:ext cx="11057839" cy="1325880"/>
+          </a:xfrm>
+          <a:prstGeom prst="roundRect">
+            <a:avLst>
+              <a:gd name="adj" fmla="val 6207"/>
+            </a:avLst>
+          </a:prstGeom>
+          <a:solidFill>
+            <a:srgbClr val="0E3A5F"/>
+          </a:solidFill>
+          <a:ln/>
+          <a:effectLst>
+            <a:outerShdw sx="100000" sy="100000" kx="0" ky="0" algn="bl" rotWithShape="0" blurRad="88900" dist="25400" dir="5400000">
+              <a:srgbClr val="22303C">
+                <a:alpha val="12000"/>
+              </a:srgbClr>
+            </a:outerShdw>
+          </a:effectLst>
+        </p:spPr>
+      </p:sp>
+      <p:sp>
+        <p:nvSpPr>
+          <p:cNvPr id="8" name="Text 6"/>
+          <p:cNvSpPr/>
+          <p:nvPr/>
+        </p:nvSpPr>
+        <p:spPr>
+          <a:xfrm>
+            <a:off x="822960" y="4681728"/>
+            <a:ext cx="640080" cy="960120"/>
+          </a:xfrm>
+          <a:prstGeom prst="rect">
+            <a:avLst/>
+          </a:prstGeom>
+          <a:noFill/>
+          <a:ln/>
+        </p:spPr>
+        <p:txBody>
+          <a:bodyPr wrap="square" lIns="0" tIns="0" rIns="0" bIns="0" rtlCol="0" anchor="ctr"/>
+          <a:lstStyle/>
+          <a:p>
+            <a:pPr algn="ctr" indent="0" marL="0">
+              <a:buNone/>
+            </a:pPr>
+            <a:r>
+              <a:rPr lang="en-US" sz="4000" b="1" dirty="0">
+                <a:solidFill>
+                  <a:srgbClr val="455A64"/>
+                </a:solidFill>
+                <a:latin typeface="Calibri" pitchFamily="34" charset="0"/>
+                <a:ea typeface="Calibri" pitchFamily="34" charset="-122"/>
+                <a:cs typeface="Calibri" pitchFamily="34" charset="-120"/>
+              </a:rPr>
+              <a:t>?</a:t>
+            </a:r>
+            <a:endParaRPr lang="en-US" sz="4000" dirty="0"/>
           </a:p>
         </p:txBody>
       </p:sp>
       <p:sp>
         <p:nvSpPr>
           <p:cNvPr id="9" name="Text 7"/>
+          <p:cNvSpPr/>
+          <p:nvPr/>
+        </p:nvSpPr>
+        <p:spPr>
+          <a:xfrm>
+            <a:off x="1618488" y="4553712"/>
+            <a:ext cx="9686239" cy="1325880"/>
+          </a:xfrm>
+          <a:prstGeom prst="rect">
+            <a:avLst/>
+          </a:prstGeom>
+          <a:noFill/>
+          <a:ln/>
+        </p:spPr>
+        <p:txBody>
+          <a:bodyPr wrap="square" lIns="0" tIns="0" rIns="0" bIns="0" rtlCol="0" anchor="ctr"/>
+          <a:lstStyle/>
+          <a:p>
+            <a:pPr algn="l" indent="0" marL="0">
+              <a:buNone/>
+            </a:pPr>
+            <a:r>
+              <a:rPr lang="en-US" sz="1500" b="1" dirty="0">
+                <a:solidFill>
+                  <a:srgbClr val="FFFFFF"/>
+                </a:solidFill>
+                <a:latin typeface="Calibri" pitchFamily="34" charset="0"/>
+                <a:ea typeface="Calibri" pitchFamily="34" charset="-122"/>
+                <a:cs typeface="Calibri" pitchFamily="34" charset="-120"/>
+              </a:rPr>
+              <a:t>How does this change the regulatory requirements?</a:t>
+            </a:r>
+            <a:endParaRPr lang="en-US" sz="1500" dirty="0"/>
+          </a:p>
+        </p:txBody>
+      </p:sp>
+      <p:sp>
+        <p:nvSpPr>
+          <p:cNvPr id="10" name="Text 8"/>
           <p:cNvSpPr/>
           <p:nvPr/>
         </p:nvSpPr>
@@ -5857,7 +6494,7 @@
       </p:sp>
       <p:sp>
         <p:nvSpPr>
-          <p:cNvPr id="10" name="Text 8"/>
+          <p:cNvPr id="11" name="Text 9"/>
           <p:cNvSpPr/>
           <p:nvPr/>
         </p:nvSpPr>
@@ -5987,7 +6624,7 @@
                 <a:ea typeface="Calibri" pitchFamily="34" charset="-122"/>
                 <a:cs typeface="Calibri" pitchFamily="34" charset="-120"/>
               </a:rPr>
-              <a:t>LAB MANAGEMENT &amp; QUALITY   ·   BOARD REVIEW  ·  Q2</a:t>
+              <a:t>LAB MANAGEMENT &amp; QUALITY   ·   CASE 2  ·  RESOLUTION</a:t>
             </a:r>
             <a:endParaRPr lang="en-US" sz="1100" dirty="0"/>
           </a:p>
@@ -6018,7 +6655,7 @@
               <a:buNone/>
             </a:pPr>
             <a:r>
-              <a:rPr lang="en-US" sz="2600" b="1" dirty="0">
+              <a:rPr lang="en-US" sz="3000" b="1" dirty="0">
                 <a:solidFill>
                   <a:srgbClr val="0E3A5F"/>
                 </a:solidFill>
@@ -6026,9 +6663,9 @@
                 <a:ea typeface="Calibri" pitchFamily="34" charset="-122"/>
                 <a:cs typeface="Calibri" pitchFamily="34" charset="-120"/>
               </a:rPr>
-              <a:t>Board-Style Review</a:t>
-            </a:r>
-            <a:endParaRPr lang="en-US" sz="2600" dirty="0"/>
+              <a:t>Case 2: Modified FDA-Cleared Test</a:t>
+            </a:r>
+            <a:endParaRPr lang="en-US" sz="3000" dirty="0"/>
           </a:p>
         </p:txBody>
       </p:sp>
@@ -6040,8 +6677,8 @@
         </p:nvSpPr>
         <p:spPr>
           <a:xfrm>
-            <a:off x="566928" y="1417320"/>
-            <a:ext cx="11057839" cy="914400"/>
+            <a:off x="566928" y="1554480"/>
+            <a:ext cx="6413547" cy="4023360"/>
           </a:xfrm>
           <a:prstGeom prst="rect">
             <a:avLst/>
@@ -6053,14 +6690,15 @@
           <a:bodyPr wrap="square" lIns="0" tIns="0" rIns="0" bIns="0" rtlCol="0" anchor="t"/>
           <a:lstStyle/>
           <a:p>
-            <a:pPr algn="l" indent="0" marL="0">
-              <a:lnSpc>
-                <a:spcPct val="105000"/>
-              </a:lnSpc>
-              <a:buNone/>
-            </a:pPr>
-            <a:r>
-              <a:rPr lang="en-US" sz="1450" b="1" dirty="0">
+            <a:pPr algn="l" marL="177800" indent="-177800">
+              <a:spcAft>
+                <a:spcPts val="900"/>
+              </a:spcAft>
+              <a:buSzPct val="100000"/>
+              <a:buChar char="•"/>
+            </a:pPr>
+            <a:r>
+              <a:rPr lang="en-US" sz="1400" b="1" dirty="0">
                 <a:solidFill>
                   <a:srgbClr val="1B2A38"/>
                 </a:solidFill>
@@ -6068,41 +6706,20 @@
                 <a:ea typeface="Calibri" pitchFamily="34" charset="-122"/>
                 <a:cs typeface="Calibri" pitchFamily="34" charset="-120"/>
               </a:rPr>
-              <a:t>Which is NOT one of the six elements of competency assessment?</a:t>
-            </a:r>
-            <a:endParaRPr lang="en-US" sz="1450" dirty="0"/>
-          </a:p>
-        </p:txBody>
-      </p:sp>
-      <p:sp>
-        <p:nvSpPr>
-          <p:cNvPr id="5" name="Text 3"/>
-          <p:cNvSpPr/>
-          <p:nvPr/>
-        </p:nvSpPr>
-        <p:spPr>
-          <a:xfrm>
-            <a:off x="658368" y="2395728"/>
-            <a:ext cx="6192390" cy="3017520"/>
-          </a:xfrm>
-          <a:prstGeom prst="rect">
-            <a:avLst/>
-          </a:prstGeom>
-          <a:noFill/>
-          <a:ln/>
-        </p:spPr>
-        <p:txBody>
-          <a:bodyPr wrap="square" lIns="0" tIns="0" rIns="0" bIns="0" rtlCol="0" anchor="t"/>
-          <a:lstStyle/>
-          <a:p>
-            <a:pPr algn="l" indent="0" marL="0">
+              <a:t>Modifying an FDA-cleared assay makes it high complexity and requires full validation.</a:t>
+            </a:r>
+            <a:endParaRPr lang="en-US" sz="1400" dirty="0"/>
+          </a:p>
+          <a:p>
+            <a:pPr algn="l" marL="177800" indent="-177800">
               <a:spcAft>
-                <a:spcPts val="600"/>
+                <a:spcPts val="900"/>
               </a:spcAft>
-              <a:buNone/>
-            </a:pPr>
-            <a:r>
-              <a:rPr lang="en-US" sz="1350" dirty="0">
+              <a:buSzPct val="100000"/>
+              <a:buChar char="•"/>
+            </a:pPr>
+            <a:r>
+              <a:rPr lang="en-US" sz="1400" dirty="0">
                 <a:solidFill>
                   <a:srgbClr val="33444F"/>
                 </a:solidFill>
@@ -6110,19 +6727,20 @@
                 <a:ea typeface="Calibri" pitchFamily="34" charset="-122"/>
                 <a:cs typeface="Calibri" pitchFamily="34" charset="-120"/>
               </a:rPr>
-              <a:t>A. Direct observation of test performance</a:t>
-            </a:r>
-            <a:endParaRPr lang="en-US" sz="1350" dirty="0"/>
-          </a:p>
-          <a:p>
-            <a:pPr algn="l" indent="0" marL="0">
+              <a:t>The lab assumes responsibility for performance characteristics.</a:t>
+            </a:r>
+            <a:endParaRPr lang="en-US" sz="1400" dirty="0"/>
+          </a:p>
+          <a:p>
+            <a:pPr algn="l" marL="177800" indent="-177800">
               <a:spcAft>
-                <a:spcPts val="600"/>
+                <a:spcPts val="900"/>
               </a:spcAft>
-              <a:buNone/>
-            </a:pPr>
-            <a:r>
-              <a:rPr lang="en-US" sz="1350" dirty="0">
+              <a:buSzPct val="100000"/>
+              <a:buChar char="•"/>
+            </a:pPr>
+            <a:r>
+              <a:rPr lang="en-US" sz="1400" dirty="0">
                 <a:solidFill>
                   <a:srgbClr val="33444F"/>
                 </a:solidFill>
@@ -6130,19 +6748,20 @@
                 <a:ea typeface="Calibri" pitchFamily="34" charset="-122"/>
                 <a:cs typeface="Calibri" pitchFamily="34" charset="-120"/>
               </a:rPr>
-              <a:t>B. Review of QC and PT records</a:t>
-            </a:r>
-            <a:endParaRPr lang="en-US" sz="1350" dirty="0"/>
-          </a:p>
-          <a:p>
-            <a:pPr algn="l" indent="0" marL="0">
+              <a:t>Personnel and QC requirements increase.</a:t>
+            </a:r>
+            <a:endParaRPr lang="en-US" sz="1400" dirty="0"/>
+          </a:p>
+          <a:p>
+            <a:pPr algn="l" marL="177800" indent="-177800">
               <a:spcAft>
-                <a:spcPts val="600"/>
+                <a:spcPts val="900"/>
               </a:spcAft>
-              <a:buNone/>
-            </a:pPr>
-            <a:r>
-              <a:rPr lang="en-US" sz="1350" dirty="0">
+              <a:buSzPct val="100000"/>
+              <a:buChar char="•"/>
+            </a:pPr>
+            <a:r>
+              <a:rPr lang="en-US" sz="1400" dirty="0">
                 <a:solidFill>
                   <a:srgbClr val="33444F"/>
                 </a:solidFill>
@@ -6150,66 +6769,26 @@
                 <a:ea typeface="Calibri" pitchFamily="34" charset="-122"/>
                 <a:cs typeface="Calibri" pitchFamily="34" charset="-120"/>
               </a:rPr>
-              <a:t>C. Assessment of problem-solving skills</a:t>
-            </a:r>
-            <a:endParaRPr lang="en-US" sz="1350" dirty="0"/>
-          </a:p>
-          <a:p>
-            <a:pPr algn="l" indent="0" marL="0">
-              <a:spcAft>
-                <a:spcPts val="600"/>
-              </a:spcAft>
-              <a:buNone/>
-            </a:pPr>
-            <a:r>
-              <a:rPr lang="en-US" sz="1350" b="1" dirty="0">
-                <a:solidFill>
-                  <a:srgbClr val="2C3A41"/>
-                </a:solidFill>
-                <a:latin typeface="Calibri" pitchFamily="34" charset="0"/>
-                <a:ea typeface="Calibri" pitchFamily="34" charset="-122"/>
-                <a:cs typeface="Calibri" pitchFamily="34" charset="-120"/>
-              </a:rPr>
-              <a:t>D. Annual salary review</a:t>
-            </a:r>
-            <a:endParaRPr lang="en-US" sz="1350" dirty="0"/>
-          </a:p>
-          <a:p>
-            <a:pPr algn="l" indent="0" marL="0">
-              <a:spcAft>
-                <a:spcPts val="600"/>
-              </a:spcAft>
-              <a:buNone/>
-            </a:pPr>
-            <a:r>
-              <a:rPr lang="en-US" sz="1350" dirty="0">
-                <a:solidFill>
-                  <a:srgbClr val="33444F"/>
-                </a:solidFill>
-                <a:latin typeface="Calibri" pitchFamily="34" charset="0"/>
-                <a:ea typeface="Calibri" pitchFamily="34" charset="-122"/>
-                <a:cs typeface="Calibri" pitchFamily="34" charset="-120"/>
-              </a:rPr>
-              <a:t>E. Direct observation of instrument maintenance</a:t>
-            </a:r>
-            <a:endParaRPr lang="en-US" sz="1350" dirty="0"/>
-          </a:p>
-        </p:txBody>
-      </p:sp>
-      <p:sp>
-        <p:nvSpPr>
-          <p:cNvPr id="6" name="Shape 4"/>
-          <p:cNvSpPr/>
-          <p:nvPr/>
-        </p:nvSpPr>
-        <p:spPr>
-          <a:xfrm>
-            <a:off x="7201632" y="2395728"/>
-            <a:ext cx="4423136" cy="3246120"/>
+              <a:t>Document the validation thoroughly.</a:t>
+            </a:r>
+            <a:endParaRPr lang="en-US" sz="1400" dirty="0"/>
+          </a:p>
+        </p:txBody>
+      </p:sp>
+      <p:sp>
+        <p:nvSpPr>
+          <p:cNvPr id="5" name="Shape 3"/>
+          <p:cNvSpPr/>
+          <p:nvPr/>
+        </p:nvSpPr>
+        <p:spPr>
+          <a:xfrm>
+            <a:off x="7422788" y="1554480"/>
+            <a:ext cx="4201979" cy="3977640"/>
           </a:xfrm>
           <a:prstGeom prst="roundRect">
             <a:avLst>
-              <a:gd name="adj" fmla="val 2535"/>
+              <a:gd name="adj" fmla="val 2069"/>
             </a:avLst>
           </a:prstGeom>
           <a:solidFill>
@@ -6227,67 +6806,53 @@
       </p:sp>
       <p:sp>
         <p:nvSpPr>
+          <p:cNvPr id="6" name="Text 4"/>
+          <p:cNvSpPr/>
+          <p:nvPr/>
+        </p:nvSpPr>
+        <p:spPr>
+          <a:xfrm>
+            <a:off x="7660532" y="1755648"/>
+            <a:ext cx="3744779" cy="310896"/>
+          </a:xfrm>
+          <a:prstGeom prst="rect">
+            <a:avLst/>
+          </a:prstGeom>
+          <a:noFill/>
+          <a:ln/>
+        </p:spPr>
+        <p:txBody>
+          <a:bodyPr wrap="square" lIns="0" tIns="0" rIns="0" bIns="0" rtlCol="0" anchor="ctr"/>
+          <a:lstStyle/>
+          <a:p>
+            <a:pPr indent="0" marL="0">
+              <a:buNone/>
+            </a:pPr>
+            <a:r>
+              <a:rPr lang="en-US" sz="1100" b="1" spc="140" kern="0" dirty="0">
+                <a:solidFill>
+                  <a:srgbClr val="455A64"/>
+                </a:solidFill>
+                <a:latin typeface="Calibri" pitchFamily="34" charset="0"/>
+                <a:ea typeface="Calibri" pitchFamily="34" charset="-122"/>
+                <a:cs typeface="Calibri" pitchFamily="34" charset="-120"/>
+              </a:rPr>
+              <a:t>TEACHING POINT</a:t>
+            </a:r>
+            <a:endParaRPr lang="en-US" sz="1100" dirty="0"/>
+          </a:p>
+        </p:txBody>
+      </p:sp>
+      <p:sp>
+        <p:nvSpPr>
           <p:cNvPr id="7" name="Text 5"/>
           <p:cNvSpPr/>
           <p:nvPr/>
         </p:nvSpPr>
         <p:spPr>
           <a:xfrm>
-            <a:off x="7439376" y="2578608"/>
-            <a:ext cx="3965936" cy="457200"/>
-          </a:xfrm>
-          <a:prstGeom prst="rect">
-            <a:avLst/>
-          </a:prstGeom>
-          <a:noFill/>
-          <a:ln/>
-        </p:spPr>
-        <p:txBody>
-          <a:bodyPr wrap="square" lIns="0" tIns="0" rIns="0" bIns="0" rtlCol="0" anchor="ctr"/>
-          <a:lstStyle/>
-          <a:p>
-            <a:pPr indent="0" marL="0">
-              <a:buNone/>
-            </a:pPr>
-            <a:r>
-              <a:rPr lang="en-US" sz="1500" b="1" dirty="0">
-                <a:solidFill>
-                  <a:srgbClr val="455A64"/>
-                </a:solidFill>
-                <a:latin typeface="Calibri" pitchFamily="34" charset="0"/>
-                <a:ea typeface="Calibri" pitchFamily="34" charset="-122"/>
-                <a:cs typeface="Calibri" pitchFamily="34" charset="-120"/>
-              </a:rPr>
-              <a:t>ANSWER  </a:t>
-            </a:r>
-            <a:pPr indent="0" marL="0">
-              <a:buNone/>
-            </a:pPr>
-            <a:r>
-              <a:rPr lang="en-US" sz="1500" b="1" dirty="0">
-                <a:solidFill>
-                  <a:srgbClr val="1B2A38"/>
-                </a:solidFill>
-                <a:latin typeface="Calibri" pitchFamily="34" charset="0"/>
-                <a:ea typeface="Calibri" pitchFamily="34" charset="-122"/>
-                <a:cs typeface="Calibri" pitchFamily="34" charset="-120"/>
-              </a:rPr>
-              <a:t>D — Annual salary review</a:t>
-            </a:r>
-            <a:endParaRPr lang="en-US" sz="1500" dirty="0"/>
-          </a:p>
-        </p:txBody>
-      </p:sp>
-      <p:sp>
-        <p:nvSpPr>
-          <p:cNvPr id="8" name="Text 6"/>
-          <p:cNvSpPr/>
-          <p:nvPr/>
-        </p:nvSpPr>
-        <p:spPr>
-          <a:xfrm>
-            <a:off x="7439376" y="3127248"/>
-            <a:ext cx="3947648" cy="2377440"/>
+            <a:off x="7660532" y="2121408"/>
+            <a:ext cx="3726491" cy="3291840"/>
           </a:xfrm>
           <a:prstGeom prst="rect">
             <a:avLst/>
@@ -6301,12 +6866,12 @@
           <a:p>
             <a:pPr algn="l" indent="0" marL="0">
               <a:lnSpc>
-                <a:spcPct val="108000"/>
+                <a:spcPct val="110000"/>
               </a:lnSpc>
               <a:buNone/>
             </a:pPr>
             <a:r>
-              <a:rPr lang="en-US" sz="1250" dirty="0">
+              <a:rPr lang="en-US" sz="1350" dirty="0">
                 <a:solidFill>
                   <a:srgbClr val="33444F"/>
                 </a:solidFill>
@@ -6314,15 +6879,15 @@
                 <a:ea typeface="Calibri" pitchFamily="34" charset="-122"/>
                 <a:cs typeface="Calibri" pitchFamily="34" charset="-120"/>
               </a:rPr>
-              <a:t>The six elements concern test performance, recording, QC/PT review, maintenance observation, blind sample testing, and problem-solving — not compensation.</a:t>
-            </a:r>
-            <a:endParaRPr lang="en-US" sz="1250" dirty="0"/>
-          </a:p>
-        </p:txBody>
-      </p:sp>
-      <p:sp>
-        <p:nvSpPr>
-          <p:cNvPr id="9" name="Text 7"/>
+              <a:t>Any modification of an FDA-cleared test converts it to a high-complexity, laboratory-validated assay with full requirements.</a:t>
+            </a:r>
+            <a:endParaRPr lang="en-US" sz="1350" dirty="0"/>
+          </a:p>
+        </p:txBody>
+      </p:sp>
+      <p:sp>
+        <p:nvSpPr>
+          <p:cNvPr id="8" name="Text 6"/>
           <p:cNvSpPr/>
           <p:nvPr/>
         </p:nvSpPr>
@@ -6361,7 +6926,7 @@
       </p:sp>
       <p:sp>
         <p:nvSpPr>
-          <p:cNvPr id="10" name="Text 8"/>
+          <p:cNvPr id="9" name="Text 7"/>
           <p:cNvSpPr/>
           <p:nvPr/>
         </p:nvSpPr>
@@ -6491,7 +7056,7 @@
                 <a:ea typeface="Calibri" pitchFamily="34" charset="-122"/>
                 <a:cs typeface="Calibri" pitchFamily="34" charset="-120"/>
               </a:rPr>
-              <a:t>LAB MANAGEMENT &amp; QUALITY   ·   BOARD REVIEW  ·  Q3</a:t>
+              <a:t>LAB MANAGEMENT &amp; QUALITY   ·   CASE 3</a:t>
             </a:r>
             <a:endParaRPr lang="en-US" sz="1100" dirty="0"/>
           </a:p>
@@ -6522,7 +7087,7 @@
               <a:buNone/>
             </a:pPr>
             <a:r>
-              <a:rPr lang="en-US" sz="2600" b="1" dirty="0">
+              <a:rPr lang="en-US" sz="3000" b="1" dirty="0">
                 <a:solidFill>
                   <a:srgbClr val="0E3A5F"/>
                 </a:solidFill>
@@ -6530,190 +7095,26 @@
                 <a:ea typeface="Calibri" pitchFamily="34" charset="-122"/>
                 <a:cs typeface="Calibri" pitchFamily="34" charset="-120"/>
               </a:rPr>
-              <a:t>Board-Style Review</a:t>
-            </a:r>
-            <a:endParaRPr lang="en-US" sz="2600" dirty="0"/>
-          </a:p>
-        </p:txBody>
-      </p:sp>
-      <p:sp>
-        <p:nvSpPr>
-          <p:cNvPr id="4" name="Text 2"/>
-          <p:cNvSpPr/>
-          <p:nvPr/>
-        </p:nvSpPr>
-        <p:spPr>
-          <a:xfrm>
-            <a:off x="566928" y="1417320"/>
-            <a:ext cx="11057839" cy="914400"/>
-          </a:xfrm>
-          <a:prstGeom prst="rect">
-            <a:avLst/>
-          </a:prstGeom>
-          <a:noFill/>
-          <a:ln/>
-        </p:spPr>
-        <p:txBody>
-          <a:bodyPr wrap="square" lIns="0" tIns="0" rIns="0" bIns="0" rtlCol="0" anchor="t"/>
-          <a:lstStyle/>
-          <a:p>
-            <a:pPr algn="l" indent="0" marL="0">
-              <a:lnSpc>
-                <a:spcPct val="105000"/>
-              </a:lnSpc>
-              <a:buNone/>
-            </a:pPr>
-            <a:r>
-              <a:rPr lang="en-US" sz="1450" b="1" dirty="0">
-                <a:solidFill>
-                  <a:srgbClr val="1B2A38"/>
-                </a:solidFill>
-                <a:latin typeface="Calibri" pitchFamily="34" charset="0"/>
-                <a:ea typeface="Calibri" pitchFamily="34" charset="-122"/>
-                <a:cs typeface="Calibri" pitchFamily="34" charset="-120"/>
-              </a:rPr>
-              <a:t>CLIA primarily functions as:</a:t>
-            </a:r>
-            <a:endParaRPr lang="en-US" sz="1450" dirty="0"/>
-          </a:p>
-        </p:txBody>
-      </p:sp>
-      <p:sp>
-        <p:nvSpPr>
-          <p:cNvPr id="5" name="Text 3"/>
-          <p:cNvSpPr/>
-          <p:nvPr/>
-        </p:nvSpPr>
-        <p:spPr>
-          <a:xfrm>
-            <a:off x="658368" y="2395728"/>
-            <a:ext cx="6192390" cy="3017520"/>
-          </a:xfrm>
-          <a:prstGeom prst="rect">
-            <a:avLst/>
-          </a:prstGeom>
-          <a:noFill/>
-          <a:ln/>
-        </p:spPr>
-        <p:txBody>
-          <a:bodyPr wrap="square" lIns="0" tIns="0" rIns="0" bIns="0" rtlCol="0" anchor="t"/>
-          <a:lstStyle/>
-          <a:p>
-            <a:pPr algn="l" indent="0" marL="0">
-              <a:spcAft>
-                <a:spcPts val="600"/>
-              </a:spcAft>
-              <a:buNone/>
-            </a:pPr>
-            <a:r>
-              <a:rPr lang="en-US" sz="1350" dirty="0">
-                <a:solidFill>
-                  <a:srgbClr val="33444F"/>
-                </a:solidFill>
-                <a:latin typeface="Calibri" pitchFamily="34" charset="0"/>
-                <a:ea typeface="Calibri" pitchFamily="34" charset="-122"/>
-                <a:cs typeface="Calibri" pitchFamily="34" charset="-120"/>
-              </a:rPr>
-              <a:t>A. A voluntary accreditation program</a:t>
-            </a:r>
-            <a:endParaRPr lang="en-US" sz="1350" dirty="0"/>
-          </a:p>
-          <a:p>
-            <a:pPr algn="l" indent="0" marL="0">
-              <a:spcAft>
-                <a:spcPts val="600"/>
-              </a:spcAft>
-              <a:buNone/>
-            </a:pPr>
-            <a:r>
-              <a:rPr lang="en-US" sz="1350" b="1" dirty="0">
-                <a:solidFill>
-                  <a:srgbClr val="2C3A41"/>
-                </a:solidFill>
-                <a:latin typeface="Calibri" pitchFamily="34" charset="0"/>
-                <a:ea typeface="Calibri" pitchFamily="34" charset="-122"/>
-                <a:cs typeface="Calibri" pitchFamily="34" charset="-120"/>
-              </a:rPr>
-              <a:t>B. The minimum federal regulatory standard for clinical testing</a:t>
-            </a:r>
-            <a:endParaRPr lang="en-US" sz="1350" dirty="0"/>
-          </a:p>
-          <a:p>
-            <a:pPr algn="l" indent="0" marL="0">
-              <a:spcAft>
-                <a:spcPts val="600"/>
-              </a:spcAft>
-              <a:buNone/>
-            </a:pPr>
-            <a:r>
-              <a:rPr lang="en-US" sz="1350" dirty="0">
-                <a:solidFill>
-                  <a:srgbClr val="33444F"/>
-                </a:solidFill>
-                <a:latin typeface="Calibri" pitchFamily="34" charset="0"/>
-                <a:ea typeface="Calibri" pitchFamily="34" charset="-122"/>
-                <a:cs typeface="Calibri" pitchFamily="34" charset="-120"/>
-              </a:rPr>
-              <a:t>C. A proficiency testing vendor</a:t>
-            </a:r>
-            <a:endParaRPr lang="en-US" sz="1350" dirty="0"/>
-          </a:p>
-          <a:p>
-            <a:pPr algn="l" indent="0" marL="0">
-              <a:spcAft>
-                <a:spcPts val="600"/>
-              </a:spcAft>
-              <a:buNone/>
-            </a:pPr>
-            <a:r>
-              <a:rPr lang="en-US" sz="1350" dirty="0">
-                <a:solidFill>
-                  <a:srgbClr val="33444F"/>
-                </a:solidFill>
-                <a:latin typeface="Calibri" pitchFamily="34" charset="0"/>
-                <a:ea typeface="Calibri" pitchFamily="34" charset="-122"/>
-                <a:cs typeface="Calibri" pitchFamily="34" charset="-120"/>
-              </a:rPr>
-              <a:t>D. A reimbursement system</a:t>
-            </a:r>
-            <a:endParaRPr lang="en-US" sz="1350" dirty="0"/>
-          </a:p>
-          <a:p>
-            <a:pPr algn="l" indent="0" marL="0">
-              <a:spcAft>
-                <a:spcPts val="600"/>
-              </a:spcAft>
-              <a:buNone/>
-            </a:pPr>
-            <a:r>
-              <a:rPr lang="en-US" sz="1350" dirty="0">
-                <a:solidFill>
-                  <a:srgbClr val="33444F"/>
-                </a:solidFill>
-                <a:latin typeface="Calibri" pitchFamily="34" charset="0"/>
-                <a:ea typeface="Calibri" pitchFamily="34" charset="-122"/>
-                <a:cs typeface="Calibri" pitchFamily="34" charset="-120"/>
-              </a:rPr>
-              <a:t>E. A document-management tool</a:t>
-            </a:r>
-            <a:endParaRPr lang="en-US" sz="1350" dirty="0"/>
-          </a:p>
-        </p:txBody>
-      </p:sp>
-      <p:sp>
-        <p:nvSpPr>
-          <p:cNvPr id="6" name="Shape 4"/>
-          <p:cNvSpPr/>
-          <p:nvPr/>
-        </p:nvSpPr>
-        <p:spPr>
-          <a:xfrm>
-            <a:off x="7201632" y="2395728"/>
-            <a:ext cx="4423136" cy="3246120"/>
+              <a:t>Case 3</a:t>
+            </a:r>
+            <a:endParaRPr lang="en-US" sz="3000" dirty="0"/>
+          </a:p>
+        </p:txBody>
+      </p:sp>
+      <p:sp>
+        <p:nvSpPr>
+          <p:cNvPr id="4" name="Shape 2"/>
+          <p:cNvSpPr/>
+          <p:nvPr/>
+        </p:nvSpPr>
+        <p:spPr>
+          <a:xfrm>
+            <a:off x="566928" y="1517904"/>
+            <a:ext cx="11057839" cy="2788920"/>
           </a:xfrm>
           <a:prstGeom prst="roundRect">
             <a:avLst>
-              <a:gd name="adj" fmla="val 2535"/>
+              <a:gd name="adj" fmla="val 2951"/>
             </a:avLst>
           </a:prstGeom>
           <a:solidFill>
@@ -6731,14 +7132,14 @@
       </p:sp>
       <p:sp>
         <p:nvSpPr>
-          <p:cNvPr id="7" name="Text 5"/>
-          <p:cNvSpPr/>
-          <p:nvPr/>
-        </p:nvSpPr>
-        <p:spPr>
-          <a:xfrm>
-            <a:off x="7439376" y="2578608"/>
-            <a:ext cx="3965936" cy="457200"/>
+          <p:cNvPr id="5" name="Text 3"/>
+          <p:cNvSpPr/>
+          <p:nvPr/>
+        </p:nvSpPr>
+        <p:spPr>
+          <a:xfrm>
+            <a:off x="841248" y="1700784"/>
+            <a:ext cx="5486400" cy="292608"/>
           </a:xfrm>
           <a:prstGeom prst="rect">
             <a:avLst/>
@@ -6754,7 +7155,7 @@
               <a:buNone/>
             </a:pPr>
             <a:r>
-              <a:rPr lang="en-US" sz="1500" b="1" dirty="0">
+              <a:rPr lang="en-US" sz="1100" b="1" spc="150" kern="0" dirty="0">
                 <a:solidFill>
                   <a:srgbClr val="455A64"/>
                 </a:solidFill>
@@ -6762,36 +7163,22 @@
                 <a:ea typeface="Calibri" pitchFamily="34" charset="-122"/>
                 <a:cs typeface="Calibri" pitchFamily="34" charset="-120"/>
               </a:rPr>
-              <a:t>ANSWER  </a:t>
-            </a:r>
-            <a:pPr indent="0" marL="0">
-              <a:buNone/>
-            </a:pPr>
-            <a:r>
-              <a:rPr lang="en-US" sz="1500" b="1" dirty="0">
-                <a:solidFill>
-                  <a:srgbClr val="1B2A38"/>
-                </a:solidFill>
-                <a:latin typeface="Calibri" pitchFamily="34" charset="0"/>
-                <a:ea typeface="Calibri" pitchFamily="34" charset="-122"/>
-                <a:cs typeface="Calibri" pitchFamily="34" charset="-120"/>
-              </a:rPr>
-              <a:t>B — The minimum federal regulatory standard</a:t>
-            </a:r>
-            <a:endParaRPr lang="en-US" sz="1500" dirty="0"/>
-          </a:p>
-        </p:txBody>
-      </p:sp>
-      <p:sp>
-        <p:nvSpPr>
-          <p:cNvPr id="8" name="Text 6"/>
-          <p:cNvSpPr/>
-          <p:nvPr/>
-        </p:nvSpPr>
-        <p:spPr>
-          <a:xfrm>
-            <a:off x="7439376" y="3127248"/>
-            <a:ext cx="3947648" cy="2377440"/>
+              <a:t>CLINICAL VIGNETTE</a:t>
+            </a:r>
+            <a:endParaRPr lang="en-US" sz="1100" dirty="0"/>
+          </a:p>
+        </p:txBody>
+      </p:sp>
+      <p:sp>
+        <p:nvSpPr>
+          <p:cNvPr id="6" name="Text 4"/>
+          <p:cNvSpPr/>
+          <p:nvPr/>
+        </p:nvSpPr>
+        <p:spPr>
+          <a:xfrm>
+            <a:off x="841248" y="2029968"/>
+            <a:ext cx="10509199" cy="2148840"/>
           </a:xfrm>
           <a:prstGeom prst="rect">
             <a:avLst/>
@@ -6810,7 +7197,7 @@
               <a:buNone/>
             </a:pPr>
             <a:r>
-              <a:rPr lang="en-US" sz="1250" dirty="0">
+              <a:rPr lang="en-US" sz="1450" dirty="0">
                 <a:solidFill>
                   <a:srgbClr val="33444F"/>
                 </a:solidFill>
@@ -6818,15 +7205,122 @@
                 <a:ea typeface="Calibri" pitchFamily="34" charset="-122"/>
                 <a:cs typeface="Calibri" pitchFamily="34" charset="-120"/>
               </a:rPr>
-              <a:t>CLIA establishes the baseline federal requirements for all U.S. clinical laboratory testing; accreditors like CAP provide deemed status often exceeding CLIA.</a:t>
-            </a:r>
-            <a:endParaRPr lang="en-US" sz="1250" dirty="0"/>
+              <a:t>A laboratory fails a proficiency-testing event for one analyte.</a:t>
+            </a:r>
+            <a:endParaRPr lang="en-US" sz="1450" dirty="0"/>
+          </a:p>
+        </p:txBody>
+      </p:sp>
+      <p:sp>
+        <p:nvSpPr>
+          <p:cNvPr id="7" name="Shape 5"/>
+          <p:cNvSpPr/>
+          <p:nvPr/>
+        </p:nvSpPr>
+        <p:spPr>
+          <a:xfrm>
+            <a:off x="566928" y="4553712"/>
+            <a:ext cx="11057839" cy="1325880"/>
+          </a:xfrm>
+          <a:prstGeom prst="roundRect">
+            <a:avLst>
+              <a:gd name="adj" fmla="val 6207"/>
+            </a:avLst>
+          </a:prstGeom>
+          <a:solidFill>
+            <a:srgbClr val="0E3A5F"/>
+          </a:solidFill>
+          <a:ln/>
+          <a:effectLst>
+            <a:outerShdw sx="100000" sy="100000" kx="0" ky="0" algn="bl" rotWithShape="0" blurRad="88900" dist="25400" dir="5400000">
+              <a:srgbClr val="22303C">
+                <a:alpha val="12000"/>
+              </a:srgbClr>
+            </a:outerShdw>
+          </a:effectLst>
+        </p:spPr>
+      </p:sp>
+      <p:sp>
+        <p:nvSpPr>
+          <p:cNvPr id="8" name="Text 6"/>
+          <p:cNvSpPr/>
+          <p:nvPr/>
+        </p:nvSpPr>
+        <p:spPr>
+          <a:xfrm>
+            <a:off x="822960" y="4681728"/>
+            <a:ext cx="640080" cy="960120"/>
+          </a:xfrm>
+          <a:prstGeom prst="rect">
+            <a:avLst/>
+          </a:prstGeom>
+          <a:noFill/>
+          <a:ln/>
+        </p:spPr>
+        <p:txBody>
+          <a:bodyPr wrap="square" lIns="0" tIns="0" rIns="0" bIns="0" rtlCol="0" anchor="ctr"/>
+          <a:lstStyle/>
+          <a:p>
+            <a:pPr algn="ctr" indent="0" marL="0">
+              <a:buNone/>
+            </a:pPr>
+            <a:r>
+              <a:rPr lang="en-US" sz="4000" b="1" dirty="0">
+                <a:solidFill>
+                  <a:srgbClr val="455A64"/>
+                </a:solidFill>
+                <a:latin typeface="Calibri" pitchFamily="34" charset="0"/>
+                <a:ea typeface="Calibri" pitchFamily="34" charset="-122"/>
+                <a:cs typeface="Calibri" pitchFamily="34" charset="-120"/>
+              </a:rPr>
+              <a:t>?</a:t>
+            </a:r>
+            <a:endParaRPr lang="en-US" sz="4000" dirty="0"/>
           </a:p>
         </p:txBody>
       </p:sp>
       <p:sp>
         <p:nvSpPr>
           <p:cNvPr id="9" name="Text 7"/>
+          <p:cNvSpPr/>
+          <p:nvPr/>
+        </p:nvSpPr>
+        <p:spPr>
+          <a:xfrm>
+            <a:off x="1618488" y="4553712"/>
+            <a:ext cx="9686239" cy="1325880"/>
+          </a:xfrm>
+          <a:prstGeom prst="rect">
+            <a:avLst/>
+          </a:prstGeom>
+          <a:noFill/>
+          <a:ln/>
+        </p:spPr>
+        <p:txBody>
+          <a:bodyPr wrap="square" lIns="0" tIns="0" rIns="0" bIns="0" rtlCol="0" anchor="ctr"/>
+          <a:lstStyle/>
+          <a:p>
+            <a:pPr algn="l" indent="0" marL="0">
+              <a:buNone/>
+            </a:pPr>
+            <a:r>
+              <a:rPr lang="en-US" sz="1500" b="1" dirty="0">
+                <a:solidFill>
+                  <a:srgbClr val="FFFFFF"/>
+                </a:solidFill>
+                <a:latin typeface="Calibri" pitchFamily="34" charset="0"/>
+                <a:ea typeface="Calibri" pitchFamily="34" charset="-122"/>
+                <a:cs typeface="Calibri" pitchFamily="34" charset="-120"/>
+              </a:rPr>
+              <a:t>What is the appropriate response?</a:t>
+            </a:r>
+            <a:endParaRPr lang="en-US" sz="1500" dirty="0"/>
+          </a:p>
+        </p:txBody>
+      </p:sp>
+      <p:sp>
+        <p:nvSpPr>
+          <p:cNvPr id="10" name="Text 8"/>
           <p:cNvSpPr/>
           <p:nvPr/>
         </p:nvSpPr>
@@ -6865,7 +7359,7 @@
       </p:sp>
       <p:sp>
         <p:nvSpPr>
-          <p:cNvPr id="10" name="Text 8"/>
+          <p:cNvPr id="11" name="Text 9"/>
           <p:cNvSpPr/>
           <p:nvPr/>
         </p:nvSpPr>
@@ -6944,7 +7438,7 @@
     <p:bg>
       <p:bgPr>
         <a:solidFill>
-          <a:srgbClr val="0A2A45"/>
+          <a:srgbClr val="FFFFFF"/>
         </a:solidFill>
       </p:bgPr>
     </p:bg>
@@ -6971,7 +7465,7 @@
         <p:spPr>
           <a:xfrm>
             <a:off x="566928" y="329184"/>
-            <a:ext cx="10058400" cy="310896"/>
+            <a:ext cx="10515600" cy="310896"/>
           </a:xfrm>
           <a:prstGeom prst="rect">
             <a:avLst/>
@@ -6983,7 +7477,7 @@
           <a:bodyPr wrap="square" lIns="0" tIns="0" rIns="0" bIns="0" rtlCol="0" anchor="ctr"/>
           <a:lstStyle/>
           <a:p>
-            <a:pPr indent="0" marL="0">
+            <a:pPr algn="l" indent="0" marL="0">
               <a:buNone/>
             </a:pPr>
             <a:r>
@@ -6995,7 +7489,7 @@
                 <a:ea typeface="Calibri" pitchFamily="34" charset="-122"/>
                 <a:cs typeface="Calibri" pitchFamily="34" charset="-120"/>
               </a:rPr>
-              <a:t>LAB MANAGEMENT &amp; QUALITY</a:t>
+              <a:t>LAB MANAGEMENT &amp; QUALITY   ·   CASE 3  ·  RESOLUTION</a:t>
             </a:r>
             <a:endParaRPr lang="en-US" sz="1100" dirty="0"/>
           </a:p>
@@ -7009,8 +7503,8 @@
         </p:nvSpPr>
         <p:spPr>
           <a:xfrm>
-            <a:off x="566928" y="676656"/>
-            <a:ext cx="10972800" cy="749808"/>
+            <a:off x="566928" y="713232"/>
+            <a:ext cx="11064240" cy="749808"/>
           </a:xfrm>
           <a:prstGeom prst="rect">
             <a:avLst/>
@@ -7022,19 +7516,19 @@
           <a:bodyPr wrap="square" lIns="0" tIns="0" rIns="0" bIns="0" rtlCol="0" anchor="ctr"/>
           <a:lstStyle/>
           <a:p>
-            <a:pPr indent="0" marL="0">
+            <a:pPr algn="l" indent="0" marL="0">
               <a:buNone/>
             </a:pPr>
             <a:r>
               <a:rPr lang="en-US" sz="3000" b="1" dirty="0">
                 <a:solidFill>
-                  <a:srgbClr val="FFFFFF"/>
-                </a:solidFill>
-                <a:latin typeface="Calibri" pitchFamily="34" charset="0"/>
-                <a:ea typeface="Calibri" pitchFamily="34" charset="-122"/>
-                <a:cs typeface="Calibri" pitchFamily="34" charset="-120"/>
-              </a:rPr>
-              <a:t>Key Take-Home Points</a:t>
+                  <a:srgbClr val="0E3A5F"/>
+                </a:solidFill>
+                <a:latin typeface="Calibri" pitchFamily="34" charset="0"/>
+                <a:ea typeface="Calibri" pitchFamily="34" charset="-122"/>
+                <a:cs typeface="Calibri" pitchFamily="34" charset="-120"/>
+              </a:rPr>
+              <a:t>Case 3: PT Failure</a:t>
             </a:r>
             <a:endParaRPr lang="en-US" sz="3000" dirty="0"/>
           </a:p>
@@ -7042,42 +7536,128 @@
       </p:sp>
       <p:sp>
         <p:nvSpPr>
-          <p:cNvPr id="4" name="Shape 2"/>
-          <p:cNvSpPr/>
-          <p:nvPr/>
-        </p:nvSpPr>
-        <p:spPr>
-          <a:xfrm>
-            <a:off x="566928" y="1517904"/>
-            <a:ext cx="11057839" cy="841248"/>
+          <p:cNvPr id="4" name="Text 2"/>
+          <p:cNvSpPr/>
+          <p:nvPr/>
+        </p:nvSpPr>
+        <p:spPr>
+          <a:xfrm>
+            <a:off x="566928" y="1554480"/>
+            <a:ext cx="6413547" cy="4023360"/>
+          </a:xfrm>
+          <a:prstGeom prst="rect">
+            <a:avLst/>
+          </a:prstGeom>
+          <a:noFill/>
+          <a:ln/>
+        </p:spPr>
+        <p:txBody>
+          <a:bodyPr wrap="square" lIns="0" tIns="0" rIns="0" bIns="0" rtlCol="0" anchor="t"/>
+          <a:lstStyle/>
+          <a:p>
+            <a:pPr algn="l" marL="177800" indent="-177800">
+              <a:spcAft>
+                <a:spcPts val="900"/>
+              </a:spcAft>
+              <a:buSzPct val="100000"/>
+              <a:buChar char="•"/>
+            </a:pPr>
+            <a:r>
+              <a:rPr lang="en-US" sz="1400" b="1" dirty="0">
+                <a:solidFill>
+                  <a:srgbClr val="1B2A38"/>
+                </a:solidFill>
+                <a:latin typeface="Calibri" pitchFamily="34" charset="0"/>
+                <a:ea typeface="Calibri" pitchFamily="34" charset="-122"/>
+                <a:cs typeface="Calibri" pitchFamily="34" charset="-120"/>
+              </a:rPr>
+              <a:t>Investigate with root-cause analysis, implement corrective action, and document the response.</a:t>
+            </a:r>
+            <a:endParaRPr lang="en-US" sz="1400" dirty="0"/>
+          </a:p>
+          <a:p>
+            <a:pPr algn="l" marL="177800" indent="-177800">
+              <a:spcAft>
+                <a:spcPts val="900"/>
+              </a:spcAft>
+              <a:buSzPct val="100000"/>
+              <a:buChar char="•"/>
+            </a:pPr>
+            <a:r>
+              <a:rPr lang="en-US" sz="1400" dirty="0">
+                <a:solidFill>
+                  <a:srgbClr val="33444F"/>
+                </a:solidFill>
+                <a:latin typeface="Calibri" pitchFamily="34" charset="0"/>
+                <a:ea typeface="Calibri" pitchFamily="34" charset="-122"/>
+                <a:cs typeface="Calibri" pitchFamily="34" charset="-120"/>
+              </a:rPr>
+              <a:t>Verify the fix before resuming confident reporting.</a:t>
+            </a:r>
+            <a:endParaRPr lang="en-US" sz="1400" dirty="0"/>
+          </a:p>
+          <a:p>
+            <a:pPr algn="l" marL="177800" indent="-177800">
+              <a:spcAft>
+                <a:spcPts val="900"/>
+              </a:spcAft>
+              <a:buSzPct val="100000"/>
+              <a:buChar char="•"/>
+            </a:pPr>
+            <a:r>
+              <a:rPr lang="en-US" sz="1400" dirty="0">
+                <a:solidFill>
+                  <a:srgbClr val="33444F"/>
+                </a:solidFill>
+                <a:latin typeface="Calibri" pitchFamily="34" charset="0"/>
+                <a:ea typeface="Calibri" pitchFamily="34" charset="-122"/>
+                <a:cs typeface="Calibri" pitchFamily="34" charset="-120"/>
+              </a:rPr>
+              <a:t>Unsuccessful performance can restrict testing for that analyte.</a:t>
+            </a:r>
+            <a:endParaRPr lang="en-US" sz="1400" dirty="0"/>
+          </a:p>
+          <a:p>
+            <a:pPr algn="l" marL="177800" indent="-177800">
+              <a:spcAft>
+                <a:spcPts val="900"/>
+              </a:spcAft>
+              <a:buSzPct val="100000"/>
+              <a:buChar char="•"/>
+            </a:pPr>
+            <a:r>
+              <a:rPr lang="en-US" sz="1400" dirty="0">
+                <a:solidFill>
+                  <a:srgbClr val="33444F"/>
+                </a:solidFill>
+                <a:latin typeface="Calibri" pitchFamily="34" charset="0"/>
+                <a:ea typeface="Calibri" pitchFamily="34" charset="-122"/>
+                <a:cs typeface="Calibri" pitchFamily="34" charset="-120"/>
+              </a:rPr>
+              <a:t>Use the event to improve the process.</a:t>
+            </a:r>
+            <a:endParaRPr lang="en-US" sz="1400" dirty="0"/>
+          </a:p>
+        </p:txBody>
+      </p:sp>
+      <p:sp>
+        <p:nvSpPr>
+          <p:cNvPr id="5" name="Shape 3"/>
+          <p:cNvSpPr/>
+          <p:nvPr/>
+        </p:nvSpPr>
+        <p:spPr>
+          <a:xfrm>
+            <a:off x="7422788" y="1554480"/>
+            <a:ext cx="4201979" cy="3977640"/>
           </a:xfrm>
           <a:prstGeom prst="roundRect">
             <a:avLst>
-              <a:gd name="adj" fmla="val 7609"/>
+              <a:gd name="adj" fmla="val 2069"/>
             </a:avLst>
           </a:prstGeom>
           <a:solidFill>
-            <a:srgbClr val="143651"/>
-          </a:solidFill>
-          <a:ln/>
-        </p:spPr>
-      </p:sp>
-      <p:sp>
-        <p:nvSpPr>
-          <p:cNvPr id="5" name="Shape 3"/>
-          <p:cNvSpPr/>
-          <p:nvPr/>
-        </p:nvSpPr>
-        <p:spPr>
-          <a:xfrm>
-            <a:off x="749808" y="1755648"/>
-            <a:ext cx="365760" cy="365760"/>
-          </a:xfrm>
-          <a:prstGeom prst="ellipse">
-            <a:avLst/>
-          </a:prstGeom>
-          <a:solidFill>
-            <a:srgbClr val="455A64"/>
+            <a:srgbClr val="ECEFF1"/>
           </a:solidFill>
           <a:ln/>
           <a:effectLst>
@@ -7097,8 +7677,8 @@
         </p:nvSpPr>
         <p:spPr>
           <a:xfrm>
-            <a:off x="749808" y="1755648"/>
-            <a:ext cx="365760" cy="365760"/>
+            <a:off x="7660532" y="1755648"/>
+            <a:ext cx="3744779" cy="310896"/>
           </a:xfrm>
           <a:prstGeom prst="rect">
             <a:avLst/>
@@ -7110,21 +7690,21 @@
           <a:bodyPr wrap="square" lIns="0" tIns="0" rIns="0" bIns="0" rtlCol="0" anchor="ctr"/>
           <a:lstStyle/>
           <a:p>
-            <a:pPr algn="ctr" indent="0" marL="0">
-              <a:buNone/>
-            </a:pPr>
-            <a:r>
-              <a:rPr lang="en-US" sz="1500" b="1" dirty="0">
-                <a:solidFill>
-                  <a:srgbClr val="FFFFFF"/>
-                </a:solidFill>
-                <a:latin typeface="Calibri" pitchFamily="34" charset="0"/>
-                <a:ea typeface="Calibri" pitchFamily="34" charset="-122"/>
-                <a:cs typeface="Calibri" pitchFamily="34" charset="-120"/>
-              </a:rPr>
-              <a:t>1</a:t>
-            </a:r>
-            <a:endParaRPr lang="en-US" sz="1500" dirty="0"/>
+            <a:pPr indent="0" marL="0">
+              <a:buNone/>
+            </a:pPr>
+            <a:r>
+              <a:rPr lang="en-US" sz="1100" b="1" spc="140" kern="0" dirty="0">
+                <a:solidFill>
+                  <a:srgbClr val="455A64"/>
+                </a:solidFill>
+                <a:latin typeface="Calibri" pitchFamily="34" charset="0"/>
+                <a:ea typeface="Calibri" pitchFamily="34" charset="-122"/>
+                <a:cs typeface="Calibri" pitchFamily="34" charset="-120"/>
+              </a:rPr>
+              <a:t>TEACHING POINT</a:t>
+            </a:r>
+            <a:endParaRPr lang="en-US" sz="1100" dirty="0"/>
           </a:p>
         </p:txBody>
       </p:sp>
@@ -7136,8 +7716,50 @@
         </p:nvSpPr>
         <p:spPr>
           <a:xfrm>
-            <a:off x="1280160" y="1517904"/>
-            <a:ext cx="10143439" cy="841248"/>
+            <a:off x="7660532" y="2121408"/>
+            <a:ext cx="3726491" cy="3291840"/>
+          </a:xfrm>
+          <a:prstGeom prst="rect">
+            <a:avLst/>
+          </a:prstGeom>
+          <a:noFill/>
+          <a:ln/>
+        </p:spPr>
+        <p:txBody>
+          <a:bodyPr wrap="square" lIns="0" tIns="0" rIns="0" bIns="0" rtlCol="0" anchor="t"/>
+          <a:lstStyle/>
+          <a:p>
+            <a:pPr algn="l" indent="0" marL="0">
+              <a:lnSpc>
+                <a:spcPct val="110000"/>
+              </a:lnSpc>
+              <a:buNone/>
+            </a:pPr>
+            <a:r>
+              <a:rPr lang="en-US" sz="1350" dirty="0">
+                <a:solidFill>
+                  <a:srgbClr val="33444F"/>
+                </a:solidFill>
+                <a:latin typeface="Calibri" pitchFamily="34" charset="0"/>
+                <a:ea typeface="Calibri" pitchFamily="34" charset="-122"/>
+                <a:cs typeface="Calibri" pitchFamily="34" charset="-120"/>
+              </a:rPr>
+              <a:t>A PT failure is a managed event: root-cause, corrective action, verification, and documentation — not just a repeat test.</a:t>
+            </a:r>
+            <a:endParaRPr lang="en-US" sz="1350" dirty="0"/>
+          </a:p>
+        </p:txBody>
+      </p:sp>
+      <p:sp>
+        <p:nvSpPr>
+          <p:cNvPr id="8" name="Text 6"/>
+          <p:cNvSpPr/>
+          <p:nvPr/>
+        </p:nvSpPr>
+        <p:spPr>
+          <a:xfrm>
+            <a:off x="566928" y="6473952"/>
+            <a:ext cx="7772400" cy="274320"/>
           </a:xfrm>
           <a:prstGeom prst="rect">
             <a:avLst/>
@@ -7153,79 +7775,30 @@
               <a:buNone/>
             </a:pPr>
             <a:r>
-              <a:rPr lang="en-US" sz="1350" dirty="0">
-                <a:solidFill>
-                  <a:srgbClr val="E7EEF4"/>
-                </a:solidFill>
-                <a:latin typeface="Calibri" pitchFamily="34" charset="0"/>
-                <a:ea typeface="Calibri" pitchFamily="34" charset="-122"/>
-                <a:cs typeface="Calibri" pitchFamily="34" charset="-120"/>
-              </a:rPr>
-              <a:t>CLIA is the regulatory floor; test complexity (waived / moderate / high) drives requirements.</a:t>
-            </a:r>
-            <a:endParaRPr lang="en-US" sz="1350" dirty="0"/>
-          </a:p>
-        </p:txBody>
-      </p:sp>
-      <p:sp>
-        <p:nvSpPr>
-          <p:cNvPr id="8" name="Shape 6"/>
-          <p:cNvSpPr/>
-          <p:nvPr/>
-        </p:nvSpPr>
-        <p:spPr>
-          <a:xfrm>
-            <a:off x="566928" y="2505456"/>
-            <a:ext cx="11057839" cy="841248"/>
-          </a:xfrm>
-          <a:prstGeom prst="roundRect">
-            <a:avLst>
-              <a:gd name="adj" fmla="val 7609"/>
-            </a:avLst>
-          </a:prstGeom>
-          <a:solidFill>
-            <a:srgbClr val="143651"/>
-          </a:solidFill>
-          <a:ln/>
-        </p:spPr>
-      </p:sp>
-      <p:sp>
-        <p:nvSpPr>
-          <p:cNvPr id="9" name="Shape 7"/>
-          <p:cNvSpPr/>
-          <p:nvPr/>
-        </p:nvSpPr>
-        <p:spPr>
-          <a:xfrm>
-            <a:off x="749808" y="2743200"/>
-            <a:ext cx="365760" cy="365760"/>
-          </a:xfrm>
-          <a:prstGeom prst="ellipse">
-            <a:avLst/>
-          </a:prstGeom>
-          <a:solidFill>
-            <a:srgbClr val="455A64"/>
-          </a:solidFill>
-          <a:ln/>
-          <a:effectLst>
-            <a:outerShdw sx="100000" sy="100000" kx="0" ky="0" algn="bl" rotWithShape="0" blurRad="88900" dist="25400" dir="5400000">
-              <a:srgbClr val="22303C">
-                <a:alpha val="12000"/>
-              </a:srgbClr>
-            </a:outerShdw>
-          </a:effectLst>
-        </p:spPr>
-      </p:sp>
-      <p:sp>
-        <p:nvSpPr>
-          <p:cNvPr id="10" name="Text 8"/>
-          <p:cNvSpPr/>
-          <p:nvPr/>
-        </p:nvSpPr>
-        <p:spPr>
-          <a:xfrm>
-            <a:off x="749808" y="2743200"/>
-            <a:ext cx="365760" cy="365760"/>
+              <a:rPr lang="en-US" sz="850" dirty="0">
+                <a:solidFill>
+                  <a:srgbClr val="9AA8B4"/>
+                </a:solidFill>
+                <a:latin typeface="Calibri" pitchFamily="34" charset="0"/>
+                <a:ea typeface="Calibri" pitchFamily="34" charset="-122"/>
+                <a:cs typeface="Calibri" pitchFamily="34" charset="-120"/>
+              </a:rPr>
+              <a:t>Makassed General Hospital  ·  Department of Laboratory Medicine</a:t>
+            </a:r>
+            <a:endParaRPr lang="en-US" sz="850" dirty="0"/>
+          </a:p>
+        </p:txBody>
+      </p:sp>
+      <p:sp>
+        <p:nvSpPr>
+          <p:cNvPr id="9" name="Text 7"/>
+          <p:cNvSpPr/>
+          <p:nvPr/>
+        </p:nvSpPr>
+        <p:spPr>
+          <a:xfrm>
+            <a:off x="9814255" y="6473952"/>
+            <a:ext cx="1828800" cy="274320"/>
           </a:xfrm>
           <a:prstGeom prst="rect">
             <a:avLst/>
@@ -7237,504 +7810,34 @@
           <a:bodyPr wrap="square" lIns="0" tIns="0" rIns="0" bIns="0" rtlCol="0" anchor="ctr"/>
           <a:lstStyle/>
           <a:p>
-            <a:pPr algn="ctr" indent="0" marL="0">
-              <a:buNone/>
-            </a:pPr>
-            <a:r>
-              <a:rPr lang="en-US" sz="1500" b="1" dirty="0">
-                <a:solidFill>
-                  <a:srgbClr val="FFFFFF"/>
-                </a:solidFill>
-                <a:latin typeface="Calibri" pitchFamily="34" charset="0"/>
-                <a:ea typeface="Calibri" pitchFamily="34" charset="-122"/>
-                <a:cs typeface="Calibri" pitchFamily="34" charset="-120"/>
-              </a:rPr>
-              <a:t>2</a:t>
-            </a:r>
-            <a:endParaRPr lang="en-US" sz="1500" dirty="0"/>
-          </a:p>
-        </p:txBody>
-      </p:sp>
-      <p:sp>
-        <p:nvSpPr>
-          <p:cNvPr id="11" name="Text 9"/>
-          <p:cNvSpPr/>
-          <p:nvPr/>
-        </p:nvSpPr>
-        <p:spPr>
-          <a:xfrm>
-            <a:off x="1280160" y="2505456"/>
-            <a:ext cx="10143439" cy="841248"/>
-          </a:xfrm>
-          <a:prstGeom prst="rect">
-            <a:avLst/>
-          </a:prstGeom>
-          <a:noFill/>
-          <a:ln/>
-        </p:spPr>
-        <p:txBody>
-          <a:bodyPr wrap="square" lIns="0" tIns="0" rIns="0" bIns="0" rtlCol="0" anchor="ctr"/>
-          <a:lstStyle/>
-          <a:p>
-            <a:pPr algn="l" indent="0" marL="0">
-              <a:buNone/>
-            </a:pPr>
-            <a:r>
-              <a:rPr lang="en-US" sz="1350" dirty="0">
-                <a:solidFill>
-                  <a:srgbClr val="E7EEF4"/>
-                </a:solidFill>
-                <a:latin typeface="Calibri" pitchFamily="34" charset="0"/>
-                <a:ea typeface="Calibri" pitchFamily="34" charset="-122"/>
-                <a:cs typeface="Calibri" pitchFamily="34" charset="-120"/>
-              </a:rPr>
-              <a:t>FDA-cleared as-intended assays require verification; modified or laboratory-developed tests require full validation (high complexity).</a:t>
-            </a:r>
-            <a:endParaRPr lang="en-US" sz="1350" dirty="0"/>
-          </a:p>
-        </p:txBody>
-      </p:sp>
-      <p:sp>
-        <p:nvSpPr>
-          <p:cNvPr id="12" name="Shape 10"/>
-          <p:cNvSpPr/>
-          <p:nvPr/>
-        </p:nvSpPr>
-        <p:spPr>
-          <a:xfrm>
-            <a:off x="566928" y="3493008"/>
-            <a:ext cx="11057839" cy="841248"/>
-          </a:xfrm>
-          <a:prstGeom prst="roundRect">
-            <a:avLst>
-              <a:gd name="adj" fmla="val 7609"/>
-            </a:avLst>
-          </a:prstGeom>
-          <a:solidFill>
-            <a:srgbClr val="143651"/>
-          </a:solidFill>
-          <a:ln/>
-        </p:spPr>
-      </p:sp>
-      <p:sp>
-        <p:nvSpPr>
-          <p:cNvPr id="13" name="Shape 11"/>
-          <p:cNvSpPr/>
-          <p:nvPr/>
-        </p:nvSpPr>
-        <p:spPr>
-          <a:xfrm>
-            <a:off x="749808" y="3730752"/>
-            <a:ext cx="365760" cy="365760"/>
-          </a:xfrm>
-          <a:prstGeom prst="ellipse">
-            <a:avLst/>
-          </a:prstGeom>
-          <a:solidFill>
-            <a:srgbClr val="455A64"/>
-          </a:solidFill>
-          <a:ln/>
-          <a:effectLst>
-            <a:outerShdw sx="100000" sy="100000" kx="0" ky="0" algn="bl" rotWithShape="0" blurRad="88900" dist="25400" dir="5400000">
-              <a:srgbClr val="22303C">
-                <a:alpha val="12000"/>
-              </a:srgbClr>
-            </a:outerShdw>
-          </a:effectLst>
-        </p:spPr>
-      </p:sp>
-      <p:sp>
-        <p:nvSpPr>
-          <p:cNvPr id="14" name="Text 12"/>
-          <p:cNvSpPr/>
-          <p:nvPr/>
-        </p:nvSpPr>
-        <p:spPr>
-          <a:xfrm>
-            <a:off x="749808" y="3730752"/>
-            <a:ext cx="365760" cy="365760"/>
-          </a:xfrm>
-          <a:prstGeom prst="rect">
-            <a:avLst/>
-          </a:prstGeom>
-          <a:noFill/>
-          <a:ln/>
-        </p:spPr>
-        <p:txBody>
-          <a:bodyPr wrap="square" lIns="0" tIns="0" rIns="0" bIns="0" rtlCol="0" anchor="ctr"/>
-          <a:lstStyle/>
-          <a:p>
-            <a:pPr algn="ctr" indent="0" marL="0">
-              <a:buNone/>
-            </a:pPr>
-            <a:r>
-              <a:rPr lang="en-US" sz="1500" b="1" dirty="0">
-                <a:solidFill>
-                  <a:srgbClr val="FFFFFF"/>
-                </a:solidFill>
-                <a:latin typeface="Calibri" pitchFamily="34" charset="0"/>
-                <a:ea typeface="Calibri" pitchFamily="34" charset="-122"/>
-                <a:cs typeface="Calibri" pitchFamily="34" charset="-120"/>
-              </a:rPr>
-              <a:t>3</a:t>
-            </a:r>
-            <a:endParaRPr lang="en-US" sz="1500" dirty="0"/>
-          </a:p>
-        </p:txBody>
-      </p:sp>
-      <p:sp>
-        <p:nvSpPr>
-          <p:cNvPr id="15" name="Text 13"/>
-          <p:cNvSpPr/>
-          <p:nvPr/>
-        </p:nvSpPr>
-        <p:spPr>
-          <a:xfrm>
-            <a:off x="1280160" y="3493008"/>
-            <a:ext cx="10143439" cy="841248"/>
-          </a:xfrm>
-          <a:prstGeom prst="rect">
-            <a:avLst/>
-          </a:prstGeom>
-          <a:noFill/>
-          <a:ln/>
-        </p:spPr>
-        <p:txBody>
-          <a:bodyPr wrap="square" lIns="0" tIns="0" rIns="0" bIns="0" rtlCol="0" anchor="ctr"/>
-          <a:lstStyle/>
-          <a:p>
-            <a:pPr algn="l" indent="0" marL="0">
-              <a:buNone/>
-            </a:pPr>
-            <a:r>
-              <a:rPr lang="en-US" sz="1350" dirty="0">
-                <a:solidFill>
-                  <a:srgbClr val="E7EEF4"/>
-                </a:solidFill>
-                <a:latin typeface="Calibri" pitchFamily="34" charset="0"/>
-                <a:ea typeface="Calibri" pitchFamily="34" charset="-122"/>
-                <a:cs typeface="Calibri" pitchFamily="34" charset="-120"/>
-              </a:rPr>
-              <a:t>Document the six elements of competency assessment at required intervals — training alone is insufficient.</a:t>
-            </a:r>
-            <a:endParaRPr lang="en-US" sz="1350" dirty="0"/>
-          </a:p>
-        </p:txBody>
-      </p:sp>
-      <p:sp>
-        <p:nvSpPr>
-          <p:cNvPr id="16" name="Shape 14"/>
-          <p:cNvSpPr/>
-          <p:nvPr/>
-        </p:nvSpPr>
-        <p:spPr>
-          <a:xfrm>
-            <a:off x="566928" y="4480560"/>
-            <a:ext cx="11057839" cy="841248"/>
-          </a:xfrm>
-          <a:prstGeom prst="roundRect">
-            <a:avLst>
-              <a:gd name="adj" fmla="val 7609"/>
-            </a:avLst>
-          </a:prstGeom>
-          <a:solidFill>
-            <a:srgbClr val="143651"/>
-          </a:solidFill>
-          <a:ln/>
-        </p:spPr>
-      </p:sp>
-      <p:sp>
-        <p:nvSpPr>
-          <p:cNvPr id="17" name="Shape 15"/>
-          <p:cNvSpPr/>
-          <p:nvPr/>
-        </p:nvSpPr>
-        <p:spPr>
-          <a:xfrm>
-            <a:off x="749808" y="4718304"/>
-            <a:ext cx="365760" cy="365760"/>
-          </a:xfrm>
-          <a:prstGeom prst="ellipse">
-            <a:avLst/>
-          </a:prstGeom>
-          <a:solidFill>
-            <a:srgbClr val="455A64"/>
-          </a:solidFill>
-          <a:ln/>
-          <a:effectLst>
-            <a:outerShdw sx="100000" sy="100000" kx="0" ky="0" algn="bl" rotWithShape="0" blurRad="88900" dist="25400" dir="5400000">
-              <a:srgbClr val="22303C">
-                <a:alpha val="12000"/>
-              </a:srgbClr>
-            </a:outerShdw>
-          </a:effectLst>
-        </p:spPr>
-      </p:sp>
-      <p:sp>
-        <p:nvSpPr>
-          <p:cNvPr id="18" name="Text 16"/>
-          <p:cNvSpPr/>
-          <p:nvPr/>
-        </p:nvSpPr>
-        <p:spPr>
-          <a:xfrm>
-            <a:off x="749808" y="4718304"/>
-            <a:ext cx="365760" cy="365760"/>
-          </a:xfrm>
-          <a:prstGeom prst="rect">
-            <a:avLst/>
-          </a:prstGeom>
-          <a:noFill/>
-          <a:ln/>
-        </p:spPr>
-        <p:txBody>
-          <a:bodyPr wrap="square" lIns="0" tIns="0" rIns="0" bIns="0" rtlCol="0" anchor="ctr"/>
-          <a:lstStyle/>
-          <a:p>
-            <a:pPr algn="ctr" indent="0" marL="0">
-              <a:buNone/>
-            </a:pPr>
-            <a:r>
-              <a:rPr lang="en-US" sz="1500" b="1" dirty="0">
-                <a:solidFill>
-                  <a:srgbClr val="FFFFFF"/>
-                </a:solidFill>
-                <a:latin typeface="Calibri" pitchFamily="34" charset="0"/>
-                <a:ea typeface="Calibri" pitchFamily="34" charset="-122"/>
-                <a:cs typeface="Calibri" pitchFamily="34" charset="-120"/>
-              </a:rPr>
-              <a:t>4</a:t>
-            </a:r>
-            <a:endParaRPr lang="en-US" sz="1500" dirty="0"/>
-          </a:p>
-        </p:txBody>
-      </p:sp>
-      <p:sp>
-        <p:nvSpPr>
-          <p:cNvPr id="19" name="Text 17"/>
-          <p:cNvSpPr/>
-          <p:nvPr/>
-        </p:nvSpPr>
-        <p:spPr>
-          <a:xfrm>
-            <a:off x="1280160" y="4480560"/>
-            <a:ext cx="10143439" cy="841248"/>
-          </a:xfrm>
-          <a:prstGeom prst="rect">
-            <a:avLst/>
-          </a:prstGeom>
-          <a:noFill/>
-          <a:ln/>
-        </p:spPr>
-        <p:txBody>
-          <a:bodyPr wrap="square" lIns="0" tIns="0" rIns="0" bIns="0" rtlCol="0" anchor="ctr"/>
-          <a:lstStyle/>
-          <a:p>
-            <a:pPr algn="l" indent="0" marL="0">
-              <a:buNone/>
-            </a:pPr>
-            <a:r>
-              <a:rPr lang="en-US" sz="1350" dirty="0">
-                <a:solidFill>
-                  <a:srgbClr val="E7EEF4"/>
-                </a:solidFill>
-                <a:latin typeface="Calibri" pitchFamily="34" charset="0"/>
-                <a:ea typeface="Calibri" pitchFamily="34" charset="-122"/>
-                <a:cs typeface="Calibri" pitchFamily="34" charset="-120"/>
-              </a:rPr>
-              <a:t>Maintain controlled, current SOPs with retention and change control; traceability from result to validation.</a:t>
-            </a:r>
-            <a:endParaRPr lang="en-US" sz="1350" dirty="0"/>
-          </a:p>
-        </p:txBody>
-      </p:sp>
-      <p:sp>
-        <p:nvSpPr>
-          <p:cNvPr id="20" name="Shape 18"/>
-          <p:cNvSpPr/>
-          <p:nvPr/>
-        </p:nvSpPr>
-        <p:spPr>
-          <a:xfrm>
-            <a:off x="566928" y="5468112"/>
-            <a:ext cx="11057839" cy="841248"/>
-          </a:xfrm>
-          <a:prstGeom prst="roundRect">
-            <a:avLst>
-              <a:gd name="adj" fmla="val 7609"/>
-            </a:avLst>
-          </a:prstGeom>
-          <a:solidFill>
-            <a:srgbClr val="143651"/>
-          </a:solidFill>
-          <a:ln/>
-        </p:spPr>
-      </p:sp>
-      <p:sp>
-        <p:nvSpPr>
-          <p:cNvPr id="21" name="Shape 19"/>
-          <p:cNvSpPr/>
-          <p:nvPr/>
-        </p:nvSpPr>
-        <p:spPr>
-          <a:xfrm>
-            <a:off x="749808" y="5705856"/>
-            <a:ext cx="365760" cy="365760"/>
-          </a:xfrm>
-          <a:prstGeom prst="ellipse">
-            <a:avLst/>
-          </a:prstGeom>
-          <a:solidFill>
-            <a:srgbClr val="455A64"/>
-          </a:solidFill>
-          <a:ln/>
-          <a:effectLst>
-            <a:outerShdw sx="100000" sy="100000" kx="0" ky="0" algn="bl" rotWithShape="0" blurRad="88900" dist="25400" dir="5400000">
-              <a:srgbClr val="22303C">
-                <a:alpha val="12000"/>
-              </a:srgbClr>
-            </a:outerShdw>
-          </a:effectLst>
-        </p:spPr>
-      </p:sp>
-      <p:sp>
-        <p:nvSpPr>
-          <p:cNvPr id="22" name="Text 20"/>
-          <p:cNvSpPr/>
-          <p:nvPr/>
-        </p:nvSpPr>
-        <p:spPr>
-          <a:xfrm>
-            <a:off x="749808" y="5705856"/>
-            <a:ext cx="365760" cy="365760"/>
-          </a:xfrm>
-          <a:prstGeom prst="rect">
-            <a:avLst/>
-          </a:prstGeom>
-          <a:noFill/>
-          <a:ln/>
-        </p:spPr>
-        <p:txBody>
-          <a:bodyPr wrap="square" lIns="0" tIns="0" rIns="0" bIns="0" rtlCol="0" anchor="ctr"/>
-          <a:lstStyle/>
-          <a:p>
-            <a:pPr algn="ctr" indent="0" marL="0">
-              <a:buNone/>
-            </a:pPr>
-            <a:r>
-              <a:rPr lang="en-US" sz="1500" b="1" dirty="0">
-                <a:solidFill>
-                  <a:srgbClr val="FFFFFF"/>
-                </a:solidFill>
-                <a:latin typeface="Calibri" pitchFamily="34" charset="0"/>
-                <a:ea typeface="Calibri" pitchFamily="34" charset="-122"/>
-                <a:cs typeface="Calibri" pitchFamily="34" charset="-120"/>
-              </a:rPr>
-              <a:t>5</a:t>
-            </a:r>
-            <a:endParaRPr lang="en-US" sz="1500" dirty="0"/>
-          </a:p>
-        </p:txBody>
-      </p:sp>
-      <p:sp>
-        <p:nvSpPr>
-          <p:cNvPr id="23" name="Text 21"/>
-          <p:cNvSpPr/>
-          <p:nvPr/>
-        </p:nvSpPr>
-        <p:spPr>
-          <a:xfrm>
-            <a:off x="1280160" y="5468112"/>
-            <a:ext cx="10143439" cy="841248"/>
-          </a:xfrm>
-          <a:prstGeom prst="rect">
-            <a:avLst/>
-          </a:prstGeom>
-          <a:noFill/>
-          <a:ln/>
-        </p:spPr>
-        <p:txBody>
-          <a:bodyPr wrap="square" lIns="0" tIns="0" rIns="0" bIns="0" rtlCol="0" anchor="ctr"/>
-          <a:lstStyle/>
-          <a:p>
-            <a:pPr algn="l" indent="0" marL="0">
-              <a:buNone/>
-            </a:pPr>
-            <a:r>
-              <a:rPr lang="en-US" sz="1350" dirty="0">
-                <a:solidFill>
-                  <a:srgbClr val="E7EEF4"/>
-                </a:solidFill>
-                <a:latin typeface="Calibri" pitchFamily="34" charset="0"/>
-                <a:ea typeface="Calibri" pitchFamily="34" charset="-122"/>
-                <a:cs typeface="Calibri" pitchFamily="34" charset="-120"/>
-              </a:rPr>
-              <a:t>Inspection readiness is continuous — use self-inspection and corrective-action records to demonstrate a functioning QMS.</a:t>
-            </a:r>
-            <a:endParaRPr lang="en-US" sz="1350" dirty="0"/>
-          </a:p>
-        </p:txBody>
-      </p:sp>
-      <p:sp>
-        <p:nvSpPr>
-          <p:cNvPr id="24" name="Text 22"/>
-          <p:cNvSpPr/>
-          <p:nvPr/>
-        </p:nvSpPr>
-        <p:spPr>
-          <a:xfrm>
-            <a:off x="566928" y="6473952"/>
-            <a:ext cx="8229600" cy="274320"/>
-          </a:xfrm>
-          <a:prstGeom prst="rect">
-            <a:avLst/>
-          </a:prstGeom>
-          <a:noFill/>
-          <a:ln/>
-        </p:spPr>
-        <p:txBody>
-          <a:bodyPr wrap="square" lIns="0" tIns="0" rIns="0" bIns="0" rtlCol="0" anchor="ctr"/>
-          <a:lstStyle/>
-          <a:p>
-            <a:pPr indent="0" marL="0">
+            <a:pPr algn="r" indent="0" marL="0">
               <a:buNone/>
             </a:pPr>
             <a:r>
               <a:rPr lang="en-US" sz="850" dirty="0">
                 <a:solidFill>
-                  <a:srgbClr val="5E7488"/>
-                </a:solidFill>
-                <a:latin typeface="Calibri" pitchFamily="34" charset="0"/>
-                <a:ea typeface="Calibri" pitchFamily="34" charset="-122"/>
-                <a:cs typeface="Calibri" pitchFamily="34" charset="-120"/>
-              </a:rPr>
-              <a:t>Makassed General Hospital  ·  Department of Laboratory Medicine</a:t>
-            </a:r>
-            <a:endParaRPr lang="en-US" sz="850" dirty="0"/>
-          </a:p>
-        </p:txBody>
-      </p:sp>
-      <p:sp>
-        <p:nvSpPr>
-          <p:cNvPr id="25" name="Text 23"/>
-          <p:cNvSpPr/>
-          <p:nvPr/>
-        </p:nvSpPr>
-        <p:spPr>
-          <a:xfrm>
-            <a:off x="11002975" y="6473952"/>
-            <a:ext cx="640080" cy="274320"/>
-          </a:xfrm>
-          <a:prstGeom prst="rect">
-            <a:avLst/>
-          </a:prstGeom>
-          <a:noFill/>
-          <a:ln/>
-        </p:spPr>
-        <p:txBody>
-          <a:bodyPr wrap="square" lIns="0" tIns="0" rIns="0" bIns="0" rtlCol="0" anchor="ctr"/>
-          <a:lstStyle/>
-          <a:p>
+                  <a:srgbClr val="9AA8B4"/>
+                </a:solidFill>
+                <a:latin typeface="Calibri" pitchFamily="34" charset="0"/>
+                <a:ea typeface="Calibri" pitchFamily="34" charset="-122"/>
+                <a:cs typeface="Calibri" pitchFamily="34" charset="-120"/>
+              </a:rPr>
+              <a:t>CP Lecture Series</a:t>
+            </a:r>
+            <a:pPr algn="r" indent="0" marL="0">
+              <a:buNone/>
+            </a:pPr>
+            <a:r>
+              <a:rPr lang="en-US" sz="850" dirty="0">
+                <a:solidFill>
+                  <a:srgbClr val="DCE4EC"/>
+                </a:solidFill>
+                <a:latin typeface="Calibri" pitchFamily="34" charset="0"/>
+                <a:ea typeface="Calibri" pitchFamily="34" charset="-122"/>
+                <a:cs typeface="Calibri" pitchFamily="34" charset="-120"/>
+              </a:rPr>
+              <a:t>   ·   </a:t>
+            </a:r>
             <a:pPr algn="r" indent="0" marL="0">
               <a:buNone/>
             </a:pPr>
@@ -7964,7 +8067,7 @@
                 <a:ea typeface="Calibri" pitchFamily="34" charset="-122"/>
                 <a:cs typeface="Calibri" pitchFamily="34" charset="-120"/>
               </a:rPr>
-              <a:t>The U.S. regulatory floor for all clinical testing</a:t>
+              <a:t>The regulatory floor for clinical testing</a:t>
             </a:r>
             <a:endParaRPr lang="en-US" sz="1150" dirty="0"/>
           </a:p>
@@ -8032,7 +8135,7 @@
                 <a:ea typeface="Calibri" pitchFamily="34" charset="-122"/>
                 <a:cs typeface="Calibri" pitchFamily="34" charset="-120"/>
               </a:rPr>
-              <a:t>6</a:t>
+              <a:t>PT</a:t>
             </a:r>
             <a:endParaRPr lang="en-US" sz="3600" dirty="0"/>
           </a:p>
@@ -8071,7 +8174,7 @@
                 <a:ea typeface="Calibri" pitchFamily="34" charset="-122"/>
                 <a:cs typeface="Calibri" pitchFamily="34" charset="-120"/>
               </a:rPr>
-              <a:t>Elements of competency assessment to document</a:t>
+              <a:t>External proof that results are accurate</a:t>
             </a:r>
             <a:endParaRPr lang="en-US" sz="1150" dirty="0"/>
           </a:p>
@@ -8139,7 +8242,7 @@
                 <a:ea typeface="Calibri" pitchFamily="34" charset="-122"/>
                 <a:cs typeface="Calibri" pitchFamily="34" charset="-120"/>
               </a:rPr>
-              <a:t>Ready</a:t>
+              <a:t>Complexity</a:t>
             </a:r>
             <a:endParaRPr lang="en-US" sz="3600" dirty="0"/>
           </a:p>
@@ -8178,7 +8281,7 @@
                 <a:ea typeface="Calibri" pitchFamily="34" charset="-122"/>
                 <a:cs typeface="Calibri" pitchFamily="34" charset="-120"/>
               </a:rPr>
-              <a:t>Inspection readiness is a daily practice, not an event</a:t>
+              <a:t>Test category sets the requirements</a:t>
             </a:r>
             <a:endParaRPr lang="en-US" sz="1150" dirty="0"/>
           </a:p>
@@ -8249,7 +8352,7 @@
                 <a:ea typeface="Calibri" pitchFamily="34" charset="-122"/>
                 <a:cs typeface="Calibri" pitchFamily="34" charset="-120"/>
               </a:rPr>
-              <a:t>Regulatory and accreditation frameworks define the minimum standards for safe testing. Residents preparing for laboratory leadership must understand CLIA complexity, accreditation, competency, and document control.</a:t>
+              <a:t>Regulation and accreditation define the non-negotiable framework the laboratory operates within: who may test, how performance is proven, and how the laboratory is inspected and held accountable.</a:t>
             </a:r>
             <a:endParaRPr lang="en-US" sz="1450" dirty="0"/>
           </a:p>
@@ -8292,7 +8395,7 @@
                 <a:ea typeface="Calibri" pitchFamily="34" charset="-122"/>
                 <a:cs typeface="Calibri" pitchFamily="34" charset="-120"/>
               </a:rPr>
-              <a:t>Compliance is continuous: validated methods, qualified people, controlled documents, and inspection-ready records every day.</a:t>
+              <a:t>Know the hierarchy: CLIA is the floor, accreditation builds on it, and proficiency testing externally verifies performance.</a:t>
             </a:r>
             <a:endParaRPr lang="en-US" sz="1300" dirty="0"/>
           </a:p>
@@ -8469,6 +8572,2845 @@
                 <a:ea typeface="Calibri" pitchFamily="34" charset="-122"/>
                 <a:cs typeface="Calibri" pitchFamily="34" charset="-120"/>
               </a:rPr>
+              <a:t>LAB MANAGEMENT &amp; QUALITY   ·   BOARD REVIEW  ·  Q1</a:t>
+            </a:r>
+            <a:endParaRPr lang="en-US" sz="1100" dirty="0"/>
+          </a:p>
+        </p:txBody>
+      </p:sp>
+      <p:sp>
+        <p:nvSpPr>
+          <p:cNvPr id="3" name="Text 1"/>
+          <p:cNvSpPr/>
+          <p:nvPr/>
+        </p:nvSpPr>
+        <p:spPr>
+          <a:xfrm>
+            <a:off x="566928" y="713232"/>
+            <a:ext cx="11064240" cy="749808"/>
+          </a:xfrm>
+          <a:prstGeom prst="rect">
+            <a:avLst/>
+          </a:prstGeom>
+          <a:noFill/>
+          <a:ln/>
+        </p:spPr>
+        <p:txBody>
+          <a:bodyPr wrap="square" lIns="0" tIns="0" rIns="0" bIns="0" rtlCol="0" anchor="ctr"/>
+          <a:lstStyle/>
+          <a:p>
+            <a:pPr algn="l" indent="0" marL="0">
+              <a:buNone/>
+            </a:pPr>
+            <a:r>
+              <a:rPr lang="en-US" sz="2600" b="1" dirty="0">
+                <a:solidFill>
+                  <a:srgbClr val="0E3A5F"/>
+                </a:solidFill>
+                <a:latin typeface="Calibri" pitchFamily="34" charset="0"/>
+                <a:ea typeface="Calibri" pitchFamily="34" charset="-122"/>
+                <a:cs typeface="Calibri" pitchFamily="34" charset="-120"/>
+              </a:rPr>
+              <a:t>Board-Style Review</a:t>
+            </a:r>
+            <a:endParaRPr lang="en-US" sz="2600" dirty="0"/>
+          </a:p>
+        </p:txBody>
+      </p:sp>
+      <p:sp>
+        <p:nvSpPr>
+          <p:cNvPr id="4" name="Text 2"/>
+          <p:cNvSpPr/>
+          <p:nvPr/>
+        </p:nvSpPr>
+        <p:spPr>
+          <a:xfrm>
+            <a:off x="566928" y="1417320"/>
+            <a:ext cx="11057839" cy="914400"/>
+          </a:xfrm>
+          <a:prstGeom prst="rect">
+            <a:avLst/>
+          </a:prstGeom>
+          <a:noFill/>
+          <a:ln/>
+        </p:spPr>
+        <p:txBody>
+          <a:bodyPr wrap="square" lIns="0" tIns="0" rIns="0" bIns="0" rtlCol="0" anchor="t"/>
+          <a:lstStyle/>
+          <a:p>
+            <a:pPr algn="l" indent="0" marL="0">
+              <a:lnSpc>
+                <a:spcPct val="105000"/>
+              </a:lnSpc>
+              <a:buNone/>
+            </a:pPr>
+            <a:r>
+              <a:rPr lang="en-US" sz="1450" b="1" dirty="0">
+                <a:solidFill>
+                  <a:srgbClr val="1B2A38"/>
+                </a:solidFill>
+                <a:latin typeface="Calibri" pitchFamily="34" charset="0"/>
+                <a:ea typeface="Calibri" pitchFamily="34" charset="-122"/>
+                <a:cs typeface="Calibri" pitchFamily="34" charset="-120"/>
+              </a:rPr>
+              <a:t>Referring a proficiency-testing sample to another laboratory is:</a:t>
+            </a:r>
+            <a:endParaRPr lang="en-US" sz="1450" dirty="0"/>
+          </a:p>
+        </p:txBody>
+      </p:sp>
+      <p:sp>
+        <p:nvSpPr>
+          <p:cNvPr id="5" name="Text 3"/>
+          <p:cNvSpPr/>
+          <p:nvPr/>
+        </p:nvSpPr>
+        <p:spPr>
+          <a:xfrm>
+            <a:off x="658368" y="2395728"/>
+            <a:ext cx="6192390" cy="3017520"/>
+          </a:xfrm>
+          <a:prstGeom prst="rect">
+            <a:avLst/>
+          </a:prstGeom>
+          <a:noFill/>
+          <a:ln/>
+        </p:spPr>
+        <p:txBody>
+          <a:bodyPr wrap="square" lIns="0" tIns="0" rIns="0" bIns="0" rtlCol="0" anchor="t"/>
+          <a:lstStyle/>
+          <a:p>
+            <a:pPr algn="l" indent="0" marL="0">
+              <a:spcAft>
+                <a:spcPts val="600"/>
+              </a:spcAft>
+              <a:buNone/>
+            </a:pPr>
+            <a:r>
+              <a:rPr lang="en-US" sz="1350" dirty="0">
+                <a:solidFill>
+                  <a:srgbClr val="33444F"/>
+                </a:solidFill>
+                <a:latin typeface="Calibri" pitchFamily="34" charset="0"/>
+                <a:ea typeface="Calibri" pitchFamily="34" charset="-122"/>
+                <a:cs typeface="Calibri" pitchFamily="34" charset="-120"/>
+              </a:rPr>
+              <a:t>A. Encouraged for accuracy</a:t>
+            </a:r>
+            <a:endParaRPr lang="en-US" sz="1350" dirty="0"/>
+          </a:p>
+          <a:p>
+            <a:pPr algn="l" indent="0" marL="0">
+              <a:spcAft>
+                <a:spcPts val="600"/>
+              </a:spcAft>
+              <a:buNone/>
+            </a:pPr>
+            <a:r>
+              <a:rPr lang="en-US" sz="1350" b="1" dirty="0">
+                <a:solidFill>
+                  <a:srgbClr val="2C3A41"/>
+                </a:solidFill>
+                <a:latin typeface="Calibri" pitchFamily="34" charset="0"/>
+                <a:ea typeface="Calibri" pitchFamily="34" charset="-122"/>
+                <a:cs typeface="Calibri" pitchFamily="34" charset="-120"/>
+              </a:rPr>
+              <a:t>B. A serious regulatory violation</a:t>
+            </a:r>
+            <a:endParaRPr lang="en-US" sz="1350" dirty="0"/>
+          </a:p>
+          <a:p>
+            <a:pPr algn="l" indent="0" marL="0">
+              <a:spcAft>
+                <a:spcPts val="600"/>
+              </a:spcAft>
+              <a:buNone/>
+            </a:pPr>
+            <a:r>
+              <a:rPr lang="en-US" sz="1350" dirty="0">
+                <a:solidFill>
+                  <a:srgbClr val="33444F"/>
+                </a:solidFill>
+                <a:latin typeface="Calibri" pitchFamily="34" charset="0"/>
+                <a:ea typeface="Calibri" pitchFamily="34" charset="-122"/>
+                <a:cs typeface="Calibri" pitchFamily="34" charset="-120"/>
+              </a:rPr>
+              <a:t>C. Required for confirmation</a:t>
+            </a:r>
+            <a:endParaRPr lang="en-US" sz="1350" dirty="0"/>
+          </a:p>
+          <a:p>
+            <a:pPr algn="l" indent="0" marL="0">
+              <a:spcAft>
+                <a:spcPts val="600"/>
+              </a:spcAft>
+              <a:buNone/>
+            </a:pPr>
+            <a:r>
+              <a:rPr lang="en-US" sz="1350" dirty="0">
+                <a:solidFill>
+                  <a:srgbClr val="33444F"/>
+                </a:solidFill>
+                <a:latin typeface="Calibri" pitchFamily="34" charset="0"/>
+                <a:ea typeface="Calibri" pitchFamily="34" charset="-122"/>
+                <a:cs typeface="Calibri" pitchFamily="34" charset="-120"/>
+              </a:rPr>
+              <a:t>D. Allowed if documented</a:t>
+            </a:r>
+            <a:endParaRPr lang="en-US" sz="1350" dirty="0"/>
+          </a:p>
+          <a:p>
+            <a:pPr algn="l" indent="0" marL="0">
+              <a:spcAft>
+                <a:spcPts val="600"/>
+              </a:spcAft>
+              <a:buNone/>
+            </a:pPr>
+            <a:r>
+              <a:rPr lang="en-US" sz="1350" dirty="0">
+                <a:solidFill>
+                  <a:srgbClr val="33444F"/>
+                </a:solidFill>
+                <a:latin typeface="Calibri" pitchFamily="34" charset="0"/>
+                <a:ea typeface="Calibri" pitchFamily="34" charset="-122"/>
+                <a:cs typeface="Calibri" pitchFamily="34" charset="-120"/>
+              </a:rPr>
+              <a:t>E. Standard practice</a:t>
+            </a:r>
+            <a:endParaRPr lang="en-US" sz="1350" dirty="0"/>
+          </a:p>
+        </p:txBody>
+      </p:sp>
+      <p:sp>
+        <p:nvSpPr>
+          <p:cNvPr id="6" name="Shape 4"/>
+          <p:cNvSpPr/>
+          <p:nvPr/>
+        </p:nvSpPr>
+        <p:spPr>
+          <a:xfrm>
+            <a:off x="7201632" y="2395728"/>
+            <a:ext cx="4423136" cy="3246120"/>
+          </a:xfrm>
+          <a:prstGeom prst="roundRect">
+            <a:avLst>
+              <a:gd name="adj" fmla="val 2535"/>
+            </a:avLst>
+          </a:prstGeom>
+          <a:solidFill>
+            <a:srgbClr val="ECEFF1"/>
+          </a:solidFill>
+          <a:ln/>
+          <a:effectLst>
+            <a:outerShdw sx="100000" sy="100000" kx="0" ky="0" algn="bl" rotWithShape="0" blurRad="88900" dist="25400" dir="5400000">
+              <a:srgbClr val="22303C">
+                <a:alpha val="12000"/>
+              </a:srgbClr>
+            </a:outerShdw>
+          </a:effectLst>
+        </p:spPr>
+      </p:sp>
+      <p:sp>
+        <p:nvSpPr>
+          <p:cNvPr id="7" name="Text 5"/>
+          <p:cNvSpPr/>
+          <p:nvPr/>
+        </p:nvSpPr>
+        <p:spPr>
+          <a:xfrm>
+            <a:off x="7439376" y="2578608"/>
+            <a:ext cx="3965936" cy="457200"/>
+          </a:xfrm>
+          <a:prstGeom prst="rect">
+            <a:avLst/>
+          </a:prstGeom>
+          <a:noFill/>
+          <a:ln/>
+        </p:spPr>
+        <p:txBody>
+          <a:bodyPr wrap="square" lIns="0" tIns="0" rIns="0" bIns="0" rtlCol="0" anchor="ctr"/>
+          <a:lstStyle/>
+          <a:p>
+            <a:pPr indent="0" marL="0">
+              <a:buNone/>
+            </a:pPr>
+            <a:r>
+              <a:rPr lang="en-US" sz="1500" b="1" dirty="0">
+                <a:solidFill>
+                  <a:srgbClr val="455A64"/>
+                </a:solidFill>
+                <a:latin typeface="Calibri" pitchFamily="34" charset="0"/>
+                <a:ea typeface="Calibri" pitchFamily="34" charset="-122"/>
+                <a:cs typeface="Calibri" pitchFamily="34" charset="-120"/>
+              </a:rPr>
+              <a:t>ANSWER  </a:t>
+            </a:r>
+            <a:pPr indent="0" marL="0">
+              <a:buNone/>
+            </a:pPr>
+            <a:r>
+              <a:rPr lang="en-US" sz="1500" b="1" dirty="0">
+                <a:solidFill>
+                  <a:srgbClr val="1B2A38"/>
+                </a:solidFill>
+                <a:latin typeface="Calibri" pitchFamily="34" charset="0"/>
+                <a:ea typeface="Calibri" pitchFamily="34" charset="-122"/>
+                <a:cs typeface="Calibri" pitchFamily="34" charset="-120"/>
+              </a:rPr>
+              <a:t>B — A serious violation</a:t>
+            </a:r>
+            <a:endParaRPr lang="en-US" sz="1500" dirty="0"/>
+          </a:p>
+        </p:txBody>
+      </p:sp>
+      <p:sp>
+        <p:nvSpPr>
+          <p:cNvPr id="8" name="Text 6"/>
+          <p:cNvSpPr/>
+          <p:nvPr/>
+        </p:nvSpPr>
+        <p:spPr>
+          <a:xfrm>
+            <a:off x="7439376" y="3127248"/>
+            <a:ext cx="3947648" cy="2377440"/>
+          </a:xfrm>
+          <a:prstGeom prst="rect">
+            <a:avLst/>
+          </a:prstGeom>
+          <a:noFill/>
+          <a:ln/>
+        </p:spPr>
+        <p:txBody>
+          <a:bodyPr wrap="square" lIns="0" tIns="0" rIns="0" bIns="0" rtlCol="0" anchor="t"/>
+          <a:lstStyle/>
+          <a:p>
+            <a:pPr algn="l" indent="0" marL="0">
+              <a:lnSpc>
+                <a:spcPct val="108000"/>
+              </a:lnSpc>
+              <a:buNone/>
+            </a:pPr>
+            <a:r>
+              <a:rPr lang="en-US" sz="1250" dirty="0">
+                <a:solidFill>
+                  <a:srgbClr val="33444F"/>
+                </a:solidFill>
+                <a:latin typeface="Calibri" pitchFamily="34" charset="0"/>
+                <a:ea typeface="Calibri" pitchFamily="34" charset="-122"/>
+                <a:cs typeface="Calibri" pitchFamily="34" charset="-120"/>
+              </a:rPr>
+              <a:t>PT samples must be tested like patient samples and never referred; PT referral can cost a laboratory its certification.</a:t>
+            </a:r>
+            <a:endParaRPr lang="en-US" sz="1250" dirty="0"/>
+          </a:p>
+        </p:txBody>
+      </p:sp>
+      <p:sp>
+        <p:nvSpPr>
+          <p:cNvPr id="9" name="Text 7"/>
+          <p:cNvSpPr/>
+          <p:nvPr/>
+        </p:nvSpPr>
+        <p:spPr>
+          <a:xfrm>
+            <a:off x="566928" y="6473952"/>
+            <a:ext cx="7772400" cy="274320"/>
+          </a:xfrm>
+          <a:prstGeom prst="rect">
+            <a:avLst/>
+          </a:prstGeom>
+          <a:noFill/>
+          <a:ln/>
+        </p:spPr>
+        <p:txBody>
+          <a:bodyPr wrap="square" lIns="0" tIns="0" rIns="0" bIns="0" rtlCol="0" anchor="ctr"/>
+          <a:lstStyle/>
+          <a:p>
+            <a:pPr algn="l" indent="0" marL="0">
+              <a:buNone/>
+            </a:pPr>
+            <a:r>
+              <a:rPr lang="en-US" sz="850" dirty="0">
+                <a:solidFill>
+                  <a:srgbClr val="9AA8B4"/>
+                </a:solidFill>
+                <a:latin typeface="Calibri" pitchFamily="34" charset="0"/>
+                <a:ea typeface="Calibri" pitchFamily="34" charset="-122"/>
+                <a:cs typeface="Calibri" pitchFamily="34" charset="-120"/>
+              </a:rPr>
+              <a:t>Makassed General Hospital  ·  Department of Laboratory Medicine</a:t>
+            </a:r>
+            <a:endParaRPr lang="en-US" sz="850" dirty="0"/>
+          </a:p>
+        </p:txBody>
+      </p:sp>
+      <p:sp>
+        <p:nvSpPr>
+          <p:cNvPr id="10" name="Text 8"/>
+          <p:cNvSpPr/>
+          <p:nvPr/>
+        </p:nvSpPr>
+        <p:spPr>
+          <a:xfrm>
+            <a:off x="9814255" y="6473952"/>
+            <a:ext cx="1828800" cy="274320"/>
+          </a:xfrm>
+          <a:prstGeom prst="rect">
+            <a:avLst/>
+          </a:prstGeom>
+          <a:noFill/>
+          <a:ln/>
+        </p:spPr>
+        <p:txBody>
+          <a:bodyPr wrap="square" lIns="0" tIns="0" rIns="0" bIns="0" rtlCol="0" anchor="ctr"/>
+          <a:lstStyle/>
+          <a:p>
+            <a:pPr algn="r" indent="0" marL="0">
+              <a:buNone/>
+            </a:pPr>
+            <a:r>
+              <a:rPr lang="en-US" sz="850" dirty="0">
+                <a:solidFill>
+                  <a:srgbClr val="9AA8B4"/>
+                </a:solidFill>
+                <a:latin typeface="Calibri" pitchFamily="34" charset="0"/>
+                <a:ea typeface="Calibri" pitchFamily="34" charset="-122"/>
+                <a:cs typeface="Calibri" pitchFamily="34" charset="-120"/>
+              </a:rPr>
+              <a:t>CP Lecture Series</a:t>
+            </a:r>
+            <a:pPr algn="r" indent="0" marL="0">
+              <a:buNone/>
+            </a:pPr>
+            <a:r>
+              <a:rPr lang="en-US" sz="850" dirty="0">
+                <a:solidFill>
+                  <a:srgbClr val="DCE4EC"/>
+                </a:solidFill>
+                <a:latin typeface="Calibri" pitchFamily="34" charset="0"/>
+                <a:ea typeface="Calibri" pitchFamily="34" charset="-122"/>
+                <a:cs typeface="Calibri" pitchFamily="34" charset="-120"/>
+              </a:rPr>
+              <a:t>   ·   </a:t>
+            </a:r>
+            <a:pPr algn="r" indent="0" marL="0">
+              <a:buNone/>
+            </a:pPr>
+            <a:r>
+              <a:rPr lang="en-US" sz="850" b="1" dirty="0">
+                <a:solidFill>
+                  <a:srgbClr val="455A64"/>
+                </a:solidFill>
+                <a:latin typeface="Calibri" pitchFamily="34" charset="0"/>
+                <a:ea typeface="Calibri" pitchFamily="34" charset="-122"/>
+                <a:cs typeface="Calibri" pitchFamily="34" charset="-120"/>
+              </a:rPr>
+              <a:t>17</a:t>
+            </a:r>
+            <a:endParaRPr lang="en-US" sz="850" dirty="0"/>
+          </a:p>
+        </p:txBody>
+      </p:sp>
+    </p:spTree>
+  </p:cSld>
+  <p:clrMapOvr>
+    <a:masterClrMapping/>
+  </p:clrMapOvr>
+</p:sld>
+</file>
+
+<file path=ppt/slides/slide21.xml><?xml version="1.0" encoding="utf-8"?>
+<p:sld xmlns:a="http://schemas.openxmlformats.org/drawingml/2006/main" xmlns:r="http://schemas.openxmlformats.org/officeDocument/2006/relationships" xmlns:p="http://schemas.openxmlformats.org/presentationml/2006/main">
+  <p:cSld name="Slide 21">
+    <p:bg>
+      <p:bgPr>
+        <a:solidFill>
+          <a:srgbClr val="FFFFFF"/>
+        </a:solidFill>
+      </p:bgPr>
+    </p:bg>
+    <p:spTree>
+      <p:nvGrpSpPr>
+        <p:cNvPr id="1" name=""/>
+        <p:cNvGrpSpPr/>
+        <p:nvPr/>
+      </p:nvGrpSpPr>
+      <p:grpSpPr>
+        <a:xfrm>
+          <a:off x="0" y="0"/>
+          <a:ext cx="0" cy="0"/>
+          <a:chOff x="0" y="0"/>
+          <a:chExt cx="0" cy="0"/>
+        </a:xfrm>
+      </p:grpSpPr>
+      <p:sp>
+        <p:nvSpPr>
+          <p:cNvPr id="2" name="Text 0"/>
+          <p:cNvSpPr/>
+          <p:nvPr/>
+        </p:nvSpPr>
+        <p:spPr>
+          <a:xfrm>
+            <a:off x="566928" y="329184"/>
+            <a:ext cx="10515600" cy="310896"/>
+          </a:xfrm>
+          <a:prstGeom prst="rect">
+            <a:avLst/>
+          </a:prstGeom>
+          <a:noFill/>
+          <a:ln/>
+        </p:spPr>
+        <p:txBody>
+          <a:bodyPr wrap="square" lIns="0" tIns="0" rIns="0" bIns="0" rtlCol="0" anchor="ctr"/>
+          <a:lstStyle/>
+          <a:p>
+            <a:pPr algn="l" indent="0" marL="0">
+              <a:buNone/>
+            </a:pPr>
+            <a:r>
+              <a:rPr lang="en-US" sz="1100" b="1" spc="150" kern="0" dirty="0">
+                <a:solidFill>
+                  <a:srgbClr val="455A64"/>
+                </a:solidFill>
+                <a:latin typeface="Calibri" pitchFamily="34" charset="0"/>
+                <a:ea typeface="Calibri" pitchFamily="34" charset="-122"/>
+                <a:cs typeface="Calibri" pitchFamily="34" charset="-120"/>
+              </a:rPr>
+              <a:t>LAB MANAGEMENT &amp; QUALITY   ·   BOARD REVIEW  ·  Q2</a:t>
+            </a:r>
+            <a:endParaRPr lang="en-US" sz="1100" dirty="0"/>
+          </a:p>
+        </p:txBody>
+      </p:sp>
+      <p:sp>
+        <p:nvSpPr>
+          <p:cNvPr id="3" name="Text 1"/>
+          <p:cNvSpPr/>
+          <p:nvPr/>
+        </p:nvSpPr>
+        <p:spPr>
+          <a:xfrm>
+            <a:off x="566928" y="713232"/>
+            <a:ext cx="11064240" cy="749808"/>
+          </a:xfrm>
+          <a:prstGeom prst="rect">
+            <a:avLst/>
+          </a:prstGeom>
+          <a:noFill/>
+          <a:ln/>
+        </p:spPr>
+        <p:txBody>
+          <a:bodyPr wrap="square" lIns="0" tIns="0" rIns="0" bIns="0" rtlCol="0" anchor="ctr"/>
+          <a:lstStyle/>
+          <a:p>
+            <a:pPr algn="l" indent="0" marL="0">
+              <a:buNone/>
+            </a:pPr>
+            <a:r>
+              <a:rPr lang="en-US" sz="2600" b="1" dirty="0">
+                <a:solidFill>
+                  <a:srgbClr val="0E3A5F"/>
+                </a:solidFill>
+                <a:latin typeface="Calibri" pitchFamily="34" charset="0"/>
+                <a:ea typeface="Calibri" pitchFamily="34" charset="-122"/>
+                <a:cs typeface="Calibri" pitchFamily="34" charset="-120"/>
+              </a:rPr>
+              <a:t>Board-Style Review</a:t>
+            </a:r>
+            <a:endParaRPr lang="en-US" sz="2600" dirty="0"/>
+          </a:p>
+        </p:txBody>
+      </p:sp>
+      <p:sp>
+        <p:nvSpPr>
+          <p:cNvPr id="4" name="Text 2"/>
+          <p:cNvSpPr/>
+          <p:nvPr/>
+        </p:nvSpPr>
+        <p:spPr>
+          <a:xfrm>
+            <a:off x="566928" y="1417320"/>
+            <a:ext cx="11057839" cy="914400"/>
+          </a:xfrm>
+          <a:prstGeom prst="rect">
+            <a:avLst/>
+          </a:prstGeom>
+          <a:noFill/>
+          <a:ln/>
+        </p:spPr>
+        <p:txBody>
+          <a:bodyPr wrap="square" lIns="0" tIns="0" rIns="0" bIns="0" rtlCol="0" anchor="t"/>
+          <a:lstStyle/>
+          <a:p>
+            <a:pPr algn="l" indent="0" marL="0">
+              <a:lnSpc>
+                <a:spcPct val="105000"/>
+              </a:lnSpc>
+              <a:buNone/>
+            </a:pPr>
+            <a:r>
+              <a:rPr lang="en-US" sz="1450" b="1" dirty="0">
+                <a:solidFill>
+                  <a:srgbClr val="1B2A38"/>
+                </a:solidFill>
+                <a:latin typeface="Calibri" pitchFamily="34" charset="0"/>
+                <a:ea typeface="Calibri" pitchFamily="34" charset="-122"/>
+                <a:cs typeface="Calibri" pitchFamily="34" charset="-120"/>
+              </a:rPr>
+              <a:t>CLIA requirements for a test increase with:</a:t>
+            </a:r>
+            <a:endParaRPr lang="en-US" sz="1450" dirty="0"/>
+          </a:p>
+        </p:txBody>
+      </p:sp>
+      <p:sp>
+        <p:nvSpPr>
+          <p:cNvPr id="5" name="Text 3"/>
+          <p:cNvSpPr/>
+          <p:nvPr/>
+        </p:nvSpPr>
+        <p:spPr>
+          <a:xfrm>
+            <a:off x="658368" y="2395728"/>
+            <a:ext cx="6192390" cy="3017520"/>
+          </a:xfrm>
+          <a:prstGeom prst="rect">
+            <a:avLst/>
+          </a:prstGeom>
+          <a:noFill/>
+          <a:ln/>
+        </p:spPr>
+        <p:txBody>
+          <a:bodyPr wrap="square" lIns="0" tIns="0" rIns="0" bIns="0" rtlCol="0" anchor="t"/>
+          <a:lstStyle/>
+          <a:p>
+            <a:pPr algn="l" indent="0" marL="0">
+              <a:spcAft>
+                <a:spcPts val="600"/>
+              </a:spcAft>
+              <a:buNone/>
+            </a:pPr>
+            <a:r>
+              <a:rPr lang="en-US" sz="1350" dirty="0">
+                <a:solidFill>
+                  <a:srgbClr val="33444F"/>
+                </a:solidFill>
+                <a:latin typeface="Calibri" pitchFamily="34" charset="0"/>
+                <a:ea typeface="Calibri" pitchFamily="34" charset="-122"/>
+                <a:cs typeface="Calibri" pitchFamily="34" charset="-120"/>
+              </a:rPr>
+              <a:t>A. The lab’s size</a:t>
+            </a:r>
+            <a:endParaRPr lang="en-US" sz="1350" dirty="0"/>
+          </a:p>
+          <a:p>
+            <a:pPr algn="l" indent="0" marL="0">
+              <a:spcAft>
+                <a:spcPts val="600"/>
+              </a:spcAft>
+              <a:buNone/>
+            </a:pPr>
+            <a:r>
+              <a:rPr lang="en-US" sz="1350" b="1" dirty="0">
+                <a:solidFill>
+                  <a:srgbClr val="2C3A41"/>
+                </a:solidFill>
+                <a:latin typeface="Calibri" pitchFamily="34" charset="0"/>
+                <a:ea typeface="Calibri" pitchFamily="34" charset="-122"/>
+                <a:cs typeface="Calibri" pitchFamily="34" charset="-120"/>
+              </a:rPr>
+              <a:t>B. Test complexity (waived → high)</a:t>
+            </a:r>
+            <a:endParaRPr lang="en-US" sz="1350" dirty="0"/>
+          </a:p>
+          <a:p>
+            <a:pPr algn="l" indent="0" marL="0">
+              <a:spcAft>
+                <a:spcPts val="600"/>
+              </a:spcAft>
+              <a:buNone/>
+            </a:pPr>
+            <a:r>
+              <a:rPr lang="en-US" sz="1350" dirty="0">
+                <a:solidFill>
+                  <a:srgbClr val="33444F"/>
+                </a:solidFill>
+                <a:latin typeface="Calibri" pitchFamily="34" charset="0"/>
+                <a:ea typeface="Calibri" pitchFamily="34" charset="-122"/>
+                <a:cs typeface="Calibri" pitchFamily="34" charset="-120"/>
+              </a:rPr>
+              <a:t>C. The number of staff</a:t>
+            </a:r>
+            <a:endParaRPr lang="en-US" sz="1350" dirty="0"/>
+          </a:p>
+          <a:p>
+            <a:pPr algn="l" indent="0" marL="0">
+              <a:spcAft>
+                <a:spcPts val="600"/>
+              </a:spcAft>
+              <a:buNone/>
+            </a:pPr>
+            <a:r>
+              <a:rPr lang="en-US" sz="1350" dirty="0">
+                <a:solidFill>
+                  <a:srgbClr val="33444F"/>
+                </a:solidFill>
+                <a:latin typeface="Calibri" pitchFamily="34" charset="0"/>
+                <a:ea typeface="Calibri" pitchFamily="34" charset="-122"/>
+                <a:cs typeface="Calibri" pitchFamily="34" charset="-120"/>
+              </a:rPr>
+              <a:t>D. The instrument brand</a:t>
+            </a:r>
+            <a:endParaRPr lang="en-US" sz="1350" dirty="0"/>
+          </a:p>
+          <a:p>
+            <a:pPr algn="l" indent="0" marL="0">
+              <a:spcAft>
+                <a:spcPts val="600"/>
+              </a:spcAft>
+              <a:buNone/>
+            </a:pPr>
+            <a:r>
+              <a:rPr lang="en-US" sz="1350" dirty="0">
+                <a:solidFill>
+                  <a:srgbClr val="33444F"/>
+                </a:solidFill>
+                <a:latin typeface="Calibri" pitchFamily="34" charset="0"/>
+                <a:ea typeface="Calibri" pitchFamily="34" charset="-122"/>
+                <a:cs typeface="Calibri" pitchFamily="34" charset="-120"/>
+              </a:rPr>
+              <a:t>E. The time of year</a:t>
+            </a:r>
+            <a:endParaRPr lang="en-US" sz="1350" dirty="0"/>
+          </a:p>
+        </p:txBody>
+      </p:sp>
+      <p:sp>
+        <p:nvSpPr>
+          <p:cNvPr id="6" name="Shape 4"/>
+          <p:cNvSpPr/>
+          <p:nvPr/>
+        </p:nvSpPr>
+        <p:spPr>
+          <a:xfrm>
+            <a:off x="7201632" y="2395728"/>
+            <a:ext cx="4423136" cy="3246120"/>
+          </a:xfrm>
+          <a:prstGeom prst="roundRect">
+            <a:avLst>
+              <a:gd name="adj" fmla="val 2535"/>
+            </a:avLst>
+          </a:prstGeom>
+          <a:solidFill>
+            <a:srgbClr val="ECEFF1"/>
+          </a:solidFill>
+          <a:ln/>
+          <a:effectLst>
+            <a:outerShdw sx="100000" sy="100000" kx="0" ky="0" algn="bl" rotWithShape="0" blurRad="88900" dist="25400" dir="5400000">
+              <a:srgbClr val="22303C">
+                <a:alpha val="12000"/>
+              </a:srgbClr>
+            </a:outerShdw>
+          </a:effectLst>
+        </p:spPr>
+      </p:sp>
+      <p:sp>
+        <p:nvSpPr>
+          <p:cNvPr id="7" name="Text 5"/>
+          <p:cNvSpPr/>
+          <p:nvPr/>
+        </p:nvSpPr>
+        <p:spPr>
+          <a:xfrm>
+            <a:off x="7439376" y="2578608"/>
+            <a:ext cx="3965936" cy="457200"/>
+          </a:xfrm>
+          <a:prstGeom prst="rect">
+            <a:avLst/>
+          </a:prstGeom>
+          <a:noFill/>
+          <a:ln/>
+        </p:spPr>
+        <p:txBody>
+          <a:bodyPr wrap="square" lIns="0" tIns="0" rIns="0" bIns="0" rtlCol="0" anchor="ctr"/>
+          <a:lstStyle/>
+          <a:p>
+            <a:pPr indent="0" marL="0">
+              <a:buNone/>
+            </a:pPr>
+            <a:r>
+              <a:rPr lang="en-US" sz="1500" b="1" dirty="0">
+                <a:solidFill>
+                  <a:srgbClr val="455A64"/>
+                </a:solidFill>
+                <a:latin typeface="Calibri" pitchFamily="34" charset="0"/>
+                <a:ea typeface="Calibri" pitchFamily="34" charset="-122"/>
+                <a:cs typeface="Calibri" pitchFamily="34" charset="-120"/>
+              </a:rPr>
+              <a:t>ANSWER  </a:t>
+            </a:r>
+            <a:pPr indent="0" marL="0">
+              <a:buNone/>
+            </a:pPr>
+            <a:r>
+              <a:rPr lang="en-US" sz="1500" b="1" dirty="0">
+                <a:solidFill>
+                  <a:srgbClr val="1B2A38"/>
+                </a:solidFill>
+                <a:latin typeface="Calibri" pitchFamily="34" charset="0"/>
+                <a:ea typeface="Calibri" pitchFamily="34" charset="-122"/>
+                <a:cs typeface="Calibri" pitchFamily="34" charset="-120"/>
+              </a:rPr>
+              <a:t>B — Test complexity</a:t>
+            </a:r>
+            <a:endParaRPr lang="en-US" sz="1500" dirty="0"/>
+          </a:p>
+        </p:txBody>
+      </p:sp>
+      <p:sp>
+        <p:nvSpPr>
+          <p:cNvPr id="8" name="Text 6"/>
+          <p:cNvSpPr/>
+          <p:nvPr/>
+        </p:nvSpPr>
+        <p:spPr>
+          <a:xfrm>
+            <a:off x="7439376" y="3127248"/>
+            <a:ext cx="3947648" cy="2377440"/>
+          </a:xfrm>
+          <a:prstGeom prst="rect">
+            <a:avLst/>
+          </a:prstGeom>
+          <a:noFill/>
+          <a:ln/>
+        </p:spPr>
+        <p:txBody>
+          <a:bodyPr wrap="square" lIns="0" tIns="0" rIns="0" bIns="0" rtlCol="0" anchor="t"/>
+          <a:lstStyle/>
+          <a:p>
+            <a:pPr algn="l" indent="0" marL="0">
+              <a:lnSpc>
+                <a:spcPct val="108000"/>
+              </a:lnSpc>
+              <a:buNone/>
+            </a:pPr>
+            <a:r>
+              <a:rPr lang="en-US" sz="1250" dirty="0">
+                <a:solidFill>
+                  <a:srgbClr val="33444F"/>
+                </a:solidFill>
+                <a:latin typeface="Calibri" pitchFamily="34" charset="0"/>
+                <a:ea typeface="Calibri" pitchFamily="34" charset="-122"/>
+                <a:cs typeface="Calibri" pitchFamily="34" charset="-120"/>
+              </a:rPr>
+              <a:t>Requirements for personnel, QC, and PT scale with complexity from waived to high complexity.</a:t>
+            </a:r>
+            <a:endParaRPr lang="en-US" sz="1250" dirty="0"/>
+          </a:p>
+        </p:txBody>
+      </p:sp>
+      <p:sp>
+        <p:nvSpPr>
+          <p:cNvPr id="9" name="Text 7"/>
+          <p:cNvSpPr/>
+          <p:nvPr/>
+        </p:nvSpPr>
+        <p:spPr>
+          <a:xfrm>
+            <a:off x="566928" y="6473952"/>
+            <a:ext cx="7772400" cy="274320"/>
+          </a:xfrm>
+          <a:prstGeom prst="rect">
+            <a:avLst/>
+          </a:prstGeom>
+          <a:noFill/>
+          <a:ln/>
+        </p:spPr>
+        <p:txBody>
+          <a:bodyPr wrap="square" lIns="0" tIns="0" rIns="0" bIns="0" rtlCol="0" anchor="ctr"/>
+          <a:lstStyle/>
+          <a:p>
+            <a:pPr algn="l" indent="0" marL="0">
+              <a:buNone/>
+            </a:pPr>
+            <a:r>
+              <a:rPr lang="en-US" sz="850" dirty="0">
+                <a:solidFill>
+                  <a:srgbClr val="9AA8B4"/>
+                </a:solidFill>
+                <a:latin typeface="Calibri" pitchFamily="34" charset="0"/>
+                <a:ea typeface="Calibri" pitchFamily="34" charset="-122"/>
+                <a:cs typeface="Calibri" pitchFamily="34" charset="-120"/>
+              </a:rPr>
+              <a:t>Makassed General Hospital  ·  Department of Laboratory Medicine</a:t>
+            </a:r>
+            <a:endParaRPr lang="en-US" sz="850" dirty="0"/>
+          </a:p>
+        </p:txBody>
+      </p:sp>
+      <p:sp>
+        <p:nvSpPr>
+          <p:cNvPr id="10" name="Text 8"/>
+          <p:cNvSpPr/>
+          <p:nvPr/>
+        </p:nvSpPr>
+        <p:spPr>
+          <a:xfrm>
+            <a:off x="9814255" y="6473952"/>
+            <a:ext cx="1828800" cy="274320"/>
+          </a:xfrm>
+          <a:prstGeom prst="rect">
+            <a:avLst/>
+          </a:prstGeom>
+          <a:noFill/>
+          <a:ln/>
+        </p:spPr>
+        <p:txBody>
+          <a:bodyPr wrap="square" lIns="0" tIns="0" rIns="0" bIns="0" rtlCol="0" anchor="ctr"/>
+          <a:lstStyle/>
+          <a:p>
+            <a:pPr algn="r" indent="0" marL="0">
+              <a:buNone/>
+            </a:pPr>
+            <a:r>
+              <a:rPr lang="en-US" sz="850" dirty="0">
+                <a:solidFill>
+                  <a:srgbClr val="9AA8B4"/>
+                </a:solidFill>
+                <a:latin typeface="Calibri" pitchFamily="34" charset="0"/>
+                <a:ea typeface="Calibri" pitchFamily="34" charset="-122"/>
+                <a:cs typeface="Calibri" pitchFamily="34" charset="-120"/>
+              </a:rPr>
+              <a:t>CP Lecture Series</a:t>
+            </a:r>
+            <a:pPr algn="r" indent="0" marL="0">
+              <a:buNone/>
+            </a:pPr>
+            <a:r>
+              <a:rPr lang="en-US" sz="850" dirty="0">
+                <a:solidFill>
+                  <a:srgbClr val="DCE4EC"/>
+                </a:solidFill>
+                <a:latin typeface="Calibri" pitchFamily="34" charset="0"/>
+                <a:ea typeface="Calibri" pitchFamily="34" charset="-122"/>
+                <a:cs typeface="Calibri" pitchFamily="34" charset="-120"/>
+              </a:rPr>
+              <a:t>   ·   </a:t>
+            </a:r>
+            <a:pPr algn="r" indent="0" marL="0">
+              <a:buNone/>
+            </a:pPr>
+            <a:r>
+              <a:rPr lang="en-US" sz="850" b="1" dirty="0">
+                <a:solidFill>
+                  <a:srgbClr val="455A64"/>
+                </a:solidFill>
+                <a:latin typeface="Calibri" pitchFamily="34" charset="0"/>
+                <a:ea typeface="Calibri" pitchFamily="34" charset="-122"/>
+                <a:cs typeface="Calibri" pitchFamily="34" charset="-120"/>
+              </a:rPr>
+              <a:t>18</a:t>
+            </a:r>
+            <a:endParaRPr lang="en-US" sz="850" dirty="0"/>
+          </a:p>
+        </p:txBody>
+      </p:sp>
+    </p:spTree>
+  </p:cSld>
+  <p:clrMapOvr>
+    <a:masterClrMapping/>
+  </p:clrMapOvr>
+</p:sld>
+</file>
+
+<file path=ppt/slides/slide22.xml><?xml version="1.0" encoding="utf-8"?>
+<p:sld xmlns:a="http://schemas.openxmlformats.org/drawingml/2006/main" xmlns:r="http://schemas.openxmlformats.org/officeDocument/2006/relationships" xmlns:p="http://schemas.openxmlformats.org/presentationml/2006/main">
+  <p:cSld name="Slide 22">
+    <p:bg>
+      <p:bgPr>
+        <a:solidFill>
+          <a:srgbClr val="FFFFFF"/>
+        </a:solidFill>
+      </p:bgPr>
+    </p:bg>
+    <p:spTree>
+      <p:nvGrpSpPr>
+        <p:cNvPr id="1" name=""/>
+        <p:cNvGrpSpPr/>
+        <p:nvPr/>
+      </p:nvGrpSpPr>
+      <p:grpSpPr>
+        <a:xfrm>
+          <a:off x="0" y="0"/>
+          <a:ext cx="0" cy="0"/>
+          <a:chOff x="0" y="0"/>
+          <a:chExt cx="0" cy="0"/>
+        </a:xfrm>
+      </p:grpSpPr>
+      <p:sp>
+        <p:nvSpPr>
+          <p:cNvPr id="2" name="Text 0"/>
+          <p:cNvSpPr/>
+          <p:nvPr/>
+        </p:nvSpPr>
+        <p:spPr>
+          <a:xfrm>
+            <a:off x="566928" y="329184"/>
+            <a:ext cx="10515600" cy="310896"/>
+          </a:xfrm>
+          <a:prstGeom prst="rect">
+            <a:avLst/>
+          </a:prstGeom>
+          <a:noFill/>
+          <a:ln/>
+        </p:spPr>
+        <p:txBody>
+          <a:bodyPr wrap="square" lIns="0" tIns="0" rIns="0" bIns="0" rtlCol="0" anchor="ctr"/>
+          <a:lstStyle/>
+          <a:p>
+            <a:pPr algn="l" indent="0" marL="0">
+              <a:buNone/>
+            </a:pPr>
+            <a:r>
+              <a:rPr lang="en-US" sz="1100" b="1" spc="150" kern="0" dirty="0">
+                <a:solidFill>
+                  <a:srgbClr val="455A64"/>
+                </a:solidFill>
+                <a:latin typeface="Calibri" pitchFamily="34" charset="0"/>
+                <a:ea typeface="Calibri" pitchFamily="34" charset="-122"/>
+                <a:cs typeface="Calibri" pitchFamily="34" charset="-120"/>
+              </a:rPr>
+              <a:t>LAB MANAGEMENT &amp; QUALITY   ·   BOARD REVIEW  ·  Q3</a:t>
+            </a:r>
+            <a:endParaRPr lang="en-US" sz="1100" dirty="0"/>
+          </a:p>
+        </p:txBody>
+      </p:sp>
+      <p:sp>
+        <p:nvSpPr>
+          <p:cNvPr id="3" name="Text 1"/>
+          <p:cNvSpPr/>
+          <p:nvPr/>
+        </p:nvSpPr>
+        <p:spPr>
+          <a:xfrm>
+            <a:off x="566928" y="713232"/>
+            <a:ext cx="11064240" cy="749808"/>
+          </a:xfrm>
+          <a:prstGeom prst="rect">
+            <a:avLst/>
+          </a:prstGeom>
+          <a:noFill/>
+          <a:ln/>
+        </p:spPr>
+        <p:txBody>
+          <a:bodyPr wrap="square" lIns="0" tIns="0" rIns="0" bIns="0" rtlCol="0" anchor="ctr"/>
+          <a:lstStyle/>
+          <a:p>
+            <a:pPr algn="l" indent="0" marL="0">
+              <a:buNone/>
+            </a:pPr>
+            <a:r>
+              <a:rPr lang="en-US" sz="2600" b="1" dirty="0">
+                <a:solidFill>
+                  <a:srgbClr val="0E3A5F"/>
+                </a:solidFill>
+                <a:latin typeface="Calibri" pitchFamily="34" charset="0"/>
+                <a:ea typeface="Calibri" pitchFamily="34" charset="-122"/>
+                <a:cs typeface="Calibri" pitchFamily="34" charset="-120"/>
+              </a:rPr>
+              <a:t>Board-Style Review</a:t>
+            </a:r>
+            <a:endParaRPr lang="en-US" sz="2600" dirty="0"/>
+          </a:p>
+        </p:txBody>
+      </p:sp>
+      <p:sp>
+        <p:nvSpPr>
+          <p:cNvPr id="4" name="Text 2"/>
+          <p:cNvSpPr/>
+          <p:nvPr/>
+        </p:nvSpPr>
+        <p:spPr>
+          <a:xfrm>
+            <a:off x="566928" y="1417320"/>
+            <a:ext cx="11057839" cy="914400"/>
+          </a:xfrm>
+          <a:prstGeom prst="rect">
+            <a:avLst/>
+          </a:prstGeom>
+          <a:noFill/>
+          <a:ln/>
+        </p:spPr>
+        <p:txBody>
+          <a:bodyPr wrap="square" lIns="0" tIns="0" rIns="0" bIns="0" rtlCol="0" anchor="t"/>
+          <a:lstStyle/>
+          <a:p>
+            <a:pPr algn="l" indent="0" marL="0">
+              <a:lnSpc>
+                <a:spcPct val="105000"/>
+              </a:lnSpc>
+              <a:buNone/>
+            </a:pPr>
+            <a:r>
+              <a:rPr lang="en-US" sz="1450" b="1" dirty="0">
+                <a:solidFill>
+                  <a:srgbClr val="1B2A38"/>
+                </a:solidFill>
+                <a:latin typeface="Calibri" pitchFamily="34" charset="0"/>
+                <a:ea typeface="Calibri" pitchFamily="34" charset="-122"/>
+                <a:cs typeface="Calibri" pitchFamily="34" charset="-120"/>
+              </a:rPr>
+              <a:t>Modifying an FDA-cleared assay generally makes it:</a:t>
+            </a:r>
+            <a:endParaRPr lang="en-US" sz="1450" dirty="0"/>
+          </a:p>
+        </p:txBody>
+      </p:sp>
+      <p:sp>
+        <p:nvSpPr>
+          <p:cNvPr id="5" name="Text 3"/>
+          <p:cNvSpPr/>
+          <p:nvPr/>
+        </p:nvSpPr>
+        <p:spPr>
+          <a:xfrm>
+            <a:off x="658368" y="2395728"/>
+            <a:ext cx="6192390" cy="3017520"/>
+          </a:xfrm>
+          <a:prstGeom prst="rect">
+            <a:avLst/>
+          </a:prstGeom>
+          <a:noFill/>
+          <a:ln/>
+        </p:spPr>
+        <p:txBody>
+          <a:bodyPr wrap="square" lIns="0" tIns="0" rIns="0" bIns="0" rtlCol="0" anchor="t"/>
+          <a:lstStyle/>
+          <a:p>
+            <a:pPr algn="l" indent="0" marL="0">
+              <a:spcAft>
+                <a:spcPts val="600"/>
+              </a:spcAft>
+              <a:buNone/>
+            </a:pPr>
+            <a:r>
+              <a:rPr lang="en-US" sz="1350" dirty="0">
+                <a:solidFill>
+                  <a:srgbClr val="33444F"/>
+                </a:solidFill>
+                <a:latin typeface="Calibri" pitchFamily="34" charset="0"/>
+                <a:ea typeface="Calibri" pitchFamily="34" charset="-122"/>
+                <a:cs typeface="Calibri" pitchFamily="34" charset="-120"/>
+              </a:rPr>
+              <a:t>A. Waived</a:t>
+            </a:r>
+            <a:endParaRPr lang="en-US" sz="1350" dirty="0"/>
+          </a:p>
+          <a:p>
+            <a:pPr algn="l" indent="0" marL="0">
+              <a:spcAft>
+                <a:spcPts val="600"/>
+              </a:spcAft>
+              <a:buNone/>
+            </a:pPr>
+            <a:r>
+              <a:rPr lang="en-US" sz="1350" dirty="0">
+                <a:solidFill>
+                  <a:srgbClr val="33444F"/>
+                </a:solidFill>
+                <a:latin typeface="Calibri" pitchFamily="34" charset="0"/>
+                <a:ea typeface="Calibri" pitchFamily="34" charset="-122"/>
+                <a:cs typeface="Calibri" pitchFamily="34" charset="-120"/>
+              </a:rPr>
+              <a:t>B. Moderate complexity</a:t>
+            </a:r>
+            <a:endParaRPr lang="en-US" sz="1350" dirty="0"/>
+          </a:p>
+          <a:p>
+            <a:pPr algn="l" indent="0" marL="0">
+              <a:spcAft>
+                <a:spcPts val="600"/>
+              </a:spcAft>
+              <a:buNone/>
+            </a:pPr>
+            <a:r>
+              <a:rPr lang="en-US" sz="1350" b="1" dirty="0">
+                <a:solidFill>
+                  <a:srgbClr val="2C3A41"/>
+                </a:solidFill>
+                <a:latin typeface="Calibri" pitchFamily="34" charset="0"/>
+                <a:ea typeface="Calibri" pitchFamily="34" charset="-122"/>
+                <a:cs typeface="Calibri" pitchFamily="34" charset="-120"/>
+              </a:rPr>
+              <a:t>C. High complexity requiring full validation</a:t>
+            </a:r>
+            <a:endParaRPr lang="en-US" sz="1350" dirty="0"/>
+          </a:p>
+          <a:p>
+            <a:pPr algn="l" indent="0" marL="0">
+              <a:spcAft>
+                <a:spcPts val="600"/>
+              </a:spcAft>
+              <a:buNone/>
+            </a:pPr>
+            <a:r>
+              <a:rPr lang="en-US" sz="1350" dirty="0">
+                <a:solidFill>
+                  <a:srgbClr val="33444F"/>
+                </a:solidFill>
+                <a:latin typeface="Calibri" pitchFamily="34" charset="0"/>
+                <a:ea typeface="Calibri" pitchFamily="34" charset="-122"/>
+                <a:cs typeface="Calibri" pitchFamily="34" charset="-120"/>
+              </a:rPr>
+              <a:t>D. Exempt from CLIA</a:t>
+            </a:r>
+            <a:endParaRPr lang="en-US" sz="1350" dirty="0"/>
+          </a:p>
+          <a:p>
+            <a:pPr algn="l" indent="0" marL="0">
+              <a:spcAft>
+                <a:spcPts val="600"/>
+              </a:spcAft>
+              <a:buNone/>
+            </a:pPr>
+            <a:r>
+              <a:rPr lang="en-US" sz="1350" dirty="0">
+                <a:solidFill>
+                  <a:srgbClr val="33444F"/>
+                </a:solidFill>
+                <a:latin typeface="Calibri" pitchFamily="34" charset="0"/>
+                <a:ea typeface="Calibri" pitchFamily="34" charset="-122"/>
+                <a:cs typeface="Calibri" pitchFamily="34" charset="-120"/>
+              </a:rPr>
+              <a:t>E. Research-use only by default</a:t>
+            </a:r>
+            <a:endParaRPr lang="en-US" sz="1350" dirty="0"/>
+          </a:p>
+        </p:txBody>
+      </p:sp>
+      <p:sp>
+        <p:nvSpPr>
+          <p:cNvPr id="6" name="Shape 4"/>
+          <p:cNvSpPr/>
+          <p:nvPr/>
+        </p:nvSpPr>
+        <p:spPr>
+          <a:xfrm>
+            <a:off x="7201632" y="2395728"/>
+            <a:ext cx="4423136" cy="3246120"/>
+          </a:xfrm>
+          <a:prstGeom prst="roundRect">
+            <a:avLst>
+              <a:gd name="adj" fmla="val 2535"/>
+            </a:avLst>
+          </a:prstGeom>
+          <a:solidFill>
+            <a:srgbClr val="ECEFF1"/>
+          </a:solidFill>
+          <a:ln/>
+          <a:effectLst>
+            <a:outerShdw sx="100000" sy="100000" kx="0" ky="0" algn="bl" rotWithShape="0" blurRad="88900" dist="25400" dir="5400000">
+              <a:srgbClr val="22303C">
+                <a:alpha val="12000"/>
+              </a:srgbClr>
+            </a:outerShdw>
+          </a:effectLst>
+        </p:spPr>
+      </p:sp>
+      <p:sp>
+        <p:nvSpPr>
+          <p:cNvPr id="7" name="Text 5"/>
+          <p:cNvSpPr/>
+          <p:nvPr/>
+        </p:nvSpPr>
+        <p:spPr>
+          <a:xfrm>
+            <a:off x="7439376" y="2578608"/>
+            <a:ext cx="3965936" cy="457200"/>
+          </a:xfrm>
+          <a:prstGeom prst="rect">
+            <a:avLst/>
+          </a:prstGeom>
+          <a:noFill/>
+          <a:ln/>
+        </p:spPr>
+        <p:txBody>
+          <a:bodyPr wrap="square" lIns="0" tIns="0" rIns="0" bIns="0" rtlCol="0" anchor="ctr"/>
+          <a:lstStyle/>
+          <a:p>
+            <a:pPr indent="0" marL="0">
+              <a:buNone/>
+            </a:pPr>
+            <a:r>
+              <a:rPr lang="en-US" sz="1500" b="1" dirty="0">
+                <a:solidFill>
+                  <a:srgbClr val="455A64"/>
+                </a:solidFill>
+                <a:latin typeface="Calibri" pitchFamily="34" charset="0"/>
+                <a:ea typeface="Calibri" pitchFamily="34" charset="-122"/>
+                <a:cs typeface="Calibri" pitchFamily="34" charset="-120"/>
+              </a:rPr>
+              <a:t>ANSWER  </a:t>
+            </a:r>
+            <a:pPr indent="0" marL="0">
+              <a:buNone/>
+            </a:pPr>
+            <a:r>
+              <a:rPr lang="en-US" sz="1500" b="1" dirty="0">
+                <a:solidFill>
+                  <a:srgbClr val="1B2A38"/>
+                </a:solidFill>
+                <a:latin typeface="Calibri" pitchFamily="34" charset="0"/>
+                <a:ea typeface="Calibri" pitchFamily="34" charset="-122"/>
+                <a:cs typeface="Calibri" pitchFamily="34" charset="-120"/>
+              </a:rPr>
+              <a:t>C — High complexity, full validation</a:t>
+            </a:r>
+            <a:endParaRPr lang="en-US" sz="1500" dirty="0"/>
+          </a:p>
+        </p:txBody>
+      </p:sp>
+      <p:sp>
+        <p:nvSpPr>
+          <p:cNvPr id="8" name="Text 6"/>
+          <p:cNvSpPr/>
+          <p:nvPr/>
+        </p:nvSpPr>
+        <p:spPr>
+          <a:xfrm>
+            <a:off x="7439376" y="3127248"/>
+            <a:ext cx="3947648" cy="2377440"/>
+          </a:xfrm>
+          <a:prstGeom prst="rect">
+            <a:avLst/>
+          </a:prstGeom>
+          <a:noFill/>
+          <a:ln/>
+        </p:spPr>
+        <p:txBody>
+          <a:bodyPr wrap="square" lIns="0" tIns="0" rIns="0" bIns="0" rtlCol="0" anchor="t"/>
+          <a:lstStyle/>
+          <a:p>
+            <a:pPr algn="l" indent="0" marL="0">
+              <a:lnSpc>
+                <a:spcPct val="108000"/>
+              </a:lnSpc>
+              <a:buNone/>
+            </a:pPr>
+            <a:r>
+              <a:rPr lang="en-US" sz="1250" dirty="0">
+                <a:solidFill>
+                  <a:srgbClr val="33444F"/>
+                </a:solidFill>
+                <a:latin typeface="Calibri" pitchFamily="34" charset="0"/>
+                <a:ea typeface="Calibri" pitchFamily="34" charset="-122"/>
+                <a:cs typeface="Calibri" pitchFamily="34" charset="-120"/>
+              </a:rPr>
+              <a:t>Modifications void the cleared status; the lab must fully validate the test as high complexity.</a:t>
+            </a:r>
+            <a:endParaRPr lang="en-US" sz="1250" dirty="0"/>
+          </a:p>
+        </p:txBody>
+      </p:sp>
+      <p:sp>
+        <p:nvSpPr>
+          <p:cNvPr id="9" name="Text 7"/>
+          <p:cNvSpPr/>
+          <p:nvPr/>
+        </p:nvSpPr>
+        <p:spPr>
+          <a:xfrm>
+            <a:off x="566928" y="6473952"/>
+            <a:ext cx="7772400" cy="274320"/>
+          </a:xfrm>
+          <a:prstGeom prst="rect">
+            <a:avLst/>
+          </a:prstGeom>
+          <a:noFill/>
+          <a:ln/>
+        </p:spPr>
+        <p:txBody>
+          <a:bodyPr wrap="square" lIns="0" tIns="0" rIns="0" bIns="0" rtlCol="0" anchor="ctr"/>
+          <a:lstStyle/>
+          <a:p>
+            <a:pPr algn="l" indent="0" marL="0">
+              <a:buNone/>
+            </a:pPr>
+            <a:r>
+              <a:rPr lang="en-US" sz="850" dirty="0">
+                <a:solidFill>
+                  <a:srgbClr val="9AA8B4"/>
+                </a:solidFill>
+                <a:latin typeface="Calibri" pitchFamily="34" charset="0"/>
+                <a:ea typeface="Calibri" pitchFamily="34" charset="-122"/>
+                <a:cs typeface="Calibri" pitchFamily="34" charset="-120"/>
+              </a:rPr>
+              <a:t>Makassed General Hospital  ·  Department of Laboratory Medicine</a:t>
+            </a:r>
+            <a:endParaRPr lang="en-US" sz="850" dirty="0"/>
+          </a:p>
+        </p:txBody>
+      </p:sp>
+      <p:sp>
+        <p:nvSpPr>
+          <p:cNvPr id="10" name="Text 8"/>
+          <p:cNvSpPr/>
+          <p:nvPr/>
+        </p:nvSpPr>
+        <p:spPr>
+          <a:xfrm>
+            <a:off x="9814255" y="6473952"/>
+            <a:ext cx="1828800" cy="274320"/>
+          </a:xfrm>
+          <a:prstGeom prst="rect">
+            <a:avLst/>
+          </a:prstGeom>
+          <a:noFill/>
+          <a:ln/>
+        </p:spPr>
+        <p:txBody>
+          <a:bodyPr wrap="square" lIns="0" tIns="0" rIns="0" bIns="0" rtlCol="0" anchor="ctr"/>
+          <a:lstStyle/>
+          <a:p>
+            <a:pPr algn="r" indent="0" marL="0">
+              <a:buNone/>
+            </a:pPr>
+            <a:r>
+              <a:rPr lang="en-US" sz="850" dirty="0">
+                <a:solidFill>
+                  <a:srgbClr val="9AA8B4"/>
+                </a:solidFill>
+                <a:latin typeface="Calibri" pitchFamily="34" charset="0"/>
+                <a:ea typeface="Calibri" pitchFamily="34" charset="-122"/>
+                <a:cs typeface="Calibri" pitchFamily="34" charset="-120"/>
+              </a:rPr>
+              <a:t>CP Lecture Series</a:t>
+            </a:r>
+            <a:pPr algn="r" indent="0" marL="0">
+              <a:buNone/>
+            </a:pPr>
+            <a:r>
+              <a:rPr lang="en-US" sz="850" dirty="0">
+                <a:solidFill>
+                  <a:srgbClr val="DCE4EC"/>
+                </a:solidFill>
+                <a:latin typeface="Calibri" pitchFamily="34" charset="0"/>
+                <a:ea typeface="Calibri" pitchFamily="34" charset="-122"/>
+                <a:cs typeface="Calibri" pitchFamily="34" charset="-120"/>
+              </a:rPr>
+              <a:t>   ·   </a:t>
+            </a:r>
+            <a:pPr algn="r" indent="0" marL="0">
+              <a:buNone/>
+            </a:pPr>
+            <a:r>
+              <a:rPr lang="en-US" sz="850" b="1" dirty="0">
+                <a:solidFill>
+                  <a:srgbClr val="455A64"/>
+                </a:solidFill>
+                <a:latin typeface="Calibri" pitchFamily="34" charset="0"/>
+                <a:ea typeface="Calibri" pitchFamily="34" charset="-122"/>
+                <a:cs typeface="Calibri" pitchFamily="34" charset="-120"/>
+              </a:rPr>
+              <a:t>19</a:t>
+            </a:r>
+            <a:endParaRPr lang="en-US" sz="850" dirty="0"/>
+          </a:p>
+        </p:txBody>
+      </p:sp>
+    </p:spTree>
+  </p:cSld>
+  <p:clrMapOvr>
+    <a:masterClrMapping/>
+  </p:clrMapOvr>
+</p:sld>
+</file>
+
+<file path=ppt/slides/slide23.xml><?xml version="1.0" encoding="utf-8"?>
+<p:sld xmlns:a="http://schemas.openxmlformats.org/drawingml/2006/main" xmlns:r="http://schemas.openxmlformats.org/officeDocument/2006/relationships" xmlns:p="http://schemas.openxmlformats.org/presentationml/2006/main">
+  <p:cSld name="Slide 23">
+    <p:bg>
+      <p:bgPr>
+        <a:solidFill>
+          <a:srgbClr val="FFFFFF"/>
+        </a:solidFill>
+      </p:bgPr>
+    </p:bg>
+    <p:spTree>
+      <p:nvGrpSpPr>
+        <p:cNvPr id="1" name=""/>
+        <p:cNvGrpSpPr/>
+        <p:nvPr/>
+      </p:nvGrpSpPr>
+      <p:grpSpPr>
+        <a:xfrm>
+          <a:off x="0" y="0"/>
+          <a:ext cx="0" cy="0"/>
+          <a:chOff x="0" y="0"/>
+          <a:chExt cx="0" cy="0"/>
+        </a:xfrm>
+      </p:grpSpPr>
+      <p:sp>
+        <p:nvSpPr>
+          <p:cNvPr id="2" name="Text 0"/>
+          <p:cNvSpPr/>
+          <p:nvPr/>
+        </p:nvSpPr>
+        <p:spPr>
+          <a:xfrm>
+            <a:off x="566928" y="329184"/>
+            <a:ext cx="10515600" cy="310896"/>
+          </a:xfrm>
+          <a:prstGeom prst="rect">
+            <a:avLst/>
+          </a:prstGeom>
+          <a:noFill/>
+          <a:ln/>
+        </p:spPr>
+        <p:txBody>
+          <a:bodyPr wrap="square" lIns="0" tIns="0" rIns="0" bIns="0" rtlCol="0" anchor="ctr"/>
+          <a:lstStyle/>
+          <a:p>
+            <a:pPr algn="l" indent="0" marL="0">
+              <a:buNone/>
+            </a:pPr>
+            <a:r>
+              <a:rPr lang="en-US" sz="1100" b="1" spc="150" kern="0" dirty="0">
+                <a:solidFill>
+                  <a:srgbClr val="455A64"/>
+                </a:solidFill>
+                <a:latin typeface="Calibri" pitchFamily="34" charset="0"/>
+                <a:ea typeface="Calibri" pitchFamily="34" charset="-122"/>
+                <a:cs typeface="Calibri" pitchFamily="34" charset="-120"/>
+              </a:rPr>
+              <a:t>LAB MANAGEMENT &amp; QUALITY   ·   BOARD REVIEW  ·  Q4</a:t>
+            </a:r>
+            <a:endParaRPr lang="en-US" sz="1100" dirty="0"/>
+          </a:p>
+        </p:txBody>
+      </p:sp>
+      <p:sp>
+        <p:nvSpPr>
+          <p:cNvPr id="3" name="Text 1"/>
+          <p:cNvSpPr/>
+          <p:nvPr/>
+        </p:nvSpPr>
+        <p:spPr>
+          <a:xfrm>
+            <a:off x="566928" y="713232"/>
+            <a:ext cx="11064240" cy="749808"/>
+          </a:xfrm>
+          <a:prstGeom prst="rect">
+            <a:avLst/>
+          </a:prstGeom>
+          <a:noFill/>
+          <a:ln/>
+        </p:spPr>
+        <p:txBody>
+          <a:bodyPr wrap="square" lIns="0" tIns="0" rIns="0" bIns="0" rtlCol="0" anchor="ctr"/>
+          <a:lstStyle/>
+          <a:p>
+            <a:pPr algn="l" indent="0" marL="0">
+              <a:buNone/>
+            </a:pPr>
+            <a:r>
+              <a:rPr lang="en-US" sz="2600" b="1" dirty="0">
+                <a:solidFill>
+                  <a:srgbClr val="0E3A5F"/>
+                </a:solidFill>
+                <a:latin typeface="Calibri" pitchFamily="34" charset="0"/>
+                <a:ea typeface="Calibri" pitchFamily="34" charset="-122"/>
+                <a:cs typeface="Calibri" pitchFamily="34" charset="-120"/>
+              </a:rPr>
+              <a:t>Board-Style Review</a:t>
+            </a:r>
+            <a:endParaRPr lang="en-US" sz="2600" dirty="0"/>
+          </a:p>
+        </p:txBody>
+      </p:sp>
+      <p:sp>
+        <p:nvSpPr>
+          <p:cNvPr id="4" name="Text 2"/>
+          <p:cNvSpPr/>
+          <p:nvPr/>
+        </p:nvSpPr>
+        <p:spPr>
+          <a:xfrm>
+            <a:off x="566928" y="1417320"/>
+            <a:ext cx="11057839" cy="914400"/>
+          </a:xfrm>
+          <a:prstGeom prst="rect">
+            <a:avLst/>
+          </a:prstGeom>
+          <a:noFill/>
+          <a:ln/>
+        </p:spPr>
+        <p:txBody>
+          <a:bodyPr wrap="square" lIns="0" tIns="0" rIns="0" bIns="0" rtlCol="0" anchor="t"/>
+          <a:lstStyle/>
+          <a:p>
+            <a:pPr algn="l" indent="0" marL="0">
+              <a:lnSpc>
+                <a:spcPct val="105000"/>
+              </a:lnSpc>
+              <a:buNone/>
+            </a:pPr>
+            <a:r>
+              <a:rPr lang="en-US" sz="1450" b="1" dirty="0">
+                <a:solidFill>
+                  <a:srgbClr val="1B2A38"/>
+                </a:solidFill>
+                <a:latin typeface="Calibri" pitchFamily="34" charset="0"/>
+                <a:ea typeface="Calibri" pitchFamily="34" charset="-122"/>
+                <a:cs typeface="Calibri" pitchFamily="34" charset="-120"/>
+              </a:rPr>
+              <a:t>Accreditation with deemed status means the laboratory:</a:t>
+            </a:r>
+            <a:endParaRPr lang="en-US" sz="1450" dirty="0"/>
+          </a:p>
+        </p:txBody>
+      </p:sp>
+      <p:sp>
+        <p:nvSpPr>
+          <p:cNvPr id="5" name="Text 3"/>
+          <p:cNvSpPr/>
+          <p:nvPr/>
+        </p:nvSpPr>
+        <p:spPr>
+          <a:xfrm>
+            <a:off x="658368" y="2395728"/>
+            <a:ext cx="6192390" cy="3017520"/>
+          </a:xfrm>
+          <a:prstGeom prst="rect">
+            <a:avLst/>
+          </a:prstGeom>
+          <a:noFill/>
+          <a:ln/>
+        </p:spPr>
+        <p:txBody>
+          <a:bodyPr wrap="square" lIns="0" tIns="0" rIns="0" bIns="0" rtlCol="0" anchor="t"/>
+          <a:lstStyle/>
+          <a:p>
+            <a:pPr algn="l" indent="0" marL="0">
+              <a:spcAft>
+                <a:spcPts val="600"/>
+              </a:spcAft>
+              <a:buNone/>
+            </a:pPr>
+            <a:r>
+              <a:rPr lang="en-US" sz="1350" dirty="0">
+                <a:solidFill>
+                  <a:srgbClr val="33444F"/>
+                </a:solidFill>
+                <a:latin typeface="Calibri" pitchFamily="34" charset="0"/>
+                <a:ea typeface="Calibri" pitchFamily="34" charset="-122"/>
+                <a:cs typeface="Calibri" pitchFamily="34" charset="-120"/>
+              </a:rPr>
+              <a:t>A. Is exempt from CLIA</a:t>
+            </a:r>
+            <a:endParaRPr lang="en-US" sz="1350" dirty="0"/>
+          </a:p>
+          <a:p>
+            <a:pPr algn="l" indent="0" marL="0">
+              <a:spcAft>
+                <a:spcPts val="600"/>
+              </a:spcAft>
+              <a:buNone/>
+            </a:pPr>
+            <a:r>
+              <a:rPr lang="en-US" sz="1350" b="1" dirty="0">
+                <a:solidFill>
+                  <a:srgbClr val="2C3A41"/>
+                </a:solidFill>
+                <a:latin typeface="Calibri" pitchFamily="34" charset="0"/>
+                <a:ea typeface="Calibri" pitchFamily="34" charset="-122"/>
+                <a:cs typeface="Calibri" pitchFamily="34" charset="-120"/>
+              </a:rPr>
+              <a:t>B. Meets CLIA through the accreditor’s inspection</a:t>
+            </a:r>
+            <a:endParaRPr lang="en-US" sz="1350" dirty="0"/>
+          </a:p>
+          <a:p>
+            <a:pPr algn="l" indent="0" marL="0">
+              <a:spcAft>
+                <a:spcPts val="600"/>
+              </a:spcAft>
+              <a:buNone/>
+            </a:pPr>
+            <a:r>
+              <a:rPr lang="en-US" sz="1350" dirty="0">
+                <a:solidFill>
+                  <a:srgbClr val="33444F"/>
+                </a:solidFill>
+                <a:latin typeface="Calibri" pitchFamily="34" charset="0"/>
+                <a:ea typeface="Calibri" pitchFamily="34" charset="-122"/>
+                <a:cs typeface="Calibri" pitchFamily="34" charset="-120"/>
+              </a:rPr>
+              <a:t>C. Needs no proficiency testing</a:t>
+            </a:r>
+            <a:endParaRPr lang="en-US" sz="1350" dirty="0"/>
+          </a:p>
+          <a:p>
+            <a:pPr algn="l" indent="0" marL="0">
+              <a:spcAft>
+                <a:spcPts val="600"/>
+              </a:spcAft>
+              <a:buNone/>
+            </a:pPr>
+            <a:r>
+              <a:rPr lang="en-US" sz="1350" dirty="0">
+                <a:solidFill>
+                  <a:srgbClr val="33444F"/>
+                </a:solidFill>
+                <a:latin typeface="Calibri" pitchFamily="34" charset="0"/>
+                <a:ea typeface="Calibri" pitchFamily="34" charset="-122"/>
+                <a:cs typeface="Calibri" pitchFamily="34" charset="-120"/>
+              </a:rPr>
+              <a:t>D. Cannot be inspected</a:t>
+            </a:r>
+            <a:endParaRPr lang="en-US" sz="1350" dirty="0"/>
+          </a:p>
+          <a:p>
+            <a:pPr algn="l" indent="0" marL="0">
+              <a:spcAft>
+                <a:spcPts val="600"/>
+              </a:spcAft>
+              <a:buNone/>
+            </a:pPr>
+            <a:r>
+              <a:rPr lang="en-US" sz="1350" dirty="0">
+                <a:solidFill>
+                  <a:srgbClr val="33444F"/>
+                </a:solidFill>
+                <a:latin typeface="Calibri" pitchFamily="34" charset="0"/>
+                <a:ea typeface="Calibri" pitchFamily="34" charset="-122"/>
+                <a:cs typeface="Calibri" pitchFamily="34" charset="-120"/>
+              </a:rPr>
+              <a:t>E. Is research-only</a:t>
+            </a:r>
+            <a:endParaRPr lang="en-US" sz="1350" dirty="0"/>
+          </a:p>
+        </p:txBody>
+      </p:sp>
+      <p:sp>
+        <p:nvSpPr>
+          <p:cNvPr id="6" name="Shape 4"/>
+          <p:cNvSpPr/>
+          <p:nvPr/>
+        </p:nvSpPr>
+        <p:spPr>
+          <a:xfrm>
+            <a:off x="7201632" y="2395728"/>
+            <a:ext cx="4423136" cy="3246120"/>
+          </a:xfrm>
+          <a:prstGeom prst="roundRect">
+            <a:avLst>
+              <a:gd name="adj" fmla="val 2535"/>
+            </a:avLst>
+          </a:prstGeom>
+          <a:solidFill>
+            <a:srgbClr val="ECEFF1"/>
+          </a:solidFill>
+          <a:ln/>
+          <a:effectLst>
+            <a:outerShdw sx="100000" sy="100000" kx="0" ky="0" algn="bl" rotWithShape="0" blurRad="88900" dist="25400" dir="5400000">
+              <a:srgbClr val="22303C">
+                <a:alpha val="12000"/>
+              </a:srgbClr>
+            </a:outerShdw>
+          </a:effectLst>
+        </p:spPr>
+      </p:sp>
+      <p:sp>
+        <p:nvSpPr>
+          <p:cNvPr id="7" name="Text 5"/>
+          <p:cNvSpPr/>
+          <p:nvPr/>
+        </p:nvSpPr>
+        <p:spPr>
+          <a:xfrm>
+            <a:off x="7439376" y="2578608"/>
+            <a:ext cx="3965936" cy="457200"/>
+          </a:xfrm>
+          <a:prstGeom prst="rect">
+            <a:avLst/>
+          </a:prstGeom>
+          <a:noFill/>
+          <a:ln/>
+        </p:spPr>
+        <p:txBody>
+          <a:bodyPr wrap="square" lIns="0" tIns="0" rIns="0" bIns="0" rtlCol="0" anchor="ctr"/>
+          <a:lstStyle/>
+          <a:p>
+            <a:pPr indent="0" marL="0">
+              <a:buNone/>
+            </a:pPr>
+            <a:r>
+              <a:rPr lang="en-US" sz="1500" b="1" dirty="0">
+                <a:solidFill>
+                  <a:srgbClr val="455A64"/>
+                </a:solidFill>
+                <a:latin typeface="Calibri" pitchFamily="34" charset="0"/>
+                <a:ea typeface="Calibri" pitchFamily="34" charset="-122"/>
+                <a:cs typeface="Calibri" pitchFamily="34" charset="-120"/>
+              </a:rPr>
+              <a:t>ANSWER  </a:t>
+            </a:r>
+            <a:pPr indent="0" marL="0">
+              <a:buNone/>
+            </a:pPr>
+            <a:r>
+              <a:rPr lang="en-US" sz="1500" b="1" dirty="0">
+                <a:solidFill>
+                  <a:srgbClr val="1B2A38"/>
+                </a:solidFill>
+                <a:latin typeface="Calibri" pitchFamily="34" charset="0"/>
+                <a:ea typeface="Calibri" pitchFamily="34" charset="-122"/>
+                <a:cs typeface="Calibri" pitchFamily="34" charset="-120"/>
+              </a:rPr>
+              <a:t>B — Meets CLIA via accreditor</a:t>
+            </a:r>
+            <a:endParaRPr lang="en-US" sz="1500" dirty="0"/>
+          </a:p>
+        </p:txBody>
+      </p:sp>
+      <p:sp>
+        <p:nvSpPr>
+          <p:cNvPr id="8" name="Text 6"/>
+          <p:cNvSpPr/>
+          <p:nvPr/>
+        </p:nvSpPr>
+        <p:spPr>
+          <a:xfrm>
+            <a:off x="7439376" y="3127248"/>
+            <a:ext cx="3947648" cy="2377440"/>
+          </a:xfrm>
+          <a:prstGeom prst="rect">
+            <a:avLst/>
+          </a:prstGeom>
+          <a:noFill/>
+          <a:ln/>
+        </p:spPr>
+        <p:txBody>
+          <a:bodyPr wrap="square" lIns="0" tIns="0" rIns="0" bIns="0" rtlCol="0" anchor="t"/>
+          <a:lstStyle/>
+          <a:p>
+            <a:pPr algn="l" indent="0" marL="0">
+              <a:lnSpc>
+                <a:spcPct val="108000"/>
+              </a:lnSpc>
+              <a:buNone/>
+            </a:pPr>
+            <a:r>
+              <a:rPr lang="en-US" sz="1250" dirty="0">
+                <a:solidFill>
+                  <a:srgbClr val="33444F"/>
+                </a:solidFill>
+                <a:latin typeface="Calibri" pitchFamily="34" charset="0"/>
+                <a:ea typeface="Calibri" pitchFamily="34" charset="-122"/>
+                <a:cs typeface="Calibri" pitchFamily="34" charset="-120"/>
+              </a:rPr>
+              <a:t>Deemed-status accreditors enforce standards that satisfy CLIA requirements through their inspection process.</a:t>
+            </a:r>
+            <a:endParaRPr lang="en-US" sz="1250" dirty="0"/>
+          </a:p>
+        </p:txBody>
+      </p:sp>
+      <p:sp>
+        <p:nvSpPr>
+          <p:cNvPr id="9" name="Text 7"/>
+          <p:cNvSpPr/>
+          <p:nvPr/>
+        </p:nvSpPr>
+        <p:spPr>
+          <a:xfrm>
+            <a:off x="566928" y="6473952"/>
+            <a:ext cx="7772400" cy="274320"/>
+          </a:xfrm>
+          <a:prstGeom prst="rect">
+            <a:avLst/>
+          </a:prstGeom>
+          <a:noFill/>
+          <a:ln/>
+        </p:spPr>
+        <p:txBody>
+          <a:bodyPr wrap="square" lIns="0" tIns="0" rIns="0" bIns="0" rtlCol="0" anchor="ctr"/>
+          <a:lstStyle/>
+          <a:p>
+            <a:pPr algn="l" indent="0" marL="0">
+              <a:buNone/>
+            </a:pPr>
+            <a:r>
+              <a:rPr lang="en-US" sz="850" dirty="0">
+                <a:solidFill>
+                  <a:srgbClr val="9AA8B4"/>
+                </a:solidFill>
+                <a:latin typeface="Calibri" pitchFamily="34" charset="0"/>
+                <a:ea typeface="Calibri" pitchFamily="34" charset="-122"/>
+                <a:cs typeface="Calibri" pitchFamily="34" charset="-120"/>
+              </a:rPr>
+              <a:t>Makassed General Hospital  ·  Department of Laboratory Medicine</a:t>
+            </a:r>
+            <a:endParaRPr lang="en-US" sz="850" dirty="0"/>
+          </a:p>
+        </p:txBody>
+      </p:sp>
+      <p:sp>
+        <p:nvSpPr>
+          <p:cNvPr id="10" name="Text 8"/>
+          <p:cNvSpPr/>
+          <p:nvPr/>
+        </p:nvSpPr>
+        <p:spPr>
+          <a:xfrm>
+            <a:off x="9814255" y="6473952"/>
+            <a:ext cx="1828800" cy="274320"/>
+          </a:xfrm>
+          <a:prstGeom prst="rect">
+            <a:avLst/>
+          </a:prstGeom>
+          <a:noFill/>
+          <a:ln/>
+        </p:spPr>
+        <p:txBody>
+          <a:bodyPr wrap="square" lIns="0" tIns="0" rIns="0" bIns="0" rtlCol="0" anchor="ctr"/>
+          <a:lstStyle/>
+          <a:p>
+            <a:pPr algn="r" indent="0" marL="0">
+              <a:buNone/>
+            </a:pPr>
+            <a:r>
+              <a:rPr lang="en-US" sz="850" dirty="0">
+                <a:solidFill>
+                  <a:srgbClr val="9AA8B4"/>
+                </a:solidFill>
+                <a:latin typeface="Calibri" pitchFamily="34" charset="0"/>
+                <a:ea typeface="Calibri" pitchFamily="34" charset="-122"/>
+                <a:cs typeface="Calibri" pitchFamily="34" charset="-120"/>
+              </a:rPr>
+              <a:t>CP Lecture Series</a:t>
+            </a:r>
+            <a:pPr algn="r" indent="0" marL="0">
+              <a:buNone/>
+            </a:pPr>
+            <a:r>
+              <a:rPr lang="en-US" sz="850" dirty="0">
+                <a:solidFill>
+                  <a:srgbClr val="DCE4EC"/>
+                </a:solidFill>
+                <a:latin typeface="Calibri" pitchFamily="34" charset="0"/>
+                <a:ea typeface="Calibri" pitchFamily="34" charset="-122"/>
+                <a:cs typeface="Calibri" pitchFamily="34" charset="-120"/>
+              </a:rPr>
+              <a:t>   ·   </a:t>
+            </a:r>
+            <a:pPr algn="r" indent="0" marL="0">
+              <a:buNone/>
+            </a:pPr>
+            <a:r>
+              <a:rPr lang="en-US" sz="850" b="1" dirty="0">
+                <a:solidFill>
+                  <a:srgbClr val="455A64"/>
+                </a:solidFill>
+                <a:latin typeface="Calibri" pitchFamily="34" charset="0"/>
+                <a:ea typeface="Calibri" pitchFamily="34" charset="-122"/>
+                <a:cs typeface="Calibri" pitchFamily="34" charset="-120"/>
+              </a:rPr>
+              <a:t>20</a:t>
+            </a:r>
+            <a:endParaRPr lang="en-US" sz="850" dirty="0"/>
+          </a:p>
+        </p:txBody>
+      </p:sp>
+    </p:spTree>
+  </p:cSld>
+  <p:clrMapOvr>
+    <a:masterClrMapping/>
+  </p:clrMapOvr>
+</p:sld>
+</file>
+
+<file path=ppt/slides/slide24.xml><?xml version="1.0" encoding="utf-8"?>
+<p:sld xmlns:a="http://schemas.openxmlformats.org/drawingml/2006/main" xmlns:r="http://schemas.openxmlformats.org/officeDocument/2006/relationships" xmlns:p="http://schemas.openxmlformats.org/presentationml/2006/main">
+  <p:cSld name="Slide 24">
+    <p:bg>
+      <p:bgPr>
+        <a:solidFill>
+          <a:srgbClr val="0A2A45"/>
+        </a:solidFill>
+      </p:bgPr>
+    </p:bg>
+    <p:spTree>
+      <p:nvGrpSpPr>
+        <p:cNvPr id="1" name=""/>
+        <p:cNvGrpSpPr/>
+        <p:nvPr/>
+      </p:nvGrpSpPr>
+      <p:grpSpPr>
+        <a:xfrm>
+          <a:off x="0" y="0"/>
+          <a:ext cx="0" cy="0"/>
+          <a:chOff x="0" y="0"/>
+          <a:chExt cx="0" cy="0"/>
+        </a:xfrm>
+      </p:grpSpPr>
+      <p:sp>
+        <p:nvSpPr>
+          <p:cNvPr id="2" name="Text 0"/>
+          <p:cNvSpPr/>
+          <p:nvPr/>
+        </p:nvSpPr>
+        <p:spPr>
+          <a:xfrm>
+            <a:off x="566928" y="329184"/>
+            <a:ext cx="10058400" cy="310896"/>
+          </a:xfrm>
+          <a:prstGeom prst="rect">
+            <a:avLst/>
+          </a:prstGeom>
+          <a:noFill/>
+          <a:ln/>
+        </p:spPr>
+        <p:txBody>
+          <a:bodyPr wrap="square" lIns="0" tIns="0" rIns="0" bIns="0" rtlCol="0" anchor="ctr"/>
+          <a:lstStyle/>
+          <a:p>
+            <a:pPr indent="0" marL="0">
+              <a:buNone/>
+            </a:pPr>
+            <a:r>
+              <a:rPr lang="en-US" sz="1100" b="1" spc="150" kern="0" dirty="0">
+                <a:solidFill>
+                  <a:srgbClr val="455A64"/>
+                </a:solidFill>
+                <a:latin typeface="Calibri" pitchFamily="34" charset="0"/>
+                <a:ea typeface="Calibri" pitchFamily="34" charset="-122"/>
+                <a:cs typeface="Calibri" pitchFamily="34" charset="-120"/>
+              </a:rPr>
+              <a:t>LAB MANAGEMENT &amp; QUALITY</a:t>
+            </a:r>
+            <a:endParaRPr lang="en-US" sz="1100" dirty="0"/>
+          </a:p>
+        </p:txBody>
+      </p:sp>
+      <p:sp>
+        <p:nvSpPr>
+          <p:cNvPr id="3" name="Text 1"/>
+          <p:cNvSpPr/>
+          <p:nvPr/>
+        </p:nvSpPr>
+        <p:spPr>
+          <a:xfrm>
+            <a:off x="566928" y="676656"/>
+            <a:ext cx="10972800" cy="749808"/>
+          </a:xfrm>
+          <a:prstGeom prst="rect">
+            <a:avLst/>
+          </a:prstGeom>
+          <a:noFill/>
+          <a:ln/>
+        </p:spPr>
+        <p:txBody>
+          <a:bodyPr wrap="square" lIns="0" tIns="0" rIns="0" bIns="0" rtlCol="0" anchor="ctr"/>
+          <a:lstStyle/>
+          <a:p>
+            <a:pPr indent="0" marL="0">
+              <a:buNone/>
+            </a:pPr>
+            <a:r>
+              <a:rPr lang="en-US" sz="3000" b="1" dirty="0">
+                <a:solidFill>
+                  <a:srgbClr val="FFFFFF"/>
+                </a:solidFill>
+                <a:latin typeface="Calibri" pitchFamily="34" charset="0"/>
+                <a:ea typeface="Calibri" pitchFamily="34" charset="-122"/>
+                <a:cs typeface="Calibri" pitchFamily="34" charset="-120"/>
+              </a:rPr>
+              <a:t>Key Take-Home Points</a:t>
+            </a:r>
+            <a:endParaRPr lang="en-US" sz="3000" dirty="0"/>
+          </a:p>
+        </p:txBody>
+      </p:sp>
+      <p:sp>
+        <p:nvSpPr>
+          <p:cNvPr id="4" name="Shape 2"/>
+          <p:cNvSpPr/>
+          <p:nvPr/>
+        </p:nvSpPr>
+        <p:spPr>
+          <a:xfrm>
+            <a:off x="566928" y="1517904"/>
+            <a:ext cx="11057839" cy="841248"/>
+          </a:xfrm>
+          <a:prstGeom prst="roundRect">
+            <a:avLst>
+              <a:gd name="adj" fmla="val 7609"/>
+            </a:avLst>
+          </a:prstGeom>
+          <a:solidFill>
+            <a:srgbClr val="143651"/>
+          </a:solidFill>
+          <a:ln/>
+        </p:spPr>
+      </p:sp>
+      <p:sp>
+        <p:nvSpPr>
+          <p:cNvPr id="5" name="Shape 3"/>
+          <p:cNvSpPr/>
+          <p:nvPr/>
+        </p:nvSpPr>
+        <p:spPr>
+          <a:xfrm>
+            <a:off x="749808" y="1755648"/>
+            <a:ext cx="365760" cy="365760"/>
+          </a:xfrm>
+          <a:prstGeom prst="ellipse">
+            <a:avLst/>
+          </a:prstGeom>
+          <a:solidFill>
+            <a:srgbClr val="455A64"/>
+          </a:solidFill>
+          <a:ln/>
+          <a:effectLst>
+            <a:outerShdw sx="100000" sy="100000" kx="0" ky="0" algn="bl" rotWithShape="0" blurRad="88900" dist="25400" dir="5400000">
+              <a:srgbClr val="22303C">
+                <a:alpha val="12000"/>
+              </a:srgbClr>
+            </a:outerShdw>
+          </a:effectLst>
+        </p:spPr>
+      </p:sp>
+      <p:sp>
+        <p:nvSpPr>
+          <p:cNvPr id="6" name="Text 4"/>
+          <p:cNvSpPr/>
+          <p:nvPr/>
+        </p:nvSpPr>
+        <p:spPr>
+          <a:xfrm>
+            <a:off x="749808" y="1755648"/>
+            <a:ext cx="365760" cy="365760"/>
+          </a:xfrm>
+          <a:prstGeom prst="rect">
+            <a:avLst/>
+          </a:prstGeom>
+          <a:noFill/>
+          <a:ln/>
+        </p:spPr>
+        <p:txBody>
+          <a:bodyPr wrap="square" lIns="0" tIns="0" rIns="0" bIns="0" rtlCol="0" anchor="ctr"/>
+          <a:lstStyle/>
+          <a:p>
+            <a:pPr algn="ctr" indent="0" marL="0">
+              <a:buNone/>
+            </a:pPr>
+            <a:r>
+              <a:rPr lang="en-US" sz="1500" b="1" dirty="0">
+                <a:solidFill>
+                  <a:srgbClr val="FFFFFF"/>
+                </a:solidFill>
+                <a:latin typeface="Calibri" pitchFamily="34" charset="0"/>
+                <a:ea typeface="Calibri" pitchFamily="34" charset="-122"/>
+                <a:cs typeface="Calibri" pitchFamily="34" charset="-120"/>
+              </a:rPr>
+              <a:t>1</a:t>
+            </a:r>
+            <a:endParaRPr lang="en-US" sz="1500" dirty="0"/>
+          </a:p>
+        </p:txBody>
+      </p:sp>
+      <p:sp>
+        <p:nvSpPr>
+          <p:cNvPr id="7" name="Text 5"/>
+          <p:cNvSpPr/>
+          <p:nvPr/>
+        </p:nvSpPr>
+        <p:spPr>
+          <a:xfrm>
+            <a:off x="1280160" y="1517904"/>
+            <a:ext cx="10143439" cy="841248"/>
+          </a:xfrm>
+          <a:prstGeom prst="rect">
+            <a:avLst/>
+          </a:prstGeom>
+          <a:noFill/>
+          <a:ln/>
+        </p:spPr>
+        <p:txBody>
+          <a:bodyPr wrap="square" lIns="0" tIns="0" rIns="0" bIns="0" rtlCol="0" anchor="ctr"/>
+          <a:lstStyle/>
+          <a:p>
+            <a:pPr algn="l" indent="0" marL="0">
+              <a:buNone/>
+            </a:pPr>
+            <a:r>
+              <a:rPr lang="en-US" sz="1350" dirty="0">
+                <a:solidFill>
+                  <a:srgbClr val="E7EEF4"/>
+                </a:solidFill>
+                <a:latin typeface="Calibri" pitchFamily="34" charset="0"/>
+                <a:ea typeface="Calibri" pitchFamily="34" charset="-122"/>
+                <a:cs typeface="Calibri" pitchFamily="34" charset="-120"/>
+              </a:rPr>
+              <a:t>CLIA is the federal floor; accreditation (with deemed status) and ISO 15189 build on it; PT verifies performance externally.</a:t>
+            </a:r>
+            <a:endParaRPr lang="en-US" sz="1350" dirty="0"/>
+          </a:p>
+        </p:txBody>
+      </p:sp>
+      <p:sp>
+        <p:nvSpPr>
+          <p:cNvPr id="8" name="Shape 6"/>
+          <p:cNvSpPr/>
+          <p:nvPr/>
+        </p:nvSpPr>
+        <p:spPr>
+          <a:xfrm>
+            <a:off x="566928" y="2505456"/>
+            <a:ext cx="11057839" cy="841248"/>
+          </a:xfrm>
+          <a:prstGeom prst="roundRect">
+            <a:avLst>
+              <a:gd name="adj" fmla="val 7609"/>
+            </a:avLst>
+          </a:prstGeom>
+          <a:solidFill>
+            <a:srgbClr val="143651"/>
+          </a:solidFill>
+          <a:ln/>
+        </p:spPr>
+      </p:sp>
+      <p:sp>
+        <p:nvSpPr>
+          <p:cNvPr id="9" name="Shape 7"/>
+          <p:cNvSpPr/>
+          <p:nvPr/>
+        </p:nvSpPr>
+        <p:spPr>
+          <a:xfrm>
+            <a:off x="749808" y="2743200"/>
+            <a:ext cx="365760" cy="365760"/>
+          </a:xfrm>
+          <a:prstGeom prst="ellipse">
+            <a:avLst/>
+          </a:prstGeom>
+          <a:solidFill>
+            <a:srgbClr val="455A64"/>
+          </a:solidFill>
+          <a:ln/>
+          <a:effectLst>
+            <a:outerShdw sx="100000" sy="100000" kx="0" ky="0" algn="bl" rotWithShape="0" blurRad="88900" dist="25400" dir="5400000">
+              <a:srgbClr val="22303C">
+                <a:alpha val="12000"/>
+              </a:srgbClr>
+            </a:outerShdw>
+          </a:effectLst>
+        </p:spPr>
+      </p:sp>
+      <p:sp>
+        <p:nvSpPr>
+          <p:cNvPr id="10" name="Text 8"/>
+          <p:cNvSpPr/>
+          <p:nvPr/>
+        </p:nvSpPr>
+        <p:spPr>
+          <a:xfrm>
+            <a:off x="749808" y="2743200"/>
+            <a:ext cx="365760" cy="365760"/>
+          </a:xfrm>
+          <a:prstGeom prst="rect">
+            <a:avLst/>
+          </a:prstGeom>
+          <a:noFill/>
+          <a:ln/>
+        </p:spPr>
+        <p:txBody>
+          <a:bodyPr wrap="square" lIns="0" tIns="0" rIns="0" bIns="0" rtlCol="0" anchor="ctr"/>
+          <a:lstStyle/>
+          <a:p>
+            <a:pPr algn="ctr" indent="0" marL="0">
+              <a:buNone/>
+            </a:pPr>
+            <a:r>
+              <a:rPr lang="en-US" sz="1500" b="1" dirty="0">
+                <a:solidFill>
+                  <a:srgbClr val="FFFFFF"/>
+                </a:solidFill>
+                <a:latin typeface="Calibri" pitchFamily="34" charset="0"/>
+                <a:ea typeface="Calibri" pitchFamily="34" charset="-122"/>
+                <a:cs typeface="Calibri" pitchFamily="34" charset="-120"/>
+              </a:rPr>
+              <a:t>2</a:t>
+            </a:r>
+            <a:endParaRPr lang="en-US" sz="1500" dirty="0"/>
+          </a:p>
+        </p:txBody>
+      </p:sp>
+      <p:sp>
+        <p:nvSpPr>
+          <p:cNvPr id="11" name="Text 9"/>
+          <p:cNvSpPr/>
+          <p:nvPr/>
+        </p:nvSpPr>
+        <p:spPr>
+          <a:xfrm>
+            <a:off x="1280160" y="2505456"/>
+            <a:ext cx="10143439" cy="841248"/>
+          </a:xfrm>
+          <a:prstGeom prst="rect">
+            <a:avLst/>
+          </a:prstGeom>
+          <a:noFill/>
+          <a:ln/>
+        </p:spPr>
+        <p:txBody>
+          <a:bodyPr wrap="square" lIns="0" tIns="0" rIns="0" bIns="0" rtlCol="0" anchor="ctr"/>
+          <a:lstStyle/>
+          <a:p>
+            <a:pPr algn="l" indent="0" marL="0">
+              <a:buNone/>
+            </a:pPr>
+            <a:r>
+              <a:rPr lang="en-US" sz="1350" dirty="0">
+                <a:solidFill>
+                  <a:srgbClr val="E7EEF4"/>
+                </a:solidFill>
+                <a:latin typeface="Calibri" pitchFamily="34" charset="0"/>
+                <a:ea typeface="Calibri" pitchFamily="34" charset="-122"/>
+                <a:cs typeface="Calibri" pitchFamily="34" charset="-120"/>
+              </a:rPr>
+              <a:t>Requirements scale with test complexity (waived → moderate → high); modifying an FDA-cleared test makes it high complexity.</a:t>
+            </a:r>
+            <a:endParaRPr lang="en-US" sz="1350" dirty="0"/>
+          </a:p>
+        </p:txBody>
+      </p:sp>
+      <p:sp>
+        <p:nvSpPr>
+          <p:cNvPr id="12" name="Shape 10"/>
+          <p:cNvSpPr/>
+          <p:nvPr/>
+        </p:nvSpPr>
+        <p:spPr>
+          <a:xfrm>
+            <a:off x="566928" y="3493008"/>
+            <a:ext cx="11057839" cy="841248"/>
+          </a:xfrm>
+          <a:prstGeom prst="roundRect">
+            <a:avLst>
+              <a:gd name="adj" fmla="val 7609"/>
+            </a:avLst>
+          </a:prstGeom>
+          <a:solidFill>
+            <a:srgbClr val="143651"/>
+          </a:solidFill>
+          <a:ln/>
+        </p:spPr>
+      </p:sp>
+      <p:sp>
+        <p:nvSpPr>
+          <p:cNvPr id="13" name="Shape 11"/>
+          <p:cNvSpPr/>
+          <p:nvPr/>
+        </p:nvSpPr>
+        <p:spPr>
+          <a:xfrm>
+            <a:off x="749808" y="3730752"/>
+            <a:ext cx="365760" cy="365760"/>
+          </a:xfrm>
+          <a:prstGeom prst="ellipse">
+            <a:avLst/>
+          </a:prstGeom>
+          <a:solidFill>
+            <a:srgbClr val="455A64"/>
+          </a:solidFill>
+          <a:ln/>
+          <a:effectLst>
+            <a:outerShdw sx="100000" sy="100000" kx="0" ky="0" algn="bl" rotWithShape="0" blurRad="88900" dist="25400" dir="5400000">
+              <a:srgbClr val="22303C">
+                <a:alpha val="12000"/>
+              </a:srgbClr>
+            </a:outerShdw>
+          </a:effectLst>
+        </p:spPr>
+      </p:sp>
+      <p:sp>
+        <p:nvSpPr>
+          <p:cNvPr id="14" name="Text 12"/>
+          <p:cNvSpPr/>
+          <p:nvPr/>
+        </p:nvSpPr>
+        <p:spPr>
+          <a:xfrm>
+            <a:off x="749808" y="3730752"/>
+            <a:ext cx="365760" cy="365760"/>
+          </a:xfrm>
+          <a:prstGeom prst="rect">
+            <a:avLst/>
+          </a:prstGeom>
+          <a:noFill/>
+          <a:ln/>
+        </p:spPr>
+        <p:txBody>
+          <a:bodyPr wrap="square" lIns="0" tIns="0" rIns="0" bIns="0" rtlCol="0" anchor="ctr"/>
+          <a:lstStyle/>
+          <a:p>
+            <a:pPr algn="ctr" indent="0" marL="0">
+              <a:buNone/>
+            </a:pPr>
+            <a:r>
+              <a:rPr lang="en-US" sz="1500" b="1" dirty="0">
+                <a:solidFill>
+                  <a:srgbClr val="FFFFFF"/>
+                </a:solidFill>
+                <a:latin typeface="Calibri" pitchFamily="34" charset="0"/>
+                <a:ea typeface="Calibri" pitchFamily="34" charset="-122"/>
+                <a:cs typeface="Calibri" pitchFamily="34" charset="-120"/>
+              </a:rPr>
+              <a:t>3</a:t>
+            </a:r>
+            <a:endParaRPr lang="en-US" sz="1500" dirty="0"/>
+          </a:p>
+        </p:txBody>
+      </p:sp>
+      <p:sp>
+        <p:nvSpPr>
+          <p:cNvPr id="15" name="Text 13"/>
+          <p:cNvSpPr/>
+          <p:nvPr/>
+        </p:nvSpPr>
+        <p:spPr>
+          <a:xfrm>
+            <a:off x="1280160" y="3493008"/>
+            <a:ext cx="10143439" cy="841248"/>
+          </a:xfrm>
+          <a:prstGeom prst="rect">
+            <a:avLst/>
+          </a:prstGeom>
+          <a:noFill/>
+          <a:ln/>
+        </p:spPr>
+        <p:txBody>
+          <a:bodyPr wrap="square" lIns="0" tIns="0" rIns="0" bIns="0" rtlCol="0" anchor="ctr"/>
+          <a:lstStyle/>
+          <a:p>
+            <a:pPr algn="l" indent="0" marL="0">
+              <a:buNone/>
+            </a:pPr>
+            <a:r>
+              <a:rPr lang="en-US" sz="1350" dirty="0">
+                <a:solidFill>
+                  <a:srgbClr val="E7EEF4"/>
+                </a:solidFill>
+                <a:latin typeface="Calibri" pitchFamily="34" charset="0"/>
+                <a:ea typeface="Calibri" pitchFamily="34" charset="-122"/>
+                <a:cs typeface="Calibri" pitchFamily="34" charset="-120"/>
+              </a:rPr>
+              <a:t>Handle PT samples exactly like patient samples — never refer or discuss them; referral is a severe violation.</a:t>
+            </a:r>
+            <a:endParaRPr lang="en-US" sz="1350" dirty="0"/>
+          </a:p>
+        </p:txBody>
+      </p:sp>
+      <p:sp>
+        <p:nvSpPr>
+          <p:cNvPr id="16" name="Shape 14"/>
+          <p:cNvSpPr/>
+          <p:nvPr/>
+        </p:nvSpPr>
+        <p:spPr>
+          <a:xfrm>
+            <a:off x="566928" y="4480560"/>
+            <a:ext cx="11057839" cy="841248"/>
+          </a:xfrm>
+          <a:prstGeom prst="roundRect">
+            <a:avLst>
+              <a:gd name="adj" fmla="val 7609"/>
+            </a:avLst>
+          </a:prstGeom>
+          <a:solidFill>
+            <a:srgbClr val="143651"/>
+          </a:solidFill>
+          <a:ln/>
+        </p:spPr>
+      </p:sp>
+      <p:sp>
+        <p:nvSpPr>
+          <p:cNvPr id="17" name="Shape 15"/>
+          <p:cNvSpPr/>
+          <p:nvPr/>
+        </p:nvSpPr>
+        <p:spPr>
+          <a:xfrm>
+            <a:off x="749808" y="4718304"/>
+            <a:ext cx="365760" cy="365760"/>
+          </a:xfrm>
+          <a:prstGeom prst="ellipse">
+            <a:avLst/>
+          </a:prstGeom>
+          <a:solidFill>
+            <a:srgbClr val="455A64"/>
+          </a:solidFill>
+          <a:ln/>
+          <a:effectLst>
+            <a:outerShdw sx="100000" sy="100000" kx="0" ky="0" algn="bl" rotWithShape="0" blurRad="88900" dist="25400" dir="5400000">
+              <a:srgbClr val="22303C">
+                <a:alpha val="12000"/>
+              </a:srgbClr>
+            </a:outerShdw>
+          </a:effectLst>
+        </p:spPr>
+      </p:sp>
+      <p:sp>
+        <p:nvSpPr>
+          <p:cNvPr id="18" name="Text 16"/>
+          <p:cNvSpPr/>
+          <p:nvPr/>
+        </p:nvSpPr>
+        <p:spPr>
+          <a:xfrm>
+            <a:off x="749808" y="4718304"/>
+            <a:ext cx="365760" cy="365760"/>
+          </a:xfrm>
+          <a:prstGeom prst="rect">
+            <a:avLst/>
+          </a:prstGeom>
+          <a:noFill/>
+          <a:ln/>
+        </p:spPr>
+        <p:txBody>
+          <a:bodyPr wrap="square" lIns="0" tIns="0" rIns="0" bIns="0" rtlCol="0" anchor="ctr"/>
+          <a:lstStyle/>
+          <a:p>
+            <a:pPr algn="ctr" indent="0" marL="0">
+              <a:buNone/>
+            </a:pPr>
+            <a:r>
+              <a:rPr lang="en-US" sz="1500" b="1" dirty="0">
+                <a:solidFill>
+                  <a:srgbClr val="FFFFFF"/>
+                </a:solidFill>
+                <a:latin typeface="Calibri" pitchFamily="34" charset="0"/>
+                <a:ea typeface="Calibri" pitchFamily="34" charset="-122"/>
+                <a:cs typeface="Calibri" pitchFamily="34" charset="-120"/>
+              </a:rPr>
+              <a:t>4</a:t>
+            </a:r>
+            <a:endParaRPr lang="en-US" sz="1500" dirty="0"/>
+          </a:p>
+        </p:txBody>
+      </p:sp>
+      <p:sp>
+        <p:nvSpPr>
+          <p:cNvPr id="19" name="Text 17"/>
+          <p:cNvSpPr/>
+          <p:nvPr/>
+        </p:nvSpPr>
+        <p:spPr>
+          <a:xfrm>
+            <a:off x="1280160" y="4480560"/>
+            <a:ext cx="10143439" cy="841248"/>
+          </a:xfrm>
+          <a:prstGeom prst="rect">
+            <a:avLst/>
+          </a:prstGeom>
+          <a:noFill/>
+          <a:ln/>
+        </p:spPr>
+        <p:txBody>
+          <a:bodyPr wrap="square" lIns="0" tIns="0" rIns="0" bIns="0" rtlCol="0" anchor="ctr"/>
+          <a:lstStyle/>
+          <a:p>
+            <a:pPr algn="l" indent="0" marL="0">
+              <a:buNone/>
+            </a:pPr>
+            <a:r>
+              <a:rPr lang="en-US" sz="1350" dirty="0">
+                <a:solidFill>
+                  <a:srgbClr val="E7EEF4"/>
+                </a:solidFill>
+                <a:latin typeface="Calibri" pitchFamily="34" charset="0"/>
+                <a:ea typeface="Calibri" pitchFamily="34" charset="-122"/>
+                <a:cs typeface="Calibri" pitchFamily="34" charset="-120"/>
+              </a:rPr>
+              <a:t>Personnel qualifications and ongoing competency (six elements) scale with complexity; the director holds overall responsibility.</a:t>
+            </a:r>
+            <a:endParaRPr lang="en-US" sz="1350" dirty="0"/>
+          </a:p>
+        </p:txBody>
+      </p:sp>
+      <p:sp>
+        <p:nvSpPr>
+          <p:cNvPr id="20" name="Shape 18"/>
+          <p:cNvSpPr/>
+          <p:nvPr/>
+        </p:nvSpPr>
+        <p:spPr>
+          <a:xfrm>
+            <a:off x="566928" y="5468112"/>
+            <a:ext cx="11057839" cy="841248"/>
+          </a:xfrm>
+          <a:prstGeom prst="roundRect">
+            <a:avLst>
+              <a:gd name="adj" fmla="val 7609"/>
+            </a:avLst>
+          </a:prstGeom>
+          <a:solidFill>
+            <a:srgbClr val="143651"/>
+          </a:solidFill>
+          <a:ln/>
+        </p:spPr>
+      </p:sp>
+      <p:sp>
+        <p:nvSpPr>
+          <p:cNvPr id="21" name="Shape 19"/>
+          <p:cNvSpPr/>
+          <p:nvPr/>
+        </p:nvSpPr>
+        <p:spPr>
+          <a:xfrm>
+            <a:off x="749808" y="5705856"/>
+            <a:ext cx="365760" cy="365760"/>
+          </a:xfrm>
+          <a:prstGeom prst="ellipse">
+            <a:avLst/>
+          </a:prstGeom>
+          <a:solidFill>
+            <a:srgbClr val="455A64"/>
+          </a:solidFill>
+          <a:ln/>
+          <a:effectLst>
+            <a:outerShdw sx="100000" sy="100000" kx="0" ky="0" algn="bl" rotWithShape="0" blurRad="88900" dist="25400" dir="5400000">
+              <a:srgbClr val="22303C">
+                <a:alpha val="12000"/>
+              </a:srgbClr>
+            </a:outerShdw>
+          </a:effectLst>
+        </p:spPr>
+      </p:sp>
+      <p:sp>
+        <p:nvSpPr>
+          <p:cNvPr id="22" name="Text 20"/>
+          <p:cNvSpPr/>
+          <p:nvPr/>
+        </p:nvSpPr>
+        <p:spPr>
+          <a:xfrm>
+            <a:off x="749808" y="5705856"/>
+            <a:ext cx="365760" cy="365760"/>
+          </a:xfrm>
+          <a:prstGeom prst="rect">
+            <a:avLst/>
+          </a:prstGeom>
+          <a:noFill/>
+          <a:ln/>
+        </p:spPr>
+        <p:txBody>
+          <a:bodyPr wrap="square" lIns="0" tIns="0" rIns="0" bIns="0" rtlCol="0" anchor="ctr"/>
+          <a:lstStyle/>
+          <a:p>
+            <a:pPr algn="ctr" indent="0" marL="0">
+              <a:buNone/>
+            </a:pPr>
+            <a:r>
+              <a:rPr lang="en-US" sz="1500" b="1" dirty="0">
+                <a:solidFill>
+                  <a:srgbClr val="FFFFFF"/>
+                </a:solidFill>
+                <a:latin typeface="Calibri" pitchFamily="34" charset="0"/>
+                <a:ea typeface="Calibri" pitchFamily="34" charset="-122"/>
+                <a:cs typeface="Calibri" pitchFamily="34" charset="-120"/>
+              </a:rPr>
+              <a:t>5</a:t>
+            </a:r>
+            <a:endParaRPr lang="en-US" sz="1500" dirty="0"/>
+          </a:p>
+        </p:txBody>
+      </p:sp>
+      <p:sp>
+        <p:nvSpPr>
+          <p:cNvPr id="23" name="Text 21"/>
+          <p:cNvSpPr/>
+          <p:nvPr/>
+        </p:nvSpPr>
+        <p:spPr>
+          <a:xfrm>
+            <a:off x="1280160" y="5468112"/>
+            <a:ext cx="10143439" cy="841248"/>
+          </a:xfrm>
+          <a:prstGeom prst="rect">
+            <a:avLst/>
+          </a:prstGeom>
+          <a:noFill/>
+          <a:ln/>
+        </p:spPr>
+        <p:txBody>
+          <a:bodyPr wrap="square" lIns="0" tIns="0" rIns="0" bIns="0" rtlCol="0" anchor="ctr"/>
+          <a:lstStyle/>
+          <a:p>
+            <a:pPr algn="l" indent="0" marL="0">
+              <a:buNone/>
+            </a:pPr>
+            <a:r>
+              <a:rPr lang="en-US" sz="1350" dirty="0">
+                <a:solidFill>
+                  <a:srgbClr val="E7EEF4"/>
+                </a:solidFill>
+                <a:latin typeface="Calibri" pitchFamily="34" charset="0"/>
+                <a:ea typeface="Calibri" pitchFamily="34" charset="-122"/>
+                <a:cs typeface="Calibri" pitchFamily="34" charset="-120"/>
+              </a:rPr>
+              <a:t>Maintain continuous inspection readiness; respond to PT failures and citations with documented corrective action.</a:t>
+            </a:r>
+            <a:endParaRPr lang="en-US" sz="1350" dirty="0"/>
+          </a:p>
+        </p:txBody>
+      </p:sp>
+      <p:sp>
+        <p:nvSpPr>
+          <p:cNvPr id="24" name="Text 22"/>
+          <p:cNvSpPr/>
+          <p:nvPr/>
+        </p:nvSpPr>
+        <p:spPr>
+          <a:xfrm>
+            <a:off x="566928" y="6473952"/>
+            <a:ext cx="8229600" cy="274320"/>
+          </a:xfrm>
+          <a:prstGeom prst="rect">
+            <a:avLst/>
+          </a:prstGeom>
+          <a:noFill/>
+          <a:ln/>
+        </p:spPr>
+        <p:txBody>
+          <a:bodyPr wrap="square" lIns="0" tIns="0" rIns="0" bIns="0" rtlCol="0" anchor="ctr"/>
+          <a:lstStyle/>
+          <a:p>
+            <a:pPr indent="0" marL="0">
+              <a:buNone/>
+            </a:pPr>
+            <a:r>
+              <a:rPr lang="en-US" sz="850" dirty="0">
+                <a:solidFill>
+                  <a:srgbClr val="5E7488"/>
+                </a:solidFill>
+                <a:latin typeface="Calibri" pitchFamily="34" charset="0"/>
+                <a:ea typeface="Calibri" pitchFamily="34" charset="-122"/>
+                <a:cs typeface="Calibri" pitchFamily="34" charset="-120"/>
+              </a:rPr>
+              <a:t>Makassed General Hospital  ·  Department of Laboratory Medicine</a:t>
+            </a:r>
+            <a:endParaRPr lang="en-US" sz="850" dirty="0"/>
+          </a:p>
+        </p:txBody>
+      </p:sp>
+      <p:sp>
+        <p:nvSpPr>
+          <p:cNvPr id="25" name="Text 23"/>
+          <p:cNvSpPr/>
+          <p:nvPr/>
+        </p:nvSpPr>
+        <p:spPr>
+          <a:xfrm>
+            <a:off x="11002975" y="6473952"/>
+            <a:ext cx="640080" cy="274320"/>
+          </a:xfrm>
+          <a:prstGeom prst="rect">
+            <a:avLst/>
+          </a:prstGeom>
+          <a:noFill/>
+          <a:ln/>
+        </p:spPr>
+        <p:txBody>
+          <a:bodyPr wrap="square" lIns="0" tIns="0" rIns="0" bIns="0" rtlCol="0" anchor="ctr"/>
+          <a:lstStyle/>
+          <a:p>
+            <a:pPr algn="r" indent="0" marL="0">
+              <a:buNone/>
+            </a:pPr>
+            <a:r>
+              <a:rPr lang="en-US" sz="850" b="1" dirty="0">
+                <a:solidFill>
+                  <a:srgbClr val="455A64"/>
+                </a:solidFill>
+                <a:latin typeface="Calibri" pitchFamily="34" charset="0"/>
+                <a:ea typeface="Calibri" pitchFamily="34" charset="-122"/>
+                <a:cs typeface="Calibri" pitchFamily="34" charset="-120"/>
+              </a:rPr>
+              <a:t>21</a:t>
+            </a:r>
+            <a:endParaRPr lang="en-US" sz="850" dirty="0"/>
+          </a:p>
+        </p:txBody>
+      </p:sp>
+    </p:spTree>
+  </p:cSld>
+  <p:clrMapOvr>
+    <a:masterClrMapping/>
+  </p:clrMapOvr>
+</p:sld>
+</file>
+
+<file path=ppt/slides/slide25.xml><?xml version="1.0" encoding="utf-8"?>
+<p:sld xmlns:a="http://schemas.openxmlformats.org/drawingml/2006/main" xmlns:r="http://schemas.openxmlformats.org/officeDocument/2006/relationships" xmlns:p="http://schemas.openxmlformats.org/presentationml/2006/main">
+  <p:cSld name="Slide 25">
+    <p:bg>
+      <p:bgPr>
+        <a:solidFill>
+          <a:srgbClr val="FFFFFF"/>
+        </a:solidFill>
+      </p:bgPr>
+    </p:bg>
+    <p:spTree>
+      <p:nvGrpSpPr>
+        <p:cNvPr id="1" name=""/>
+        <p:cNvGrpSpPr/>
+        <p:nvPr/>
+      </p:nvGrpSpPr>
+      <p:grpSpPr>
+        <a:xfrm>
+          <a:off x="0" y="0"/>
+          <a:ext cx="0" cy="0"/>
+          <a:chOff x="0" y="0"/>
+          <a:chExt cx="0" cy="0"/>
+        </a:xfrm>
+      </p:grpSpPr>
+      <p:sp>
+        <p:nvSpPr>
+          <p:cNvPr id="2" name="Text 0"/>
+          <p:cNvSpPr/>
+          <p:nvPr/>
+        </p:nvSpPr>
+        <p:spPr>
+          <a:xfrm>
+            <a:off x="566928" y="329184"/>
+            <a:ext cx="10515600" cy="310896"/>
+          </a:xfrm>
+          <a:prstGeom prst="rect">
+            <a:avLst/>
+          </a:prstGeom>
+          <a:noFill/>
+          <a:ln/>
+        </p:spPr>
+        <p:txBody>
+          <a:bodyPr wrap="square" lIns="0" tIns="0" rIns="0" bIns="0" rtlCol="0" anchor="ctr"/>
+          <a:lstStyle/>
+          <a:p>
+            <a:pPr algn="l" indent="0" marL="0">
+              <a:buNone/>
+            </a:pPr>
+            <a:r>
+              <a:rPr lang="en-US" sz="1100" b="1" spc="150" kern="0" dirty="0">
+                <a:solidFill>
+                  <a:srgbClr val="455A64"/>
+                </a:solidFill>
+                <a:latin typeface="Calibri" pitchFamily="34" charset="0"/>
+                <a:ea typeface="Calibri" pitchFamily="34" charset="-122"/>
+                <a:cs typeface="Calibri" pitchFamily="34" charset="-120"/>
+              </a:rPr>
               <a:t>LAB MANAGEMENT &amp; QUALITY   ·   REFERENCES &amp; FURTHER READING</a:t>
             </a:r>
             <a:endParaRPr lang="en-US" sz="1100" dirty="0"/>
@@ -8550,7 +11492,7 @@
                 <a:ea typeface="Calibri" pitchFamily="34" charset="-122"/>
                 <a:cs typeface="Calibri" pitchFamily="34" charset="-120"/>
               </a:rPr>
-              <a:t>1.   Centers for Medicare &amp; Medicaid Services. CLIA regulations (42 CFR 493).</a:t>
+              <a:t>1.   Clinical Laboratory Improvement Amendments (CLIA) regulations (42 CFR 493).</a:t>
             </a:r>
             <a:endParaRPr lang="en-US" sz="1150" dirty="0"/>
           </a:p>
@@ -8570,7 +11512,7 @@
                 <a:ea typeface="Calibri" pitchFamily="34" charset="-122"/>
                 <a:cs typeface="Calibri" pitchFamily="34" charset="-120"/>
               </a:rPr>
-              <a:t>2.   College of American Pathologists. Laboratory Accreditation Program checklists (current).</a:t>
+              <a:t>2.   College of American Pathologists Laboratory Accreditation Program.</a:t>
             </a:r>
             <a:endParaRPr lang="en-US" sz="1150" dirty="0"/>
           </a:p>
@@ -8590,7 +11532,7 @@
                 <a:ea typeface="Calibri" pitchFamily="34" charset="-122"/>
                 <a:cs typeface="Calibri" pitchFamily="34" charset="-120"/>
               </a:rPr>
-              <a:t>3.   CLSI QMS documents.</a:t>
+              <a:t>3.   CMS proficiency-testing requirements and referral policy.</a:t>
             </a:r>
             <a:endParaRPr lang="en-US" sz="1150" dirty="0"/>
           </a:p>
@@ -8716,7 +11658,7 @@
                 <a:ea typeface="Calibri" pitchFamily="34" charset="-122"/>
                 <a:cs typeface="Calibri" pitchFamily="34" charset="-120"/>
               </a:rPr>
-              <a:t>17</a:t>
+              <a:t>22</a:t>
             </a:r>
             <a:endParaRPr lang="en-US" sz="850" dirty="0"/>
           </a:p>
@@ -8960,7 +11902,7 @@
                 <a:ea typeface="Calibri" pitchFamily="34" charset="-122"/>
                 <a:cs typeface="Calibri" pitchFamily="34" charset="-120"/>
               </a:rPr>
-              <a:t>Describe CLIA and CAP frameworks at a working level.</a:t>
+              <a:t>Describe CLIA and test-complexity categories.</a:t>
             </a:r>
             <a:endParaRPr lang="en-US" sz="1350" dirty="0"/>
           </a:p>
@@ -9094,7 +12036,7 @@
                 <a:ea typeface="Calibri" pitchFamily="34" charset="-122"/>
                 <a:cs typeface="Calibri" pitchFamily="34" charset="-120"/>
               </a:rPr>
-              <a:t>Classify tests by complexity (waived, moderate, high).</a:t>
+              <a:t>Explain accreditation and deemed status.</a:t>
             </a:r>
             <a:endParaRPr lang="en-US" sz="1350" dirty="0"/>
           </a:p>
@@ -9228,7 +12170,7 @@
                 <a:ea typeface="Calibri" pitchFamily="34" charset="-122"/>
                 <a:cs typeface="Calibri" pitchFamily="34" charset="-120"/>
               </a:rPr>
-              <a:t>Apply competency-assessment requirements.</a:t>
+              <a:t>State proficiency-testing requirements and the response to failure.</a:t>
             </a:r>
             <a:endParaRPr lang="en-US" sz="1350" dirty="0"/>
           </a:p>
@@ -9362,7 +12304,7 @@
                 <a:ea typeface="Calibri" pitchFamily="34" charset="-122"/>
                 <a:cs typeface="Calibri" pitchFamily="34" charset="-120"/>
               </a:rPr>
-              <a:t>Maintain document control and version management.</a:t>
+              <a:t>Outline personnel and competency requirements.</a:t>
             </a:r>
             <a:endParaRPr lang="en-US" sz="1350" dirty="0"/>
           </a:p>
@@ -9496,7 +12438,7 @@
                 <a:ea typeface="Calibri" pitchFamily="34" charset="-122"/>
                 <a:cs typeface="Calibri" pitchFamily="34" charset="-120"/>
               </a:rPr>
-              <a:t>Prepare for inspection readiness.</a:t>
+              <a:t>Describe waived testing and its risks.</a:t>
             </a:r>
             <a:endParaRPr lang="en-US" sz="1350" dirty="0"/>
           </a:p>
@@ -9630,7 +12572,7 @@
                 <a:ea typeface="Calibri" pitchFamily="34" charset="-122"/>
                 <a:cs typeface="Calibri" pitchFamily="34" charset="-120"/>
               </a:rPr>
-              <a:t>Recognize personnel and quality requirements.</a:t>
+              <a:t>Prepare for and respond to inspections.</a:t>
             </a:r>
             <a:endParaRPr lang="en-US" sz="1350" dirty="0"/>
           </a:p>
@@ -9980,7 +12922,7 @@
                 <a:ea typeface="Calibri" pitchFamily="34" charset="-122"/>
                 <a:cs typeface="Calibri" pitchFamily="34" charset="-120"/>
               </a:rPr>
-              <a:t>CLIA &amp; complexity</a:t>
+              <a:t>Oversight layers</a:t>
             </a:r>
             <a:pPr algn="l" indent="0" marL="0">
               <a:buNone/>
@@ -9994,7 +12936,7 @@
                 <a:ea typeface="Calibri" pitchFamily="34" charset="-122"/>
                 <a:cs typeface="Calibri" pitchFamily="34" charset="-120"/>
               </a:rPr>
-              <a:t>   —  the regulatory floor</a:t>
+              <a:t>   —  CLIA, accreditation, ISO, PT</a:t>
             </a:r>
             <a:endParaRPr lang="en-US" sz="1400" dirty="0"/>
           </a:p>
@@ -10121,7 +13063,7 @@
                 <a:ea typeface="Calibri" pitchFamily="34" charset="-122"/>
                 <a:cs typeface="Calibri" pitchFamily="34" charset="-120"/>
               </a:rPr>
-              <a:t>Accreditation</a:t>
+              <a:t>Test complexity</a:t>
             </a:r>
             <a:pPr algn="l" indent="0" marL="0">
               <a:buNone/>
@@ -10135,7 +13077,7 @@
                 <a:ea typeface="Calibri" pitchFamily="34" charset="-122"/>
                 <a:cs typeface="Calibri" pitchFamily="34" charset="-120"/>
               </a:rPr>
-              <a:t>   —  CAP and checklists</a:t>
+              <a:t>   —  waived to high complexity</a:t>
             </a:r>
             <a:endParaRPr lang="en-US" sz="1400" dirty="0"/>
           </a:p>
@@ -10269,7 +13211,7 @@
                 <a:ea typeface="Calibri" pitchFamily="34" charset="-122"/>
                 <a:cs typeface="Calibri" pitchFamily="34" charset="-120"/>
               </a:rPr>
-              <a:t>Competency assessment</a:t>
+              <a:t>Proficiency testing</a:t>
             </a:r>
             <a:pPr algn="l" indent="0" marL="0">
               <a:buNone/>
@@ -10283,7 +13225,7 @@
                 <a:ea typeface="Calibri" pitchFamily="34" charset="-122"/>
                 <a:cs typeface="Calibri" pitchFamily="34" charset="-120"/>
               </a:rPr>
-              <a:t>   —  the six elements</a:t>
+              <a:t>   —  requirements and failures</a:t>
             </a:r>
             <a:endParaRPr lang="en-US" sz="1400" dirty="0"/>
           </a:p>
@@ -10410,7 +13352,7 @@
                 <a:ea typeface="Calibri" pitchFamily="34" charset="-122"/>
                 <a:cs typeface="Calibri" pitchFamily="34" charset="-120"/>
               </a:rPr>
-              <a:t>Documents &amp; readiness</a:t>
+              <a:t>Personnel &amp; inspection</a:t>
             </a:r>
             <a:pPr algn="l" indent="0" marL="0">
               <a:buNone/>
@@ -10424,7 +13366,7 @@
                 <a:ea typeface="Calibri" pitchFamily="34" charset="-122"/>
                 <a:cs typeface="Calibri" pitchFamily="34" charset="-120"/>
               </a:rPr>
-              <a:t>   —  control and inspection</a:t>
+              <a:t>   —  competency and readiness</a:t>
             </a:r>
             <a:endParaRPr lang="en-US" sz="1400" dirty="0"/>
           </a:p>
@@ -10558,7 +13500,7 @@
                 <a:ea typeface="Calibri" pitchFamily="34" charset="-122"/>
                 <a:cs typeface="Calibri" pitchFamily="34" charset="-120"/>
               </a:rPr>
-              <a:t>Cases &amp; board</a:t>
+              <a:t>Cases &amp; board review</a:t>
             </a:r>
             <a:endParaRPr lang="en-US" sz="1400" dirty="0"/>
           </a:p>
@@ -10857,7 +13799,7 @@
                 <a:ea typeface="Calibri" pitchFamily="34" charset="-122"/>
                 <a:cs typeface="Calibri" pitchFamily="34" charset="-120"/>
               </a:rPr>
-              <a:t>CLIA, Complexity &amp; Accreditation</a:t>
+              <a:t>The Regulatory Framework</a:t>
             </a:r>
             <a:endParaRPr lang="en-US" sz="3800" dirty="0"/>
           </a:p>
@@ -10928,7 +13870,7 @@
                 <a:ea typeface="Calibri" pitchFamily="34" charset="-122"/>
                 <a:cs typeface="Calibri" pitchFamily="34" charset="-120"/>
               </a:rPr>
-              <a:t>LAB MANAGEMENT &amp; QUALITY   ·   CLIA</a:t>
+              <a:t>LAB MANAGEMENT &amp; QUALITY   ·   OVERSIGHT</a:t>
             </a:r>
             <a:endParaRPr lang="en-US" sz="1100" dirty="0"/>
           </a:p>
@@ -10967,876 +13909,79 @@
                 <a:ea typeface="Calibri" pitchFamily="34" charset="-122"/>
                 <a:cs typeface="Calibri" pitchFamily="34" charset="-120"/>
               </a:rPr>
-              <a:t>Test Complexity Categories</a:t>
+              <a:t>Layers of Laboratory Oversight</a:t>
             </a:r>
             <a:endParaRPr lang="en-US" sz="3000" dirty="0"/>
           </a:p>
         </p:txBody>
       </p:sp>
-      <p:graphicFrame>
-        <p:nvGraphicFramePr>
-          <p:cNvPr id="7" name="Table 0"/>
-          <p:cNvGraphicFramePr>
-            <a:graphicFrameLocks noGrp="1"/>
-          </p:cNvGraphicFramePr>
-          <p:nvPr>
-            <p:extLst>
-              <p:ext uri="{D42A27DB-BD31-4B8C-83A1-F6EECF244321}">
-                <p14:modId xmlns:p14="http://schemas.microsoft.com/office/powerpoint/2010/main" val="1579011935"/>
-              </p:ext>
-            </p:extLst>
-          </p:nvPr>
-        </p:nvGraphicFramePr>
-        <p:xfrm>
-          <a:off x="566928" y="1463040"/>
-          <a:ext cx="11057839" cy="914400"/>
-        </p:xfrm>
-        <a:graphic>
-          <a:graphicData uri="http://schemas.openxmlformats.org/drawingml/2006/table">
-            <a:tbl>
-              <a:tblPr/>
-              <a:tblGrid>
-                <a:gridCol w="2468880"/>
-                <a:gridCol w="3840480"/>
-                <a:gridCol w="4745736"/>
-              </a:tblGrid>
-              <a:tr h="676656">
-                <a:tc>
-                  <a:txBody>
-                    <a:bodyPr/>
-                    <a:lstStyle/>
-                    <a:p>
-                      <a:pPr algn="ctr" indent="0" marL="0">
-                        <a:buNone/>
-                      </a:pPr>
-                      <a:r>
-                        <a:rPr lang="en-US" sz="1200" b="1" dirty="0">
-                          <a:solidFill>
-                            <a:srgbClr val="FFFFFF"/>
-                          </a:solidFill>
-                          <a:latin typeface="Calibri" pitchFamily="34" charset="0"/>
-                          <a:ea typeface="Calibri" pitchFamily="34" charset="-122"/>
-                          <a:cs typeface="Calibri" pitchFamily="34" charset="-120"/>
-                        </a:rPr>
-                        <a:t>Category</a:t>
-                      </a:r>
-                      <a:endParaRPr lang="en-US" sz="1200" dirty="0">
-                        <a:latin typeface="Calibri" charset="0"/>
-                        <a:ea typeface="Calibri" charset="0"/>
-                        <a:cs typeface="Calibri" charset="0"/>
-                      </a:endParaRPr>
-                    </a:p>
-                  </a:txBody>
-                  <a:tcPr marL="91440" marR="91440" marT="45720" marB="45720" anchor="ctr">
-                    <a:lnL w="9525" cap="flat" cmpd="sng" algn="ctr">
-                      <a:solidFill>
-                        <a:srgbClr val="DCE4EC"/>
-                      </a:solidFill>
-                      <a:prstDash val="solid"/>
-                      <a:round/>
-                      <a:headEnd type="none" w="med" len="med"/>
-                      <a:tailEnd type="none" w="med" len="med"/>
-                    </a:lnL>
-                    <a:lnR w="9525" cap="flat" cmpd="sng" algn="ctr">
-                      <a:solidFill>
-                        <a:srgbClr val="DCE4EC"/>
-                      </a:solidFill>
-                      <a:prstDash val="solid"/>
-                      <a:round/>
-                      <a:headEnd type="none" w="med" len="med"/>
-                      <a:tailEnd type="none" w="med" len="med"/>
-                    </a:lnR>
-                    <a:lnT w="9525" cap="flat" cmpd="sng" algn="ctr">
-                      <a:solidFill>
-                        <a:srgbClr val="DCE4EC"/>
-                      </a:solidFill>
-                      <a:prstDash val="solid"/>
-                      <a:round/>
-                      <a:headEnd type="none" w="med" len="med"/>
-                      <a:tailEnd type="none" w="med" len="med"/>
-                    </a:lnT>
-                    <a:lnB w="9525" cap="flat" cmpd="sng" algn="ctr">
-                      <a:solidFill>
-                        <a:srgbClr val="DCE4EC"/>
-                      </a:solidFill>
-                      <a:prstDash val="solid"/>
-                      <a:round/>
-                      <a:headEnd type="none" w="med" len="med"/>
-                      <a:tailEnd type="none" w="med" len="med"/>
-                    </a:lnB>
-                    <a:solidFill>
-                      <a:srgbClr val="455A64"/>
-                    </a:solidFill>
-                  </a:tcPr>
-                </a:tc>
-                <a:tc>
-                  <a:txBody>
-                    <a:bodyPr/>
-                    <a:lstStyle/>
-                    <a:p>
-                      <a:pPr algn="ctr" indent="0" marL="0">
-                        <a:buNone/>
-                      </a:pPr>
-                      <a:r>
-                        <a:rPr lang="en-US" sz="1200" b="1" dirty="0">
-                          <a:solidFill>
-                            <a:srgbClr val="FFFFFF"/>
-                          </a:solidFill>
-                          <a:latin typeface="Calibri" pitchFamily="34" charset="0"/>
-                          <a:ea typeface="Calibri" pitchFamily="34" charset="-122"/>
-                          <a:cs typeface="Calibri" pitchFamily="34" charset="-120"/>
-                        </a:rPr>
-                        <a:t>Examples</a:t>
-                      </a:r>
-                      <a:endParaRPr lang="en-US" sz="1200" dirty="0">
-                        <a:latin typeface="Calibri" charset="0"/>
-                        <a:ea typeface="Calibri" charset="0"/>
-                        <a:cs typeface="Calibri" charset="0"/>
-                      </a:endParaRPr>
-                    </a:p>
-                  </a:txBody>
-                  <a:tcPr marL="91440" marR="91440" marT="45720" marB="45720" anchor="ctr">
-                    <a:lnL w="9525" cap="flat" cmpd="sng" algn="ctr">
-                      <a:solidFill>
-                        <a:srgbClr val="DCE4EC"/>
-                      </a:solidFill>
-                      <a:prstDash val="solid"/>
-                      <a:round/>
-                      <a:headEnd type="none" w="med" len="med"/>
-                      <a:tailEnd type="none" w="med" len="med"/>
-                    </a:lnL>
-                    <a:lnR w="9525" cap="flat" cmpd="sng" algn="ctr">
-                      <a:solidFill>
-                        <a:srgbClr val="DCE4EC"/>
-                      </a:solidFill>
-                      <a:prstDash val="solid"/>
-                      <a:round/>
-                      <a:headEnd type="none" w="med" len="med"/>
-                      <a:tailEnd type="none" w="med" len="med"/>
-                    </a:lnR>
-                    <a:lnT w="9525" cap="flat" cmpd="sng" algn="ctr">
-                      <a:solidFill>
-                        <a:srgbClr val="DCE4EC"/>
-                      </a:solidFill>
-                      <a:prstDash val="solid"/>
-                      <a:round/>
-                      <a:headEnd type="none" w="med" len="med"/>
-                      <a:tailEnd type="none" w="med" len="med"/>
-                    </a:lnT>
-                    <a:lnB w="9525" cap="flat" cmpd="sng" algn="ctr">
-                      <a:solidFill>
-                        <a:srgbClr val="DCE4EC"/>
-                      </a:solidFill>
-                      <a:prstDash val="solid"/>
-                      <a:round/>
-                      <a:headEnd type="none" w="med" len="med"/>
-                      <a:tailEnd type="none" w="med" len="med"/>
-                    </a:lnB>
-                    <a:solidFill>
-                      <a:srgbClr val="455A64"/>
-                    </a:solidFill>
-                  </a:tcPr>
-                </a:tc>
-                <a:tc>
-                  <a:txBody>
-                    <a:bodyPr/>
-                    <a:lstStyle/>
-                    <a:p>
-                      <a:pPr algn="ctr" indent="0" marL="0">
-                        <a:buNone/>
-                      </a:pPr>
-                      <a:r>
-                        <a:rPr lang="en-US" sz="1200" b="1" dirty="0">
-                          <a:solidFill>
-                            <a:srgbClr val="FFFFFF"/>
-                          </a:solidFill>
-                          <a:latin typeface="Calibri" pitchFamily="34" charset="0"/>
-                          <a:ea typeface="Calibri" pitchFamily="34" charset="-122"/>
-                          <a:cs typeface="Calibri" pitchFamily="34" charset="-120"/>
-                        </a:rPr>
-                        <a:t>Key requirements</a:t>
-                      </a:r>
-                      <a:endParaRPr lang="en-US" sz="1200" dirty="0">
-                        <a:latin typeface="Calibri" charset="0"/>
-                        <a:ea typeface="Calibri" charset="0"/>
-                        <a:cs typeface="Calibri" charset="0"/>
-                      </a:endParaRPr>
-                    </a:p>
-                  </a:txBody>
-                  <a:tcPr marL="91440" marR="91440" marT="45720" marB="45720" anchor="ctr">
-                    <a:lnL w="9525" cap="flat" cmpd="sng" algn="ctr">
-                      <a:solidFill>
-                        <a:srgbClr val="DCE4EC"/>
-                      </a:solidFill>
-                      <a:prstDash val="solid"/>
-                      <a:round/>
-                      <a:headEnd type="none" w="med" len="med"/>
-                      <a:tailEnd type="none" w="med" len="med"/>
-                    </a:lnL>
-                    <a:lnR w="9525" cap="flat" cmpd="sng" algn="ctr">
-                      <a:solidFill>
-                        <a:srgbClr val="DCE4EC"/>
-                      </a:solidFill>
-                      <a:prstDash val="solid"/>
-                      <a:round/>
-                      <a:headEnd type="none" w="med" len="med"/>
-                      <a:tailEnd type="none" w="med" len="med"/>
-                    </a:lnR>
-                    <a:lnT w="9525" cap="flat" cmpd="sng" algn="ctr">
-                      <a:solidFill>
-                        <a:srgbClr val="DCE4EC"/>
-                      </a:solidFill>
-                      <a:prstDash val="solid"/>
-                      <a:round/>
-                      <a:headEnd type="none" w="med" len="med"/>
-                      <a:tailEnd type="none" w="med" len="med"/>
-                    </a:lnT>
-                    <a:lnB w="9525" cap="flat" cmpd="sng" algn="ctr">
-                      <a:solidFill>
-                        <a:srgbClr val="DCE4EC"/>
-                      </a:solidFill>
-                      <a:prstDash val="solid"/>
-                      <a:round/>
-                      <a:headEnd type="none" w="med" len="med"/>
-                      <a:tailEnd type="none" w="med" len="med"/>
-                    </a:lnB>
-                    <a:solidFill>
-                      <a:srgbClr val="455A64"/>
-                    </a:solidFill>
-                  </a:tcPr>
-                </a:tc>
-              </a:tr>
-              <a:tr h="676656">
-                <a:tc>
-                  <a:txBody>
-                    <a:bodyPr/>
-                    <a:lstStyle/>
-                    <a:p>
-                      <a:pPr algn="l" indent="0" marL="0">
-                        <a:buNone/>
-                      </a:pPr>
-                      <a:r>
-                        <a:rPr lang="en-US" sz="1100" b="1" dirty="0">
-                          <a:solidFill>
-                            <a:srgbClr val="1B2A38"/>
-                          </a:solidFill>
-                          <a:latin typeface="Calibri" pitchFamily="34" charset="0"/>
-                          <a:ea typeface="Calibri" pitchFamily="34" charset="-122"/>
-                          <a:cs typeface="Calibri" pitchFamily="34" charset="-120"/>
-                        </a:rPr>
-                        <a:t>Waived</a:t>
-                      </a:r>
-                      <a:endParaRPr lang="en-US" sz="1100" dirty="0">
-                        <a:latin typeface="Calibri" charset="0"/>
-                        <a:ea typeface="Calibri" charset="0"/>
-                        <a:cs typeface="Calibri" charset="0"/>
-                      </a:endParaRPr>
-                    </a:p>
-                  </a:txBody>
-                  <a:tcPr marL="91440" marR="91440" marT="45720" marB="45720" anchor="ctr">
-                    <a:lnL w="9525" cap="flat" cmpd="sng" algn="ctr">
-                      <a:solidFill>
-                        <a:srgbClr val="DCE4EC"/>
-                      </a:solidFill>
-                      <a:prstDash val="solid"/>
-                      <a:round/>
-                      <a:headEnd type="none" w="med" len="med"/>
-                      <a:tailEnd type="none" w="med" len="med"/>
-                    </a:lnL>
-                    <a:lnR w="9525" cap="flat" cmpd="sng" algn="ctr">
-                      <a:solidFill>
-                        <a:srgbClr val="DCE4EC"/>
-                      </a:solidFill>
-                      <a:prstDash val="solid"/>
-                      <a:round/>
-                      <a:headEnd type="none" w="med" len="med"/>
-                      <a:tailEnd type="none" w="med" len="med"/>
-                    </a:lnR>
-                    <a:lnT w="9525" cap="flat" cmpd="sng" algn="ctr">
-                      <a:solidFill>
-                        <a:srgbClr val="DCE4EC"/>
-                      </a:solidFill>
-                      <a:prstDash val="solid"/>
-                      <a:round/>
-                      <a:headEnd type="none" w="med" len="med"/>
-                      <a:tailEnd type="none" w="med" len="med"/>
-                    </a:lnT>
-                    <a:lnB w="9525" cap="flat" cmpd="sng" algn="ctr">
-                      <a:solidFill>
-                        <a:srgbClr val="DCE4EC"/>
-                      </a:solidFill>
-                      <a:prstDash val="solid"/>
-                      <a:round/>
-                      <a:headEnd type="none" w="med" len="med"/>
-                      <a:tailEnd type="none" w="med" len="med"/>
-                    </a:lnB>
-                    <a:solidFill>
-                      <a:srgbClr val="F3F7FA"/>
-                    </a:solidFill>
-                  </a:tcPr>
-                </a:tc>
-                <a:tc>
-                  <a:txBody>
-                    <a:bodyPr/>
-                    <a:lstStyle/>
-                    <a:p>
-                      <a:pPr algn="ctr" indent="0" marL="0">
-                        <a:buNone/>
-                      </a:pPr>
-                      <a:r>
-                        <a:rPr lang="en-US" sz="1100" dirty="0">
-                          <a:solidFill>
-                            <a:srgbClr val="33444F"/>
-                          </a:solidFill>
-                          <a:latin typeface="Calibri" pitchFamily="34" charset="0"/>
-                          <a:ea typeface="Calibri" pitchFamily="34" charset="-122"/>
-                          <a:cs typeface="Calibri" pitchFamily="34" charset="-120"/>
-                        </a:rPr>
-                        <a:t>Simple, low-risk (e.g., many POCT, urine dipstick)</a:t>
-                      </a:r>
-                      <a:endParaRPr lang="en-US" sz="1100" dirty="0">
-                        <a:latin typeface="Calibri" charset="0"/>
-                        <a:ea typeface="Calibri" charset="0"/>
-                        <a:cs typeface="Calibri" charset="0"/>
-                      </a:endParaRPr>
-                    </a:p>
-                  </a:txBody>
-                  <a:tcPr marL="91440" marR="91440" marT="45720" marB="45720" anchor="ctr">
-                    <a:lnL w="9525" cap="flat" cmpd="sng" algn="ctr">
-                      <a:solidFill>
-                        <a:srgbClr val="DCE4EC"/>
-                      </a:solidFill>
-                      <a:prstDash val="solid"/>
-                      <a:round/>
-                      <a:headEnd type="none" w="med" len="med"/>
-                      <a:tailEnd type="none" w="med" len="med"/>
-                    </a:lnL>
-                    <a:lnR w="9525" cap="flat" cmpd="sng" algn="ctr">
-                      <a:solidFill>
-                        <a:srgbClr val="DCE4EC"/>
-                      </a:solidFill>
-                      <a:prstDash val="solid"/>
-                      <a:round/>
-                      <a:headEnd type="none" w="med" len="med"/>
-                      <a:tailEnd type="none" w="med" len="med"/>
-                    </a:lnR>
-                    <a:lnT w="9525" cap="flat" cmpd="sng" algn="ctr">
-                      <a:solidFill>
-                        <a:srgbClr val="DCE4EC"/>
-                      </a:solidFill>
-                      <a:prstDash val="solid"/>
-                      <a:round/>
-                      <a:headEnd type="none" w="med" len="med"/>
-                      <a:tailEnd type="none" w="med" len="med"/>
-                    </a:lnT>
-                    <a:lnB w="9525" cap="flat" cmpd="sng" algn="ctr">
-                      <a:solidFill>
-                        <a:srgbClr val="DCE4EC"/>
-                      </a:solidFill>
-                      <a:prstDash val="solid"/>
-                      <a:round/>
-                      <a:headEnd type="none" w="med" len="med"/>
-                      <a:tailEnd type="none" w="med" len="med"/>
-                    </a:lnB>
-                    <a:solidFill>
-                      <a:srgbClr val="F3F7FA"/>
-                    </a:solidFill>
-                  </a:tcPr>
-                </a:tc>
-                <a:tc>
-                  <a:txBody>
-                    <a:bodyPr/>
-                    <a:lstStyle/>
-                    <a:p>
-                      <a:pPr algn="ctr" indent="0" marL="0">
-                        <a:buNone/>
-                      </a:pPr>
-                      <a:r>
-                        <a:rPr lang="en-US" sz="1100" dirty="0">
-                          <a:solidFill>
-                            <a:srgbClr val="33444F"/>
-                          </a:solidFill>
-                          <a:latin typeface="Calibri" pitchFamily="34" charset="0"/>
-                          <a:ea typeface="Calibri" pitchFamily="34" charset="-122"/>
-                          <a:cs typeface="Calibri" pitchFamily="34" charset="-120"/>
-                        </a:rPr>
-                        <a:t>CLIA certificate of waiver; follow manufacturer instructions</a:t>
-                      </a:r>
-                      <a:endParaRPr lang="en-US" sz="1100" dirty="0">
-                        <a:latin typeface="Calibri" charset="0"/>
-                        <a:ea typeface="Calibri" charset="0"/>
-                        <a:cs typeface="Calibri" charset="0"/>
-                      </a:endParaRPr>
-                    </a:p>
-                  </a:txBody>
-                  <a:tcPr marL="91440" marR="91440" marT="45720" marB="45720" anchor="ctr">
-                    <a:lnL w="9525" cap="flat" cmpd="sng" algn="ctr">
-                      <a:solidFill>
-                        <a:srgbClr val="DCE4EC"/>
-                      </a:solidFill>
-                      <a:prstDash val="solid"/>
-                      <a:round/>
-                      <a:headEnd type="none" w="med" len="med"/>
-                      <a:tailEnd type="none" w="med" len="med"/>
-                    </a:lnL>
-                    <a:lnR w="9525" cap="flat" cmpd="sng" algn="ctr">
-                      <a:solidFill>
-                        <a:srgbClr val="DCE4EC"/>
-                      </a:solidFill>
-                      <a:prstDash val="solid"/>
-                      <a:round/>
-                      <a:headEnd type="none" w="med" len="med"/>
-                      <a:tailEnd type="none" w="med" len="med"/>
-                    </a:lnR>
-                    <a:lnT w="9525" cap="flat" cmpd="sng" algn="ctr">
-                      <a:solidFill>
-                        <a:srgbClr val="DCE4EC"/>
-                      </a:solidFill>
-                      <a:prstDash val="solid"/>
-                      <a:round/>
-                      <a:headEnd type="none" w="med" len="med"/>
-                      <a:tailEnd type="none" w="med" len="med"/>
-                    </a:lnT>
-                    <a:lnB w="9525" cap="flat" cmpd="sng" algn="ctr">
-                      <a:solidFill>
-                        <a:srgbClr val="DCE4EC"/>
-                      </a:solidFill>
-                      <a:prstDash val="solid"/>
-                      <a:round/>
-                      <a:headEnd type="none" w="med" len="med"/>
-                      <a:tailEnd type="none" w="med" len="med"/>
-                    </a:lnB>
-                    <a:solidFill>
-                      <a:srgbClr val="F3F7FA"/>
-                    </a:solidFill>
-                  </a:tcPr>
-                </a:tc>
-              </a:tr>
-              <a:tr h="676656">
-                <a:tc>
-                  <a:txBody>
-                    <a:bodyPr/>
-                    <a:lstStyle/>
-                    <a:p>
-                      <a:pPr algn="l" indent="0" marL="0">
-                        <a:buNone/>
-                      </a:pPr>
-                      <a:r>
-                        <a:rPr lang="en-US" sz="1100" b="1" dirty="0">
-                          <a:solidFill>
-                            <a:srgbClr val="1B2A38"/>
-                          </a:solidFill>
-                          <a:latin typeface="Calibri" pitchFamily="34" charset="0"/>
-                          <a:ea typeface="Calibri" pitchFamily="34" charset="-122"/>
-                          <a:cs typeface="Calibri" pitchFamily="34" charset="-120"/>
-                        </a:rPr>
-                        <a:t>Moderate complexity</a:t>
-                      </a:r>
-                      <a:endParaRPr lang="en-US" sz="1100" dirty="0">
-                        <a:latin typeface="Calibri" charset="0"/>
-                        <a:ea typeface="Calibri" charset="0"/>
-                        <a:cs typeface="Calibri" charset="0"/>
-                      </a:endParaRPr>
-                    </a:p>
-                  </a:txBody>
-                  <a:tcPr marL="91440" marR="91440" marT="45720" marB="45720" anchor="ctr">
-                    <a:lnL w="9525" cap="flat" cmpd="sng" algn="ctr">
-                      <a:solidFill>
-                        <a:srgbClr val="DCE4EC"/>
-                      </a:solidFill>
-                      <a:prstDash val="solid"/>
-                      <a:round/>
-                      <a:headEnd type="none" w="med" len="med"/>
-                      <a:tailEnd type="none" w="med" len="med"/>
-                    </a:lnL>
-                    <a:lnR w="9525" cap="flat" cmpd="sng" algn="ctr">
-                      <a:solidFill>
-                        <a:srgbClr val="DCE4EC"/>
-                      </a:solidFill>
-                      <a:prstDash val="solid"/>
-                      <a:round/>
-                      <a:headEnd type="none" w="med" len="med"/>
-                      <a:tailEnd type="none" w="med" len="med"/>
-                    </a:lnR>
-                    <a:lnT w="9525" cap="flat" cmpd="sng" algn="ctr">
-                      <a:solidFill>
-                        <a:srgbClr val="DCE4EC"/>
-                      </a:solidFill>
-                      <a:prstDash val="solid"/>
-                      <a:round/>
-                      <a:headEnd type="none" w="med" len="med"/>
-                      <a:tailEnd type="none" w="med" len="med"/>
-                    </a:lnT>
-                    <a:lnB w="9525" cap="flat" cmpd="sng" algn="ctr">
-                      <a:solidFill>
-                        <a:srgbClr val="DCE4EC"/>
-                      </a:solidFill>
-                      <a:prstDash val="solid"/>
-                      <a:round/>
-                      <a:headEnd type="none" w="med" len="med"/>
-                      <a:tailEnd type="none" w="med" len="med"/>
-                    </a:lnB>
-                    <a:solidFill>
-                      <a:srgbClr val="FFFFFF"/>
-                    </a:solidFill>
-                  </a:tcPr>
-                </a:tc>
-                <a:tc>
-                  <a:txBody>
-                    <a:bodyPr/>
-                    <a:lstStyle/>
-                    <a:p>
-                      <a:pPr algn="ctr" indent="0" marL="0">
-                        <a:buNone/>
-                      </a:pPr>
-                      <a:r>
-                        <a:rPr lang="en-US" sz="1100" dirty="0">
-                          <a:solidFill>
-                            <a:srgbClr val="33444F"/>
-                          </a:solidFill>
-                          <a:latin typeface="Calibri" pitchFamily="34" charset="0"/>
-                          <a:ea typeface="Calibri" pitchFamily="34" charset="-122"/>
-                          <a:cs typeface="Calibri" pitchFamily="34" charset="-120"/>
-                        </a:rPr>
-                        <a:t>Many automated chemistry/hematology assays</a:t>
-                      </a:r>
-                      <a:endParaRPr lang="en-US" sz="1100" dirty="0">
-                        <a:latin typeface="Calibri" charset="0"/>
-                        <a:ea typeface="Calibri" charset="0"/>
-                        <a:cs typeface="Calibri" charset="0"/>
-                      </a:endParaRPr>
-                    </a:p>
-                  </a:txBody>
-                  <a:tcPr marL="91440" marR="91440" marT="45720" marB="45720" anchor="ctr">
-                    <a:lnL w="9525" cap="flat" cmpd="sng" algn="ctr">
-                      <a:solidFill>
-                        <a:srgbClr val="DCE4EC"/>
-                      </a:solidFill>
-                      <a:prstDash val="solid"/>
-                      <a:round/>
-                      <a:headEnd type="none" w="med" len="med"/>
-                      <a:tailEnd type="none" w="med" len="med"/>
-                    </a:lnL>
-                    <a:lnR w="9525" cap="flat" cmpd="sng" algn="ctr">
-                      <a:solidFill>
-                        <a:srgbClr val="DCE4EC"/>
-                      </a:solidFill>
-                      <a:prstDash val="solid"/>
-                      <a:round/>
-                      <a:headEnd type="none" w="med" len="med"/>
-                      <a:tailEnd type="none" w="med" len="med"/>
-                    </a:lnR>
-                    <a:lnT w="9525" cap="flat" cmpd="sng" algn="ctr">
-                      <a:solidFill>
-                        <a:srgbClr val="DCE4EC"/>
-                      </a:solidFill>
-                      <a:prstDash val="solid"/>
-                      <a:round/>
-                      <a:headEnd type="none" w="med" len="med"/>
-                      <a:tailEnd type="none" w="med" len="med"/>
-                    </a:lnT>
-                    <a:lnB w="9525" cap="flat" cmpd="sng" algn="ctr">
-                      <a:solidFill>
-                        <a:srgbClr val="DCE4EC"/>
-                      </a:solidFill>
-                      <a:prstDash val="solid"/>
-                      <a:round/>
-                      <a:headEnd type="none" w="med" len="med"/>
-                      <a:tailEnd type="none" w="med" len="med"/>
-                    </a:lnB>
-                    <a:solidFill>
-                      <a:srgbClr val="FFFFFF"/>
-                    </a:solidFill>
-                  </a:tcPr>
-                </a:tc>
-                <a:tc>
-                  <a:txBody>
-                    <a:bodyPr/>
-                    <a:lstStyle/>
-                    <a:p>
-                      <a:pPr algn="ctr" indent="0" marL="0">
-                        <a:buNone/>
-                      </a:pPr>
-                      <a:r>
-                        <a:rPr lang="en-US" sz="1100" dirty="0">
-                          <a:solidFill>
-                            <a:srgbClr val="33444F"/>
-                          </a:solidFill>
-                          <a:latin typeface="Calibri" pitchFamily="34" charset="0"/>
-                          <a:ea typeface="Calibri" pitchFamily="34" charset="-122"/>
-                          <a:cs typeface="Calibri" pitchFamily="34" charset="-120"/>
-                        </a:rPr>
-                        <a:t>QC, proficiency testing, qualified personnel, calibration verification</a:t>
-                      </a:r>
-                      <a:endParaRPr lang="en-US" sz="1100" dirty="0">
-                        <a:latin typeface="Calibri" charset="0"/>
-                        <a:ea typeface="Calibri" charset="0"/>
-                        <a:cs typeface="Calibri" charset="0"/>
-                      </a:endParaRPr>
-                    </a:p>
-                  </a:txBody>
-                  <a:tcPr marL="91440" marR="91440" marT="45720" marB="45720" anchor="ctr">
-                    <a:lnL w="9525" cap="flat" cmpd="sng" algn="ctr">
-                      <a:solidFill>
-                        <a:srgbClr val="DCE4EC"/>
-                      </a:solidFill>
-                      <a:prstDash val="solid"/>
-                      <a:round/>
-                      <a:headEnd type="none" w="med" len="med"/>
-                      <a:tailEnd type="none" w="med" len="med"/>
-                    </a:lnL>
-                    <a:lnR w="9525" cap="flat" cmpd="sng" algn="ctr">
-                      <a:solidFill>
-                        <a:srgbClr val="DCE4EC"/>
-                      </a:solidFill>
-                      <a:prstDash val="solid"/>
-                      <a:round/>
-                      <a:headEnd type="none" w="med" len="med"/>
-                      <a:tailEnd type="none" w="med" len="med"/>
-                    </a:lnR>
-                    <a:lnT w="9525" cap="flat" cmpd="sng" algn="ctr">
-                      <a:solidFill>
-                        <a:srgbClr val="DCE4EC"/>
-                      </a:solidFill>
-                      <a:prstDash val="solid"/>
-                      <a:round/>
-                      <a:headEnd type="none" w="med" len="med"/>
-                      <a:tailEnd type="none" w="med" len="med"/>
-                    </a:lnT>
-                    <a:lnB w="9525" cap="flat" cmpd="sng" algn="ctr">
-                      <a:solidFill>
-                        <a:srgbClr val="DCE4EC"/>
-                      </a:solidFill>
-                      <a:prstDash val="solid"/>
-                      <a:round/>
-                      <a:headEnd type="none" w="med" len="med"/>
-                      <a:tailEnd type="none" w="med" len="med"/>
-                    </a:lnB>
-                    <a:solidFill>
-                      <a:srgbClr val="FFFFFF"/>
-                    </a:solidFill>
-                  </a:tcPr>
-                </a:tc>
-              </a:tr>
-              <a:tr h="676656">
-                <a:tc>
-                  <a:txBody>
-                    <a:bodyPr/>
-                    <a:lstStyle/>
-                    <a:p>
-                      <a:pPr algn="l" indent="0" marL="0">
-                        <a:buNone/>
-                      </a:pPr>
-                      <a:r>
-                        <a:rPr lang="en-US" sz="1100" b="1" dirty="0">
-                          <a:solidFill>
-                            <a:srgbClr val="1B2A38"/>
-                          </a:solidFill>
-                          <a:latin typeface="Calibri" pitchFamily="34" charset="0"/>
-                          <a:ea typeface="Calibri" pitchFamily="34" charset="-122"/>
-                          <a:cs typeface="Calibri" pitchFamily="34" charset="-120"/>
-                        </a:rPr>
-                        <a:t>High complexity</a:t>
-                      </a:r>
-                      <a:endParaRPr lang="en-US" sz="1100" dirty="0">
-                        <a:latin typeface="Calibri" charset="0"/>
-                        <a:ea typeface="Calibri" charset="0"/>
-                        <a:cs typeface="Calibri" charset="0"/>
-                      </a:endParaRPr>
-                    </a:p>
-                  </a:txBody>
-                  <a:tcPr marL="91440" marR="91440" marT="45720" marB="45720" anchor="ctr">
-                    <a:lnL w="9525" cap="flat" cmpd="sng" algn="ctr">
-                      <a:solidFill>
-                        <a:srgbClr val="DCE4EC"/>
-                      </a:solidFill>
-                      <a:prstDash val="solid"/>
-                      <a:round/>
-                      <a:headEnd type="none" w="med" len="med"/>
-                      <a:tailEnd type="none" w="med" len="med"/>
-                    </a:lnL>
-                    <a:lnR w="9525" cap="flat" cmpd="sng" algn="ctr">
-                      <a:solidFill>
-                        <a:srgbClr val="DCE4EC"/>
-                      </a:solidFill>
-                      <a:prstDash val="solid"/>
-                      <a:round/>
-                      <a:headEnd type="none" w="med" len="med"/>
-                      <a:tailEnd type="none" w="med" len="med"/>
-                    </a:lnR>
-                    <a:lnT w="9525" cap="flat" cmpd="sng" algn="ctr">
-                      <a:solidFill>
-                        <a:srgbClr val="DCE4EC"/>
-                      </a:solidFill>
-                      <a:prstDash val="solid"/>
-                      <a:round/>
-                      <a:headEnd type="none" w="med" len="med"/>
-                      <a:tailEnd type="none" w="med" len="med"/>
-                    </a:lnT>
-                    <a:lnB w="9525" cap="flat" cmpd="sng" algn="ctr">
-                      <a:solidFill>
-                        <a:srgbClr val="DCE4EC"/>
-                      </a:solidFill>
-                      <a:prstDash val="solid"/>
-                      <a:round/>
-                      <a:headEnd type="none" w="med" len="med"/>
-                      <a:tailEnd type="none" w="med" len="med"/>
-                    </a:lnB>
-                    <a:solidFill>
-                      <a:srgbClr val="F3F7FA"/>
-                    </a:solidFill>
-                  </a:tcPr>
-                </a:tc>
-                <a:tc>
-                  <a:txBody>
-                    <a:bodyPr/>
-                    <a:lstStyle/>
-                    <a:p>
-                      <a:pPr algn="ctr" indent="0" marL="0">
-                        <a:buNone/>
-                      </a:pPr>
-                      <a:r>
-                        <a:rPr lang="en-US" sz="1100" dirty="0">
-                          <a:solidFill>
-                            <a:srgbClr val="33444F"/>
-                          </a:solidFill>
-                          <a:latin typeface="Calibri" pitchFamily="34" charset="0"/>
-                          <a:ea typeface="Calibri" pitchFamily="34" charset="-122"/>
-                          <a:cs typeface="Calibri" pitchFamily="34" charset="-120"/>
-                        </a:rPr>
-                        <a:t>Manual/complex (e.g., some molecular, manual differentials)</a:t>
-                      </a:r>
-                      <a:endParaRPr lang="en-US" sz="1100" dirty="0">
-                        <a:latin typeface="Calibri" charset="0"/>
-                        <a:ea typeface="Calibri" charset="0"/>
-                        <a:cs typeface="Calibri" charset="0"/>
-                      </a:endParaRPr>
-                    </a:p>
-                  </a:txBody>
-                  <a:tcPr marL="91440" marR="91440" marT="45720" marB="45720" anchor="ctr">
-                    <a:lnL w="9525" cap="flat" cmpd="sng" algn="ctr">
-                      <a:solidFill>
-                        <a:srgbClr val="DCE4EC"/>
-                      </a:solidFill>
-                      <a:prstDash val="solid"/>
-                      <a:round/>
-                      <a:headEnd type="none" w="med" len="med"/>
-                      <a:tailEnd type="none" w="med" len="med"/>
-                    </a:lnL>
-                    <a:lnR w="9525" cap="flat" cmpd="sng" algn="ctr">
-                      <a:solidFill>
-                        <a:srgbClr val="DCE4EC"/>
-                      </a:solidFill>
-                      <a:prstDash val="solid"/>
-                      <a:round/>
-                      <a:headEnd type="none" w="med" len="med"/>
-                      <a:tailEnd type="none" w="med" len="med"/>
-                    </a:lnR>
-                    <a:lnT w="9525" cap="flat" cmpd="sng" algn="ctr">
-                      <a:solidFill>
-                        <a:srgbClr val="DCE4EC"/>
-                      </a:solidFill>
-                      <a:prstDash val="solid"/>
-                      <a:round/>
-                      <a:headEnd type="none" w="med" len="med"/>
-                      <a:tailEnd type="none" w="med" len="med"/>
-                    </a:lnT>
-                    <a:lnB w="9525" cap="flat" cmpd="sng" algn="ctr">
-                      <a:solidFill>
-                        <a:srgbClr val="DCE4EC"/>
-                      </a:solidFill>
-                      <a:prstDash val="solid"/>
-                      <a:round/>
-                      <a:headEnd type="none" w="med" len="med"/>
-                      <a:tailEnd type="none" w="med" len="med"/>
-                    </a:lnB>
-                    <a:solidFill>
-                      <a:srgbClr val="F3F7FA"/>
-                    </a:solidFill>
-                  </a:tcPr>
-                </a:tc>
-                <a:tc>
-                  <a:txBody>
-                    <a:bodyPr/>
-                    <a:lstStyle/>
-                    <a:p>
-                      <a:pPr algn="ctr" indent="0" marL="0">
-                        <a:buNone/>
-                      </a:pPr>
-                      <a:r>
-                        <a:rPr lang="en-US" sz="1100" dirty="0">
-                          <a:solidFill>
-                            <a:srgbClr val="33444F"/>
-                          </a:solidFill>
-                          <a:latin typeface="Calibri" pitchFamily="34" charset="0"/>
-                          <a:ea typeface="Calibri" pitchFamily="34" charset="-122"/>
-                          <a:cs typeface="Calibri" pitchFamily="34" charset="-120"/>
-                        </a:rPr>
-                        <a:t>Strictest personnel qualifications; full QC/PT/validation</a:t>
-                      </a:r>
-                      <a:endParaRPr lang="en-US" sz="1100" dirty="0">
-                        <a:latin typeface="Calibri" charset="0"/>
-                        <a:ea typeface="Calibri" charset="0"/>
-                        <a:cs typeface="Calibri" charset="0"/>
-                      </a:endParaRPr>
-                    </a:p>
-                  </a:txBody>
-                  <a:tcPr marL="91440" marR="91440" marT="45720" marB="45720" anchor="ctr">
-                    <a:lnL w="9525" cap="flat" cmpd="sng" algn="ctr">
-                      <a:solidFill>
-                        <a:srgbClr val="DCE4EC"/>
-                      </a:solidFill>
-                      <a:prstDash val="solid"/>
-                      <a:round/>
-                      <a:headEnd type="none" w="med" len="med"/>
-                      <a:tailEnd type="none" w="med" len="med"/>
-                    </a:lnL>
-                    <a:lnR w="9525" cap="flat" cmpd="sng" algn="ctr">
-                      <a:solidFill>
-                        <a:srgbClr val="DCE4EC"/>
-                      </a:solidFill>
-                      <a:prstDash val="solid"/>
-                      <a:round/>
-                      <a:headEnd type="none" w="med" len="med"/>
-                      <a:tailEnd type="none" w="med" len="med"/>
-                    </a:lnR>
-                    <a:lnT w="9525" cap="flat" cmpd="sng" algn="ctr">
-                      <a:solidFill>
-                        <a:srgbClr val="DCE4EC"/>
-                      </a:solidFill>
-                      <a:prstDash val="solid"/>
-                      <a:round/>
-                      <a:headEnd type="none" w="med" len="med"/>
-                      <a:tailEnd type="none" w="med" len="med"/>
-                    </a:lnT>
-                    <a:lnB w="9525" cap="flat" cmpd="sng" algn="ctr">
-                      <a:solidFill>
-                        <a:srgbClr val="DCE4EC"/>
-                      </a:solidFill>
-                      <a:prstDash val="solid"/>
-                      <a:round/>
-                      <a:headEnd type="none" w="med" len="med"/>
-                      <a:tailEnd type="none" w="med" len="med"/>
-                    </a:lnB>
-                    <a:solidFill>
-                      <a:srgbClr val="F3F7FA"/>
-                    </a:solidFill>
-                  </a:tcPr>
-                </a:tc>
-              </a:tr>
-            </a:tbl>
-          </a:graphicData>
-        </a:graphic>
-      </p:graphicFrame>
-      <p:sp>
-        <p:nvSpPr>
-          <p:cNvPr id="5" name="Text 2"/>
-          <p:cNvSpPr/>
-          <p:nvPr/>
-        </p:nvSpPr>
-        <p:spPr>
-          <a:xfrm>
-            <a:off x="566928" y="6016752"/>
+      <p:sp>
+        <p:nvSpPr>
+          <p:cNvPr id="4" name="Shape 2"/>
+          <p:cNvSpPr/>
+          <p:nvPr/>
+        </p:nvSpPr>
+        <p:spPr>
+          <a:xfrm>
+            <a:off x="792328" y="1481328"/>
+            <a:ext cx="10607040" cy="4480560"/>
+          </a:xfrm>
+          <a:prstGeom prst="roundRect">
+            <a:avLst>
+              <a:gd name="adj" fmla="val 1837"/>
+            </a:avLst>
+          </a:prstGeom>
+          <a:solidFill>
+            <a:srgbClr val="FFFFFF"/>
+          </a:solidFill>
+          <a:ln w="12700">
+            <a:solidFill>
+              <a:srgbClr val="DCE4EC"/>
+            </a:solidFill>
+            <a:prstDash val="solid"/>
+          </a:ln>
+          <a:effectLst>
+            <a:outerShdw sx="100000" sy="100000" kx="0" ky="0" algn="bl" rotWithShape="0" blurRad="88900" dist="25400" dir="5400000">
+              <a:srgbClr val="22303C">
+                <a:alpha val="12000"/>
+              </a:srgbClr>
+            </a:outerShdw>
+          </a:effectLst>
+        </p:spPr>
+      </p:sp>
+      <p:pic>
+        <p:nvPicPr>
+          <p:cNvPr id="5" name="Image 0" descr="/tmp/cp_work2/art/lab_reg.png">    </p:cNvPr>
+          <p:cNvPicPr>
+            <a:picLocks noChangeAspect="1"/>
+          </p:cNvPicPr>
+          <p:nvPr/>
+        </p:nvPicPr>
+        <p:blipFill>
+          <a:blip r:embed="rId1"/>
+          <a:stretch>
+            <a:fillRect/>
+          </a:stretch>
+        </p:blipFill>
+        <p:spPr>
+          <a:xfrm>
+            <a:off x="920344" y="1609344"/>
+            <a:ext cx="10351008" cy="4224528"/>
+          </a:xfrm>
+          <a:prstGeom prst="rect">
+            <a:avLst/>
+          </a:prstGeom>
+        </p:spPr>
+      </p:pic>
+      <p:sp>
+        <p:nvSpPr>
+          <p:cNvPr id="6" name="Text 3"/>
+          <p:cNvSpPr/>
+          <p:nvPr/>
+        </p:nvSpPr>
+        <p:spPr>
+          <a:xfrm>
+            <a:off x="566928" y="6035040"/>
             <a:ext cx="11057839" cy="365760"/>
           </a:xfrm>
           <a:prstGeom prst="rect">
@@ -11846,14 +13991,14 @@
           <a:ln/>
         </p:spPr>
         <p:txBody>
-          <a:bodyPr wrap="square" lIns="0" tIns="0" rIns="0" bIns="0" rtlCol="0" anchor="ctr"/>
-          <a:lstStyle/>
-          <a:p>
-            <a:pPr algn="l" indent="0" marL="0">
-              <a:buNone/>
-            </a:pPr>
-            <a:r>
-              <a:rPr lang="en-US" sz="1050" i="1" dirty="0">
+          <a:bodyPr wrap="square" lIns="0" tIns="0" rIns="0" bIns="0" rtlCol="0" anchor="t"/>
+          <a:lstStyle/>
+          <a:p>
+            <a:pPr algn="ctr" indent="0" marL="0">
+              <a:buNone/>
+            </a:pPr>
+            <a:r>
+              <a:rPr lang="en-US" sz="1150" i="1" dirty="0">
                 <a:solidFill>
                   <a:srgbClr val="6B7B8A"/>
                 </a:solidFill>
@@ -11861,15 +14006,15 @@
                 <a:ea typeface="Calibri" pitchFamily="34" charset="-122"/>
                 <a:cs typeface="Calibri" pitchFamily="34" charset="-120"/>
               </a:rPr>
-              <a:t>Laboratory-developed tests are high complexity and require full validation; FDA-cleared assays in moderate-complexity use require verification.</a:t>
-            </a:r>
-            <a:endParaRPr lang="en-US" sz="1050" dirty="0"/>
-          </a:p>
-        </p:txBody>
-      </p:sp>
-      <p:sp>
-        <p:nvSpPr>
-          <p:cNvPr id="6" name="Text 3"/>
+              <a:t>Original schematic. CLIA is the federal floor; accreditation and ISO 15189 build on it; proficiency testing verifies performance.</a:t>
+            </a:r>
+            <a:endParaRPr lang="en-US" sz="1150" dirty="0"/>
+          </a:p>
+        </p:txBody>
+      </p:sp>
+      <p:sp>
+        <p:nvSpPr>
+          <p:cNvPr id="7" name="Text 4"/>
           <p:cNvSpPr/>
           <p:nvPr/>
         </p:nvSpPr>
@@ -11908,7 +14053,7 @@
       </p:sp>
       <p:sp>
         <p:nvSpPr>
-          <p:cNvPr id="7" name="Text 4"/>
+          <p:cNvPr id="8" name="Text 5"/>
           <p:cNvSpPr/>
           <p:nvPr/>
         </p:nvSpPr>
@@ -12038,7 +14183,7 @@
                 <a:ea typeface="Calibri" pitchFamily="34" charset="-122"/>
                 <a:cs typeface="Calibri" pitchFamily="34" charset="-120"/>
               </a:rPr>
-              <a:t>LAB MANAGEMENT &amp; QUALITY   ·   ACCREDITATION</a:t>
+              <a:t>LAB MANAGEMENT &amp; QUALITY   ·   REGULATION</a:t>
             </a:r>
             <a:endParaRPr lang="en-US" sz="1100" dirty="0"/>
           </a:p>
@@ -12077,7 +14222,7 @@
                 <a:ea typeface="Calibri" pitchFamily="34" charset="-122"/>
                 <a:cs typeface="Calibri" pitchFamily="34" charset="-120"/>
               </a:rPr>
-              <a:t>CLIA vs Accreditation Bodies</a:t>
+              <a:t>CLIA &amp; Accreditation</a:t>
             </a:r>
             <a:endParaRPr lang="en-US" sz="3000" dirty="0"/>
           </a:p>
@@ -12145,7 +14290,7 @@
                 <a:ea typeface="Calibri" pitchFamily="34" charset="-122"/>
                 <a:cs typeface="Calibri" pitchFamily="34" charset="-120"/>
               </a:rPr>
-              <a:t>THE REGULATORY FLOOR</a:t>
+              <a:t>CLIA</a:t>
             </a:r>
             <a:endParaRPr lang="en-US" sz="1200" dirty="0"/>
           </a:p>
@@ -12188,7 +14333,7 @@
                 <a:ea typeface="Calibri" pitchFamily="34" charset="-122"/>
                 <a:cs typeface="Calibri" pitchFamily="34" charset="-120"/>
               </a:rPr>
-              <a:t>CLIA sets the minimum federal standards for all U.S. clinical laboratory testing.</a:t>
+              <a:t>Federal regulations governing all clinical laboratory testing on human specimens.</a:t>
             </a:r>
             <a:endParaRPr lang="en-US" sz="1250" dirty="0"/>
           </a:p>
@@ -12209,7 +14354,7 @@
                 <a:ea typeface="Calibri" pitchFamily="34" charset="-122"/>
                 <a:cs typeface="Calibri" pitchFamily="34" charset="-120"/>
               </a:rPr>
-              <a:t>Certificates correspond to the complexity of testing performed.</a:t>
+              <a:t>Sets personnel, QC, and proficiency-testing requirements.</a:t>
             </a:r>
             <a:endParaRPr lang="en-US" sz="1250" dirty="0"/>
           </a:p>
@@ -12230,7 +14375,7 @@
                 <a:ea typeface="Calibri" pitchFamily="34" charset="-122"/>
                 <a:cs typeface="Calibri" pitchFamily="34" charset="-120"/>
               </a:rPr>
-              <a:t>Covers QC, PT, personnel, and quality systems.</a:t>
+              <a:t>Requirements scale with test complexity.</a:t>
             </a:r>
             <a:endParaRPr lang="en-US" sz="1250" dirty="0"/>
           </a:p>
@@ -12251,7 +14396,7 @@
                 <a:ea typeface="Calibri" pitchFamily="34" charset="-122"/>
                 <a:cs typeface="Calibri" pitchFamily="34" charset="-120"/>
               </a:rPr>
-              <a:t>Enforced through inspections and PT performance.</a:t>
+              <a:t>Enforced via certificates and inspection.</a:t>
             </a:r>
             <a:endParaRPr lang="en-US" sz="1250" dirty="0"/>
           </a:p>
@@ -12274,7 +14419,7 @@
             </a:avLst>
           </a:prstGeom>
           <a:solidFill>
-            <a:srgbClr val="ECEFF1"/>
+            <a:srgbClr val="E6EAED"/>
           </a:solidFill>
           <a:ln/>
           <a:effectLst>
@@ -12319,7 +14464,7 @@
                 <a:ea typeface="Calibri" pitchFamily="34" charset="-122"/>
                 <a:cs typeface="Calibri" pitchFamily="34" charset="-120"/>
               </a:rPr>
-              <a:t>ACCREDITATION PROGRAMS</a:t>
+              <a:t>ACCREDITATION &amp; DEEMED STATUS</a:t>
             </a:r>
             <a:endParaRPr lang="en-US" sz="1200" dirty="0"/>
           </a:p>
@@ -12362,7 +14507,7 @@
                 <a:ea typeface="Calibri" pitchFamily="34" charset="-122"/>
                 <a:cs typeface="Calibri" pitchFamily="34" charset="-120"/>
               </a:rPr>
-              <a:t>CAP (and others) provide deemed-status accreditation with detailed checklists that often exceed CLIA minimums.</a:t>
+              <a:t>Accreditors (e.g., CAP, TJC) with deemed status inspect against detailed checklists.</a:t>
             </a:r>
             <a:endParaRPr lang="en-US" sz="1250" dirty="0"/>
           </a:p>
@@ -12383,7 +14528,7 @@
                 <a:ea typeface="Calibri" pitchFamily="34" charset="-122"/>
                 <a:cs typeface="Calibri" pitchFamily="34" charset="-120"/>
               </a:rPr>
-              <a:t>Peer-based, discipline-specific checklist requirements.</a:t>
+              <a:t>Meeting accreditation satisfies CLIA via deemed status.</a:t>
             </a:r>
             <a:endParaRPr lang="en-US" sz="1250" dirty="0"/>
           </a:p>
@@ -12404,7 +14549,7 @@
                 <a:ea typeface="Calibri" pitchFamily="34" charset="-122"/>
                 <a:cs typeface="Calibri" pitchFamily="34" charset="-120"/>
               </a:rPr>
-              <a:t>Joint Commission and ISO 15189 are other frameworks.</a:t>
+              <a:t>Inspections are typically periodic and may be unannounced.</a:t>
             </a:r>
             <a:endParaRPr lang="en-US" sz="1250" dirty="0"/>
           </a:p>
@@ -12425,7 +14570,7 @@
                 <a:ea typeface="Calibri" pitchFamily="34" charset="-122"/>
                 <a:cs typeface="Calibri" pitchFamily="34" charset="-120"/>
               </a:rPr>
-              <a:t>Accreditation drives continuous, checklist-aligned compliance.</a:t>
+              <a:t>ISO 15189 is an optional international standard.</a:t>
             </a:r>
             <a:endParaRPr lang="en-US" sz="1250" dirty="0"/>
           </a:p>
@@ -12548,6 +14693,570 @@
 <file path=ppt/slides/slide8.xml><?xml version="1.0" encoding="utf-8"?>
 <p:sld xmlns:a="http://schemas.openxmlformats.org/drawingml/2006/main" xmlns:r="http://schemas.openxmlformats.org/officeDocument/2006/relationships" xmlns:p="http://schemas.openxmlformats.org/presentationml/2006/main">
   <p:cSld name="Slide 8">
+    <p:bg>
+      <p:bgPr>
+        <a:solidFill>
+          <a:srgbClr val="FFFFFF"/>
+        </a:solidFill>
+      </p:bgPr>
+    </p:bg>
+    <p:spTree>
+      <p:nvGrpSpPr>
+        <p:cNvPr id="1" name=""/>
+        <p:cNvGrpSpPr/>
+        <p:nvPr/>
+      </p:nvGrpSpPr>
+      <p:grpSpPr>
+        <a:xfrm>
+          <a:off x="0" y="0"/>
+          <a:ext cx="0" cy="0"/>
+          <a:chOff x="0" y="0"/>
+          <a:chExt cx="0" cy="0"/>
+        </a:xfrm>
+      </p:grpSpPr>
+      <p:sp>
+        <p:nvSpPr>
+          <p:cNvPr id="2" name="Text 0"/>
+          <p:cNvSpPr/>
+          <p:nvPr/>
+        </p:nvSpPr>
+        <p:spPr>
+          <a:xfrm>
+            <a:off x="566928" y="329184"/>
+            <a:ext cx="10515600" cy="310896"/>
+          </a:xfrm>
+          <a:prstGeom prst="rect">
+            <a:avLst/>
+          </a:prstGeom>
+          <a:noFill/>
+          <a:ln/>
+        </p:spPr>
+        <p:txBody>
+          <a:bodyPr wrap="square" lIns="0" tIns="0" rIns="0" bIns="0" rtlCol="0" anchor="ctr"/>
+          <a:lstStyle/>
+          <a:p>
+            <a:pPr algn="l" indent="0" marL="0">
+              <a:buNone/>
+            </a:pPr>
+            <a:r>
+              <a:rPr lang="en-US" sz="1100" b="1" spc="150" kern="0" dirty="0">
+                <a:solidFill>
+                  <a:srgbClr val="455A64"/>
+                </a:solidFill>
+                <a:latin typeface="Calibri" pitchFamily="34" charset="0"/>
+                <a:ea typeface="Calibri" pitchFamily="34" charset="-122"/>
+                <a:cs typeface="Calibri" pitchFamily="34" charset="-120"/>
+              </a:rPr>
+              <a:t>LAB MANAGEMENT &amp; QUALITY   ·   COMPLEXITY</a:t>
+            </a:r>
+            <a:endParaRPr lang="en-US" sz="1100" dirty="0"/>
+          </a:p>
+        </p:txBody>
+      </p:sp>
+      <p:sp>
+        <p:nvSpPr>
+          <p:cNvPr id="3" name="Text 1"/>
+          <p:cNvSpPr/>
+          <p:nvPr/>
+        </p:nvSpPr>
+        <p:spPr>
+          <a:xfrm>
+            <a:off x="566928" y="713232"/>
+            <a:ext cx="11064240" cy="749808"/>
+          </a:xfrm>
+          <a:prstGeom prst="rect">
+            <a:avLst/>
+          </a:prstGeom>
+          <a:noFill/>
+          <a:ln/>
+        </p:spPr>
+        <p:txBody>
+          <a:bodyPr wrap="square" lIns="0" tIns="0" rIns="0" bIns="0" rtlCol="0" anchor="ctr"/>
+          <a:lstStyle/>
+          <a:p>
+            <a:pPr algn="l" indent="0" marL="0">
+              <a:buNone/>
+            </a:pPr>
+            <a:r>
+              <a:rPr lang="en-US" sz="3000" b="1" dirty="0">
+                <a:solidFill>
+                  <a:srgbClr val="0E3A5F"/>
+                </a:solidFill>
+                <a:latin typeface="Calibri" pitchFamily="34" charset="0"/>
+                <a:ea typeface="Calibri" pitchFamily="34" charset="-122"/>
+                <a:cs typeface="Calibri" pitchFamily="34" charset="-120"/>
+              </a:rPr>
+              <a:t>Test Complexity Categories</a:t>
+            </a:r>
+            <a:endParaRPr lang="en-US" sz="3000" dirty="0"/>
+          </a:p>
+        </p:txBody>
+      </p:sp>
+      <p:sp>
+        <p:nvSpPr>
+          <p:cNvPr id="4" name="Shape 2"/>
+          <p:cNvSpPr/>
+          <p:nvPr/>
+        </p:nvSpPr>
+        <p:spPr>
+          <a:xfrm>
+            <a:off x="566928" y="1517904"/>
+            <a:ext cx="5346040" cy="4114800"/>
+          </a:xfrm>
+          <a:prstGeom prst="roundRect">
+            <a:avLst>
+              <a:gd name="adj" fmla="val 2000"/>
+            </a:avLst>
+          </a:prstGeom>
+          <a:solidFill>
+            <a:srgbClr val="ECEFF1"/>
+          </a:solidFill>
+          <a:ln/>
+          <a:effectLst>
+            <a:outerShdw sx="100000" sy="100000" kx="0" ky="0" algn="bl" rotWithShape="0" blurRad="88900" dist="25400" dir="5400000">
+              <a:srgbClr val="22303C">
+                <a:alpha val="12000"/>
+              </a:srgbClr>
+            </a:outerShdw>
+          </a:effectLst>
+        </p:spPr>
+      </p:sp>
+      <p:sp>
+        <p:nvSpPr>
+          <p:cNvPr id="5" name="Text 3"/>
+          <p:cNvSpPr/>
+          <p:nvPr/>
+        </p:nvSpPr>
+        <p:spPr>
+          <a:xfrm>
+            <a:off x="804672" y="1682496"/>
+            <a:ext cx="4888840" cy="274320"/>
+          </a:xfrm>
+          <a:prstGeom prst="rect">
+            <a:avLst/>
+          </a:prstGeom>
+          <a:noFill/>
+          <a:ln/>
+        </p:spPr>
+        <p:txBody>
+          <a:bodyPr wrap="square" lIns="0" tIns="0" rIns="0" bIns="0" rtlCol="0" anchor="ctr"/>
+          <a:lstStyle/>
+          <a:p>
+            <a:pPr indent="0" marL="0">
+              <a:buNone/>
+            </a:pPr>
+            <a:r>
+              <a:rPr lang="en-US" sz="1200" b="1" spc="100" kern="0" dirty="0">
+                <a:solidFill>
+                  <a:srgbClr val="2C3A41"/>
+                </a:solidFill>
+                <a:latin typeface="Calibri" pitchFamily="34" charset="0"/>
+                <a:ea typeface="Calibri" pitchFamily="34" charset="-122"/>
+                <a:cs typeface="Calibri" pitchFamily="34" charset="-120"/>
+              </a:rPr>
+              <a:t>THE CATEGORIES</a:t>
+            </a:r>
+            <a:endParaRPr lang="en-US" sz="1200" dirty="0"/>
+          </a:p>
+        </p:txBody>
+      </p:sp>
+      <p:sp>
+        <p:nvSpPr>
+          <p:cNvPr id="6" name="Text 4"/>
+          <p:cNvSpPr/>
+          <p:nvPr/>
+        </p:nvSpPr>
+        <p:spPr>
+          <a:xfrm>
+            <a:off x="804672" y="2029968"/>
+            <a:ext cx="4870552" cy="3474720"/>
+          </a:xfrm>
+          <a:prstGeom prst="rect">
+            <a:avLst/>
+          </a:prstGeom>
+          <a:noFill/>
+          <a:ln/>
+        </p:spPr>
+        <p:txBody>
+          <a:bodyPr wrap="square" lIns="0" tIns="0" rIns="0" bIns="0" rtlCol="0" anchor="t"/>
+          <a:lstStyle/>
+          <a:p>
+            <a:pPr algn="l" marL="177800" indent="-177800">
+              <a:spcAft>
+                <a:spcPts val="900"/>
+              </a:spcAft>
+              <a:buSzPct val="100000"/>
+              <a:buChar char="•"/>
+            </a:pPr>
+            <a:r>
+              <a:rPr lang="en-US" sz="1250" b="1" dirty="0">
+                <a:solidFill>
+                  <a:srgbClr val="1B2A38"/>
+                </a:solidFill>
+                <a:latin typeface="Calibri" pitchFamily="34" charset="0"/>
+                <a:ea typeface="Calibri" pitchFamily="34" charset="-122"/>
+                <a:cs typeface="Calibri" pitchFamily="34" charset="-120"/>
+              </a:rPr>
+              <a:t>Waived, moderate complexity, and high complexity — requirements increase accordingly.</a:t>
+            </a:r>
+            <a:endParaRPr lang="en-US" sz="1250" dirty="0"/>
+          </a:p>
+          <a:p>
+            <a:pPr algn="l" marL="177800" indent="-177800">
+              <a:spcAft>
+                <a:spcPts val="900"/>
+              </a:spcAft>
+              <a:buSzPct val="100000"/>
+              <a:buChar char="•"/>
+            </a:pPr>
+            <a:r>
+              <a:rPr lang="en-US" sz="1250" dirty="0">
+                <a:solidFill>
+                  <a:srgbClr val="33444F"/>
+                </a:solidFill>
+                <a:latin typeface="Calibri" pitchFamily="34" charset="0"/>
+                <a:ea typeface="Calibri" pitchFamily="34" charset="-122"/>
+                <a:cs typeface="Calibri" pitchFamily="34" charset="-120"/>
+              </a:rPr>
+              <a:t>Complexity reflects knowledge, steps, and interpretation needed.</a:t>
+            </a:r>
+            <a:endParaRPr lang="en-US" sz="1250" dirty="0"/>
+          </a:p>
+          <a:p>
+            <a:pPr algn="l" marL="177800" indent="-177800">
+              <a:spcAft>
+                <a:spcPts val="900"/>
+              </a:spcAft>
+              <a:buSzPct val="100000"/>
+              <a:buChar char="•"/>
+            </a:pPr>
+            <a:r>
+              <a:rPr lang="en-US" sz="1250" dirty="0">
+                <a:solidFill>
+                  <a:srgbClr val="33444F"/>
+                </a:solidFill>
+                <a:latin typeface="Calibri" pitchFamily="34" charset="0"/>
+                <a:ea typeface="Calibri" pitchFamily="34" charset="-122"/>
+                <a:cs typeface="Calibri" pitchFamily="34" charset="-120"/>
+              </a:rPr>
+              <a:t>Personnel qualifications scale with complexity.</a:t>
+            </a:r>
+            <a:endParaRPr lang="en-US" sz="1250" dirty="0"/>
+          </a:p>
+          <a:p>
+            <a:pPr algn="l" marL="177800" indent="-177800">
+              <a:spcAft>
+                <a:spcPts val="900"/>
+              </a:spcAft>
+              <a:buSzPct val="100000"/>
+              <a:buChar char="•"/>
+            </a:pPr>
+            <a:r>
+              <a:rPr lang="en-US" sz="1250" dirty="0">
+                <a:solidFill>
+                  <a:srgbClr val="33444F"/>
+                </a:solidFill>
+                <a:latin typeface="Calibri" pitchFamily="34" charset="0"/>
+                <a:ea typeface="Calibri" pitchFamily="34" charset="-122"/>
+                <a:cs typeface="Calibri" pitchFamily="34" charset="-120"/>
+              </a:rPr>
+              <a:t>Modifying an FDA-cleared test raises it to high complexity.</a:t>
+            </a:r>
+            <a:endParaRPr lang="en-US" sz="1250" dirty="0"/>
+          </a:p>
+        </p:txBody>
+      </p:sp>
+      <p:sp>
+        <p:nvSpPr>
+          <p:cNvPr id="7" name="Shape 5"/>
+          <p:cNvSpPr/>
+          <p:nvPr/>
+        </p:nvSpPr>
+        <p:spPr>
+          <a:xfrm>
+            <a:off x="6278728" y="1517904"/>
+            <a:ext cx="5346040" cy="4114800"/>
+          </a:xfrm>
+          <a:prstGeom prst="roundRect">
+            <a:avLst>
+              <a:gd name="adj" fmla="val 2000"/>
+            </a:avLst>
+          </a:prstGeom>
+          <a:solidFill>
+            <a:srgbClr val="E6EAED"/>
+          </a:solidFill>
+          <a:ln/>
+          <a:effectLst>
+            <a:outerShdw sx="100000" sy="100000" kx="0" ky="0" algn="bl" rotWithShape="0" blurRad="88900" dist="25400" dir="5400000">
+              <a:srgbClr val="22303C">
+                <a:alpha val="12000"/>
+              </a:srgbClr>
+            </a:outerShdw>
+          </a:effectLst>
+        </p:spPr>
+      </p:sp>
+      <p:sp>
+        <p:nvSpPr>
+          <p:cNvPr id="8" name="Text 6"/>
+          <p:cNvSpPr/>
+          <p:nvPr/>
+        </p:nvSpPr>
+        <p:spPr>
+          <a:xfrm>
+            <a:off x="6516472" y="1682496"/>
+            <a:ext cx="4888840" cy="274320"/>
+          </a:xfrm>
+          <a:prstGeom prst="rect">
+            <a:avLst/>
+          </a:prstGeom>
+          <a:noFill/>
+          <a:ln/>
+        </p:spPr>
+        <p:txBody>
+          <a:bodyPr wrap="square" lIns="0" tIns="0" rIns="0" bIns="0" rtlCol="0" anchor="ctr"/>
+          <a:lstStyle/>
+          <a:p>
+            <a:pPr indent="0" marL="0">
+              <a:buNone/>
+            </a:pPr>
+            <a:r>
+              <a:rPr lang="en-US" sz="1200" b="1" spc="100" kern="0" dirty="0">
+                <a:solidFill>
+                  <a:srgbClr val="2C3A41"/>
+                </a:solidFill>
+                <a:latin typeface="Calibri" pitchFamily="34" charset="0"/>
+                <a:ea typeface="Calibri" pitchFamily="34" charset="-122"/>
+                <a:cs typeface="Calibri" pitchFamily="34" charset="-120"/>
+              </a:rPr>
+              <a:t>WAIVED TESTING</a:t>
+            </a:r>
+            <a:endParaRPr lang="en-US" sz="1200" dirty="0"/>
+          </a:p>
+        </p:txBody>
+      </p:sp>
+      <p:sp>
+        <p:nvSpPr>
+          <p:cNvPr id="9" name="Text 7"/>
+          <p:cNvSpPr/>
+          <p:nvPr/>
+        </p:nvSpPr>
+        <p:spPr>
+          <a:xfrm>
+            <a:off x="6516472" y="2029968"/>
+            <a:ext cx="4870552" cy="3474720"/>
+          </a:xfrm>
+          <a:prstGeom prst="rect">
+            <a:avLst/>
+          </a:prstGeom>
+          <a:noFill/>
+          <a:ln/>
+        </p:spPr>
+        <p:txBody>
+          <a:bodyPr wrap="square" lIns="0" tIns="0" rIns="0" bIns="0" rtlCol="0" anchor="t"/>
+          <a:lstStyle/>
+          <a:p>
+            <a:pPr algn="l" marL="177800" indent="-177800">
+              <a:spcAft>
+                <a:spcPts val="900"/>
+              </a:spcAft>
+              <a:buSzPct val="100000"/>
+              <a:buChar char="•"/>
+            </a:pPr>
+            <a:r>
+              <a:rPr lang="en-US" sz="1250" b="1" dirty="0">
+                <a:solidFill>
+                  <a:srgbClr val="1B2A38"/>
+                </a:solidFill>
+                <a:latin typeface="Calibri" pitchFamily="34" charset="0"/>
+                <a:ea typeface="Calibri" pitchFamily="34" charset="-122"/>
+                <a:cs typeface="Calibri" pitchFamily="34" charset="-120"/>
+              </a:rPr>
+              <a:t>Waived tests are simple with low error risk but still require correct performance.</a:t>
+            </a:r>
+            <a:endParaRPr lang="en-US" sz="1250" dirty="0"/>
+          </a:p>
+          <a:p>
+            <a:pPr algn="l" marL="177800" indent="-177800">
+              <a:spcAft>
+                <a:spcPts val="900"/>
+              </a:spcAft>
+              <a:buSzPct val="100000"/>
+              <a:buChar char="•"/>
+            </a:pPr>
+            <a:r>
+              <a:rPr lang="en-US" sz="1250" dirty="0">
+                <a:solidFill>
+                  <a:srgbClr val="33444F"/>
+                </a:solidFill>
+                <a:latin typeface="Calibri" pitchFamily="34" charset="0"/>
+                <a:ea typeface="Calibri" pitchFamily="34" charset="-122"/>
+                <a:cs typeface="Calibri" pitchFamily="34" charset="-120"/>
+              </a:rPr>
+              <a:t>‘Waived’ does not mean ‘no oversight’.</a:t>
+            </a:r>
+            <a:endParaRPr lang="en-US" sz="1250" dirty="0"/>
+          </a:p>
+          <a:p>
+            <a:pPr algn="l" marL="177800" indent="-177800">
+              <a:spcAft>
+                <a:spcPts val="900"/>
+              </a:spcAft>
+              <a:buSzPct val="100000"/>
+              <a:buChar char="•"/>
+            </a:pPr>
+            <a:r>
+              <a:rPr lang="en-US" sz="1250" dirty="0">
+                <a:solidFill>
+                  <a:srgbClr val="33444F"/>
+                </a:solidFill>
+                <a:latin typeface="Calibri" pitchFamily="34" charset="0"/>
+                <a:ea typeface="Calibri" pitchFamily="34" charset="-122"/>
+                <a:cs typeface="Calibri" pitchFamily="34" charset="-120"/>
+              </a:rPr>
+              <a:t>Follow manufacturer instructions exactly.</a:t>
+            </a:r>
+            <a:endParaRPr lang="en-US" sz="1250" dirty="0"/>
+          </a:p>
+          <a:p>
+            <a:pPr algn="l" marL="177800" indent="-177800">
+              <a:spcAft>
+                <a:spcPts val="900"/>
+              </a:spcAft>
+              <a:buSzPct val="100000"/>
+              <a:buChar char="•"/>
+            </a:pPr>
+            <a:r>
+              <a:rPr lang="en-US" sz="1250" dirty="0">
+                <a:solidFill>
+                  <a:srgbClr val="33444F"/>
+                </a:solidFill>
+                <a:latin typeface="Calibri" pitchFamily="34" charset="0"/>
+                <a:ea typeface="Calibri" pitchFamily="34" charset="-122"/>
+                <a:cs typeface="Calibri" pitchFamily="34" charset="-120"/>
+              </a:rPr>
+              <a:t>Point-of-care programs need governance.</a:t>
+            </a:r>
+            <a:endParaRPr lang="en-US" sz="1250" dirty="0"/>
+          </a:p>
+        </p:txBody>
+      </p:sp>
+      <p:sp>
+        <p:nvSpPr>
+          <p:cNvPr id="10" name="Text 8"/>
+          <p:cNvSpPr/>
+          <p:nvPr/>
+        </p:nvSpPr>
+        <p:spPr>
+          <a:xfrm>
+            <a:off x="566928" y="6473952"/>
+            <a:ext cx="7772400" cy="274320"/>
+          </a:xfrm>
+          <a:prstGeom prst="rect">
+            <a:avLst/>
+          </a:prstGeom>
+          <a:noFill/>
+          <a:ln/>
+        </p:spPr>
+        <p:txBody>
+          <a:bodyPr wrap="square" lIns="0" tIns="0" rIns="0" bIns="0" rtlCol="0" anchor="ctr"/>
+          <a:lstStyle/>
+          <a:p>
+            <a:pPr algn="l" indent="0" marL="0">
+              <a:buNone/>
+            </a:pPr>
+            <a:r>
+              <a:rPr lang="en-US" sz="850" dirty="0">
+                <a:solidFill>
+                  <a:srgbClr val="9AA8B4"/>
+                </a:solidFill>
+                <a:latin typeface="Calibri" pitchFamily="34" charset="0"/>
+                <a:ea typeface="Calibri" pitchFamily="34" charset="-122"/>
+                <a:cs typeface="Calibri" pitchFamily="34" charset="-120"/>
+              </a:rPr>
+              <a:t>Makassed General Hospital  ·  Department of Laboratory Medicine</a:t>
+            </a:r>
+            <a:endParaRPr lang="en-US" sz="850" dirty="0"/>
+          </a:p>
+        </p:txBody>
+      </p:sp>
+      <p:sp>
+        <p:nvSpPr>
+          <p:cNvPr id="11" name="Text 9"/>
+          <p:cNvSpPr/>
+          <p:nvPr/>
+        </p:nvSpPr>
+        <p:spPr>
+          <a:xfrm>
+            <a:off x="9814255" y="6473952"/>
+            <a:ext cx="1828800" cy="274320"/>
+          </a:xfrm>
+          <a:prstGeom prst="rect">
+            <a:avLst/>
+          </a:prstGeom>
+          <a:noFill/>
+          <a:ln/>
+        </p:spPr>
+        <p:txBody>
+          <a:bodyPr wrap="square" lIns="0" tIns="0" rIns="0" bIns="0" rtlCol="0" anchor="ctr"/>
+          <a:lstStyle/>
+          <a:p>
+            <a:pPr algn="r" indent="0" marL="0">
+              <a:buNone/>
+            </a:pPr>
+            <a:r>
+              <a:rPr lang="en-US" sz="850" dirty="0">
+                <a:solidFill>
+                  <a:srgbClr val="9AA8B4"/>
+                </a:solidFill>
+                <a:latin typeface="Calibri" pitchFamily="34" charset="0"/>
+                <a:ea typeface="Calibri" pitchFamily="34" charset="-122"/>
+                <a:cs typeface="Calibri" pitchFamily="34" charset="-120"/>
+              </a:rPr>
+              <a:t>CP Lecture Series</a:t>
+            </a:r>
+            <a:pPr algn="r" indent="0" marL="0">
+              <a:buNone/>
+            </a:pPr>
+            <a:r>
+              <a:rPr lang="en-US" sz="850" dirty="0">
+                <a:solidFill>
+                  <a:srgbClr val="DCE4EC"/>
+                </a:solidFill>
+                <a:latin typeface="Calibri" pitchFamily="34" charset="0"/>
+                <a:ea typeface="Calibri" pitchFamily="34" charset="-122"/>
+                <a:cs typeface="Calibri" pitchFamily="34" charset="-120"/>
+              </a:rPr>
+              <a:t>   ·   </a:t>
+            </a:r>
+            <a:pPr algn="r" indent="0" marL="0">
+              <a:buNone/>
+            </a:pPr>
+            <a:r>
+              <a:rPr lang="en-US" sz="850" b="1" dirty="0">
+                <a:solidFill>
+                  <a:srgbClr val="455A64"/>
+                </a:solidFill>
+                <a:latin typeface="Calibri" pitchFamily="34" charset="0"/>
+                <a:ea typeface="Calibri" pitchFamily="34" charset="-122"/>
+                <a:cs typeface="Calibri" pitchFamily="34" charset="-120"/>
+              </a:rPr>
+              <a:t>7</a:t>
+            </a:r>
+            <a:endParaRPr lang="en-US" sz="850" dirty="0"/>
+          </a:p>
+        </p:txBody>
+      </p:sp>
+    </p:spTree>
+  </p:cSld>
+  <p:clrMapOvr>
+    <a:masterClrMapping/>
+  </p:clrMapOvr>
+</p:sld>
+</file>
+
+<file path=ppt/slides/slide9.xml><?xml version="1.0" encoding="utf-8"?>
+<p:sld xmlns:a="http://schemas.openxmlformats.org/drawingml/2006/main" xmlns:r="http://schemas.openxmlformats.org/officeDocument/2006/relationships" xmlns:p="http://schemas.openxmlformats.org/presentationml/2006/main">
+  <p:cSld name="Slide 9">
     <p:bg>
       <p:bgPr>
         <a:solidFill>
@@ -12724,573 +15433,9 @@
                 <a:ea typeface="Calibri" pitchFamily="34" charset="-122"/>
                 <a:cs typeface="Calibri" pitchFamily="34" charset="-120"/>
               </a:rPr>
-              <a:t>Competency, Documents &amp; Readiness</a:t>
+              <a:t>Proficiency Testing, Personnel &amp; Inspection</a:t>
             </a:r>
             <a:endParaRPr lang="en-US" sz="3800" dirty="0"/>
-          </a:p>
-        </p:txBody>
-      </p:sp>
-    </p:spTree>
-  </p:cSld>
-  <p:clrMapOvr>
-    <a:masterClrMapping/>
-  </p:clrMapOvr>
-</p:sld>
-</file>
-
-<file path=ppt/slides/slide9.xml><?xml version="1.0" encoding="utf-8"?>
-<p:sld xmlns:a="http://schemas.openxmlformats.org/drawingml/2006/main" xmlns:r="http://schemas.openxmlformats.org/officeDocument/2006/relationships" xmlns:p="http://schemas.openxmlformats.org/presentationml/2006/main">
-  <p:cSld name="Slide 9">
-    <p:bg>
-      <p:bgPr>
-        <a:solidFill>
-          <a:srgbClr val="FFFFFF"/>
-        </a:solidFill>
-      </p:bgPr>
-    </p:bg>
-    <p:spTree>
-      <p:nvGrpSpPr>
-        <p:cNvPr id="1" name=""/>
-        <p:cNvGrpSpPr/>
-        <p:nvPr/>
-      </p:nvGrpSpPr>
-      <p:grpSpPr>
-        <a:xfrm>
-          <a:off x="0" y="0"/>
-          <a:ext cx="0" cy="0"/>
-          <a:chOff x="0" y="0"/>
-          <a:chExt cx="0" cy="0"/>
-        </a:xfrm>
-      </p:grpSpPr>
-      <p:sp>
-        <p:nvSpPr>
-          <p:cNvPr id="2" name="Text 0"/>
-          <p:cNvSpPr/>
-          <p:nvPr/>
-        </p:nvSpPr>
-        <p:spPr>
-          <a:xfrm>
-            <a:off x="566928" y="329184"/>
-            <a:ext cx="10515600" cy="310896"/>
-          </a:xfrm>
-          <a:prstGeom prst="rect">
-            <a:avLst/>
-          </a:prstGeom>
-          <a:noFill/>
-          <a:ln/>
-        </p:spPr>
-        <p:txBody>
-          <a:bodyPr wrap="square" lIns="0" tIns="0" rIns="0" bIns="0" rtlCol="0" anchor="ctr"/>
-          <a:lstStyle/>
-          <a:p>
-            <a:pPr algn="l" indent="0" marL="0">
-              <a:buNone/>
-            </a:pPr>
-            <a:r>
-              <a:rPr lang="en-US" sz="1100" b="1" spc="150" kern="0" dirty="0">
-                <a:solidFill>
-                  <a:srgbClr val="455A64"/>
-                </a:solidFill>
-                <a:latin typeface="Calibri" pitchFamily="34" charset="0"/>
-                <a:ea typeface="Calibri" pitchFamily="34" charset="-122"/>
-                <a:cs typeface="Calibri" pitchFamily="34" charset="-120"/>
-              </a:rPr>
-              <a:t>LAB MANAGEMENT &amp; QUALITY   ·   COMPETENCY</a:t>
-            </a:r>
-            <a:endParaRPr lang="en-US" sz="1100" dirty="0"/>
-          </a:p>
-        </p:txBody>
-      </p:sp>
-      <p:sp>
-        <p:nvSpPr>
-          <p:cNvPr id="3" name="Text 1"/>
-          <p:cNvSpPr/>
-          <p:nvPr/>
-        </p:nvSpPr>
-        <p:spPr>
-          <a:xfrm>
-            <a:off x="566928" y="713232"/>
-            <a:ext cx="11064240" cy="749808"/>
-          </a:xfrm>
-          <a:prstGeom prst="rect">
-            <a:avLst/>
-          </a:prstGeom>
-          <a:noFill/>
-          <a:ln/>
-        </p:spPr>
-        <p:txBody>
-          <a:bodyPr wrap="square" lIns="0" tIns="0" rIns="0" bIns="0" rtlCol="0" anchor="ctr"/>
-          <a:lstStyle/>
-          <a:p>
-            <a:pPr algn="l" indent="0" marL="0">
-              <a:buNone/>
-            </a:pPr>
-            <a:r>
-              <a:rPr lang="en-US" sz="3000" b="1" dirty="0">
-                <a:solidFill>
-                  <a:srgbClr val="0E3A5F"/>
-                </a:solidFill>
-                <a:latin typeface="Calibri" pitchFamily="34" charset="0"/>
-                <a:ea typeface="Calibri" pitchFamily="34" charset="-122"/>
-                <a:cs typeface="Calibri" pitchFamily="34" charset="-120"/>
-              </a:rPr>
-              <a:t>The Six Elements of Competency Assessment</a:t>
-            </a:r>
-            <a:endParaRPr lang="en-US" sz="3000" dirty="0"/>
-          </a:p>
-        </p:txBody>
-      </p:sp>
-      <p:sp>
-        <p:nvSpPr>
-          <p:cNvPr id="4" name="Shape 2"/>
-          <p:cNvSpPr/>
-          <p:nvPr/>
-        </p:nvSpPr>
-        <p:spPr>
-          <a:xfrm>
-            <a:off x="566928" y="1517904"/>
-            <a:ext cx="5346040" cy="4114800"/>
-          </a:xfrm>
-          <a:prstGeom prst="roundRect">
-            <a:avLst>
-              <a:gd name="adj" fmla="val 2000"/>
-            </a:avLst>
-          </a:prstGeom>
-          <a:solidFill>
-            <a:srgbClr val="ECEFF1"/>
-          </a:solidFill>
-          <a:ln/>
-          <a:effectLst>
-            <a:outerShdw sx="100000" sy="100000" kx="0" ky="0" algn="bl" rotWithShape="0" blurRad="88900" dist="25400" dir="5400000">
-              <a:srgbClr val="22303C">
-                <a:alpha val="12000"/>
-              </a:srgbClr>
-            </a:outerShdw>
-          </a:effectLst>
-        </p:spPr>
-      </p:sp>
-      <p:sp>
-        <p:nvSpPr>
-          <p:cNvPr id="5" name="Text 3"/>
-          <p:cNvSpPr/>
-          <p:nvPr/>
-        </p:nvSpPr>
-        <p:spPr>
-          <a:xfrm>
-            <a:off x="804672" y="1682496"/>
-            <a:ext cx="4888840" cy="274320"/>
-          </a:xfrm>
-          <a:prstGeom prst="rect">
-            <a:avLst/>
-          </a:prstGeom>
-          <a:noFill/>
-          <a:ln/>
-        </p:spPr>
-        <p:txBody>
-          <a:bodyPr wrap="square" lIns="0" tIns="0" rIns="0" bIns="0" rtlCol="0" anchor="ctr"/>
-          <a:lstStyle/>
-          <a:p>
-            <a:pPr indent="0" marL="0">
-              <a:buNone/>
-            </a:pPr>
-            <a:r>
-              <a:rPr lang="en-US" sz="1200" b="1" spc="100" kern="0" dirty="0">
-                <a:solidFill>
-                  <a:srgbClr val="2C3A41"/>
-                </a:solidFill>
-                <a:latin typeface="Calibri" pitchFamily="34" charset="0"/>
-                <a:ea typeface="Calibri" pitchFamily="34" charset="-122"/>
-                <a:cs typeface="Calibri" pitchFamily="34" charset="-120"/>
-              </a:rPr>
-              <a:t>WHAT MUST BE ASSESSED</a:t>
-            </a:r>
-            <a:endParaRPr lang="en-US" sz="1200" dirty="0"/>
-          </a:p>
-        </p:txBody>
-      </p:sp>
-      <p:sp>
-        <p:nvSpPr>
-          <p:cNvPr id="6" name="Text 4"/>
-          <p:cNvSpPr/>
-          <p:nvPr/>
-        </p:nvSpPr>
-        <p:spPr>
-          <a:xfrm>
-            <a:off x="804672" y="2029968"/>
-            <a:ext cx="4870552" cy="3474720"/>
-          </a:xfrm>
-          <a:prstGeom prst="rect">
-            <a:avLst/>
-          </a:prstGeom>
-          <a:noFill/>
-          <a:ln/>
-        </p:spPr>
-        <p:txBody>
-          <a:bodyPr wrap="square" lIns="0" tIns="0" rIns="0" bIns="0" rtlCol="0" anchor="t"/>
-          <a:lstStyle/>
-          <a:p>
-            <a:pPr algn="l" marL="177800" indent="-177800">
-              <a:spcAft>
-                <a:spcPts val="900"/>
-              </a:spcAft>
-              <a:buSzPct val="100000"/>
-              <a:buChar char="•"/>
-            </a:pPr>
-            <a:r>
-              <a:rPr lang="en-US" sz="1250" b="1" dirty="0">
-                <a:solidFill>
-                  <a:srgbClr val="1B2A38"/>
-                </a:solidFill>
-                <a:latin typeface="Calibri" pitchFamily="34" charset="0"/>
-                <a:ea typeface="Calibri" pitchFamily="34" charset="-122"/>
-                <a:cs typeface="Calibri" pitchFamily="34" charset="-120"/>
-              </a:rPr>
-              <a:t>1) Direct observation of test performance; 2) monitoring of recording/reporting.</a:t>
-            </a:r>
-            <a:endParaRPr lang="en-US" sz="1250" dirty="0"/>
-          </a:p>
-          <a:p>
-            <a:pPr algn="l" marL="177800" indent="-177800">
-              <a:spcAft>
-                <a:spcPts val="900"/>
-              </a:spcAft>
-              <a:buSzPct val="100000"/>
-              <a:buChar char="•"/>
-            </a:pPr>
-            <a:r>
-              <a:rPr lang="en-US" sz="1250" dirty="0">
-                <a:solidFill>
-                  <a:srgbClr val="33444F"/>
-                </a:solidFill>
-                <a:latin typeface="Calibri" pitchFamily="34" charset="0"/>
-                <a:ea typeface="Calibri" pitchFamily="34" charset="-122"/>
-                <a:cs typeface="Calibri" pitchFamily="34" charset="-120"/>
-              </a:rPr>
-              <a:t>3) Review of QC, PT, and maintenance records; 4) direct observation of instrument maintenance/function checks.</a:t>
-            </a:r>
-            <a:endParaRPr lang="en-US" sz="1250" dirty="0"/>
-          </a:p>
-          <a:p>
-            <a:pPr algn="l" marL="177800" indent="-177800">
-              <a:spcAft>
-                <a:spcPts val="900"/>
-              </a:spcAft>
-              <a:buSzPct val="100000"/>
-              <a:buChar char="•"/>
-            </a:pPr>
-            <a:r>
-              <a:rPr lang="en-US" sz="1250" dirty="0">
-                <a:solidFill>
-                  <a:srgbClr val="33444F"/>
-                </a:solidFill>
-                <a:latin typeface="Calibri" pitchFamily="34" charset="0"/>
-                <a:ea typeface="Calibri" pitchFamily="34" charset="-122"/>
-                <a:cs typeface="Calibri" pitchFamily="34" charset="-120"/>
-              </a:rPr>
-              <a:t>5) Assessment of test performance (blind/PT samples); 6) evaluation of problem-solving skills.</a:t>
-            </a:r>
-            <a:endParaRPr lang="en-US" sz="1250" dirty="0"/>
-          </a:p>
-          <a:p>
-            <a:pPr algn="l" marL="177800" indent="-177800">
-              <a:spcAft>
-                <a:spcPts val="900"/>
-              </a:spcAft>
-              <a:buSzPct val="100000"/>
-              <a:buChar char="•"/>
-            </a:pPr>
-            <a:r>
-              <a:rPr lang="en-US" sz="1250" dirty="0">
-                <a:solidFill>
-                  <a:srgbClr val="33444F"/>
-                </a:solidFill>
-                <a:latin typeface="Calibri" pitchFamily="34" charset="0"/>
-                <a:ea typeface="Calibri" pitchFamily="34" charset="-122"/>
-                <a:cs typeface="Calibri" pitchFamily="34" charset="-120"/>
-              </a:rPr>
-              <a:t>Assess at defined intervals (e.g., during the first year and annually thereafter).</a:t>
-            </a:r>
-            <a:endParaRPr lang="en-US" sz="1250" dirty="0"/>
-          </a:p>
-        </p:txBody>
-      </p:sp>
-      <p:sp>
-        <p:nvSpPr>
-          <p:cNvPr id="7" name="Shape 5"/>
-          <p:cNvSpPr/>
-          <p:nvPr/>
-        </p:nvSpPr>
-        <p:spPr>
-          <a:xfrm>
-            <a:off x="6278728" y="1517904"/>
-            <a:ext cx="5346040" cy="4114800"/>
-          </a:xfrm>
-          <a:prstGeom prst="roundRect">
-            <a:avLst>
-              <a:gd name="adj" fmla="val 2000"/>
-            </a:avLst>
-          </a:prstGeom>
-          <a:solidFill>
-            <a:srgbClr val="ECEFF1"/>
-          </a:solidFill>
-          <a:ln/>
-          <a:effectLst>
-            <a:outerShdw sx="100000" sy="100000" kx="0" ky="0" algn="bl" rotWithShape="0" blurRad="88900" dist="25400" dir="5400000">
-              <a:srgbClr val="22303C">
-                <a:alpha val="12000"/>
-              </a:srgbClr>
-            </a:outerShdw>
-          </a:effectLst>
-        </p:spPr>
-      </p:sp>
-      <p:sp>
-        <p:nvSpPr>
-          <p:cNvPr id="8" name="Text 6"/>
-          <p:cNvSpPr/>
-          <p:nvPr/>
-        </p:nvSpPr>
-        <p:spPr>
-          <a:xfrm>
-            <a:off x="6516472" y="1682496"/>
-            <a:ext cx="4888840" cy="274320"/>
-          </a:xfrm>
-          <a:prstGeom prst="rect">
-            <a:avLst/>
-          </a:prstGeom>
-          <a:noFill/>
-          <a:ln/>
-        </p:spPr>
-        <p:txBody>
-          <a:bodyPr wrap="square" lIns="0" tIns="0" rIns="0" bIns="0" rtlCol="0" anchor="ctr"/>
-          <a:lstStyle/>
-          <a:p>
-            <a:pPr indent="0" marL="0">
-              <a:buNone/>
-            </a:pPr>
-            <a:r>
-              <a:rPr lang="en-US" sz="1200" b="1" spc="100" kern="0" dirty="0">
-                <a:solidFill>
-                  <a:srgbClr val="2C3A41"/>
-                </a:solidFill>
-                <a:latin typeface="Calibri" pitchFamily="34" charset="0"/>
-                <a:ea typeface="Calibri" pitchFamily="34" charset="-122"/>
-                <a:cs typeface="Calibri" pitchFamily="34" charset="-120"/>
-              </a:rPr>
-              <a:t>PERSONNEL &amp; TRAINING</a:t>
-            </a:r>
-            <a:endParaRPr lang="en-US" sz="1200" dirty="0"/>
-          </a:p>
-        </p:txBody>
-      </p:sp>
-      <p:sp>
-        <p:nvSpPr>
-          <p:cNvPr id="9" name="Text 7"/>
-          <p:cNvSpPr/>
-          <p:nvPr/>
-        </p:nvSpPr>
-        <p:spPr>
-          <a:xfrm>
-            <a:off x="6516472" y="2029968"/>
-            <a:ext cx="4870552" cy="3474720"/>
-          </a:xfrm>
-          <a:prstGeom prst="rect">
-            <a:avLst/>
-          </a:prstGeom>
-          <a:noFill/>
-          <a:ln/>
-        </p:spPr>
-        <p:txBody>
-          <a:bodyPr wrap="square" lIns="0" tIns="0" rIns="0" bIns="0" rtlCol="0" anchor="t"/>
-          <a:lstStyle/>
-          <a:p>
-            <a:pPr algn="l" marL="177800" indent="-177800">
-              <a:spcAft>
-                <a:spcPts val="900"/>
-              </a:spcAft>
-              <a:buSzPct val="100000"/>
-              <a:buChar char="•"/>
-            </a:pPr>
-            <a:r>
-              <a:rPr lang="en-US" sz="1250" b="1" dirty="0">
-                <a:solidFill>
-                  <a:srgbClr val="1B2A38"/>
-                </a:solidFill>
-                <a:latin typeface="Calibri" pitchFamily="34" charset="0"/>
-                <a:ea typeface="Calibri" pitchFamily="34" charset="-122"/>
-                <a:cs typeface="Calibri" pitchFamily="34" charset="-120"/>
-              </a:rPr>
-              <a:t>Roles (director, technical/clinical consultant, supervisor, testing personnel) have defined qualifications.</a:t>
-            </a:r>
-            <a:endParaRPr lang="en-US" sz="1250" dirty="0"/>
-          </a:p>
-          <a:p>
-            <a:pPr algn="l" marL="177800" indent="-177800">
-              <a:spcAft>
-                <a:spcPts val="900"/>
-              </a:spcAft>
-              <a:buSzPct val="100000"/>
-              <a:buChar char="•"/>
-            </a:pPr>
-            <a:r>
-              <a:rPr lang="en-US" sz="1250" dirty="0">
-                <a:solidFill>
-                  <a:srgbClr val="33444F"/>
-                </a:solidFill>
-                <a:latin typeface="Calibri" pitchFamily="34" charset="0"/>
-                <a:ea typeface="Calibri" pitchFamily="34" charset="-122"/>
-                <a:cs typeface="Calibri" pitchFamily="34" charset="-120"/>
-              </a:rPr>
-              <a:t>Training precedes independent testing; competency confirms it is maintained.</a:t>
-            </a:r>
-            <a:endParaRPr lang="en-US" sz="1250" dirty="0"/>
-          </a:p>
-          <a:p>
-            <a:pPr algn="l" marL="177800" indent="-177800">
-              <a:spcAft>
-                <a:spcPts val="900"/>
-              </a:spcAft>
-              <a:buSzPct val="100000"/>
-              <a:buChar char="•"/>
-            </a:pPr>
-            <a:r>
-              <a:rPr lang="en-US" sz="1250" dirty="0">
-                <a:solidFill>
-                  <a:srgbClr val="33444F"/>
-                </a:solidFill>
-                <a:latin typeface="Calibri" pitchFamily="34" charset="0"/>
-                <a:ea typeface="Calibri" pitchFamily="34" charset="-122"/>
-                <a:cs typeface="Calibri" pitchFamily="34" charset="-120"/>
-              </a:rPr>
-              <a:t>Document everything — if it isn’t recorded, it didn’t happen.</a:t>
-            </a:r>
-            <a:endParaRPr lang="en-US" sz="1250" dirty="0"/>
-          </a:p>
-          <a:p>
-            <a:pPr algn="l" marL="177800" indent="-177800">
-              <a:spcAft>
-                <a:spcPts val="900"/>
-              </a:spcAft>
-              <a:buSzPct val="100000"/>
-              <a:buChar char="•"/>
-            </a:pPr>
-            <a:r>
-              <a:rPr lang="en-US" sz="1250" dirty="0">
-                <a:solidFill>
-                  <a:srgbClr val="33444F"/>
-                </a:solidFill>
-                <a:latin typeface="Calibri" pitchFamily="34" charset="0"/>
-                <a:ea typeface="Calibri" pitchFamily="34" charset="-122"/>
-                <a:cs typeface="Calibri" pitchFamily="34" charset="-120"/>
-              </a:rPr>
-              <a:t>Re-train and reassess after problems or changes.</a:t>
-            </a:r>
-            <a:endParaRPr lang="en-US" sz="1250" dirty="0"/>
-          </a:p>
-        </p:txBody>
-      </p:sp>
-      <p:sp>
-        <p:nvSpPr>
-          <p:cNvPr id="10" name="Text 8"/>
-          <p:cNvSpPr/>
-          <p:nvPr/>
-        </p:nvSpPr>
-        <p:spPr>
-          <a:xfrm>
-            <a:off x="566928" y="6473952"/>
-            <a:ext cx="7772400" cy="274320"/>
-          </a:xfrm>
-          <a:prstGeom prst="rect">
-            <a:avLst/>
-          </a:prstGeom>
-          <a:noFill/>
-          <a:ln/>
-        </p:spPr>
-        <p:txBody>
-          <a:bodyPr wrap="square" lIns="0" tIns="0" rIns="0" bIns="0" rtlCol="0" anchor="ctr"/>
-          <a:lstStyle/>
-          <a:p>
-            <a:pPr algn="l" indent="0" marL="0">
-              <a:buNone/>
-            </a:pPr>
-            <a:r>
-              <a:rPr lang="en-US" sz="850" dirty="0">
-                <a:solidFill>
-                  <a:srgbClr val="9AA8B4"/>
-                </a:solidFill>
-                <a:latin typeface="Calibri" pitchFamily="34" charset="0"/>
-                <a:ea typeface="Calibri" pitchFamily="34" charset="-122"/>
-                <a:cs typeface="Calibri" pitchFamily="34" charset="-120"/>
-              </a:rPr>
-              <a:t>Makassed General Hospital  ·  Department of Laboratory Medicine</a:t>
-            </a:r>
-            <a:endParaRPr lang="en-US" sz="850" dirty="0"/>
-          </a:p>
-        </p:txBody>
-      </p:sp>
-      <p:sp>
-        <p:nvSpPr>
-          <p:cNvPr id="11" name="Text 9"/>
-          <p:cNvSpPr/>
-          <p:nvPr/>
-        </p:nvSpPr>
-        <p:spPr>
-          <a:xfrm>
-            <a:off x="9814255" y="6473952"/>
-            <a:ext cx="1828800" cy="274320"/>
-          </a:xfrm>
-          <a:prstGeom prst="rect">
-            <a:avLst/>
-          </a:prstGeom>
-          <a:noFill/>
-          <a:ln/>
-        </p:spPr>
-        <p:txBody>
-          <a:bodyPr wrap="square" lIns="0" tIns="0" rIns="0" bIns="0" rtlCol="0" anchor="ctr"/>
-          <a:lstStyle/>
-          <a:p>
-            <a:pPr algn="r" indent="0" marL="0">
-              <a:buNone/>
-            </a:pPr>
-            <a:r>
-              <a:rPr lang="en-US" sz="850" dirty="0">
-                <a:solidFill>
-                  <a:srgbClr val="9AA8B4"/>
-                </a:solidFill>
-                <a:latin typeface="Calibri" pitchFamily="34" charset="0"/>
-                <a:ea typeface="Calibri" pitchFamily="34" charset="-122"/>
-                <a:cs typeface="Calibri" pitchFamily="34" charset="-120"/>
-              </a:rPr>
-              <a:t>CP Lecture Series</a:t>
-            </a:r>
-            <a:pPr algn="r" indent="0" marL="0">
-              <a:buNone/>
-            </a:pPr>
-            <a:r>
-              <a:rPr lang="en-US" sz="850" dirty="0">
-                <a:solidFill>
-                  <a:srgbClr val="DCE4EC"/>
-                </a:solidFill>
-                <a:latin typeface="Calibri" pitchFamily="34" charset="0"/>
-                <a:ea typeface="Calibri" pitchFamily="34" charset="-122"/>
-                <a:cs typeface="Calibri" pitchFamily="34" charset="-120"/>
-              </a:rPr>
-              <a:t>   ·   </a:t>
-            </a:r>
-            <a:pPr algn="r" indent="0" marL="0">
-              <a:buNone/>
-            </a:pPr>
-            <a:r>
-              <a:rPr lang="en-US" sz="850" b="1" dirty="0">
-                <a:solidFill>
-                  <a:srgbClr val="455A64"/>
-                </a:solidFill>
-                <a:latin typeface="Calibri" pitchFamily="34" charset="0"/>
-                <a:ea typeface="Calibri" pitchFamily="34" charset="-122"/>
-                <a:cs typeface="Calibri" pitchFamily="34" charset="-120"/>
-              </a:rPr>
-              <a:t>7</a:t>
-            </a:r>
-            <a:endParaRPr lang="en-US" sz="850" dirty="0"/>
           </a:p>
         </p:txBody>
       </p:sp>

--- a/decks/LabMgmt_02_Regulatory-and-Accreditation.pptx
+++ b/decks/LabMgmt_02_Regulatory-and-Accreditation.pptx
@@ -25,9 +25,13 @@
     <p:sldId id="273" r:id="rId19"/>
     <p:sldId id="274" r:id="rId20"/>
     <p:sldId id="275" r:id="rId21"/>
+    <p:sldId id="284" r:id="rId35"/>
     <p:sldId id="276" r:id="rId22"/>
+    <p:sldId id="283" r:id="rId34"/>
     <p:sldId id="277" r:id="rId23"/>
+    <p:sldId id="282" r:id="rId33"/>
     <p:sldId id="278" r:id="rId24"/>
+    <p:sldId id="281" r:id="rId32"/>
     <p:sldId id="279" r:id="rId25"/>
     <p:sldId id="280" r:id="rId26"/>
   </p:sldIdLst>
@@ -3032,6 +3036,10 @@
           </a:solidFill>
           <a:ln/>
         </p:spPr>
+        <p:txBody>
+          <a:bodyPr/>
+          <a:p/>
+        </p:txBody>
       </p:sp>
       <p:sp>
         <p:nvSpPr>
@@ -3054,6 +3062,10 @@
           </a:solidFill>
           <a:ln/>
         </p:spPr>
+        <p:txBody>
+          <a:bodyPr/>
+          <a:p/>
+        </p:txBody>
       </p:sp>
       <p:sp>
         <p:nvSpPr>
@@ -3076,6 +3088,10 @@
           </a:solidFill>
           <a:ln/>
         </p:spPr>
+        <p:txBody>
+          <a:bodyPr/>
+          <a:p/>
+        </p:txBody>
       </p:sp>
       <p:sp>
         <p:nvSpPr>
@@ -3098,6 +3114,10 @@
           </a:solidFill>
           <a:ln/>
         </p:spPr>
+        <p:txBody>
+          <a:bodyPr/>
+          <a:p/>
+        </p:txBody>
       </p:sp>
       <p:sp>
         <p:nvSpPr>
@@ -3514,6 +3534,10 @@
             </a:outerShdw>
           </a:effectLst>
         </p:spPr>
+        <p:txBody>
+          <a:bodyPr/>
+          <a:p/>
+        </p:txBody>
       </p:sp>
       <p:sp>
         <p:nvSpPr>
@@ -3688,6 +3712,10 @@
             </a:outerShdw>
           </a:effectLst>
         </p:spPr>
+        <p:txBody>
+          <a:bodyPr/>
+          <a:p/>
+        </p:txBody>
       </p:sp>
       <p:sp>
         <p:nvSpPr>
@@ -4078,6 +4106,10 @@
             </a:outerShdw>
           </a:effectLst>
         </p:spPr>
+        <p:txBody>
+          <a:bodyPr/>
+          <a:p/>
+        </p:txBody>
       </p:sp>
       <p:sp>
         <p:nvSpPr>
@@ -4252,6 +4284,10 @@
             </a:outerShdw>
           </a:effectLst>
         </p:spPr>
+        <p:txBody>
+          <a:bodyPr/>
+          <a:p/>
+        </p:txBody>
       </p:sp>
       <p:sp>
         <p:nvSpPr>
@@ -4642,6 +4678,10 @@
             </a:outerShdw>
           </a:effectLst>
         </p:spPr>
+        <p:txBody>
+          <a:bodyPr/>
+          <a:p/>
+        </p:txBody>
       </p:sp>
       <p:sp>
         <p:nvSpPr>
@@ -4816,6 +4856,10 @@
             </a:outerShdw>
           </a:effectLst>
         </p:spPr>
+        <p:txBody>
+          <a:bodyPr/>
+          <a:p/>
+        </p:txBody>
       </p:sp>
       <p:sp>
         <p:nvSpPr>
@@ -5121,6 +5165,10 @@
           </a:solidFill>
           <a:ln/>
         </p:spPr>
+        <p:txBody>
+          <a:bodyPr/>
+          <a:p/>
+        </p:txBody>
       </p:sp>
       <p:sp>
         <p:nvSpPr>
@@ -5143,6 +5191,10 @@
           </a:solidFill>
           <a:ln/>
         </p:spPr>
+        <p:txBody>
+          <a:bodyPr/>
+          <a:p/>
+        </p:txBody>
       </p:sp>
       <p:sp>
         <p:nvSpPr>
@@ -5399,6 +5451,10 @@
             </a:outerShdw>
           </a:effectLst>
         </p:spPr>
+        <p:txBody>
+          <a:bodyPr/>
+          <a:p/>
+        </p:txBody>
       </p:sp>
       <p:sp>
         <p:nvSpPr>
@@ -5509,6 +5565,10 @@
             </a:outerShdw>
           </a:effectLst>
         </p:spPr>
+        <p:txBody>
+          <a:bodyPr/>
+          <a:p/>
+        </p:txBody>
       </p:sp>
       <p:sp>
         <p:nvSpPr>
@@ -5938,6 +5998,10 @@
             </a:outerShdw>
           </a:effectLst>
         </p:spPr>
+        <p:txBody>
+          <a:bodyPr/>
+          <a:p/>
+        </p:txBody>
       </p:sp>
       <p:sp>
         <p:nvSpPr>
@@ -6264,6 +6328,10 @@
             </a:outerShdw>
           </a:effectLst>
         </p:spPr>
+        <p:txBody>
+          <a:bodyPr/>
+          <a:p/>
+        </p:txBody>
       </p:sp>
       <p:sp>
         <p:nvSpPr>
@@ -6374,6 +6442,10 @@
             </a:outerShdw>
           </a:effectLst>
         </p:spPr>
+        <p:txBody>
+          <a:bodyPr/>
+          <a:p/>
+        </p:txBody>
       </p:sp>
       <p:sp>
         <p:nvSpPr>
@@ -6803,6 +6875,10 @@
             </a:outerShdw>
           </a:effectLst>
         </p:spPr>
+        <p:txBody>
+          <a:bodyPr/>
+          <a:p/>
+        </p:txBody>
       </p:sp>
       <p:sp>
         <p:nvSpPr>
@@ -7129,6 +7205,10 @@
             </a:outerShdw>
           </a:effectLst>
         </p:spPr>
+        <p:txBody>
+          <a:bodyPr/>
+          <a:p/>
+        </p:txBody>
       </p:sp>
       <p:sp>
         <p:nvSpPr>
@@ -7239,6 +7319,10 @@
             </a:outerShdw>
           </a:effectLst>
         </p:spPr>
+        <p:txBody>
+          <a:bodyPr/>
+          <a:p/>
+        </p:txBody>
       </p:sp>
       <p:sp>
         <p:nvSpPr>
@@ -7668,6 +7752,10 @@
             </a:outerShdw>
           </a:effectLst>
         </p:spPr>
+        <p:txBody>
+          <a:bodyPr/>
+          <a:p/>
+        </p:txBody>
       </p:sp>
       <p:sp>
         <p:nvSpPr>
@@ -7994,6 +8082,10 @@
             </a:outerShdw>
           </a:effectLst>
         </p:spPr>
+        <p:txBody>
+          <a:bodyPr/>
+          <a:p/>
+        </p:txBody>
       </p:sp>
       <p:sp>
         <p:nvSpPr>
@@ -8101,6 +8193,10 @@
             </a:outerShdw>
           </a:effectLst>
         </p:spPr>
+        <p:txBody>
+          <a:bodyPr/>
+          <a:p/>
+        </p:txBody>
       </p:sp>
       <p:sp>
         <p:nvSpPr>
@@ -8208,6 +8304,10 @@
             </a:outerShdw>
           </a:effectLst>
         </p:spPr>
+        <p:txBody>
+          <a:bodyPr/>
+          <a:p/>
+        </p:txBody>
       </p:sp>
       <p:sp>
         <p:nvSpPr>
@@ -8315,6 +8415,10 @@
             </a:outerShdw>
           </a:effectLst>
         </p:spPr>
+        <p:txBody>
+          <a:bodyPr/>
+          <a:p/>
+        </p:txBody>
       </p:sp>
       <p:sp>
         <p:nvSpPr>
@@ -8707,9 +8811,9 @@
               <a:buNone/>
             </a:pPr>
             <a:r>
-              <a:rPr lang="en-US" sz="1350" b="1" dirty="0">
-                <a:solidFill>
-                  <a:srgbClr val="2C3A41"/>
+              <a:rPr lang="en-US" sz="1350" b="0" dirty="0">
+                <a:solidFill>
+                  <a:srgbClr val="33444F"/>
                 </a:solidFill>
                 <a:latin typeface="Calibri" pitchFamily="34" charset="0"/>
                 <a:ea typeface="Calibri" pitchFamily="34" charset="-122"/>
@@ -8778,130 +8882,6 @@
               <a:t>E. Standard practice</a:t>
             </a:r>
             <a:endParaRPr lang="en-US" sz="1350" dirty="0"/>
-          </a:p>
-        </p:txBody>
-      </p:sp>
-      <p:sp>
-        <p:nvSpPr>
-          <p:cNvPr id="6" name="Shape 4"/>
-          <p:cNvSpPr/>
-          <p:nvPr/>
-        </p:nvSpPr>
-        <p:spPr>
-          <a:xfrm>
-            <a:off x="7201632" y="2395728"/>
-            <a:ext cx="4423136" cy="3246120"/>
-          </a:xfrm>
-          <a:prstGeom prst="roundRect">
-            <a:avLst>
-              <a:gd name="adj" fmla="val 2535"/>
-            </a:avLst>
-          </a:prstGeom>
-          <a:solidFill>
-            <a:srgbClr val="ECEFF1"/>
-          </a:solidFill>
-          <a:ln/>
-          <a:effectLst>
-            <a:outerShdw sx="100000" sy="100000" kx="0" ky="0" algn="bl" rotWithShape="0" blurRad="88900" dist="25400" dir="5400000">
-              <a:srgbClr val="22303C">
-                <a:alpha val="12000"/>
-              </a:srgbClr>
-            </a:outerShdw>
-          </a:effectLst>
-        </p:spPr>
-      </p:sp>
-      <p:sp>
-        <p:nvSpPr>
-          <p:cNvPr id="7" name="Text 5"/>
-          <p:cNvSpPr/>
-          <p:nvPr/>
-        </p:nvSpPr>
-        <p:spPr>
-          <a:xfrm>
-            <a:off x="7439376" y="2578608"/>
-            <a:ext cx="3965936" cy="457200"/>
-          </a:xfrm>
-          <a:prstGeom prst="rect">
-            <a:avLst/>
-          </a:prstGeom>
-          <a:noFill/>
-          <a:ln/>
-        </p:spPr>
-        <p:txBody>
-          <a:bodyPr wrap="square" lIns="0" tIns="0" rIns="0" bIns="0" rtlCol="0" anchor="ctr"/>
-          <a:lstStyle/>
-          <a:p>
-            <a:pPr indent="0" marL="0">
-              <a:buNone/>
-            </a:pPr>
-            <a:r>
-              <a:rPr lang="en-US" sz="1500" b="1" dirty="0">
-                <a:solidFill>
-                  <a:srgbClr val="455A64"/>
-                </a:solidFill>
-                <a:latin typeface="Calibri" pitchFamily="34" charset="0"/>
-                <a:ea typeface="Calibri" pitchFamily="34" charset="-122"/>
-                <a:cs typeface="Calibri" pitchFamily="34" charset="-120"/>
-              </a:rPr>
-              <a:t>ANSWER  </a:t>
-            </a:r>
-            <a:pPr indent="0" marL="0">
-              <a:buNone/>
-            </a:pPr>
-            <a:r>
-              <a:rPr lang="en-US" sz="1500" b="1" dirty="0">
-                <a:solidFill>
-                  <a:srgbClr val="1B2A38"/>
-                </a:solidFill>
-                <a:latin typeface="Calibri" pitchFamily="34" charset="0"/>
-                <a:ea typeface="Calibri" pitchFamily="34" charset="-122"/>
-                <a:cs typeface="Calibri" pitchFamily="34" charset="-120"/>
-              </a:rPr>
-              <a:t>B — A serious violation</a:t>
-            </a:r>
-            <a:endParaRPr lang="en-US" sz="1500" dirty="0"/>
-          </a:p>
-        </p:txBody>
-      </p:sp>
-      <p:sp>
-        <p:nvSpPr>
-          <p:cNvPr id="8" name="Text 6"/>
-          <p:cNvSpPr/>
-          <p:nvPr/>
-        </p:nvSpPr>
-        <p:spPr>
-          <a:xfrm>
-            <a:off x="7439376" y="3127248"/>
-            <a:ext cx="3947648" cy="2377440"/>
-          </a:xfrm>
-          <a:prstGeom prst="rect">
-            <a:avLst/>
-          </a:prstGeom>
-          <a:noFill/>
-          <a:ln/>
-        </p:spPr>
-        <p:txBody>
-          <a:bodyPr wrap="square" lIns="0" tIns="0" rIns="0" bIns="0" rtlCol="0" anchor="t"/>
-          <a:lstStyle/>
-          <a:p>
-            <a:pPr algn="l" indent="0" marL="0">
-              <a:lnSpc>
-                <a:spcPct val="108000"/>
-              </a:lnSpc>
-              <a:buNone/>
-            </a:pPr>
-            <a:r>
-              <a:rPr lang="en-US" sz="1250" dirty="0">
-                <a:solidFill>
-                  <a:srgbClr val="33444F"/>
-                </a:solidFill>
-                <a:latin typeface="Calibri" pitchFamily="34" charset="0"/>
-                <a:ea typeface="Calibri" pitchFamily="34" charset="-122"/>
-                <a:cs typeface="Calibri" pitchFamily="34" charset="-120"/>
-              </a:rPr>
-              <a:t>PT samples must be tested like patient samples and never referred; PT referral can cost a laboratory its certification.</a:t>
-            </a:r>
-            <a:endParaRPr lang="en-US" sz="1250" dirty="0"/>
           </a:p>
         </p:txBody>
       </p:sp>
@@ -9211,9 +9191,9 @@
               <a:buNone/>
             </a:pPr>
             <a:r>
-              <a:rPr lang="en-US" sz="1350" b="1" dirty="0">
-                <a:solidFill>
-                  <a:srgbClr val="2C3A41"/>
+              <a:rPr lang="en-US" sz="1350" b="0" dirty="0">
+                <a:solidFill>
+                  <a:srgbClr val="33444F"/>
                 </a:solidFill>
                 <a:latin typeface="Calibri" pitchFamily="34" charset="0"/>
                 <a:ea typeface="Calibri" pitchFamily="34" charset="-122"/>
@@ -9282,130 +9262,6 @@
               <a:t>E. The time of year</a:t>
             </a:r>
             <a:endParaRPr lang="en-US" sz="1350" dirty="0"/>
-          </a:p>
-        </p:txBody>
-      </p:sp>
-      <p:sp>
-        <p:nvSpPr>
-          <p:cNvPr id="6" name="Shape 4"/>
-          <p:cNvSpPr/>
-          <p:nvPr/>
-        </p:nvSpPr>
-        <p:spPr>
-          <a:xfrm>
-            <a:off x="7201632" y="2395728"/>
-            <a:ext cx="4423136" cy="3246120"/>
-          </a:xfrm>
-          <a:prstGeom prst="roundRect">
-            <a:avLst>
-              <a:gd name="adj" fmla="val 2535"/>
-            </a:avLst>
-          </a:prstGeom>
-          <a:solidFill>
-            <a:srgbClr val="ECEFF1"/>
-          </a:solidFill>
-          <a:ln/>
-          <a:effectLst>
-            <a:outerShdw sx="100000" sy="100000" kx="0" ky="0" algn="bl" rotWithShape="0" blurRad="88900" dist="25400" dir="5400000">
-              <a:srgbClr val="22303C">
-                <a:alpha val="12000"/>
-              </a:srgbClr>
-            </a:outerShdw>
-          </a:effectLst>
-        </p:spPr>
-      </p:sp>
-      <p:sp>
-        <p:nvSpPr>
-          <p:cNvPr id="7" name="Text 5"/>
-          <p:cNvSpPr/>
-          <p:nvPr/>
-        </p:nvSpPr>
-        <p:spPr>
-          <a:xfrm>
-            <a:off x="7439376" y="2578608"/>
-            <a:ext cx="3965936" cy="457200"/>
-          </a:xfrm>
-          <a:prstGeom prst="rect">
-            <a:avLst/>
-          </a:prstGeom>
-          <a:noFill/>
-          <a:ln/>
-        </p:spPr>
-        <p:txBody>
-          <a:bodyPr wrap="square" lIns="0" tIns="0" rIns="0" bIns="0" rtlCol="0" anchor="ctr"/>
-          <a:lstStyle/>
-          <a:p>
-            <a:pPr indent="0" marL="0">
-              <a:buNone/>
-            </a:pPr>
-            <a:r>
-              <a:rPr lang="en-US" sz="1500" b="1" dirty="0">
-                <a:solidFill>
-                  <a:srgbClr val="455A64"/>
-                </a:solidFill>
-                <a:latin typeface="Calibri" pitchFamily="34" charset="0"/>
-                <a:ea typeface="Calibri" pitchFamily="34" charset="-122"/>
-                <a:cs typeface="Calibri" pitchFamily="34" charset="-120"/>
-              </a:rPr>
-              <a:t>ANSWER  </a:t>
-            </a:r>
-            <a:pPr indent="0" marL="0">
-              <a:buNone/>
-            </a:pPr>
-            <a:r>
-              <a:rPr lang="en-US" sz="1500" b="1" dirty="0">
-                <a:solidFill>
-                  <a:srgbClr val="1B2A38"/>
-                </a:solidFill>
-                <a:latin typeface="Calibri" pitchFamily="34" charset="0"/>
-                <a:ea typeface="Calibri" pitchFamily="34" charset="-122"/>
-                <a:cs typeface="Calibri" pitchFamily="34" charset="-120"/>
-              </a:rPr>
-              <a:t>B — Test complexity</a:t>
-            </a:r>
-            <a:endParaRPr lang="en-US" sz="1500" dirty="0"/>
-          </a:p>
-        </p:txBody>
-      </p:sp>
-      <p:sp>
-        <p:nvSpPr>
-          <p:cNvPr id="8" name="Text 6"/>
-          <p:cNvSpPr/>
-          <p:nvPr/>
-        </p:nvSpPr>
-        <p:spPr>
-          <a:xfrm>
-            <a:off x="7439376" y="3127248"/>
-            <a:ext cx="3947648" cy="2377440"/>
-          </a:xfrm>
-          <a:prstGeom prst="rect">
-            <a:avLst/>
-          </a:prstGeom>
-          <a:noFill/>
-          <a:ln/>
-        </p:spPr>
-        <p:txBody>
-          <a:bodyPr wrap="square" lIns="0" tIns="0" rIns="0" bIns="0" rtlCol="0" anchor="t"/>
-          <a:lstStyle/>
-          <a:p>
-            <a:pPr algn="l" indent="0" marL="0">
-              <a:lnSpc>
-                <a:spcPct val="108000"/>
-              </a:lnSpc>
-              <a:buNone/>
-            </a:pPr>
-            <a:r>
-              <a:rPr lang="en-US" sz="1250" dirty="0">
-                <a:solidFill>
-                  <a:srgbClr val="33444F"/>
-                </a:solidFill>
-                <a:latin typeface="Calibri" pitchFamily="34" charset="0"/>
-                <a:ea typeface="Calibri" pitchFamily="34" charset="-122"/>
-                <a:cs typeface="Calibri" pitchFamily="34" charset="-120"/>
-              </a:rPr>
-              <a:t>Requirements for personnel, QC, and PT scale with complexity from waived to high complexity.</a:t>
-            </a:r>
-            <a:endParaRPr lang="en-US" sz="1250" dirty="0"/>
           </a:p>
         </p:txBody>
       </p:sp>
@@ -9735,9 +9591,9 @@
               <a:buNone/>
             </a:pPr>
             <a:r>
-              <a:rPr lang="en-US" sz="1350" b="1" dirty="0">
-                <a:solidFill>
-                  <a:srgbClr val="2C3A41"/>
+              <a:rPr lang="en-US" sz="1350" b="0" dirty="0">
+                <a:solidFill>
+                  <a:srgbClr val="33444F"/>
                 </a:solidFill>
                 <a:latin typeface="Calibri" pitchFamily="34" charset="0"/>
                 <a:ea typeface="Calibri" pitchFamily="34" charset="-122"/>
@@ -9786,130 +9642,6 @@
               <a:t>E. Research-use only by default</a:t>
             </a:r>
             <a:endParaRPr lang="en-US" sz="1350" dirty="0"/>
-          </a:p>
-        </p:txBody>
-      </p:sp>
-      <p:sp>
-        <p:nvSpPr>
-          <p:cNvPr id="6" name="Shape 4"/>
-          <p:cNvSpPr/>
-          <p:nvPr/>
-        </p:nvSpPr>
-        <p:spPr>
-          <a:xfrm>
-            <a:off x="7201632" y="2395728"/>
-            <a:ext cx="4423136" cy="3246120"/>
-          </a:xfrm>
-          <a:prstGeom prst="roundRect">
-            <a:avLst>
-              <a:gd name="adj" fmla="val 2535"/>
-            </a:avLst>
-          </a:prstGeom>
-          <a:solidFill>
-            <a:srgbClr val="ECEFF1"/>
-          </a:solidFill>
-          <a:ln/>
-          <a:effectLst>
-            <a:outerShdw sx="100000" sy="100000" kx="0" ky="0" algn="bl" rotWithShape="0" blurRad="88900" dist="25400" dir="5400000">
-              <a:srgbClr val="22303C">
-                <a:alpha val="12000"/>
-              </a:srgbClr>
-            </a:outerShdw>
-          </a:effectLst>
-        </p:spPr>
-      </p:sp>
-      <p:sp>
-        <p:nvSpPr>
-          <p:cNvPr id="7" name="Text 5"/>
-          <p:cNvSpPr/>
-          <p:nvPr/>
-        </p:nvSpPr>
-        <p:spPr>
-          <a:xfrm>
-            <a:off x="7439376" y="2578608"/>
-            <a:ext cx="3965936" cy="457200"/>
-          </a:xfrm>
-          <a:prstGeom prst="rect">
-            <a:avLst/>
-          </a:prstGeom>
-          <a:noFill/>
-          <a:ln/>
-        </p:spPr>
-        <p:txBody>
-          <a:bodyPr wrap="square" lIns="0" tIns="0" rIns="0" bIns="0" rtlCol="0" anchor="ctr"/>
-          <a:lstStyle/>
-          <a:p>
-            <a:pPr indent="0" marL="0">
-              <a:buNone/>
-            </a:pPr>
-            <a:r>
-              <a:rPr lang="en-US" sz="1500" b="1" dirty="0">
-                <a:solidFill>
-                  <a:srgbClr val="455A64"/>
-                </a:solidFill>
-                <a:latin typeface="Calibri" pitchFamily="34" charset="0"/>
-                <a:ea typeface="Calibri" pitchFamily="34" charset="-122"/>
-                <a:cs typeface="Calibri" pitchFamily="34" charset="-120"/>
-              </a:rPr>
-              <a:t>ANSWER  </a:t>
-            </a:r>
-            <a:pPr indent="0" marL="0">
-              <a:buNone/>
-            </a:pPr>
-            <a:r>
-              <a:rPr lang="en-US" sz="1500" b="1" dirty="0">
-                <a:solidFill>
-                  <a:srgbClr val="1B2A38"/>
-                </a:solidFill>
-                <a:latin typeface="Calibri" pitchFamily="34" charset="0"/>
-                <a:ea typeface="Calibri" pitchFamily="34" charset="-122"/>
-                <a:cs typeface="Calibri" pitchFamily="34" charset="-120"/>
-              </a:rPr>
-              <a:t>C — High complexity, full validation</a:t>
-            </a:r>
-            <a:endParaRPr lang="en-US" sz="1500" dirty="0"/>
-          </a:p>
-        </p:txBody>
-      </p:sp>
-      <p:sp>
-        <p:nvSpPr>
-          <p:cNvPr id="8" name="Text 6"/>
-          <p:cNvSpPr/>
-          <p:nvPr/>
-        </p:nvSpPr>
-        <p:spPr>
-          <a:xfrm>
-            <a:off x="7439376" y="3127248"/>
-            <a:ext cx="3947648" cy="2377440"/>
-          </a:xfrm>
-          <a:prstGeom prst="rect">
-            <a:avLst/>
-          </a:prstGeom>
-          <a:noFill/>
-          <a:ln/>
-        </p:spPr>
-        <p:txBody>
-          <a:bodyPr wrap="square" lIns="0" tIns="0" rIns="0" bIns="0" rtlCol="0" anchor="t"/>
-          <a:lstStyle/>
-          <a:p>
-            <a:pPr algn="l" indent="0" marL="0">
-              <a:lnSpc>
-                <a:spcPct val="108000"/>
-              </a:lnSpc>
-              <a:buNone/>
-            </a:pPr>
-            <a:r>
-              <a:rPr lang="en-US" sz="1250" dirty="0">
-                <a:solidFill>
-                  <a:srgbClr val="33444F"/>
-                </a:solidFill>
-                <a:latin typeface="Calibri" pitchFamily="34" charset="0"/>
-                <a:ea typeface="Calibri" pitchFamily="34" charset="-122"/>
-                <a:cs typeface="Calibri" pitchFamily="34" charset="-120"/>
-              </a:rPr>
-              <a:t>Modifications void the cleared status; the lab must fully validate the test as high complexity.</a:t>
-            </a:r>
-            <a:endParaRPr lang="en-US" sz="1250" dirty="0"/>
           </a:p>
         </p:txBody>
       </p:sp>
@@ -10219,9 +9951,9 @@
               <a:buNone/>
             </a:pPr>
             <a:r>
-              <a:rPr lang="en-US" sz="1350" b="1" dirty="0">
-                <a:solidFill>
-                  <a:srgbClr val="2C3A41"/>
+              <a:rPr lang="en-US" sz="1350" b="0" dirty="0">
+                <a:solidFill>
+                  <a:srgbClr val="33444F"/>
                 </a:solidFill>
                 <a:latin typeface="Calibri" pitchFamily="34" charset="0"/>
                 <a:ea typeface="Calibri" pitchFamily="34" charset="-122"/>
@@ -10290,130 +10022,6 @@
               <a:t>E. Is research-only</a:t>
             </a:r>
             <a:endParaRPr lang="en-US" sz="1350" dirty="0"/>
-          </a:p>
-        </p:txBody>
-      </p:sp>
-      <p:sp>
-        <p:nvSpPr>
-          <p:cNvPr id="6" name="Shape 4"/>
-          <p:cNvSpPr/>
-          <p:nvPr/>
-        </p:nvSpPr>
-        <p:spPr>
-          <a:xfrm>
-            <a:off x="7201632" y="2395728"/>
-            <a:ext cx="4423136" cy="3246120"/>
-          </a:xfrm>
-          <a:prstGeom prst="roundRect">
-            <a:avLst>
-              <a:gd name="adj" fmla="val 2535"/>
-            </a:avLst>
-          </a:prstGeom>
-          <a:solidFill>
-            <a:srgbClr val="ECEFF1"/>
-          </a:solidFill>
-          <a:ln/>
-          <a:effectLst>
-            <a:outerShdw sx="100000" sy="100000" kx="0" ky="0" algn="bl" rotWithShape="0" blurRad="88900" dist="25400" dir="5400000">
-              <a:srgbClr val="22303C">
-                <a:alpha val="12000"/>
-              </a:srgbClr>
-            </a:outerShdw>
-          </a:effectLst>
-        </p:spPr>
-      </p:sp>
-      <p:sp>
-        <p:nvSpPr>
-          <p:cNvPr id="7" name="Text 5"/>
-          <p:cNvSpPr/>
-          <p:nvPr/>
-        </p:nvSpPr>
-        <p:spPr>
-          <a:xfrm>
-            <a:off x="7439376" y="2578608"/>
-            <a:ext cx="3965936" cy="457200"/>
-          </a:xfrm>
-          <a:prstGeom prst="rect">
-            <a:avLst/>
-          </a:prstGeom>
-          <a:noFill/>
-          <a:ln/>
-        </p:spPr>
-        <p:txBody>
-          <a:bodyPr wrap="square" lIns="0" tIns="0" rIns="0" bIns="0" rtlCol="0" anchor="ctr"/>
-          <a:lstStyle/>
-          <a:p>
-            <a:pPr indent="0" marL="0">
-              <a:buNone/>
-            </a:pPr>
-            <a:r>
-              <a:rPr lang="en-US" sz="1500" b="1" dirty="0">
-                <a:solidFill>
-                  <a:srgbClr val="455A64"/>
-                </a:solidFill>
-                <a:latin typeface="Calibri" pitchFamily="34" charset="0"/>
-                <a:ea typeface="Calibri" pitchFamily="34" charset="-122"/>
-                <a:cs typeface="Calibri" pitchFamily="34" charset="-120"/>
-              </a:rPr>
-              <a:t>ANSWER  </a:t>
-            </a:r>
-            <a:pPr indent="0" marL="0">
-              <a:buNone/>
-            </a:pPr>
-            <a:r>
-              <a:rPr lang="en-US" sz="1500" b="1" dirty="0">
-                <a:solidFill>
-                  <a:srgbClr val="1B2A38"/>
-                </a:solidFill>
-                <a:latin typeface="Calibri" pitchFamily="34" charset="0"/>
-                <a:ea typeface="Calibri" pitchFamily="34" charset="-122"/>
-                <a:cs typeface="Calibri" pitchFamily="34" charset="-120"/>
-              </a:rPr>
-              <a:t>B — Meets CLIA via accreditor</a:t>
-            </a:r>
-            <a:endParaRPr lang="en-US" sz="1500" dirty="0"/>
-          </a:p>
-        </p:txBody>
-      </p:sp>
-      <p:sp>
-        <p:nvSpPr>
-          <p:cNvPr id="8" name="Text 6"/>
-          <p:cNvSpPr/>
-          <p:nvPr/>
-        </p:nvSpPr>
-        <p:spPr>
-          <a:xfrm>
-            <a:off x="7439376" y="3127248"/>
-            <a:ext cx="3947648" cy="2377440"/>
-          </a:xfrm>
-          <a:prstGeom prst="rect">
-            <a:avLst/>
-          </a:prstGeom>
-          <a:noFill/>
-          <a:ln/>
-        </p:spPr>
-        <p:txBody>
-          <a:bodyPr wrap="square" lIns="0" tIns="0" rIns="0" bIns="0" rtlCol="0" anchor="t"/>
-          <a:lstStyle/>
-          <a:p>
-            <a:pPr algn="l" indent="0" marL="0">
-              <a:lnSpc>
-                <a:spcPct val="108000"/>
-              </a:lnSpc>
-              <a:buNone/>
-            </a:pPr>
-            <a:r>
-              <a:rPr lang="en-US" sz="1250" dirty="0">
-                <a:solidFill>
-                  <a:srgbClr val="33444F"/>
-                </a:solidFill>
-                <a:latin typeface="Calibri" pitchFamily="34" charset="0"/>
-                <a:ea typeface="Calibri" pitchFamily="34" charset="-122"/>
-                <a:cs typeface="Calibri" pitchFamily="34" charset="-120"/>
-              </a:rPr>
-              <a:t>Deemed-status accreditors enforce standards that satisfy CLIA requirements through their inspection process.</a:t>
-            </a:r>
-            <a:endParaRPr lang="en-US" sz="1250" dirty="0"/>
           </a:p>
         </p:txBody>
       </p:sp>
@@ -10654,6 +10262,10 @@
           </a:solidFill>
           <a:ln/>
         </p:spPr>
+        <p:txBody>
+          <a:bodyPr/>
+          <a:p/>
+        </p:txBody>
       </p:sp>
       <p:sp>
         <p:nvSpPr>
@@ -10681,6 +10293,10 @@
             </a:outerShdw>
           </a:effectLst>
         </p:spPr>
+        <p:txBody>
+          <a:bodyPr/>
+          <a:p/>
+        </p:txBody>
       </p:sp>
       <p:sp>
         <p:nvSpPr>
@@ -10781,6 +10397,10 @@
           </a:solidFill>
           <a:ln/>
         </p:spPr>
+        <p:txBody>
+          <a:bodyPr/>
+          <a:p/>
+        </p:txBody>
       </p:sp>
       <p:sp>
         <p:nvSpPr>
@@ -10808,6 +10428,10 @@
             </a:outerShdw>
           </a:effectLst>
         </p:spPr>
+        <p:txBody>
+          <a:bodyPr/>
+          <a:p/>
+        </p:txBody>
       </p:sp>
       <p:sp>
         <p:nvSpPr>
@@ -10908,6 +10532,10 @@
           </a:solidFill>
           <a:ln/>
         </p:spPr>
+        <p:txBody>
+          <a:bodyPr/>
+          <a:p/>
+        </p:txBody>
       </p:sp>
       <p:sp>
         <p:nvSpPr>
@@ -10935,6 +10563,10 @@
             </a:outerShdw>
           </a:effectLst>
         </p:spPr>
+        <p:txBody>
+          <a:bodyPr/>
+          <a:p/>
+        </p:txBody>
       </p:sp>
       <p:sp>
         <p:nvSpPr>
@@ -11035,6 +10667,10 @@
           </a:solidFill>
           <a:ln/>
         </p:spPr>
+        <p:txBody>
+          <a:bodyPr/>
+          <a:p/>
+        </p:txBody>
       </p:sp>
       <p:sp>
         <p:nvSpPr>
@@ -11062,6 +10698,10 @@
             </a:outerShdw>
           </a:effectLst>
         </p:spPr>
+        <p:txBody>
+          <a:bodyPr/>
+          <a:p/>
+        </p:txBody>
       </p:sp>
       <p:sp>
         <p:nvSpPr>
@@ -11162,6 +10802,10 @@
           </a:solidFill>
           <a:ln/>
         </p:spPr>
+        <p:txBody>
+          <a:bodyPr/>
+          <a:p/>
+        </p:txBody>
       </p:sp>
       <p:sp>
         <p:nvSpPr>
@@ -11189,6 +10833,10 @@
             </a:outerShdw>
           </a:effectLst>
         </p:spPr>
+        <p:txBody>
+          <a:bodyPr/>
+          <a:p/>
+        </p:txBody>
       </p:sp>
       <p:sp>
         <p:nvSpPr>
@@ -11672,6 +11320,1982 @@
 </p:sld>
 </file>
 
+<file path=ppt/slides/slide26.xml><?xml version="1.0" encoding="utf-8"?>
+<p:sld xmlns:a="http://schemas.openxmlformats.org/drawingml/2006/main" xmlns:p="http://schemas.openxmlformats.org/presentationml/2006/main" xmlns:r="http://schemas.openxmlformats.org/officeDocument/2006/relationships">
+  <p:cSld>
+    <p:spTree>
+      <p:nvGrpSpPr>
+        <p:cNvPr id="1" name=""/>
+        <p:cNvGrpSpPr/>
+        <p:nvPr/>
+      </p:nvGrpSpPr>
+      <p:grpSpPr/>
+      <p:sp>
+        <p:nvSpPr>
+          <p:cNvPr id="2" name="Text 0"/>
+          <p:cNvSpPr/>
+          <p:nvPr/>
+        </p:nvSpPr>
+        <p:spPr>
+          <a:xfrm>
+            <a:off x="566928" y="329184"/>
+            <a:ext cx="10515600" cy="310896"/>
+          </a:xfrm>
+          <a:prstGeom prst="rect">
+            <a:avLst/>
+          </a:prstGeom>
+          <a:noFill/>
+          <a:ln/>
+        </p:spPr>
+        <p:txBody>
+          <a:bodyPr wrap="square" lIns="0" tIns="0" rIns="0" bIns="0" rtlCol="0" anchor="ctr"/>
+          <a:lstStyle/>
+          <a:p>
+            <a:pPr algn="l" indent="0" marL="0">
+              <a:buNone/>
+            </a:pPr>
+            <a:r>
+              <a:rPr lang="en-US" sz="1100" b="1" spc="150" kern="0" dirty="0">
+                <a:solidFill>
+                  <a:srgbClr val="455A64"/>
+                </a:solidFill>
+                <a:latin typeface="Calibri" pitchFamily="34" charset="0"/>
+                <a:ea typeface="Calibri" pitchFamily="34" charset="-122"/>
+                <a:cs typeface="Calibri" pitchFamily="34" charset="-120"/>
+              </a:rPr>
+              <a:t>LAB MANAGEMENT &amp; QUALITY   ·   BOARD REVIEW  ·  Q4</a:t>
+            </a:r>
+            <a:endParaRPr lang="en-US" sz="1100" dirty="0"/>
+          </a:p>
+        </p:txBody>
+      </p:sp>
+      <p:sp>
+        <p:nvSpPr>
+          <p:cNvPr id="3" name="Text 1"/>
+          <p:cNvSpPr/>
+          <p:nvPr/>
+        </p:nvSpPr>
+        <p:spPr>
+          <a:xfrm>
+            <a:off x="566928" y="713232"/>
+            <a:ext cx="11064240" cy="749808"/>
+          </a:xfrm>
+          <a:prstGeom prst="rect">
+            <a:avLst/>
+          </a:prstGeom>
+          <a:noFill/>
+          <a:ln/>
+        </p:spPr>
+        <p:txBody>
+          <a:bodyPr wrap="square" lIns="0" tIns="0" rIns="0" bIns="0" rtlCol="0" anchor="ctr"/>
+          <a:lstStyle/>
+          <a:p>
+            <a:pPr algn="l" indent="0" marL="0">
+              <a:buNone/>
+            </a:pPr>
+            <a:r>
+              <a:rPr lang="en-US" sz="2600" b="1" dirty="0">
+                <a:solidFill>
+                  <a:srgbClr val="0E3A5F"/>
+                </a:solidFill>
+                <a:latin typeface="Calibri" pitchFamily="34" charset="0"/>
+                <a:ea typeface="Calibri" pitchFamily="34" charset="-122"/>
+                <a:cs typeface="Calibri" pitchFamily="34" charset="-120"/>
+              </a:rPr>
+              <a:t>Board-Style Review</a:t>
+            </a:r>
+            <a:endParaRPr lang="en-US" sz="2600" dirty="0"/>
+          </a:p>
+        </p:txBody>
+      </p:sp>
+      <p:sp>
+        <p:nvSpPr>
+          <p:cNvPr id="4" name="Text 2"/>
+          <p:cNvSpPr/>
+          <p:nvPr/>
+        </p:nvSpPr>
+        <p:spPr>
+          <a:xfrm>
+            <a:off x="566928" y="1417320"/>
+            <a:ext cx="11057839" cy="914400"/>
+          </a:xfrm>
+          <a:prstGeom prst="rect">
+            <a:avLst/>
+          </a:prstGeom>
+          <a:noFill/>
+          <a:ln/>
+        </p:spPr>
+        <p:txBody>
+          <a:bodyPr wrap="square" lIns="0" tIns="0" rIns="0" bIns="0" rtlCol="0" anchor="t"/>
+          <a:lstStyle/>
+          <a:p>
+            <a:pPr algn="l" indent="0" marL="0">
+              <a:lnSpc>
+                <a:spcPct val="105000"/>
+              </a:lnSpc>
+              <a:buNone/>
+            </a:pPr>
+            <a:r>
+              <a:rPr lang="en-US" sz="1450" b="1" dirty="0">
+                <a:solidFill>
+                  <a:srgbClr val="1B2A38"/>
+                </a:solidFill>
+                <a:latin typeface="Calibri" pitchFamily="34" charset="0"/>
+                <a:ea typeface="Calibri" pitchFamily="34" charset="-122"/>
+                <a:cs typeface="Calibri" pitchFamily="34" charset="-120"/>
+              </a:rPr>
+              <a:t>Accreditation with deemed status means the laboratory:</a:t>
+            </a:r>
+            <a:endParaRPr lang="en-US" sz="1450" dirty="0"/>
+          </a:p>
+        </p:txBody>
+      </p:sp>
+      <p:sp>
+        <p:nvSpPr>
+          <p:cNvPr id="5" name="Text 3"/>
+          <p:cNvSpPr/>
+          <p:nvPr/>
+        </p:nvSpPr>
+        <p:spPr>
+          <a:xfrm>
+            <a:off x="658368" y="2395728"/>
+            <a:ext cx="6192390" cy="3017520"/>
+          </a:xfrm>
+          <a:prstGeom prst="rect">
+            <a:avLst/>
+          </a:prstGeom>
+          <a:noFill/>
+          <a:ln/>
+        </p:spPr>
+        <p:txBody>
+          <a:bodyPr wrap="square" lIns="0" tIns="0" rIns="0" bIns="0" rtlCol="0" anchor="t"/>
+          <a:lstStyle/>
+          <a:p>
+            <a:pPr algn="l" indent="0" marL="0">
+              <a:spcAft>
+                <a:spcPts val="600"/>
+              </a:spcAft>
+              <a:buNone/>
+            </a:pPr>
+            <a:r>
+              <a:rPr lang="en-US" sz="1350" dirty="0">
+                <a:solidFill>
+                  <a:srgbClr val="33444F"/>
+                </a:solidFill>
+                <a:latin typeface="Calibri" pitchFamily="34" charset="0"/>
+                <a:ea typeface="Calibri" pitchFamily="34" charset="-122"/>
+                <a:cs typeface="Calibri" pitchFamily="34" charset="-120"/>
+              </a:rPr>
+              <a:t>A. Is exempt from CLIA</a:t>
+            </a:r>
+            <a:endParaRPr lang="en-US" sz="1350" dirty="0"/>
+          </a:p>
+          <a:p>
+            <a:pPr algn="l" indent="0" marL="0">
+              <a:spcAft>
+                <a:spcPts val="600"/>
+              </a:spcAft>
+              <a:buNone/>
+            </a:pPr>
+            <a:r>
+              <a:rPr lang="en-US" sz="1350" b="1" dirty="0">
+                <a:solidFill>
+                  <a:srgbClr val="2C3A41"/>
+                </a:solidFill>
+                <a:latin typeface="Calibri" pitchFamily="34" charset="0"/>
+                <a:ea typeface="Calibri" pitchFamily="34" charset="-122"/>
+                <a:cs typeface="Calibri" pitchFamily="34" charset="-120"/>
+              </a:rPr>
+              <a:t>B. Meets CLIA through the accreditor’s inspection</a:t>
+            </a:r>
+            <a:endParaRPr lang="en-US" sz="1350" dirty="0"/>
+          </a:p>
+          <a:p>
+            <a:pPr algn="l" indent="0" marL="0">
+              <a:spcAft>
+                <a:spcPts val="600"/>
+              </a:spcAft>
+              <a:buNone/>
+            </a:pPr>
+            <a:r>
+              <a:rPr lang="en-US" sz="1350" dirty="0">
+                <a:solidFill>
+                  <a:srgbClr val="33444F"/>
+                </a:solidFill>
+                <a:latin typeface="Calibri" pitchFamily="34" charset="0"/>
+                <a:ea typeface="Calibri" pitchFamily="34" charset="-122"/>
+                <a:cs typeface="Calibri" pitchFamily="34" charset="-120"/>
+              </a:rPr>
+              <a:t>C. Needs no proficiency testing</a:t>
+            </a:r>
+            <a:endParaRPr lang="en-US" sz="1350" dirty="0"/>
+          </a:p>
+          <a:p>
+            <a:pPr algn="l" indent="0" marL="0">
+              <a:spcAft>
+                <a:spcPts val="600"/>
+              </a:spcAft>
+              <a:buNone/>
+            </a:pPr>
+            <a:r>
+              <a:rPr lang="en-US" sz="1350" dirty="0">
+                <a:solidFill>
+                  <a:srgbClr val="33444F"/>
+                </a:solidFill>
+                <a:latin typeface="Calibri" pitchFamily="34" charset="0"/>
+                <a:ea typeface="Calibri" pitchFamily="34" charset="-122"/>
+                <a:cs typeface="Calibri" pitchFamily="34" charset="-120"/>
+              </a:rPr>
+              <a:t>D. Cannot be inspected</a:t>
+            </a:r>
+            <a:endParaRPr lang="en-US" sz="1350" dirty="0"/>
+          </a:p>
+          <a:p>
+            <a:pPr algn="l" indent="0" marL="0">
+              <a:spcAft>
+                <a:spcPts val="600"/>
+              </a:spcAft>
+              <a:buNone/>
+            </a:pPr>
+            <a:r>
+              <a:rPr lang="en-US" sz="1350" dirty="0">
+                <a:solidFill>
+                  <a:srgbClr val="33444F"/>
+                </a:solidFill>
+                <a:latin typeface="Calibri" pitchFamily="34" charset="0"/>
+                <a:ea typeface="Calibri" pitchFamily="34" charset="-122"/>
+                <a:cs typeface="Calibri" pitchFamily="34" charset="-120"/>
+              </a:rPr>
+              <a:t>E. Is research-only</a:t>
+            </a:r>
+            <a:endParaRPr lang="en-US" sz="1350" dirty="0"/>
+          </a:p>
+        </p:txBody>
+      </p:sp>
+      <p:sp>
+        <p:nvSpPr>
+          <p:cNvPr id="6" name="Shape 4"/>
+          <p:cNvSpPr/>
+          <p:nvPr/>
+        </p:nvSpPr>
+        <p:spPr>
+          <a:xfrm>
+            <a:off x="7201632" y="2395728"/>
+            <a:ext cx="4423136" cy="3246120"/>
+          </a:xfrm>
+          <a:prstGeom prst="roundRect">
+            <a:avLst>
+              <a:gd name="adj" fmla="val 2535"/>
+            </a:avLst>
+          </a:prstGeom>
+          <a:solidFill>
+            <a:srgbClr val="ECEFF1"/>
+          </a:solidFill>
+          <a:ln/>
+          <a:effectLst>
+            <a:outerShdw sx="100000" sy="100000" kx="0" ky="0" algn="bl" rotWithShape="0" blurRad="88900" dist="25400" dir="5400000">
+              <a:srgbClr val="22303C">
+                <a:alpha val="12000"/>
+              </a:srgbClr>
+            </a:outerShdw>
+          </a:effectLst>
+        </p:spPr>
+        <p:txBody>
+          <a:bodyPr/>
+          <a:p/>
+        </p:txBody>
+      </p:sp>
+      <p:sp>
+        <p:nvSpPr>
+          <p:cNvPr id="7" name="Text 5"/>
+          <p:cNvSpPr/>
+          <p:nvPr/>
+        </p:nvSpPr>
+        <p:spPr>
+          <a:xfrm>
+            <a:off x="7439376" y="2578608"/>
+            <a:ext cx="3965936" cy="457200"/>
+          </a:xfrm>
+          <a:prstGeom prst="rect">
+            <a:avLst/>
+          </a:prstGeom>
+          <a:noFill/>
+          <a:ln/>
+        </p:spPr>
+        <p:txBody>
+          <a:bodyPr wrap="square" lIns="0" tIns="0" rIns="0" bIns="0" rtlCol="0" anchor="ctr"/>
+          <a:lstStyle/>
+          <a:p>
+            <a:pPr indent="0" marL="0">
+              <a:buNone/>
+            </a:pPr>
+            <a:r>
+              <a:rPr lang="en-US" sz="1500" b="1" dirty="0">
+                <a:solidFill>
+                  <a:srgbClr val="455A64"/>
+                </a:solidFill>
+                <a:latin typeface="Calibri" pitchFamily="34" charset="0"/>
+                <a:ea typeface="Calibri" pitchFamily="34" charset="-122"/>
+                <a:cs typeface="Calibri" pitchFamily="34" charset="-120"/>
+              </a:rPr>
+              <a:t>ANSWER  </a:t>
+            </a:r>
+            <a:pPr indent="0" marL="0">
+              <a:buNone/>
+            </a:pPr>
+            <a:r>
+              <a:rPr lang="en-US" sz="1500" b="1" dirty="0">
+                <a:solidFill>
+                  <a:srgbClr val="1B2A38"/>
+                </a:solidFill>
+                <a:latin typeface="Calibri" pitchFamily="34" charset="0"/>
+                <a:ea typeface="Calibri" pitchFamily="34" charset="-122"/>
+                <a:cs typeface="Calibri" pitchFamily="34" charset="-120"/>
+              </a:rPr>
+              <a:t>B — Meets CLIA via accreditor</a:t>
+            </a:r>
+            <a:endParaRPr lang="en-US" sz="1500" dirty="0"/>
+          </a:p>
+        </p:txBody>
+      </p:sp>
+      <p:sp>
+        <p:nvSpPr>
+          <p:cNvPr id="8" name="Text 6"/>
+          <p:cNvSpPr/>
+          <p:nvPr/>
+        </p:nvSpPr>
+        <p:spPr>
+          <a:xfrm>
+            <a:off x="7439376" y="3127248"/>
+            <a:ext cx="3947648" cy="2377440"/>
+          </a:xfrm>
+          <a:prstGeom prst="rect">
+            <a:avLst/>
+          </a:prstGeom>
+          <a:noFill/>
+          <a:ln/>
+        </p:spPr>
+        <p:txBody>
+          <a:bodyPr wrap="square" lIns="0" tIns="0" rIns="0" bIns="0" rtlCol="0" anchor="t"/>
+          <a:lstStyle/>
+          <a:p>
+            <a:pPr algn="l" indent="0" marL="0">
+              <a:lnSpc>
+                <a:spcPct val="108000"/>
+              </a:lnSpc>
+              <a:buNone/>
+            </a:pPr>
+            <a:r>
+              <a:rPr lang="en-US" sz="1250" dirty="0">
+                <a:solidFill>
+                  <a:srgbClr val="33444F"/>
+                </a:solidFill>
+                <a:latin typeface="Calibri" pitchFamily="34" charset="0"/>
+                <a:ea typeface="Calibri" pitchFamily="34" charset="-122"/>
+                <a:cs typeface="Calibri" pitchFamily="34" charset="-120"/>
+              </a:rPr>
+              <a:t>Deemed-status accreditors enforce standards that satisfy CLIA requirements through their inspection process.</a:t>
+            </a:r>
+            <a:endParaRPr lang="en-US" sz="1250" dirty="0"/>
+          </a:p>
+        </p:txBody>
+      </p:sp>
+      <p:sp>
+        <p:nvSpPr>
+          <p:cNvPr id="9" name="Text 7"/>
+          <p:cNvSpPr/>
+          <p:nvPr/>
+        </p:nvSpPr>
+        <p:spPr>
+          <a:xfrm>
+            <a:off x="566928" y="6473952"/>
+            <a:ext cx="7772400" cy="274320"/>
+          </a:xfrm>
+          <a:prstGeom prst="rect">
+            <a:avLst/>
+          </a:prstGeom>
+          <a:noFill/>
+          <a:ln/>
+        </p:spPr>
+        <p:txBody>
+          <a:bodyPr wrap="square" lIns="0" tIns="0" rIns="0" bIns="0" rtlCol="0" anchor="ctr"/>
+          <a:lstStyle/>
+          <a:p>
+            <a:pPr algn="l" indent="0" marL="0">
+              <a:buNone/>
+            </a:pPr>
+            <a:r>
+              <a:rPr lang="en-US" sz="850" dirty="0">
+                <a:solidFill>
+                  <a:srgbClr val="9AA8B4"/>
+                </a:solidFill>
+                <a:latin typeface="Calibri" pitchFamily="34" charset="0"/>
+                <a:ea typeface="Calibri" pitchFamily="34" charset="-122"/>
+                <a:cs typeface="Calibri" pitchFamily="34" charset="-120"/>
+              </a:rPr>
+              <a:t>Makassed General Hospital  ·  Department of Laboratory Medicine</a:t>
+            </a:r>
+            <a:endParaRPr lang="en-US" sz="850" dirty="0"/>
+          </a:p>
+        </p:txBody>
+      </p:sp>
+      <p:sp>
+        <p:nvSpPr>
+          <p:cNvPr id="10" name="Text 8"/>
+          <p:cNvSpPr/>
+          <p:nvPr/>
+        </p:nvSpPr>
+        <p:spPr>
+          <a:xfrm>
+            <a:off x="9814255" y="6473952"/>
+            <a:ext cx="1828800" cy="274320"/>
+          </a:xfrm>
+          <a:prstGeom prst="rect">
+            <a:avLst/>
+          </a:prstGeom>
+          <a:noFill/>
+          <a:ln/>
+        </p:spPr>
+        <p:txBody>
+          <a:bodyPr wrap="square" lIns="0" tIns="0" rIns="0" bIns="0" rtlCol="0" anchor="ctr"/>
+          <a:lstStyle/>
+          <a:p>
+            <a:pPr algn="r" indent="0" marL="0">
+              <a:buNone/>
+            </a:pPr>
+            <a:r>
+              <a:rPr lang="en-US" sz="850" dirty="0">
+                <a:solidFill>
+                  <a:srgbClr val="9AA8B4"/>
+                </a:solidFill>
+                <a:latin typeface="Calibri" pitchFamily="34" charset="0"/>
+                <a:ea typeface="Calibri" pitchFamily="34" charset="-122"/>
+                <a:cs typeface="Calibri" pitchFamily="34" charset="-120"/>
+              </a:rPr>
+              <a:t>CP Lecture Series</a:t>
+            </a:r>
+            <a:pPr algn="r" indent="0" marL="0">
+              <a:buNone/>
+            </a:pPr>
+            <a:r>
+              <a:rPr lang="en-US" sz="850" dirty="0">
+                <a:solidFill>
+                  <a:srgbClr val="DCE4EC"/>
+                </a:solidFill>
+                <a:latin typeface="Calibri" pitchFamily="34" charset="0"/>
+                <a:ea typeface="Calibri" pitchFamily="34" charset="-122"/>
+                <a:cs typeface="Calibri" pitchFamily="34" charset="-120"/>
+              </a:rPr>
+              <a:t>   ·   </a:t>
+            </a:r>
+            <a:pPr algn="r" indent="0" marL="0">
+              <a:buNone/>
+            </a:pPr>
+            <a:r>
+              <a:rPr lang="en-US" sz="850" b="1" dirty="0">
+                <a:solidFill>
+                  <a:srgbClr val="455A64"/>
+                </a:solidFill>
+                <a:latin typeface="Calibri" pitchFamily="34" charset="0"/>
+                <a:ea typeface="Calibri" pitchFamily="34" charset="-122"/>
+                <a:cs typeface="Calibri" pitchFamily="34" charset="-120"/>
+              </a:rPr>
+              <a:t>20</a:t>
+            </a:r>
+            <a:endParaRPr lang="en-US" sz="850" dirty="0"/>
+          </a:p>
+        </p:txBody>
+      </p:sp>
+    </p:spTree>
+  </p:cSld>
+  <p:clrMapOvr>
+    <a:masterClrMapping/>
+  </p:clrMapOvr>
+</p:sld>
+</file>
+
+<file path=ppt/slides/slide27.xml><?xml version="1.0" encoding="utf-8"?>
+<p:sld xmlns:a="http://schemas.openxmlformats.org/drawingml/2006/main" xmlns:p="http://schemas.openxmlformats.org/presentationml/2006/main" xmlns:r="http://schemas.openxmlformats.org/officeDocument/2006/relationships">
+  <p:cSld>
+    <p:spTree>
+      <p:nvGrpSpPr>
+        <p:cNvPr id="1" name=""/>
+        <p:cNvGrpSpPr/>
+        <p:nvPr/>
+      </p:nvGrpSpPr>
+      <p:grpSpPr/>
+      <p:sp>
+        <p:nvSpPr>
+          <p:cNvPr id="2" name="Text 0"/>
+          <p:cNvSpPr/>
+          <p:nvPr/>
+        </p:nvSpPr>
+        <p:spPr>
+          <a:xfrm>
+            <a:off x="566928" y="329184"/>
+            <a:ext cx="10515600" cy="310896"/>
+          </a:xfrm>
+          <a:prstGeom prst="rect">
+            <a:avLst/>
+          </a:prstGeom>
+          <a:noFill/>
+          <a:ln/>
+        </p:spPr>
+        <p:txBody>
+          <a:bodyPr wrap="square" lIns="0" tIns="0" rIns="0" bIns="0" rtlCol="0" anchor="ctr"/>
+          <a:lstStyle/>
+          <a:p>
+            <a:pPr algn="l" indent="0" marL="0">
+              <a:buNone/>
+            </a:pPr>
+            <a:r>
+              <a:rPr lang="en-US" sz="1100" b="1" spc="150" kern="0" dirty="0">
+                <a:solidFill>
+                  <a:srgbClr val="455A64"/>
+                </a:solidFill>
+                <a:latin typeface="Calibri" pitchFamily="34" charset="0"/>
+                <a:ea typeface="Calibri" pitchFamily="34" charset="-122"/>
+                <a:cs typeface="Calibri" pitchFamily="34" charset="-120"/>
+              </a:rPr>
+              <a:t>LAB MANAGEMENT &amp; QUALITY   ·   BOARD REVIEW  ·  Q3</a:t>
+            </a:r>
+            <a:endParaRPr lang="en-US" sz="1100" dirty="0"/>
+          </a:p>
+        </p:txBody>
+      </p:sp>
+      <p:sp>
+        <p:nvSpPr>
+          <p:cNvPr id="3" name="Text 1"/>
+          <p:cNvSpPr/>
+          <p:nvPr/>
+        </p:nvSpPr>
+        <p:spPr>
+          <a:xfrm>
+            <a:off x="566928" y="713232"/>
+            <a:ext cx="11064240" cy="749808"/>
+          </a:xfrm>
+          <a:prstGeom prst="rect">
+            <a:avLst/>
+          </a:prstGeom>
+          <a:noFill/>
+          <a:ln/>
+        </p:spPr>
+        <p:txBody>
+          <a:bodyPr wrap="square" lIns="0" tIns="0" rIns="0" bIns="0" rtlCol="0" anchor="ctr"/>
+          <a:lstStyle/>
+          <a:p>
+            <a:pPr algn="l" indent="0" marL="0">
+              <a:buNone/>
+            </a:pPr>
+            <a:r>
+              <a:rPr lang="en-US" sz="2600" b="1" dirty="0">
+                <a:solidFill>
+                  <a:srgbClr val="0E3A5F"/>
+                </a:solidFill>
+                <a:latin typeface="Calibri" pitchFamily="34" charset="0"/>
+                <a:ea typeface="Calibri" pitchFamily="34" charset="-122"/>
+                <a:cs typeface="Calibri" pitchFamily="34" charset="-120"/>
+              </a:rPr>
+              <a:t>Board-Style Review</a:t>
+            </a:r>
+            <a:endParaRPr lang="en-US" sz="2600" dirty="0"/>
+          </a:p>
+        </p:txBody>
+      </p:sp>
+      <p:sp>
+        <p:nvSpPr>
+          <p:cNvPr id="4" name="Text 2"/>
+          <p:cNvSpPr/>
+          <p:nvPr/>
+        </p:nvSpPr>
+        <p:spPr>
+          <a:xfrm>
+            <a:off x="566928" y="1417320"/>
+            <a:ext cx="11057839" cy="914400"/>
+          </a:xfrm>
+          <a:prstGeom prst="rect">
+            <a:avLst/>
+          </a:prstGeom>
+          <a:noFill/>
+          <a:ln/>
+        </p:spPr>
+        <p:txBody>
+          <a:bodyPr wrap="square" lIns="0" tIns="0" rIns="0" bIns="0" rtlCol="0" anchor="t"/>
+          <a:lstStyle/>
+          <a:p>
+            <a:pPr algn="l" indent="0" marL="0">
+              <a:lnSpc>
+                <a:spcPct val="105000"/>
+              </a:lnSpc>
+              <a:buNone/>
+            </a:pPr>
+            <a:r>
+              <a:rPr lang="en-US" sz="1450" b="1" dirty="0">
+                <a:solidFill>
+                  <a:srgbClr val="1B2A38"/>
+                </a:solidFill>
+                <a:latin typeface="Calibri" pitchFamily="34" charset="0"/>
+                <a:ea typeface="Calibri" pitchFamily="34" charset="-122"/>
+                <a:cs typeface="Calibri" pitchFamily="34" charset="-120"/>
+              </a:rPr>
+              <a:t>Modifying an FDA-cleared assay generally makes it:</a:t>
+            </a:r>
+            <a:endParaRPr lang="en-US" sz="1450" dirty="0"/>
+          </a:p>
+        </p:txBody>
+      </p:sp>
+      <p:sp>
+        <p:nvSpPr>
+          <p:cNvPr id="5" name="Text 3"/>
+          <p:cNvSpPr/>
+          <p:nvPr/>
+        </p:nvSpPr>
+        <p:spPr>
+          <a:xfrm>
+            <a:off x="658368" y="2395728"/>
+            <a:ext cx="6192390" cy="3017520"/>
+          </a:xfrm>
+          <a:prstGeom prst="rect">
+            <a:avLst/>
+          </a:prstGeom>
+          <a:noFill/>
+          <a:ln/>
+        </p:spPr>
+        <p:txBody>
+          <a:bodyPr wrap="square" lIns="0" tIns="0" rIns="0" bIns="0" rtlCol="0" anchor="t"/>
+          <a:lstStyle/>
+          <a:p>
+            <a:pPr algn="l" indent="0" marL="0">
+              <a:spcAft>
+                <a:spcPts val="600"/>
+              </a:spcAft>
+              <a:buNone/>
+            </a:pPr>
+            <a:r>
+              <a:rPr lang="en-US" sz="1350" dirty="0">
+                <a:solidFill>
+                  <a:srgbClr val="33444F"/>
+                </a:solidFill>
+                <a:latin typeface="Calibri" pitchFamily="34" charset="0"/>
+                <a:ea typeface="Calibri" pitchFamily="34" charset="-122"/>
+                <a:cs typeface="Calibri" pitchFamily="34" charset="-120"/>
+              </a:rPr>
+              <a:t>A. Waived</a:t>
+            </a:r>
+            <a:endParaRPr lang="en-US" sz="1350" dirty="0"/>
+          </a:p>
+          <a:p>
+            <a:pPr algn="l" indent="0" marL="0">
+              <a:spcAft>
+                <a:spcPts val="600"/>
+              </a:spcAft>
+              <a:buNone/>
+            </a:pPr>
+            <a:r>
+              <a:rPr lang="en-US" sz="1350" dirty="0">
+                <a:solidFill>
+                  <a:srgbClr val="33444F"/>
+                </a:solidFill>
+                <a:latin typeface="Calibri" pitchFamily="34" charset="0"/>
+                <a:ea typeface="Calibri" pitchFamily="34" charset="-122"/>
+                <a:cs typeface="Calibri" pitchFamily="34" charset="-120"/>
+              </a:rPr>
+              <a:t>B. Moderate complexity</a:t>
+            </a:r>
+            <a:endParaRPr lang="en-US" sz="1350" dirty="0"/>
+          </a:p>
+          <a:p>
+            <a:pPr algn="l" indent="0" marL="0">
+              <a:spcAft>
+                <a:spcPts val="600"/>
+              </a:spcAft>
+              <a:buNone/>
+            </a:pPr>
+            <a:r>
+              <a:rPr lang="en-US" sz="1350" b="1" dirty="0">
+                <a:solidFill>
+                  <a:srgbClr val="2C3A41"/>
+                </a:solidFill>
+                <a:latin typeface="Calibri" pitchFamily="34" charset="0"/>
+                <a:ea typeface="Calibri" pitchFamily="34" charset="-122"/>
+                <a:cs typeface="Calibri" pitchFamily="34" charset="-120"/>
+              </a:rPr>
+              <a:t>C. High complexity requiring full validation</a:t>
+            </a:r>
+            <a:endParaRPr lang="en-US" sz="1350" dirty="0"/>
+          </a:p>
+          <a:p>
+            <a:pPr algn="l" indent="0" marL="0">
+              <a:spcAft>
+                <a:spcPts val="600"/>
+              </a:spcAft>
+              <a:buNone/>
+            </a:pPr>
+            <a:r>
+              <a:rPr lang="en-US" sz="1350" dirty="0">
+                <a:solidFill>
+                  <a:srgbClr val="33444F"/>
+                </a:solidFill>
+                <a:latin typeface="Calibri" pitchFamily="34" charset="0"/>
+                <a:ea typeface="Calibri" pitchFamily="34" charset="-122"/>
+                <a:cs typeface="Calibri" pitchFamily="34" charset="-120"/>
+              </a:rPr>
+              <a:t>D. Exempt from CLIA</a:t>
+            </a:r>
+            <a:endParaRPr lang="en-US" sz="1350" dirty="0"/>
+          </a:p>
+          <a:p>
+            <a:pPr algn="l" indent="0" marL="0">
+              <a:spcAft>
+                <a:spcPts val="600"/>
+              </a:spcAft>
+              <a:buNone/>
+            </a:pPr>
+            <a:r>
+              <a:rPr lang="en-US" sz="1350" dirty="0">
+                <a:solidFill>
+                  <a:srgbClr val="33444F"/>
+                </a:solidFill>
+                <a:latin typeface="Calibri" pitchFamily="34" charset="0"/>
+                <a:ea typeface="Calibri" pitchFamily="34" charset="-122"/>
+                <a:cs typeface="Calibri" pitchFamily="34" charset="-120"/>
+              </a:rPr>
+              <a:t>E. Research-use only by default</a:t>
+            </a:r>
+            <a:endParaRPr lang="en-US" sz="1350" dirty="0"/>
+          </a:p>
+        </p:txBody>
+      </p:sp>
+      <p:sp>
+        <p:nvSpPr>
+          <p:cNvPr id="6" name="Shape 4"/>
+          <p:cNvSpPr/>
+          <p:nvPr/>
+        </p:nvSpPr>
+        <p:spPr>
+          <a:xfrm>
+            <a:off x="7201632" y="2395728"/>
+            <a:ext cx="4423136" cy="3246120"/>
+          </a:xfrm>
+          <a:prstGeom prst="roundRect">
+            <a:avLst>
+              <a:gd name="adj" fmla="val 2535"/>
+            </a:avLst>
+          </a:prstGeom>
+          <a:solidFill>
+            <a:srgbClr val="ECEFF1"/>
+          </a:solidFill>
+          <a:ln/>
+          <a:effectLst>
+            <a:outerShdw sx="100000" sy="100000" kx="0" ky="0" algn="bl" rotWithShape="0" blurRad="88900" dist="25400" dir="5400000">
+              <a:srgbClr val="22303C">
+                <a:alpha val="12000"/>
+              </a:srgbClr>
+            </a:outerShdw>
+          </a:effectLst>
+        </p:spPr>
+        <p:txBody>
+          <a:bodyPr/>
+          <a:p/>
+        </p:txBody>
+      </p:sp>
+      <p:sp>
+        <p:nvSpPr>
+          <p:cNvPr id="7" name="Text 5"/>
+          <p:cNvSpPr/>
+          <p:nvPr/>
+        </p:nvSpPr>
+        <p:spPr>
+          <a:xfrm>
+            <a:off x="7439376" y="2578608"/>
+            <a:ext cx="3965936" cy="457200"/>
+          </a:xfrm>
+          <a:prstGeom prst="rect">
+            <a:avLst/>
+          </a:prstGeom>
+          <a:noFill/>
+          <a:ln/>
+        </p:spPr>
+        <p:txBody>
+          <a:bodyPr wrap="square" lIns="0" tIns="0" rIns="0" bIns="0" rtlCol="0" anchor="ctr"/>
+          <a:lstStyle/>
+          <a:p>
+            <a:pPr indent="0" marL="0">
+              <a:buNone/>
+            </a:pPr>
+            <a:r>
+              <a:rPr lang="en-US" sz="1500" b="1" dirty="0">
+                <a:solidFill>
+                  <a:srgbClr val="455A64"/>
+                </a:solidFill>
+                <a:latin typeface="Calibri" pitchFamily="34" charset="0"/>
+                <a:ea typeface="Calibri" pitchFamily="34" charset="-122"/>
+                <a:cs typeface="Calibri" pitchFamily="34" charset="-120"/>
+              </a:rPr>
+              <a:t>ANSWER  </a:t>
+            </a:r>
+            <a:pPr indent="0" marL="0">
+              <a:buNone/>
+            </a:pPr>
+            <a:r>
+              <a:rPr lang="en-US" sz="1500" b="1" dirty="0">
+                <a:solidFill>
+                  <a:srgbClr val="1B2A38"/>
+                </a:solidFill>
+                <a:latin typeface="Calibri" pitchFamily="34" charset="0"/>
+                <a:ea typeface="Calibri" pitchFamily="34" charset="-122"/>
+                <a:cs typeface="Calibri" pitchFamily="34" charset="-120"/>
+              </a:rPr>
+              <a:t>C — High complexity, full validation</a:t>
+            </a:r>
+            <a:endParaRPr lang="en-US" sz="1500" dirty="0"/>
+          </a:p>
+        </p:txBody>
+      </p:sp>
+      <p:sp>
+        <p:nvSpPr>
+          <p:cNvPr id="8" name="Text 6"/>
+          <p:cNvSpPr/>
+          <p:nvPr/>
+        </p:nvSpPr>
+        <p:spPr>
+          <a:xfrm>
+            <a:off x="7439376" y="3127248"/>
+            <a:ext cx="3947648" cy="2377440"/>
+          </a:xfrm>
+          <a:prstGeom prst="rect">
+            <a:avLst/>
+          </a:prstGeom>
+          <a:noFill/>
+          <a:ln/>
+        </p:spPr>
+        <p:txBody>
+          <a:bodyPr wrap="square" lIns="0" tIns="0" rIns="0" bIns="0" rtlCol="0" anchor="t"/>
+          <a:lstStyle/>
+          <a:p>
+            <a:pPr algn="l" indent="0" marL="0">
+              <a:lnSpc>
+                <a:spcPct val="108000"/>
+              </a:lnSpc>
+              <a:buNone/>
+            </a:pPr>
+            <a:r>
+              <a:rPr lang="en-US" sz="1250" dirty="0">
+                <a:solidFill>
+                  <a:srgbClr val="33444F"/>
+                </a:solidFill>
+                <a:latin typeface="Calibri" pitchFamily="34" charset="0"/>
+                <a:ea typeface="Calibri" pitchFamily="34" charset="-122"/>
+                <a:cs typeface="Calibri" pitchFamily="34" charset="-120"/>
+              </a:rPr>
+              <a:t>Modifications void the cleared status; the lab must fully validate the test as high complexity.</a:t>
+            </a:r>
+            <a:endParaRPr lang="en-US" sz="1250" dirty="0"/>
+          </a:p>
+        </p:txBody>
+      </p:sp>
+      <p:sp>
+        <p:nvSpPr>
+          <p:cNvPr id="9" name="Text 7"/>
+          <p:cNvSpPr/>
+          <p:nvPr/>
+        </p:nvSpPr>
+        <p:spPr>
+          <a:xfrm>
+            <a:off x="566928" y="6473952"/>
+            <a:ext cx="7772400" cy="274320"/>
+          </a:xfrm>
+          <a:prstGeom prst="rect">
+            <a:avLst/>
+          </a:prstGeom>
+          <a:noFill/>
+          <a:ln/>
+        </p:spPr>
+        <p:txBody>
+          <a:bodyPr wrap="square" lIns="0" tIns="0" rIns="0" bIns="0" rtlCol="0" anchor="ctr"/>
+          <a:lstStyle/>
+          <a:p>
+            <a:pPr algn="l" indent="0" marL="0">
+              <a:buNone/>
+            </a:pPr>
+            <a:r>
+              <a:rPr lang="en-US" sz="850" dirty="0">
+                <a:solidFill>
+                  <a:srgbClr val="9AA8B4"/>
+                </a:solidFill>
+                <a:latin typeface="Calibri" pitchFamily="34" charset="0"/>
+                <a:ea typeface="Calibri" pitchFamily="34" charset="-122"/>
+                <a:cs typeface="Calibri" pitchFamily="34" charset="-120"/>
+              </a:rPr>
+              <a:t>Makassed General Hospital  ·  Department of Laboratory Medicine</a:t>
+            </a:r>
+            <a:endParaRPr lang="en-US" sz="850" dirty="0"/>
+          </a:p>
+        </p:txBody>
+      </p:sp>
+      <p:sp>
+        <p:nvSpPr>
+          <p:cNvPr id="10" name="Text 8"/>
+          <p:cNvSpPr/>
+          <p:nvPr/>
+        </p:nvSpPr>
+        <p:spPr>
+          <a:xfrm>
+            <a:off x="9814255" y="6473952"/>
+            <a:ext cx="1828800" cy="274320"/>
+          </a:xfrm>
+          <a:prstGeom prst="rect">
+            <a:avLst/>
+          </a:prstGeom>
+          <a:noFill/>
+          <a:ln/>
+        </p:spPr>
+        <p:txBody>
+          <a:bodyPr wrap="square" lIns="0" tIns="0" rIns="0" bIns="0" rtlCol="0" anchor="ctr"/>
+          <a:lstStyle/>
+          <a:p>
+            <a:pPr algn="r" indent="0" marL="0">
+              <a:buNone/>
+            </a:pPr>
+            <a:r>
+              <a:rPr lang="en-US" sz="850" dirty="0">
+                <a:solidFill>
+                  <a:srgbClr val="9AA8B4"/>
+                </a:solidFill>
+                <a:latin typeface="Calibri" pitchFamily="34" charset="0"/>
+                <a:ea typeface="Calibri" pitchFamily="34" charset="-122"/>
+                <a:cs typeface="Calibri" pitchFamily="34" charset="-120"/>
+              </a:rPr>
+              <a:t>CP Lecture Series</a:t>
+            </a:r>
+            <a:pPr algn="r" indent="0" marL="0">
+              <a:buNone/>
+            </a:pPr>
+            <a:r>
+              <a:rPr lang="en-US" sz="850" dirty="0">
+                <a:solidFill>
+                  <a:srgbClr val="DCE4EC"/>
+                </a:solidFill>
+                <a:latin typeface="Calibri" pitchFamily="34" charset="0"/>
+                <a:ea typeface="Calibri" pitchFamily="34" charset="-122"/>
+                <a:cs typeface="Calibri" pitchFamily="34" charset="-120"/>
+              </a:rPr>
+              <a:t>   ·   </a:t>
+            </a:r>
+            <a:pPr algn="r" indent="0" marL="0">
+              <a:buNone/>
+            </a:pPr>
+            <a:r>
+              <a:rPr lang="en-US" sz="850" b="1" dirty="0">
+                <a:solidFill>
+                  <a:srgbClr val="455A64"/>
+                </a:solidFill>
+                <a:latin typeface="Calibri" pitchFamily="34" charset="0"/>
+                <a:ea typeface="Calibri" pitchFamily="34" charset="-122"/>
+                <a:cs typeface="Calibri" pitchFamily="34" charset="-120"/>
+              </a:rPr>
+              <a:t>19</a:t>
+            </a:r>
+            <a:endParaRPr lang="en-US" sz="850" dirty="0"/>
+          </a:p>
+        </p:txBody>
+      </p:sp>
+    </p:spTree>
+  </p:cSld>
+  <p:clrMapOvr>
+    <a:masterClrMapping/>
+  </p:clrMapOvr>
+</p:sld>
+</file>
+
+<file path=ppt/slides/slide28.xml><?xml version="1.0" encoding="utf-8"?>
+<p:sld xmlns:a="http://schemas.openxmlformats.org/drawingml/2006/main" xmlns:p="http://schemas.openxmlformats.org/presentationml/2006/main" xmlns:r="http://schemas.openxmlformats.org/officeDocument/2006/relationships">
+  <p:cSld>
+    <p:spTree>
+      <p:nvGrpSpPr>
+        <p:cNvPr id="1" name=""/>
+        <p:cNvGrpSpPr/>
+        <p:nvPr/>
+      </p:nvGrpSpPr>
+      <p:grpSpPr/>
+      <p:sp>
+        <p:nvSpPr>
+          <p:cNvPr id="2" name="Text 0"/>
+          <p:cNvSpPr/>
+          <p:nvPr/>
+        </p:nvSpPr>
+        <p:spPr>
+          <a:xfrm>
+            <a:off x="566928" y="329184"/>
+            <a:ext cx="10515600" cy="310896"/>
+          </a:xfrm>
+          <a:prstGeom prst="rect">
+            <a:avLst/>
+          </a:prstGeom>
+          <a:noFill/>
+          <a:ln/>
+        </p:spPr>
+        <p:txBody>
+          <a:bodyPr wrap="square" lIns="0" tIns="0" rIns="0" bIns="0" rtlCol="0" anchor="ctr"/>
+          <a:lstStyle/>
+          <a:p>
+            <a:pPr algn="l" indent="0" marL="0">
+              <a:buNone/>
+            </a:pPr>
+            <a:r>
+              <a:rPr lang="en-US" sz="1100" b="1" spc="150" kern="0" dirty="0">
+                <a:solidFill>
+                  <a:srgbClr val="455A64"/>
+                </a:solidFill>
+                <a:latin typeface="Calibri" pitchFamily="34" charset="0"/>
+                <a:ea typeface="Calibri" pitchFamily="34" charset="-122"/>
+                <a:cs typeface="Calibri" pitchFamily="34" charset="-120"/>
+              </a:rPr>
+              <a:t>LAB MANAGEMENT &amp; QUALITY   ·   BOARD REVIEW  ·  Q2</a:t>
+            </a:r>
+            <a:endParaRPr lang="en-US" sz="1100" dirty="0"/>
+          </a:p>
+        </p:txBody>
+      </p:sp>
+      <p:sp>
+        <p:nvSpPr>
+          <p:cNvPr id="3" name="Text 1"/>
+          <p:cNvSpPr/>
+          <p:nvPr/>
+        </p:nvSpPr>
+        <p:spPr>
+          <a:xfrm>
+            <a:off x="566928" y="713232"/>
+            <a:ext cx="11064240" cy="749808"/>
+          </a:xfrm>
+          <a:prstGeom prst="rect">
+            <a:avLst/>
+          </a:prstGeom>
+          <a:noFill/>
+          <a:ln/>
+        </p:spPr>
+        <p:txBody>
+          <a:bodyPr wrap="square" lIns="0" tIns="0" rIns="0" bIns="0" rtlCol="0" anchor="ctr"/>
+          <a:lstStyle/>
+          <a:p>
+            <a:pPr algn="l" indent="0" marL="0">
+              <a:buNone/>
+            </a:pPr>
+            <a:r>
+              <a:rPr lang="en-US" sz="2600" b="1" dirty="0">
+                <a:solidFill>
+                  <a:srgbClr val="0E3A5F"/>
+                </a:solidFill>
+                <a:latin typeface="Calibri" pitchFamily="34" charset="0"/>
+                <a:ea typeface="Calibri" pitchFamily="34" charset="-122"/>
+                <a:cs typeface="Calibri" pitchFamily="34" charset="-120"/>
+              </a:rPr>
+              <a:t>Board-Style Review</a:t>
+            </a:r>
+            <a:endParaRPr lang="en-US" sz="2600" dirty="0"/>
+          </a:p>
+        </p:txBody>
+      </p:sp>
+      <p:sp>
+        <p:nvSpPr>
+          <p:cNvPr id="4" name="Text 2"/>
+          <p:cNvSpPr/>
+          <p:nvPr/>
+        </p:nvSpPr>
+        <p:spPr>
+          <a:xfrm>
+            <a:off x="566928" y="1417320"/>
+            <a:ext cx="11057839" cy="914400"/>
+          </a:xfrm>
+          <a:prstGeom prst="rect">
+            <a:avLst/>
+          </a:prstGeom>
+          <a:noFill/>
+          <a:ln/>
+        </p:spPr>
+        <p:txBody>
+          <a:bodyPr wrap="square" lIns="0" tIns="0" rIns="0" bIns="0" rtlCol="0" anchor="t"/>
+          <a:lstStyle/>
+          <a:p>
+            <a:pPr algn="l" indent="0" marL="0">
+              <a:lnSpc>
+                <a:spcPct val="105000"/>
+              </a:lnSpc>
+              <a:buNone/>
+            </a:pPr>
+            <a:r>
+              <a:rPr lang="en-US" sz="1450" b="1" dirty="0">
+                <a:solidFill>
+                  <a:srgbClr val="1B2A38"/>
+                </a:solidFill>
+                <a:latin typeface="Calibri" pitchFamily="34" charset="0"/>
+                <a:ea typeface="Calibri" pitchFamily="34" charset="-122"/>
+                <a:cs typeface="Calibri" pitchFamily="34" charset="-120"/>
+              </a:rPr>
+              <a:t>CLIA requirements for a test increase with:</a:t>
+            </a:r>
+            <a:endParaRPr lang="en-US" sz="1450" dirty="0"/>
+          </a:p>
+        </p:txBody>
+      </p:sp>
+      <p:sp>
+        <p:nvSpPr>
+          <p:cNvPr id="5" name="Text 3"/>
+          <p:cNvSpPr/>
+          <p:nvPr/>
+        </p:nvSpPr>
+        <p:spPr>
+          <a:xfrm>
+            <a:off x="658368" y="2395728"/>
+            <a:ext cx="6192390" cy="3017520"/>
+          </a:xfrm>
+          <a:prstGeom prst="rect">
+            <a:avLst/>
+          </a:prstGeom>
+          <a:noFill/>
+          <a:ln/>
+        </p:spPr>
+        <p:txBody>
+          <a:bodyPr wrap="square" lIns="0" tIns="0" rIns="0" bIns="0" rtlCol="0" anchor="t"/>
+          <a:lstStyle/>
+          <a:p>
+            <a:pPr algn="l" indent="0" marL="0">
+              <a:spcAft>
+                <a:spcPts val="600"/>
+              </a:spcAft>
+              <a:buNone/>
+            </a:pPr>
+            <a:r>
+              <a:rPr lang="en-US" sz="1350" dirty="0">
+                <a:solidFill>
+                  <a:srgbClr val="33444F"/>
+                </a:solidFill>
+                <a:latin typeface="Calibri" pitchFamily="34" charset="0"/>
+                <a:ea typeface="Calibri" pitchFamily="34" charset="-122"/>
+                <a:cs typeface="Calibri" pitchFamily="34" charset="-120"/>
+              </a:rPr>
+              <a:t>A. The lab’s size</a:t>
+            </a:r>
+            <a:endParaRPr lang="en-US" sz="1350" dirty="0"/>
+          </a:p>
+          <a:p>
+            <a:pPr algn="l" indent="0" marL="0">
+              <a:spcAft>
+                <a:spcPts val="600"/>
+              </a:spcAft>
+              <a:buNone/>
+            </a:pPr>
+            <a:r>
+              <a:rPr lang="en-US" sz="1350" b="1" dirty="0">
+                <a:solidFill>
+                  <a:srgbClr val="2C3A41"/>
+                </a:solidFill>
+                <a:latin typeface="Calibri" pitchFamily="34" charset="0"/>
+                <a:ea typeface="Calibri" pitchFamily="34" charset="-122"/>
+                <a:cs typeface="Calibri" pitchFamily="34" charset="-120"/>
+              </a:rPr>
+              <a:t>B. Test complexity (waived → high)</a:t>
+            </a:r>
+            <a:endParaRPr lang="en-US" sz="1350" dirty="0"/>
+          </a:p>
+          <a:p>
+            <a:pPr algn="l" indent="0" marL="0">
+              <a:spcAft>
+                <a:spcPts val="600"/>
+              </a:spcAft>
+              <a:buNone/>
+            </a:pPr>
+            <a:r>
+              <a:rPr lang="en-US" sz="1350" dirty="0">
+                <a:solidFill>
+                  <a:srgbClr val="33444F"/>
+                </a:solidFill>
+                <a:latin typeface="Calibri" pitchFamily="34" charset="0"/>
+                <a:ea typeface="Calibri" pitchFamily="34" charset="-122"/>
+                <a:cs typeface="Calibri" pitchFamily="34" charset="-120"/>
+              </a:rPr>
+              <a:t>C. The number of staff</a:t>
+            </a:r>
+            <a:endParaRPr lang="en-US" sz="1350" dirty="0"/>
+          </a:p>
+          <a:p>
+            <a:pPr algn="l" indent="0" marL="0">
+              <a:spcAft>
+                <a:spcPts val="600"/>
+              </a:spcAft>
+              <a:buNone/>
+            </a:pPr>
+            <a:r>
+              <a:rPr lang="en-US" sz="1350" dirty="0">
+                <a:solidFill>
+                  <a:srgbClr val="33444F"/>
+                </a:solidFill>
+                <a:latin typeface="Calibri" pitchFamily="34" charset="0"/>
+                <a:ea typeface="Calibri" pitchFamily="34" charset="-122"/>
+                <a:cs typeface="Calibri" pitchFamily="34" charset="-120"/>
+              </a:rPr>
+              <a:t>D. The instrument brand</a:t>
+            </a:r>
+            <a:endParaRPr lang="en-US" sz="1350" dirty="0"/>
+          </a:p>
+          <a:p>
+            <a:pPr algn="l" indent="0" marL="0">
+              <a:spcAft>
+                <a:spcPts val="600"/>
+              </a:spcAft>
+              <a:buNone/>
+            </a:pPr>
+            <a:r>
+              <a:rPr lang="en-US" sz="1350" dirty="0">
+                <a:solidFill>
+                  <a:srgbClr val="33444F"/>
+                </a:solidFill>
+                <a:latin typeface="Calibri" pitchFamily="34" charset="0"/>
+                <a:ea typeface="Calibri" pitchFamily="34" charset="-122"/>
+                <a:cs typeface="Calibri" pitchFamily="34" charset="-120"/>
+              </a:rPr>
+              <a:t>E. The time of year</a:t>
+            </a:r>
+            <a:endParaRPr lang="en-US" sz="1350" dirty="0"/>
+          </a:p>
+        </p:txBody>
+      </p:sp>
+      <p:sp>
+        <p:nvSpPr>
+          <p:cNvPr id="6" name="Shape 4"/>
+          <p:cNvSpPr/>
+          <p:nvPr/>
+        </p:nvSpPr>
+        <p:spPr>
+          <a:xfrm>
+            <a:off x="7201632" y="2395728"/>
+            <a:ext cx="4423136" cy="3246120"/>
+          </a:xfrm>
+          <a:prstGeom prst="roundRect">
+            <a:avLst>
+              <a:gd name="adj" fmla="val 2535"/>
+            </a:avLst>
+          </a:prstGeom>
+          <a:solidFill>
+            <a:srgbClr val="ECEFF1"/>
+          </a:solidFill>
+          <a:ln/>
+          <a:effectLst>
+            <a:outerShdw sx="100000" sy="100000" kx="0" ky="0" algn="bl" rotWithShape="0" blurRad="88900" dist="25400" dir="5400000">
+              <a:srgbClr val="22303C">
+                <a:alpha val="12000"/>
+              </a:srgbClr>
+            </a:outerShdw>
+          </a:effectLst>
+        </p:spPr>
+        <p:txBody>
+          <a:bodyPr/>
+          <a:p/>
+        </p:txBody>
+      </p:sp>
+      <p:sp>
+        <p:nvSpPr>
+          <p:cNvPr id="7" name="Text 5"/>
+          <p:cNvSpPr/>
+          <p:nvPr/>
+        </p:nvSpPr>
+        <p:spPr>
+          <a:xfrm>
+            <a:off x="7439376" y="2578608"/>
+            <a:ext cx="3965936" cy="457200"/>
+          </a:xfrm>
+          <a:prstGeom prst="rect">
+            <a:avLst/>
+          </a:prstGeom>
+          <a:noFill/>
+          <a:ln/>
+        </p:spPr>
+        <p:txBody>
+          <a:bodyPr wrap="square" lIns="0" tIns="0" rIns="0" bIns="0" rtlCol="0" anchor="ctr"/>
+          <a:lstStyle/>
+          <a:p>
+            <a:pPr indent="0" marL="0">
+              <a:buNone/>
+            </a:pPr>
+            <a:r>
+              <a:rPr lang="en-US" sz="1500" b="1" dirty="0">
+                <a:solidFill>
+                  <a:srgbClr val="455A64"/>
+                </a:solidFill>
+                <a:latin typeface="Calibri" pitchFamily="34" charset="0"/>
+                <a:ea typeface="Calibri" pitchFamily="34" charset="-122"/>
+                <a:cs typeface="Calibri" pitchFamily="34" charset="-120"/>
+              </a:rPr>
+              <a:t>ANSWER  </a:t>
+            </a:r>
+            <a:pPr indent="0" marL="0">
+              <a:buNone/>
+            </a:pPr>
+            <a:r>
+              <a:rPr lang="en-US" sz="1500" b="1" dirty="0">
+                <a:solidFill>
+                  <a:srgbClr val="1B2A38"/>
+                </a:solidFill>
+                <a:latin typeface="Calibri" pitchFamily="34" charset="0"/>
+                <a:ea typeface="Calibri" pitchFamily="34" charset="-122"/>
+                <a:cs typeface="Calibri" pitchFamily="34" charset="-120"/>
+              </a:rPr>
+              <a:t>B — Test complexity</a:t>
+            </a:r>
+            <a:endParaRPr lang="en-US" sz="1500" dirty="0"/>
+          </a:p>
+        </p:txBody>
+      </p:sp>
+      <p:sp>
+        <p:nvSpPr>
+          <p:cNvPr id="8" name="Text 6"/>
+          <p:cNvSpPr/>
+          <p:nvPr/>
+        </p:nvSpPr>
+        <p:spPr>
+          <a:xfrm>
+            <a:off x="7439376" y="3127248"/>
+            <a:ext cx="3947648" cy="2377440"/>
+          </a:xfrm>
+          <a:prstGeom prst="rect">
+            <a:avLst/>
+          </a:prstGeom>
+          <a:noFill/>
+          <a:ln/>
+        </p:spPr>
+        <p:txBody>
+          <a:bodyPr wrap="square" lIns="0" tIns="0" rIns="0" bIns="0" rtlCol="0" anchor="t"/>
+          <a:lstStyle/>
+          <a:p>
+            <a:pPr algn="l" indent="0" marL="0">
+              <a:lnSpc>
+                <a:spcPct val="108000"/>
+              </a:lnSpc>
+              <a:buNone/>
+            </a:pPr>
+            <a:r>
+              <a:rPr lang="en-US" sz="1250" dirty="0">
+                <a:solidFill>
+                  <a:srgbClr val="33444F"/>
+                </a:solidFill>
+                <a:latin typeface="Calibri" pitchFamily="34" charset="0"/>
+                <a:ea typeface="Calibri" pitchFamily="34" charset="-122"/>
+                <a:cs typeface="Calibri" pitchFamily="34" charset="-120"/>
+              </a:rPr>
+              <a:t>Requirements for personnel, QC, and PT scale with complexity from waived to high complexity.</a:t>
+            </a:r>
+            <a:endParaRPr lang="en-US" sz="1250" dirty="0"/>
+          </a:p>
+        </p:txBody>
+      </p:sp>
+      <p:sp>
+        <p:nvSpPr>
+          <p:cNvPr id="9" name="Text 7"/>
+          <p:cNvSpPr/>
+          <p:nvPr/>
+        </p:nvSpPr>
+        <p:spPr>
+          <a:xfrm>
+            <a:off x="566928" y="6473952"/>
+            <a:ext cx="7772400" cy="274320"/>
+          </a:xfrm>
+          <a:prstGeom prst="rect">
+            <a:avLst/>
+          </a:prstGeom>
+          <a:noFill/>
+          <a:ln/>
+        </p:spPr>
+        <p:txBody>
+          <a:bodyPr wrap="square" lIns="0" tIns="0" rIns="0" bIns="0" rtlCol="0" anchor="ctr"/>
+          <a:lstStyle/>
+          <a:p>
+            <a:pPr algn="l" indent="0" marL="0">
+              <a:buNone/>
+            </a:pPr>
+            <a:r>
+              <a:rPr lang="en-US" sz="850" dirty="0">
+                <a:solidFill>
+                  <a:srgbClr val="9AA8B4"/>
+                </a:solidFill>
+                <a:latin typeface="Calibri" pitchFamily="34" charset="0"/>
+                <a:ea typeface="Calibri" pitchFamily="34" charset="-122"/>
+                <a:cs typeface="Calibri" pitchFamily="34" charset="-120"/>
+              </a:rPr>
+              <a:t>Makassed General Hospital  ·  Department of Laboratory Medicine</a:t>
+            </a:r>
+            <a:endParaRPr lang="en-US" sz="850" dirty="0"/>
+          </a:p>
+        </p:txBody>
+      </p:sp>
+      <p:sp>
+        <p:nvSpPr>
+          <p:cNvPr id="10" name="Text 8"/>
+          <p:cNvSpPr/>
+          <p:nvPr/>
+        </p:nvSpPr>
+        <p:spPr>
+          <a:xfrm>
+            <a:off x="9814255" y="6473952"/>
+            <a:ext cx="1828800" cy="274320"/>
+          </a:xfrm>
+          <a:prstGeom prst="rect">
+            <a:avLst/>
+          </a:prstGeom>
+          <a:noFill/>
+          <a:ln/>
+        </p:spPr>
+        <p:txBody>
+          <a:bodyPr wrap="square" lIns="0" tIns="0" rIns="0" bIns="0" rtlCol="0" anchor="ctr"/>
+          <a:lstStyle/>
+          <a:p>
+            <a:pPr algn="r" indent="0" marL="0">
+              <a:buNone/>
+            </a:pPr>
+            <a:r>
+              <a:rPr lang="en-US" sz="850" dirty="0">
+                <a:solidFill>
+                  <a:srgbClr val="9AA8B4"/>
+                </a:solidFill>
+                <a:latin typeface="Calibri" pitchFamily="34" charset="0"/>
+                <a:ea typeface="Calibri" pitchFamily="34" charset="-122"/>
+                <a:cs typeface="Calibri" pitchFamily="34" charset="-120"/>
+              </a:rPr>
+              <a:t>CP Lecture Series</a:t>
+            </a:r>
+            <a:pPr algn="r" indent="0" marL="0">
+              <a:buNone/>
+            </a:pPr>
+            <a:r>
+              <a:rPr lang="en-US" sz="850" dirty="0">
+                <a:solidFill>
+                  <a:srgbClr val="DCE4EC"/>
+                </a:solidFill>
+                <a:latin typeface="Calibri" pitchFamily="34" charset="0"/>
+                <a:ea typeface="Calibri" pitchFamily="34" charset="-122"/>
+                <a:cs typeface="Calibri" pitchFamily="34" charset="-120"/>
+              </a:rPr>
+              <a:t>   ·   </a:t>
+            </a:r>
+            <a:pPr algn="r" indent="0" marL="0">
+              <a:buNone/>
+            </a:pPr>
+            <a:r>
+              <a:rPr lang="en-US" sz="850" b="1" dirty="0">
+                <a:solidFill>
+                  <a:srgbClr val="455A64"/>
+                </a:solidFill>
+                <a:latin typeface="Calibri" pitchFamily="34" charset="0"/>
+                <a:ea typeface="Calibri" pitchFamily="34" charset="-122"/>
+                <a:cs typeface="Calibri" pitchFamily="34" charset="-120"/>
+              </a:rPr>
+              <a:t>18</a:t>
+            </a:r>
+            <a:endParaRPr lang="en-US" sz="850" dirty="0"/>
+          </a:p>
+        </p:txBody>
+      </p:sp>
+    </p:spTree>
+  </p:cSld>
+  <p:clrMapOvr>
+    <a:masterClrMapping/>
+  </p:clrMapOvr>
+</p:sld>
+</file>
+
+<file path=ppt/slides/slide29.xml><?xml version="1.0" encoding="utf-8"?>
+<p:sld xmlns:a="http://schemas.openxmlformats.org/drawingml/2006/main" xmlns:p="http://schemas.openxmlformats.org/presentationml/2006/main" xmlns:r="http://schemas.openxmlformats.org/officeDocument/2006/relationships">
+  <p:cSld>
+    <p:spTree>
+      <p:nvGrpSpPr>
+        <p:cNvPr id="1" name=""/>
+        <p:cNvGrpSpPr/>
+        <p:nvPr/>
+      </p:nvGrpSpPr>
+      <p:grpSpPr/>
+      <p:sp>
+        <p:nvSpPr>
+          <p:cNvPr id="2" name="Text 0"/>
+          <p:cNvSpPr/>
+          <p:nvPr/>
+        </p:nvSpPr>
+        <p:spPr>
+          <a:xfrm>
+            <a:off x="566928" y="329184"/>
+            <a:ext cx="10515600" cy="310896"/>
+          </a:xfrm>
+          <a:prstGeom prst="rect">
+            <a:avLst/>
+          </a:prstGeom>
+          <a:noFill/>
+          <a:ln/>
+        </p:spPr>
+        <p:txBody>
+          <a:bodyPr wrap="square" lIns="0" tIns="0" rIns="0" bIns="0" rtlCol="0" anchor="ctr"/>
+          <a:lstStyle/>
+          <a:p>
+            <a:pPr algn="l" indent="0" marL="0">
+              <a:buNone/>
+            </a:pPr>
+            <a:r>
+              <a:rPr lang="en-US" sz="1100" b="1" spc="150" kern="0" dirty="0">
+                <a:solidFill>
+                  <a:srgbClr val="455A64"/>
+                </a:solidFill>
+                <a:latin typeface="Calibri" pitchFamily="34" charset="0"/>
+                <a:ea typeface="Calibri" pitchFamily="34" charset="-122"/>
+                <a:cs typeface="Calibri" pitchFamily="34" charset="-120"/>
+              </a:rPr>
+              <a:t>LAB MANAGEMENT &amp; QUALITY   ·   BOARD REVIEW  ·  Q1</a:t>
+            </a:r>
+            <a:endParaRPr lang="en-US" sz="1100" dirty="0"/>
+          </a:p>
+        </p:txBody>
+      </p:sp>
+      <p:sp>
+        <p:nvSpPr>
+          <p:cNvPr id="3" name="Text 1"/>
+          <p:cNvSpPr/>
+          <p:nvPr/>
+        </p:nvSpPr>
+        <p:spPr>
+          <a:xfrm>
+            <a:off x="566928" y="713232"/>
+            <a:ext cx="11064240" cy="749808"/>
+          </a:xfrm>
+          <a:prstGeom prst="rect">
+            <a:avLst/>
+          </a:prstGeom>
+          <a:noFill/>
+          <a:ln/>
+        </p:spPr>
+        <p:txBody>
+          <a:bodyPr wrap="square" lIns="0" tIns="0" rIns="0" bIns="0" rtlCol="0" anchor="ctr"/>
+          <a:lstStyle/>
+          <a:p>
+            <a:pPr algn="l" indent="0" marL="0">
+              <a:buNone/>
+            </a:pPr>
+            <a:r>
+              <a:rPr lang="en-US" sz="2600" b="1" dirty="0">
+                <a:solidFill>
+                  <a:srgbClr val="0E3A5F"/>
+                </a:solidFill>
+                <a:latin typeface="Calibri" pitchFamily="34" charset="0"/>
+                <a:ea typeface="Calibri" pitchFamily="34" charset="-122"/>
+                <a:cs typeface="Calibri" pitchFamily="34" charset="-120"/>
+              </a:rPr>
+              <a:t>Board-Style Review</a:t>
+            </a:r>
+            <a:endParaRPr lang="en-US" sz="2600" dirty="0"/>
+          </a:p>
+        </p:txBody>
+      </p:sp>
+      <p:sp>
+        <p:nvSpPr>
+          <p:cNvPr id="4" name="Text 2"/>
+          <p:cNvSpPr/>
+          <p:nvPr/>
+        </p:nvSpPr>
+        <p:spPr>
+          <a:xfrm>
+            <a:off x="566928" y="1417320"/>
+            <a:ext cx="11057839" cy="914400"/>
+          </a:xfrm>
+          <a:prstGeom prst="rect">
+            <a:avLst/>
+          </a:prstGeom>
+          <a:noFill/>
+          <a:ln/>
+        </p:spPr>
+        <p:txBody>
+          <a:bodyPr wrap="square" lIns="0" tIns="0" rIns="0" bIns="0" rtlCol="0" anchor="t"/>
+          <a:lstStyle/>
+          <a:p>
+            <a:pPr algn="l" indent="0" marL="0">
+              <a:lnSpc>
+                <a:spcPct val="105000"/>
+              </a:lnSpc>
+              <a:buNone/>
+            </a:pPr>
+            <a:r>
+              <a:rPr lang="en-US" sz="1450" b="1" dirty="0">
+                <a:solidFill>
+                  <a:srgbClr val="1B2A38"/>
+                </a:solidFill>
+                <a:latin typeface="Calibri" pitchFamily="34" charset="0"/>
+                <a:ea typeface="Calibri" pitchFamily="34" charset="-122"/>
+                <a:cs typeface="Calibri" pitchFamily="34" charset="-120"/>
+              </a:rPr>
+              <a:t>Referring a proficiency-testing sample to another laboratory is:</a:t>
+            </a:r>
+            <a:endParaRPr lang="en-US" sz="1450" dirty="0"/>
+          </a:p>
+        </p:txBody>
+      </p:sp>
+      <p:sp>
+        <p:nvSpPr>
+          <p:cNvPr id="5" name="Text 3"/>
+          <p:cNvSpPr/>
+          <p:nvPr/>
+        </p:nvSpPr>
+        <p:spPr>
+          <a:xfrm>
+            <a:off x="658368" y="2395728"/>
+            <a:ext cx="6192390" cy="3017520"/>
+          </a:xfrm>
+          <a:prstGeom prst="rect">
+            <a:avLst/>
+          </a:prstGeom>
+          <a:noFill/>
+          <a:ln/>
+        </p:spPr>
+        <p:txBody>
+          <a:bodyPr wrap="square" lIns="0" tIns="0" rIns="0" bIns="0" rtlCol="0" anchor="t"/>
+          <a:lstStyle/>
+          <a:p>
+            <a:pPr algn="l" indent="0" marL="0">
+              <a:spcAft>
+                <a:spcPts val="600"/>
+              </a:spcAft>
+              <a:buNone/>
+            </a:pPr>
+            <a:r>
+              <a:rPr lang="en-US" sz="1350" dirty="0">
+                <a:solidFill>
+                  <a:srgbClr val="33444F"/>
+                </a:solidFill>
+                <a:latin typeface="Calibri" pitchFamily="34" charset="0"/>
+                <a:ea typeface="Calibri" pitchFamily="34" charset="-122"/>
+                <a:cs typeface="Calibri" pitchFamily="34" charset="-120"/>
+              </a:rPr>
+              <a:t>A. Encouraged for accuracy</a:t>
+            </a:r>
+            <a:endParaRPr lang="en-US" sz="1350" dirty="0"/>
+          </a:p>
+          <a:p>
+            <a:pPr algn="l" indent="0" marL="0">
+              <a:spcAft>
+                <a:spcPts val="600"/>
+              </a:spcAft>
+              <a:buNone/>
+            </a:pPr>
+            <a:r>
+              <a:rPr lang="en-US" sz="1350" b="1" dirty="0">
+                <a:solidFill>
+                  <a:srgbClr val="2C3A41"/>
+                </a:solidFill>
+                <a:latin typeface="Calibri" pitchFamily="34" charset="0"/>
+                <a:ea typeface="Calibri" pitchFamily="34" charset="-122"/>
+                <a:cs typeface="Calibri" pitchFamily="34" charset="-120"/>
+              </a:rPr>
+              <a:t>B. A serious regulatory violation</a:t>
+            </a:r>
+            <a:endParaRPr lang="en-US" sz="1350" dirty="0"/>
+          </a:p>
+          <a:p>
+            <a:pPr algn="l" indent="0" marL="0">
+              <a:spcAft>
+                <a:spcPts val="600"/>
+              </a:spcAft>
+              <a:buNone/>
+            </a:pPr>
+            <a:r>
+              <a:rPr lang="en-US" sz="1350" dirty="0">
+                <a:solidFill>
+                  <a:srgbClr val="33444F"/>
+                </a:solidFill>
+                <a:latin typeface="Calibri" pitchFamily="34" charset="0"/>
+                <a:ea typeface="Calibri" pitchFamily="34" charset="-122"/>
+                <a:cs typeface="Calibri" pitchFamily="34" charset="-120"/>
+              </a:rPr>
+              <a:t>C. Required for confirmation</a:t>
+            </a:r>
+            <a:endParaRPr lang="en-US" sz="1350" dirty="0"/>
+          </a:p>
+          <a:p>
+            <a:pPr algn="l" indent="0" marL="0">
+              <a:spcAft>
+                <a:spcPts val="600"/>
+              </a:spcAft>
+              <a:buNone/>
+            </a:pPr>
+            <a:r>
+              <a:rPr lang="en-US" sz="1350" dirty="0">
+                <a:solidFill>
+                  <a:srgbClr val="33444F"/>
+                </a:solidFill>
+                <a:latin typeface="Calibri" pitchFamily="34" charset="0"/>
+                <a:ea typeface="Calibri" pitchFamily="34" charset="-122"/>
+                <a:cs typeface="Calibri" pitchFamily="34" charset="-120"/>
+              </a:rPr>
+              <a:t>D. Allowed if documented</a:t>
+            </a:r>
+            <a:endParaRPr lang="en-US" sz="1350" dirty="0"/>
+          </a:p>
+          <a:p>
+            <a:pPr algn="l" indent="0" marL="0">
+              <a:spcAft>
+                <a:spcPts val="600"/>
+              </a:spcAft>
+              <a:buNone/>
+            </a:pPr>
+            <a:r>
+              <a:rPr lang="en-US" sz="1350" dirty="0">
+                <a:solidFill>
+                  <a:srgbClr val="33444F"/>
+                </a:solidFill>
+                <a:latin typeface="Calibri" pitchFamily="34" charset="0"/>
+                <a:ea typeface="Calibri" pitchFamily="34" charset="-122"/>
+                <a:cs typeface="Calibri" pitchFamily="34" charset="-120"/>
+              </a:rPr>
+              <a:t>E. Standard practice</a:t>
+            </a:r>
+            <a:endParaRPr lang="en-US" sz="1350" dirty="0"/>
+          </a:p>
+        </p:txBody>
+      </p:sp>
+      <p:sp>
+        <p:nvSpPr>
+          <p:cNvPr id="6" name="Shape 4"/>
+          <p:cNvSpPr/>
+          <p:nvPr/>
+        </p:nvSpPr>
+        <p:spPr>
+          <a:xfrm>
+            <a:off x="7201632" y="2395728"/>
+            <a:ext cx="4423136" cy="3246120"/>
+          </a:xfrm>
+          <a:prstGeom prst="roundRect">
+            <a:avLst>
+              <a:gd name="adj" fmla="val 2535"/>
+            </a:avLst>
+          </a:prstGeom>
+          <a:solidFill>
+            <a:srgbClr val="ECEFF1"/>
+          </a:solidFill>
+          <a:ln/>
+          <a:effectLst>
+            <a:outerShdw sx="100000" sy="100000" kx="0" ky="0" algn="bl" rotWithShape="0" blurRad="88900" dist="25400" dir="5400000">
+              <a:srgbClr val="22303C">
+                <a:alpha val="12000"/>
+              </a:srgbClr>
+            </a:outerShdw>
+          </a:effectLst>
+        </p:spPr>
+        <p:txBody>
+          <a:bodyPr/>
+          <a:p/>
+        </p:txBody>
+      </p:sp>
+      <p:sp>
+        <p:nvSpPr>
+          <p:cNvPr id="7" name="Text 5"/>
+          <p:cNvSpPr/>
+          <p:nvPr/>
+        </p:nvSpPr>
+        <p:spPr>
+          <a:xfrm>
+            <a:off x="7439376" y="2578608"/>
+            <a:ext cx="3965936" cy="457200"/>
+          </a:xfrm>
+          <a:prstGeom prst="rect">
+            <a:avLst/>
+          </a:prstGeom>
+          <a:noFill/>
+          <a:ln/>
+        </p:spPr>
+        <p:txBody>
+          <a:bodyPr wrap="square" lIns="0" tIns="0" rIns="0" bIns="0" rtlCol="0" anchor="ctr"/>
+          <a:lstStyle/>
+          <a:p>
+            <a:pPr indent="0" marL="0">
+              <a:buNone/>
+            </a:pPr>
+            <a:r>
+              <a:rPr lang="en-US" sz="1500" b="1" dirty="0">
+                <a:solidFill>
+                  <a:srgbClr val="455A64"/>
+                </a:solidFill>
+                <a:latin typeface="Calibri" pitchFamily="34" charset="0"/>
+                <a:ea typeface="Calibri" pitchFamily="34" charset="-122"/>
+                <a:cs typeface="Calibri" pitchFamily="34" charset="-120"/>
+              </a:rPr>
+              <a:t>ANSWER  </a:t>
+            </a:r>
+            <a:pPr indent="0" marL="0">
+              <a:buNone/>
+            </a:pPr>
+            <a:r>
+              <a:rPr lang="en-US" sz="1500" b="1" dirty="0">
+                <a:solidFill>
+                  <a:srgbClr val="1B2A38"/>
+                </a:solidFill>
+                <a:latin typeface="Calibri" pitchFamily="34" charset="0"/>
+                <a:ea typeface="Calibri" pitchFamily="34" charset="-122"/>
+                <a:cs typeface="Calibri" pitchFamily="34" charset="-120"/>
+              </a:rPr>
+              <a:t>B — A serious violation</a:t>
+            </a:r>
+            <a:endParaRPr lang="en-US" sz="1500" dirty="0"/>
+          </a:p>
+        </p:txBody>
+      </p:sp>
+      <p:sp>
+        <p:nvSpPr>
+          <p:cNvPr id="8" name="Text 6"/>
+          <p:cNvSpPr/>
+          <p:nvPr/>
+        </p:nvSpPr>
+        <p:spPr>
+          <a:xfrm>
+            <a:off x="7439376" y="3127248"/>
+            <a:ext cx="3947648" cy="2377440"/>
+          </a:xfrm>
+          <a:prstGeom prst="rect">
+            <a:avLst/>
+          </a:prstGeom>
+          <a:noFill/>
+          <a:ln/>
+        </p:spPr>
+        <p:txBody>
+          <a:bodyPr wrap="square" lIns="0" tIns="0" rIns="0" bIns="0" rtlCol="0" anchor="t"/>
+          <a:lstStyle/>
+          <a:p>
+            <a:pPr algn="l" indent="0" marL="0">
+              <a:lnSpc>
+                <a:spcPct val="108000"/>
+              </a:lnSpc>
+              <a:buNone/>
+            </a:pPr>
+            <a:r>
+              <a:rPr lang="en-US" sz="1250" dirty="0">
+                <a:solidFill>
+                  <a:srgbClr val="33444F"/>
+                </a:solidFill>
+                <a:latin typeface="Calibri" pitchFamily="34" charset="0"/>
+                <a:ea typeface="Calibri" pitchFamily="34" charset="-122"/>
+                <a:cs typeface="Calibri" pitchFamily="34" charset="-120"/>
+              </a:rPr>
+              <a:t>PT samples must be tested like patient samples and never referred; PT referral can cost a laboratory its certification.</a:t>
+            </a:r>
+            <a:endParaRPr lang="en-US" sz="1250" dirty="0"/>
+          </a:p>
+        </p:txBody>
+      </p:sp>
+      <p:sp>
+        <p:nvSpPr>
+          <p:cNvPr id="9" name="Text 7"/>
+          <p:cNvSpPr/>
+          <p:nvPr/>
+        </p:nvSpPr>
+        <p:spPr>
+          <a:xfrm>
+            <a:off x="566928" y="6473952"/>
+            <a:ext cx="7772400" cy="274320"/>
+          </a:xfrm>
+          <a:prstGeom prst="rect">
+            <a:avLst/>
+          </a:prstGeom>
+          <a:noFill/>
+          <a:ln/>
+        </p:spPr>
+        <p:txBody>
+          <a:bodyPr wrap="square" lIns="0" tIns="0" rIns="0" bIns="0" rtlCol="0" anchor="ctr"/>
+          <a:lstStyle/>
+          <a:p>
+            <a:pPr algn="l" indent="0" marL="0">
+              <a:buNone/>
+            </a:pPr>
+            <a:r>
+              <a:rPr lang="en-US" sz="850" dirty="0">
+                <a:solidFill>
+                  <a:srgbClr val="9AA8B4"/>
+                </a:solidFill>
+                <a:latin typeface="Calibri" pitchFamily="34" charset="0"/>
+                <a:ea typeface="Calibri" pitchFamily="34" charset="-122"/>
+                <a:cs typeface="Calibri" pitchFamily="34" charset="-120"/>
+              </a:rPr>
+              <a:t>Makassed General Hospital  ·  Department of Laboratory Medicine</a:t>
+            </a:r>
+            <a:endParaRPr lang="en-US" sz="850" dirty="0"/>
+          </a:p>
+        </p:txBody>
+      </p:sp>
+      <p:sp>
+        <p:nvSpPr>
+          <p:cNvPr id="10" name="Text 8"/>
+          <p:cNvSpPr/>
+          <p:nvPr/>
+        </p:nvSpPr>
+        <p:spPr>
+          <a:xfrm>
+            <a:off x="9814255" y="6473952"/>
+            <a:ext cx="1828800" cy="274320"/>
+          </a:xfrm>
+          <a:prstGeom prst="rect">
+            <a:avLst/>
+          </a:prstGeom>
+          <a:noFill/>
+          <a:ln/>
+        </p:spPr>
+        <p:txBody>
+          <a:bodyPr wrap="square" lIns="0" tIns="0" rIns="0" bIns="0" rtlCol="0" anchor="ctr"/>
+          <a:lstStyle/>
+          <a:p>
+            <a:pPr algn="r" indent="0" marL="0">
+              <a:buNone/>
+            </a:pPr>
+            <a:r>
+              <a:rPr lang="en-US" sz="850" dirty="0">
+                <a:solidFill>
+                  <a:srgbClr val="9AA8B4"/>
+                </a:solidFill>
+                <a:latin typeface="Calibri" pitchFamily="34" charset="0"/>
+                <a:ea typeface="Calibri" pitchFamily="34" charset="-122"/>
+                <a:cs typeface="Calibri" pitchFamily="34" charset="-120"/>
+              </a:rPr>
+              <a:t>CP Lecture Series</a:t>
+            </a:r>
+            <a:pPr algn="r" indent="0" marL="0">
+              <a:buNone/>
+            </a:pPr>
+            <a:r>
+              <a:rPr lang="en-US" sz="850" dirty="0">
+                <a:solidFill>
+                  <a:srgbClr val="DCE4EC"/>
+                </a:solidFill>
+                <a:latin typeface="Calibri" pitchFamily="34" charset="0"/>
+                <a:ea typeface="Calibri" pitchFamily="34" charset="-122"/>
+                <a:cs typeface="Calibri" pitchFamily="34" charset="-120"/>
+              </a:rPr>
+              <a:t>   ·   </a:t>
+            </a:r>
+            <a:pPr algn="r" indent="0" marL="0">
+              <a:buNone/>
+            </a:pPr>
+            <a:r>
+              <a:rPr lang="en-US" sz="850" b="1" dirty="0">
+                <a:solidFill>
+                  <a:srgbClr val="455A64"/>
+                </a:solidFill>
+                <a:latin typeface="Calibri" pitchFamily="34" charset="0"/>
+                <a:ea typeface="Calibri" pitchFamily="34" charset="-122"/>
+                <a:cs typeface="Calibri" pitchFamily="34" charset="-120"/>
+              </a:rPr>
+              <a:t>17</a:t>
+            </a:r>
+            <a:endParaRPr lang="en-US" sz="850" dirty="0"/>
+          </a:p>
+        </p:txBody>
+      </p:sp>
+    </p:spTree>
+  </p:cSld>
+  <p:clrMapOvr>
+    <a:masterClrMapping/>
+  </p:clrMapOvr>
+</p:sld>
+</file>
+
 <file path=ppt/slides/slide3.xml><?xml version="1.0" encoding="utf-8"?>
 <p:sld xmlns:a="http://schemas.openxmlformats.org/drawingml/2006/main" xmlns:r="http://schemas.openxmlformats.org/officeDocument/2006/relationships" xmlns:p="http://schemas.openxmlformats.org/presentationml/2006/main">
   <p:cSld name="Slide 3">
@@ -11802,6 +13426,10 @@
             </a:outerShdw>
           </a:effectLst>
         </p:spPr>
+        <p:txBody>
+          <a:bodyPr/>
+          <a:p/>
+        </p:txBody>
       </p:sp>
       <p:sp>
         <p:nvSpPr>
@@ -11829,6 +13457,10 @@
             </a:outerShdw>
           </a:effectLst>
         </p:spPr>
+        <p:txBody>
+          <a:bodyPr/>
+          <a:p/>
+        </p:txBody>
       </p:sp>
       <p:sp>
         <p:nvSpPr>
@@ -11936,6 +13568,10 @@
             </a:outerShdw>
           </a:effectLst>
         </p:spPr>
+        <p:txBody>
+          <a:bodyPr/>
+          <a:p/>
+        </p:txBody>
       </p:sp>
       <p:sp>
         <p:nvSpPr>
@@ -11963,6 +13599,10 @@
             </a:outerShdw>
           </a:effectLst>
         </p:spPr>
+        <p:txBody>
+          <a:bodyPr/>
+          <a:p/>
+        </p:txBody>
       </p:sp>
       <p:sp>
         <p:nvSpPr>
@@ -12070,6 +13710,10 @@
             </a:outerShdw>
           </a:effectLst>
         </p:spPr>
+        <p:txBody>
+          <a:bodyPr/>
+          <a:p/>
+        </p:txBody>
       </p:sp>
       <p:sp>
         <p:nvSpPr>
@@ -12097,6 +13741,10 @@
             </a:outerShdw>
           </a:effectLst>
         </p:spPr>
+        <p:txBody>
+          <a:bodyPr/>
+          <a:p/>
+        </p:txBody>
       </p:sp>
       <p:sp>
         <p:nvSpPr>
@@ -12204,6 +13852,10 @@
             </a:outerShdw>
           </a:effectLst>
         </p:spPr>
+        <p:txBody>
+          <a:bodyPr/>
+          <a:p/>
+        </p:txBody>
       </p:sp>
       <p:sp>
         <p:nvSpPr>
@@ -12231,6 +13883,10 @@
             </a:outerShdw>
           </a:effectLst>
         </p:spPr>
+        <p:txBody>
+          <a:bodyPr/>
+          <a:p/>
+        </p:txBody>
       </p:sp>
       <p:sp>
         <p:nvSpPr>
@@ -12338,6 +13994,10 @@
             </a:outerShdw>
           </a:effectLst>
         </p:spPr>
+        <p:txBody>
+          <a:bodyPr/>
+          <a:p/>
+        </p:txBody>
       </p:sp>
       <p:sp>
         <p:nvSpPr>
@@ -12365,6 +14025,10 @@
             </a:outerShdw>
           </a:effectLst>
         </p:spPr>
+        <p:txBody>
+          <a:bodyPr/>
+          <a:p/>
+        </p:txBody>
       </p:sp>
       <p:sp>
         <p:nvSpPr>
@@ -12472,6 +14136,10 @@
             </a:outerShdw>
           </a:effectLst>
         </p:spPr>
+        <p:txBody>
+          <a:bodyPr/>
+          <a:p/>
+        </p:txBody>
       </p:sp>
       <p:sp>
         <p:nvSpPr>
@@ -12499,6 +14167,10 @@
             </a:outerShdw>
           </a:effectLst>
         </p:spPr>
+        <p:txBody>
+          <a:bodyPr/>
+          <a:p/>
+        </p:txBody>
       </p:sp>
       <p:sp>
         <p:nvSpPr>
@@ -12822,6 +14494,10 @@
             </a:outerShdw>
           </a:effectLst>
         </p:spPr>
+        <p:txBody>
+          <a:bodyPr/>
+          <a:p/>
+        </p:txBody>
       </p:sp>
       <p:sp>
         <p:nvSpPr>
@@ -12849,6 +14525,10 @@
             </a:outerShdw>
           </a:effectLst>
         </p:spPr>
+        <p:txBody>
+          <a:bodyPr/>
+          <a:p/>
+        </p:txBody>
       </p:sp>
       <p:sp>
         <p:nvSpPr>
@@ -12963,6 +14643,10 @@
           </a:solidFill>
           <a:ln/>
         </p:spPr>
+        <p:txBody>
+          <a:bodyPr/>
+          <a:p/>
+        </p:txBody>
       </p:sp>
       <p:sp>
         <p:nvSpPr>
@@ -12990,6 +14674,10 @@
             </a:outerShdw>
           </a:effectLst>
         </p:spPr>
+        <p:txBody>
+          <a:bodyPr/>
+          <a:p/>
+        </p:txBody>
       </p:sp>
       <p:sp>
         <p:nvSpPr>
@@ -13111,6 +14799,10 @@
             </a:outerShdw>
           </a:effectLst>
         </p:spPr>
+        <p:txBody>
+          <a:bodyPr/>
+          <a:p/>
+        </p:txBody>
       </p:sp>
       <p:sp>
         <p:nvSpPr>
@@ -13138,6 +14830,10 @@
             </a:outerShdw>
           </a:effectLst>
         </p:spPr>
+        <p:txBody>
+          <a:bodyPr/>
+          <a:p/>
+        </p:txBody>
       </p:sp>
       <p:sp>
         <p:nvSpPr>
@@ -13252,6 +14948,10 @@
           </a:solidFill>
           <a:ln/>
         </p:spPr>
+        <p:txBody>
+          <a:bodyPr/>
+          <a:p/>
+        </p:txBody>
       </p:sp>
       <p:sp>
         <p:nvSpPr>
@@ -13279,6 +14979,10 @@
             </a:outerShdw>
           </a:effectLst>
         </p:spPr>
+        <p:txBody>
+          <a:bodyPr/>
+          <a:p/>
+        </p:txBody>
       </p:sp>
       <p:sp>
         <p:nvSpPr>
@@ -13400,6 +15104,10 @@
             </a:outerShdw>
           </a:effectLst>
         </p:spPr>
+        <p:txBody>
+          <a:bodyPr/>
+          <a:p/>
+        </p:txBody>
       </p:sp>
       <p:sp>
         <p:nvSpPr>
@@ -13427,6 +15135,10 @@
             </a:outerShdw>
           </a:effectLst>
         </p:spPr>
+        <p:txBody>
+          <a:bodyPr/>
+          <a:p/>
+        </p:txBody>
       </p:sp>
       <p:sp>
         <p:nvSpPr>
@@ -13665,6 +15377,10 @@
           </a:solidFill>
           <a:ln/>
         </p:spPr>
+        <p:txBody>
+          <a:bodyPr/>
+          <a:p/>
+        </p:txBody>
       </p:sp>
       <p:sp>
         <p:nvSpPr>
@@ -13687,6 +15403,10 @@
           </a:solidFill>
           <a:ln/>
         </p:spPr>
+        <p:txBody>
+          <a:bodyPr/>
+          <a:p/>
+        </p:txBody>
       </p:sp>
       <p:sp>
         <p:nvSpPr>
@@ -13948,6 +15668,10 @@
             </a:outerShdw>
           </a:effectLst>
         </p:spPr>
+        <p:txBody>
+          <a:bodyPr/>
+          <a:p/>
+        </p:txBody>
       </p:sp>
       <p:pic>
         <p:nvPicPr>
@@ -14256,6 +15980,10 @@
             </a:outerShdw>
           </a:effectLst>
         </p:spPr>
+        <p:txBody>
+          <a:bodyPr/>
+          <a:p/>
+        </p:txBody>
       </p:sp>
       <p:sp>
         <p:nvSpPr>
@@ -14430,6 +16158,10 @@
             </a:outerShdw>
           </a:effectLst>
         </p:spPr>
+        <p:txBody>
+          <a:bodyPr/>
+          <a:p/>
+        </p:txBody>
       </p:sp>
       <p:sp>
         <p:nvSpPr>
@@ -14820,6 +16552,10 @@
             </a:outerShdw>
           </a:effectLst>
         </p:spPr>
+        <p:txBody>
+          <a:bodyPr/>
+          <a:p/>
+        </p:txBody>
       </p:sp>
       <p:sp>
         <p:nvSpPr>
@@ -14994,6 +16730,10 @@
             </a:outerShdw>
           </a:effectLst>
         </p:spPr>
+        <p:txBody>
+          <a:bodyPr/>
+          <a:p/>
+        </p:txBody>
       </p:sp>
       <p:sp>
         <p:nvSpPr>
@@ -15299,6 +17039,10 @@
           </a:solidFill>
           <a:ln/>
         </p:spPr>
+        <p:txBody>
+          <a:bodyPr/>
+          <a:p/>
+        </p:txBody>
       </p:sp>
       <p:sp>
         <p:nvSpPr>
@@ -15321,6 +17065,10 @@
           </a:solidFill>
           <a:ln/>
         </p:spPr>
+        <p:txBody>
+          <a:bodyPr/>
+          <a:p/>
+        </p:txBody>
       </p:sp>
       <p:sp>
         <p:nvSpPr>
